--- a/public/fun/pack/pptx/review/보장점검양식_11_본인점검_라일락골목.pptx
+++ b/public/fun/pack/pptx/review/보장점검양식_11_본인점검_라일락골목.pptx
@@ -3286,14 +3286,6 @@
 <file path=ppt/slides/slide1.xml><?xml version="1.0" encoding="utf-8"?>
 <p:sld xmlns:a="http://schemas.openxmlformats.org/drawingml/2006/main" xmlns:p="http://schemas.openxmlformats.org/presentationml/2006/main" xmlns:r="http://schemas.openxmlformats.org/officeDocument/2006/relationships">
   <p:cSld>
-    <p:bg>
-      <p:bgPr>
-        <a:solidFill>
-          <a:srgbClr val="FFFFFF"/>
-        </a:solidFill>
-        <a:effectLst/>
-      </p:bgPr>
-    </p:bg>
     <p:spTree>
       <p:nvGrpSpPr>
         <p:cNvPr id="1" name=""/>
@@ -3301,383 +3293,30 @@
         <p:nvPr/>
       </p:nvGrpSpPr>
       <p:grpSpPr/>
-      <p:sp>
-        <p:nvSpPr>
-          <p:cNvPr id="3" name="장식"/>
-          <p:cNvSpPr/>
+      <p:pic>
+        <p:nvPicPr>
+          <p:cNvPr id="3" name="표지 그림" descr="review-11.jpg"/>
+          <p:cNvPicPr>
+            <a:picLocks noChangeAspect="1"/>
+          </p:cNvPicPr>
           <p:nvPr/>
-        </p:nvSpPr>
-        <p:spPr>
-          <a:xfrm>
-            <a:off x="7071183" y="-1714500"/>
-            <a:ext cx="7886700" cy="7886700"/>
-          </a:xfrm>
-          <a:prstGeom prst="ellipse">
+        </p:nvPicPr>
+        <p:blipFill>
+          <a:blip r:embed="rId2"/>
+          <a:stretch>
+            <a:fillRect/>
+          </a:stretch>
+        </p:blipFill>
+        <p:spPr>
+          <a:xfrm>
+            <a:off x="0" y="0"/>
+            <a:ext cx="12191695" cy="6858000"/>
+          </a:xfrm>
+          <a:prstGeom prst="rect">
             <a:avLst/>
           </a:prstGeom>
-          <a:solidFill>
-            <a:srgbClr val="E3D3EE"/>
-          </a:solidFill>
-          <a:ln>
-            <a:noFill/>
-          </a:ln>
-        </p:spPr>
-        <p:txBody>
-          <a:bodyPr rtlCol="0" anchor="ctr"/>
-          <a:lstStyle/>
-          <a:p>
-            <a:pPr algn="ctr"/>
-          </a:p>
-        </p:txBody>
-      </p:sp>
-      <p:sp>
-        <p:nvSpPr>
-          <p:cNvPr id="4" name="장식"/>
-          <p:cNvSpPr/>
-          <p:nvPr/>
-        </p:nvSpPr>
-        <p:spPr>
-          <a:xfrm>
-            <a:off x="9509522" y="3977639"/>
-            <a:ext cx="3429000" cy="3429000"/>
-          </a:xfrm>
-          <a:prstGeom prst="ellipse">
-            <a:avLst/>
-          </a:prstGeom>
-          <a:solidFill>
-            <a:srgbClr val="8C56B3"/>
-          </a:solidFill>
-          <a:ln>
-            <a:noFill/>
-          </a:ln>
-        </p:spPr>
-        <p:txBody>
-          <a:bodyPr rtlCol="0" anchor="ctr"/>
-          <a:lstStyle/>
-          <a:p>
-            <a:pPr algn="ctr"/>
-          </a:p>
-        </p:txBody>
-      </p:sp>
-      <p:sp>
-        <p:nvSpPr>
-          <p:cNvPr id="5" name="장식"/>
-          <p:cNvSpPr/>
-          <p:nvPr/>
-        </p:nvSpPr>
-        <p:spPr>
-          <a:xfrm>
-            <a:off x="8548094" y="665468"/>
-            <a:ext cx="439711" cy="439711"/>
-          </a:xfrm>
-          <a:prstGeom prst="ellipse">
-            <a:avLst/>
-          </a:prstGeom>
-          <a:solidFill>
-            <a:srgbClr val="8C56B3"/>
-          </a:solidFill>
-          <a:ln>
-            <a:noFill/>
-          </a:ln>
-        </p:spPr>
-        <p:txBody>
-          <a:bodyPr rtlCol="0" anchor="ctr"/>
-          <a:lstStyle/>
-          <a:p>
-            <a:pPr algn="ctr"/>
-          </a:p>
-        </p:txBody>
-      </p:sp>
-      <p:sp>
-        <p:nvSpPr>
-          <p:cNvPr id="6" name="장식"/>
-          <p:cNvSpPr/>
-          <p:nvPr/>
-        </p:nvSpPr>
-        <p:spPr>
-          <a:xfrm>
-            <a:off x="9870174" y="2648211"/>
-            <a:ext cx="325546" cy="325546"/>
-          </a:xfrm>
-          <a:prstGeom prst="ellipse">
-            <a:avLst/>
-          </a:prstGeom>
-          <a:solidFill>
-            <a:srgbClr val="E3D3EE"/>
-          </a:solidFill>
-          <a:ln>
-            <a:noFill/>
-          </a:ln>
-        </p:spPr>
-        <p:txBody>
-          <a:bodyPr rtlCol="0" anchor="ctr"/>
-          <a:lstStyle/>
-          <a:p>
-            <a:pPr algn="ctr"/>
-          </a:p>
-        </p:txBody>
-      </p:sp>
-      <p:sp>
-        <p:nvSpPr>
-          <p:cNvPr id="7" name="장식"/>
-          <p:cNvSpPr/>
-          <p:nvPr/>
-        </p:nvSpPr>
-        <p:spPr>
-          <a:xfrm>
-            <a:off x="10456902" y="844189"/>
-            <a:ext cx="428847" cy="428847"/>
-          </a:xfrm>
-          <a:prstGeom prst="ellipse">
-            <a:avLst/>
-          </a:prstGeom>
-          <a:solidFill>
-            <a:srgbClr val="868D3F"/>
-          </a:solidFill>
-          <a:ln>
-            <a:noFill/>
-          </a:ln>
-        </p:spPr>
-        <p:txBody>
-          <a:bodyPr rtlCol="0" anchor="ctr"/>
-          <a:lstStyle/>
-          <a:p>
-            <a:pPr algn="ctr"/>
-          </a:p>
-        </p:txBody>
-      </p:sp>
-      <p:sp>
-        <p:nvSpPr>
-          <p:cNvPr id="8" name="장식"/>
-          <p:cNvSpPr/>
-          <p:nvPr/>
-        </p:nvSpPr>
-        <p:spPr>
-          <a:xfrm>
-            <a:off x="10327883" y="2558810"/>
-            <a:ext cx="383917" cy="383917"/>
-          </a:xfrm>
-          <a:prstGeom prst="ellipse">
-            <a:avLst/>
-          </a:prstGeom>
-          <a:solidFill>
-            <a:srgbClr val="8C56B3"/>
-          </a:solidFill>
-          <a:ln>
-            <a:noFill/>
-          </a:ln>
-        </p:spPr>
-        <p:txBody>
-          <a:bodyPr rtlCol="0" anchor="ctr"/>
-          <a:lstStyle/>
-          <a:p>
-            <a:pPr algn="ctr"/>
-          </a:p>
-        </p:txBody>
-      </p:sp>
-      <p:sp>
-        <p:nvSpPr>
-          <p:cNvPr id="9" name="장식"/>
-          <p:cNvSpPr/>
-          <p:nvPr/>
-        </p:nvSpPr>
-        <p:spPr>
-          <a:xfrm>
-            <a:off x="8985224" y="371263"/>
-            <a:ext cx="271256" cy="271256"/>
-          </a:xfrm>
-          <a:prstGeom prst="ellipse">
-            <a:avLst/>
-          </a:prstGeom>
-          <a:solidFill>
-            <a:srgbClr val="E3D3EE"/>
-          </a:solidFill>
-          <a:ln>
-            <a:noFill/>
-          </a:ln>
-        </p:spPr>
-        <p:txBody>
-          <a:bodyPr rtlCol="0" anchor="ctr"/>
-          <a:lstStyle/>
-          <a:p>
-            <a:pPr algn="ctr"/>
-          </a:p>
-        </p:txBody>
-      </p:sp>
-      <p:sp>
-        <p:nvSpPr>
-          <p:cNvPr id="10" name="장식"/>
-          <p:cNvSpPr/>
-          <p:nvPr/>
-        </p:nvSpPr>
-        <p:spPr>
-          <a:xfrm>
-            <a:off x="10054636" y="427995"/>
-            <a:ext cx="294091" cy="294091"/>
-          </a:xfrm>
-          <a:prstGeom prst="ellipse">
-            <a:avLst/>
-          </a:prstGeom>
-          <a:solidFill>
-            <a:srgbClr val="868D3F"/>
-          </a:solidFill>
-          <a:ln>
-            <a:noFill/>
-          </a:ln>
-        </p:spPr>
-        <p:txBody>
-          <a:bodyPr rtlCol="0" anchor="ctr"/>
-          <a:lstStyle/>
-          <a:p>
-            <a:pPr algn="ctr"/>
-          </a:p>
-        </p:txBody>
-      </p:sp>
-      <p:sp>
-        <p:nvSpPr>
-          <p:cNvPr id="11" name="장식"/>
-          <p:cNvSpPr/>
-          <p:nvPr/>
-        </p:nvSpPr>
-        <p:spPr>
-          <a:xfrm>
-            <a:off x="10539235" y="2844566"/>
-            <a:ext cx="506986" cy="506986"/>
-          </a:xfrm>
-          <a:prstGeom prst="ellipse">
-            <a:avLst/>
-          </a:prstGeom>
-          <a:solidFill>
-            <a:srgbClr val="8C56B3"/>
-          </a:solidFill>
-          <a:ln>
-            <a:noFill/>
-          </a:ln>
-        </p:spPr>
-        <p:txBody>
-          <a:bodyPr rtlCol="0" anchor="ctr"/>
-          <a:lstStyle/>
-          <a:p>
-            <a:pPr algn="ctr"/>
-          </a:p>
-        </p:txBody>
-      </p:sp>
-      <p:sp>
-        <p:nvSpPr>
-          <p:cNvPr id="12" name="장식"/>
-          <p:cNvSpPr/>
-          <p:nvPr/>
-        </p:nvSpPr>
-        <p:spPr>
-          <a:xfrm>
-            <a:off x="9714677" y="793042"/>
-            <a:ext cx="486841" cy="486841"/>
-          </a:xfrm>
-          <a:prstGeom prst="ellipse">
-            <a:avLst/>
-          </a:prstGeom>
-          <a:solidFill>
-            <a:srgbClr val="E3D3EE"/>
-          </a:solidFill>
-          <a:ln>
-            <a:noFill/>
-          </a:ln>
-        </p:spPr>
-        <p:txBody>
-          <a:bodyPr rtlCol="0" anchor="ctr"/>
-          <a:lstStyle/>
-          <a:p>
-            <a:pPr algn="ctr"/>
-          </a:p>
-        </p:txBody>
-      </p:sp>
-      <p:sp>
-        <p:nvSpPr>
-          <p:cNvPr id="13" name="장식"/>
-          <p:cNvSpPr/>
-          <p:nvPr/>
-        </p:nvSpPr>
-        <p:spPr>
-          <a:xfrm>
-            <a:off x="9093804" y="730731"/>
-            <a:ext cx="496258" cy="496258"/>
-          </a:xfrm>
-          <a:prstGeom prst="ellipse">
-            <a:avLst/>
-          </a:prstGeom>
-          <a:solidFill>
-            <a:srgbClr val="868D3F"/>
-          </a:solidFill>
-          <a:ln>
-            <a:noFill/>
-          </a:ln>
-        </p:spPr>
-        <p:txBody>
-          <a:bodyPr rtlCol="0" anchor="ctr"/>
-          <a:lstStyle/>
-          <a:p>
-            <a:pPr algn="ctr"/>
-          </a:p>
-        </p:txBody>
-      </p:sp>
-      <p:sp>
-        <p:nvSpPr>
-          <p:cNvPr id="14" name="장식"/>
-          <p:cNvSpPr/>
-          <p:nvPr/>
-        </p:nvSpPr>
-        <p:spPr>
-          <a:xfrm>
-            <a:off x="8263488" y="21126"/>
-            <a:ext cx="405194" cy="405194"/>
-          </a:xfrm>
-          <a:prstGeom prst="ellipse">
-            <a:avLst/>
-          </a:prstGeom>
-          <a:solidFill>
-            <a:srgbClr val="8C56B3"/>
-          </a:solidFill>
-          <a:ln>
-            <a:noFill/>
-          </a:ln>
-        </p:spPr>
-        <p:txBody>
-          <a:bodyPr rtlCol="0" anchor="ctr"/>
-          <a:lstStyle/>
-          <a:p>
-            <a:pPr algn="ctr"/>
-          </a:p>
-        </p:txBody>
-      </p:sp>
-      <p:sp>
-        <p:nvSpPr>
-          <p:cNvPr id="15" name="장식"/>
-          <p:cNvSpPr/>
-          <p:nvPr/>
-        </p:nvSpPr>
-        <p:spPr>
-          <a:xfrm>
-            <a:off x="10553950" y="2861152"/>
-            <a:ext cx="241523" cy="241523"/>
-          </a:xfrm>
-          <a:prstGeom prst="ellipse">
-            <a:avLst/>
-          </a:prstGeom>
-          <a:solidFill>
-            <a:srgbClr val="E3D3EE"/>
-          </a:solidFill>
-          <a:ln>
-            <a:noFill/>
-          </a:ln>
-        </p:spPr>
-        <p:txBody>
-          <a:bodyPr rtlCol="0" anchor="ctr"/>
-          <a:lstStyle/>
-          <a:p>
-            <a:pPr algn="ctr"/>
-          </a:p>
-        </p:txBody>
-      </p:sp>
+        </p:spPr>
+      </p:pic>
       <p:sp>
         <p:nvSpPr>
           <p:cNvPr id="2" name="Title 1"/>
@@ -3691,7 +3330,7 @@
         <p:spPr>
           <a:xfrm>
             <a:off x="853418" y="2057400"/>
-            <a:ext cx="6705432" cy="1463040"/>
+            <a:ext cx="6095847" cy="1554480"/>
           </a:xfrm>
         </p:spPr>
         <p:txBody>
@@ -3718,13 +3357,13 @@
       </p:sp>
       <p:sp>
         <p:nvSpPr>
-          <p:cNvPr id="16" name="한 줄 문구"/>
+          <p:cNvPr id="4" name="한 줄 문구"/>
           <p:cNvSpPr txBox="1"/>
           <p:nvPr/>
         </p:nvSpPr>
         <p:spPr>
           <a:xfrm>
-            <a:off x="853418" y="3611880"/>
+            <a:off x="853418" y="3749039"/>
             <a:ext cx="6095847" cy="822960"/>
           </a:xfrm>
           <a:prstGeom prst="rect">
@@ -3749,20 +3388,20 @@
                   <a:srgbClr val="573371"/>
                 </a:solidFill>
               </a:rPr>
-              <a:t>향기로운 차 한 잔과 함께하는 점검</a:t>
+              <a:t>봄맞이 정리하듯 서류부터 모읍니다</a:t>
             </a:r>
           </a:p>
         </p:txBody>
       </p:sp>
       <p:sp>
         <p:nvSpPr>
-          <p:cNvPr id="17" name="안내 문구"/>
+          <p:cNvPr id="5" name="안내 문구"/>
           <p:cNvSpPr txBox="1"/>
           <p:nvPr/>
         </p:nvSpPr>
         <p:spPr>
           <a:xfrm>
-            <a:off x="853418" y="4480560"/>
+            <a:off x="853418" y="4617720"/>
             <a:ext cx="6095847" cy="914400"/>
           </a:xfrm>
           <a:prstGeom prst="rect">
@@ -3787,7 +3426,7 @@
                   <a:srgbClr val="666666"/>
                 </a:solidFill>
               </a:rPr>
-              <a:t>본인 점검 · 2026. 00. 00</a:t>
+              <a:t>본인 점검 · 2027. 00. 00</a:t>
             </a:r>
           </a:p>
           <a:p>
@@ -3893,325 +3532,6 @@
       </p:sp>
       <p:sp>
         <p:nvSpPr>
-          <p:cNvPr id="5" name="장식"/>
-          <p:cNvSpPr/>
-          <p:nvPr/>
-        </p:nvSpPr>
-        <p:spPr>
-          <a:xfrm>
-            <a:off x="10902130" y="434860"/>
-            <a:ext cx="153549" cy="153549"/>
-          </a:xfrm>
-          <a:prstGeom prst="ellipse">
-            <a:avLst/>
-          </a:prstGeom>
-          <a:solidFill>
-            <a:srgbClr val="8C56B3"/>
-          </a:solidFill>
-          <a:ln>
-            <a:noFill/>
-          </a:ln>
-        </p:spPr>
-        <p:txBody>
-          <a:bodyPr rtlCol="0" anchor="ctr"/>
-          <a:lstStyle/>
-          <a:p>
-            <a:pPr algn="ctr"/>
-          </a:p>
-        </p:txBody>
-      </p:sp>
-      <p:sp>
-        <p:nvSpPr>
-          <p:cNvPr id="6" name="장식"/>
-          <p:cNvSpPr/>
-          <p:nvPr/>
-        </p:nvSpPr>
-        <p:spPr>
-          <a:xfrm>
-            <a:off x="11363808" y="1127246"/>
-            <a:ext cx="113682" cy="113682"/>
-          </a:xfrm>
-          <a:prstGeom prst="ellipse">
-            <a:avLst/>
-          </a:prstGeom>
-          <a:solidFill>
-            <a:srgbClr val="E3D3EE"/>
-          </a:solidFill>
-          <a:ln>
-            <a:noFill/>
-          </a:ln>
-        </p:spPr>
-        <p:txBody>
-          <a:bodyPr rtlCol="0" anchor="ctr"/>
-          <a:lstStyle/>
-          <a:p>
-            <a:pPr algn="ctr"/>
-          </a:p>
-        </p:txBody>
-      </p:sp>
-      <p:sp>
-        <p:nvSpPr>
-          <p:cNvPr id="7" name="장식"/>
-          <p:cNvSpPr/>
-          <p:nvPr/>
-        </p:nvSpPr>
-        <p:spPr>
-          <a:xfrm>
-            <a:off x="11568698" y="497270"/>
-            <a:ext cx="149756" cy="149756"/>
-          </a:xfrm>
-          <a:prstGeom prst="ellipse">
-            <a:avLst/>
-          </a:prstGeom>
-          <a:solidFill>
-            <a:srgbClr val="868D3F"/>
-          </a:solidFill>
-          <a:ln>
-            <a:noFill/>
-          </a:ln>
-        </p:spPr>
-        <p:txBody>
-          <a:bodyPr rtlCol="0" anchor="ctr"/>
-          <a:lstStyle/>
-          <a:p>
-            <a:pPr algn="ctr"/>
-          </a:p>
-        </p:txBody>
-      </p:sp>
-      <p:sp>
-        <p:nvSpPr>
-          <p:cNvPr id="8" name="장식"/>
-          <p:cNvSpPr/>
-          <p:nvPr/>
-        </p:nvSpPr>
-        <p:spPr>
-          <a:xfrm>
-            <a:off x="11523643" y="1096027"/>
-            <a:ext cx="134066" cy="134066"/>
-          </a:xfrm>
-          <a:prstGeom prst="ellipse">
-            <a:avLst/>
-          </a:prstGeom>
-          <a:solidFill>
-            <a:srgbClr val="8C56B3"/>
-          </a:solidFill>
-          <a:ln>
-            <a:noFill/>
-          </a:ln>
-        </p:spPr>
-        <p:txBody>
-          <a:bodyPr rtlCol="0" anchor="ctr"/>
-          <a:lstStyle/>
-          <a:p>
-            <a:pPr algn="ctr"/>
-          </a:p>
-        </p:txBody>
-      </p:sp>
-      <p:sp>
-        <p:nvSpPr>
-          <p:cNvPr id="9" name="장식"/>
-          <p:cNvSpPr/>
-          <p:nvPr/>
-        </p:nvSpPr>
-        <p:spPr>
-          <a:xfrm>
-            <a:off x="11054778" y="332121"/>
-            <a:ext cx="94724" cy="94724"/>
-          </a:xfrm>
-          <a:prstGeom prst="ellipse">
-            <a:avLst/>
-          </a:prstGeom>
-          <a:solidFill>
-            <a:srgbClr val="E3D3EE"/>
-          </a:solidFill>
-          <a:ln>
-            <a:noFill/>
-          </a:ln>
-        </p:spPr>
-        <p:txBody>
-          <a:bodyPr rtlCol="0" anchor="ctr"/>
-          <a:lstStyle/>
-          <a:p>
-            <a:pPr algn="ctr"/>
-          </a:p>
-        </p:txBody>
-      </p:sp>
-      <p:sp>
-        <p:nvSpPr>
-          <p:cNvPr id="10" name="장식"/>
-          <p:cNvSpPr/>
-          <p:nvPr/>
-        </p:nvSpPr>
-        <p:spPr>
-          <a:xfrm>
-            <a:off x="11428224" y="351933"/>
-            <a:ext cx="102698" cy="102698"/>
-          </a:xfrm>
-          <a:prstGeom prst="ellipse">
-            <a:avLst/>
-          </a:prstGeom>
-          <a:solidFill>
-            <a:srgbClr val="868D3F"/>
-          </a:solidFill>
-          <a:ln>
-            <a:noFill/>
-          </a:ln>
-        </p:spPr>
-        <p:txBody>
-          <a:bodyPr rtlCol="0" anchor="ctr"/>
-          <a:lstStyle/>
-          <a:p>
-            <a:pPr algn="ctr"/>
-          </a:p>
-        </p:txBody>
-      </p:sp>
-      <p:sp>
-        <p:nvSpPr>
-          <p:cNvPr id="11" name="장식"/>
-          <p:cNvSpPr/>
-          <p:nvPr/>
-        </p:nvSpPr>
-        <p:spPr>
-          <a:xfrm>
-            <a:off x="11597449" y="1195815"/>
-            <a:ext cx="177042" cy="177042"/>
-          </a:xfrm>
-          <a:prstGeom prst="ellipse">
-            <a:avLst/>
-          </a:prstGeom>
-          <a:solidFill>
-            <a:srgbClr val="8C56B3"/>
-          </a:solidFill>
-          <a:ln>
-            <a:noFill/>
-          </a:ln>
-        </p:spPr>
-        <p:txBody>
-          <a:bodyPr rtlCol="0" anchor="ctr"/>
-          <a:lstStyle/>
-          <a:p>
-            <a:pPr algn="ctr"/>
-          </a:p>
-        </p:txBody>
-      </p:sp>
-      <p:sp>
-        <p:nvSpPr>
-          <p:cNvPr id="12" name="장식"/>
-          <p:cNvSpPr/>
-          <p:nvPr/>
-        </p:nvSpPr>
-        <p:spPr>
-          <a:xfrm>
-            <a:off x="11309508" y="479409"/>
-            <a:ext cx="170008" cy="170008"/>
-          </a:xfrm>
-          <a:prstGeom prst="ellipse">
-            <a:avLst/>
-          </a:prstGeom>
-          <a:solidFill>
-            <a:srgbClr val="E3D3EE"/>
-          </a:solidFill>
-          <a:ln>
-            <a:noFill/>
-          </a:ln>
-        </p:spPr>
-        <p:txBody>
-          <a:bodyPr rtlCol="0" anchor="ctr"/>
-          <a:lstStyle/>
-          <a:p>
-            <a:pPr algn="ctr"/>
-          </a:p>
-        </p:txBody>
-      </p:sp>
-      <p:sp>
-        <p:nvSpPr>
-          <p:cNvPr id="13" name="장식"/>
-          <p:cNvSpPr/>
-          <p:nvPr/>
-        </p:nvSpPr>
-        <p:spPr>
-          <a:xfrm>
-            <a:off x="11092695" y="457650"/>
-            <a:ext cx="173296" cy="173296"/>
-          </a:xfrm>
-          <a:prstGeom prst="ellipse">
-            <a:avLst/>
-          </a:prstGeom>
-          <a:solidFill>
-            <a:srgbClr val="868D3F"/>
-          </a:solidFill>
-          <a:ln>
-            <a:noFill/>
-          </a:ln>
-        </p:spPr>
-        <p:txBody>
-          <a:bodyPr rtlCol="0" anchor="ctr"/>
-          <a:lstStyle/>
-          <a:p>
-            <a:pPr algn="ctr"/>
-          </a:p>
-        </p:txBody>
-      </p:sp>
-      <p:sp>
-        <p:nvSpPr>
-          <p:cNvPr id="14" name="장식"/>
-          <p:cNvSpPr/>
-          <p:nvPr/>
-        </p:nvSpPr>
-        <p:spPr>
-          <a:xfrm>
-            <a:off x="10802743" y="209851"/>
-            <a:ext cx="141496" cy="141496"/>
-          </a:xfrm>
-          <a:prstGeom prst="ellipse">
-            <a:avLst/>
-          </a:prstGeom>
-          <a:solidFill>
-            <a:srgbClr val="8C56B3"/>
-          </a:solidFill>
-          <a:ln>
-            <a:noFill/>
-          </a:ln>
-        </p:spPr>
-        <p:txBody>
-          <a:bodyPr rtlCol="0" anchor="ctr"/>
-          <a:lstStyle/>
-          <a:p>
-            <a:pPr algn="ctr"/>
-          </a:p>
-        </p:txBody>
-      </p:sp>
-      <p:sp>
-        <p:nvSpPr>
-          <p:cNvPr id="15" name="장식"/>
-          <p:cNvSpPr/>
-          <p:nvPr/>
-        </p:nvSpPr>
-        <p:spPr>
-          <a:xfrm>
-            <a:off x="11602587" y="1201606"/>
-            <a:ext cx="84341" cy="84341"/>
-          </a:xfrm>
-          <a:prstGeom prst="ellipse">
-            <a:avLst/>
-          </a:prstGeom>
-          <a:solidFill>
-            <a:srgbClr val="E3D3EE"/>
-          </a:solidFill>
-          <a:ln>
-            <a:noFill/>
-          </a:ln>
-        </p:spPr>
-        <p:txBody>
-          <a:bodyPr rtlCol="0" anchor="ctr"/>
-          <a:lstStyle/>
-          <a:p>
-            <a:pPr algn="ctr"/>
-          </a:p>
-        </p:txBody>
-      </p:sp>
-      <p:sp>
-        <p:nvSpPr>
           <p:cNvPr id="2" name="Title 1"/>
           <p:cNvSpPr>
             <a:spLocks noGrp="1"/>
@@ -4250,7 +3570,7 @@
       </p:sp>
       <p:graphicFrame>
         <p:nvGraphicFramePr>
-          <p:cNvPr id="16" name="표"/>
+          <p:cNvPr id="5" name="표"/>
           <p:cNvGraphicFramePr>
             <a:graphicFrameLocks noGrp="1"/>
           </p:cNvGraphicFramePr>
@@ -4830,325 +4150,6 @@
       </p:sp>
       <p:sp>
         <p:nvSpPr>
-          <p:cNvPr id="5" name="장식"/>
-          <p:cNvSpPr/>
-          <p:nvPr/>
-        </p:nvSpPr>
-        <p:spPr>
-          <a:xfrm>
-            <a:off x="10902130" y="434860"/>
-            <a:ext cx="153549" cy="153549"/>
-          </a:xfrm>
-          <a:prstGeom prst="ellipse">
-            <a:avLst/>
-          </a:prstGeom>
-          <a:solidFill>
-            <a:srgbClr val="8C56B3"/>
-          </a:solidFill>
-          <a:ln>
-            <a:noFill/>
-          </a:ln>
-        </p:spPr>
-        <p:txBody>
-          <a:bodyPr rtlCol="0" anchor="ctr"/>
-          <a:lstStyle/>
-          <a:p>
-            <a:pPr algn="ctr"/>
-          </a:p>
-        </p:txBody>
-      </p:sp>
-      <p:sp>
-        <p:nvSpPr>
-          <p:cNvPr id="6" name="장식"/>
-          <p:cNvSpPr/>
-          <p:nvPr/>
-        </p:nvSpPr>
-        <p:spPr>
-          <a:xfrm>
-            <a:off x="11363808" y="1127246"/>
-            <a:ext cx="113682" cy="113682"/>
-          </a:xfrm>
-          <a:prstGeom prst="ellipse">
-            <a:avLst/>
-          </a:prstGeom>
-          <a:solidFill>
-            <a:srgbClr val="E3D3EE"/>
-          </a:solidFill>
-          <a:ln>
-            <a:noFill/>
-          </a:ln>
-        </p:spPr>
-        <p:txBody>
-          <a:bodyPr rtlCol="0" anchor="ctr"/>
-          <a:lstStyle/>
-          <a:p>
-            <a:pPr algn="ctr"/>
-          </a:p>
-        </p:txBody>
-      </p:sp>
-      <p:sp>
-        <p:nvSpPr>
-          <p:cNvPr id="7" name="장식"/>
-          <p:cNvSpPr/>
-          <p:nvPr/>
-        </p:nvSpPr>
-        <p:spPr>
-          <a:xfrm>
-            <a:off x="11568698" y="497270"/>
-            <a:ext cx="149756" cy="149756"/>
-          </a:xfrm>
-          <a:prstGeom prst="ellipse">
-            <a:avLst/>
-          </a:prstGeom>
-          <a:solidFill>
-            <a:srgbClr val="868D3F"/>
-          </a:solidFill>
-          <a:ln>
-            <a:noFill/>
-          </a:ln>
-        </p:spPr>
-        <p:txBody>
-          <a:bodyPr rtlCol="0" anchor="ctr"/>
-          <a:lstStyle/>
-          <a:p>
-            <a:pPr algn="ctr"/>
-          </a:p>
-        </p:txBody>
-      </p:sp>
-      <p:sp>
-        <p:nvSpPr>
-          <p:cNvPr id="8" name="장식"/>
-          <p:cNvSpPr/>
-          <p:nvPr/>
-        </p:nvSpPr>
-        <p:spPr>
-          <a:xfrm>
-            <a:off x="11523643" y="1096027"/>
-            <a:ext cx="134066" cy="134066"/>
-          </a:xfrm>
-          <a:prstGeom prst="ellipse">
-            <a:avLst/>
-          </a:prstGeom>
-          <a:solidFill>
-            <a:srgbClr val="8C56B3"/>
-          </a:solidFill>
-          <a:ln>
-            <a:noFill/>
-          </a:ln>
-        </p:spPr>
-        <p:txBody>
-          <a:bodyPr rtlCol="0" anchor="ctr"/>
-          <a:lstStyle/>
-          <a:p>
-            <a:pPr algn="ctr"/>
-          </a:p>
-        </p:txBody>
-      </p:sp>
-      <p:sp>
-        <p:nvSpPr>
-          <p:cNvPr id="9" name="장식"/>
-          <p:cNvSpPr/>
-          <p:nvPr/>
-        </p:nvSpPr>
-        <p:spPr>
-          <a:xfrm>
-            <a:off x="11054778" y="332121"/>
-            <a:ext cx="94724" cy="94724"/>
-          </a:xfrm>
-          <a:prstGeom prst="ellipse">
-            <a:avLst/>
-          </a:prstGeom>
-          <a:solidFill>
-            <a:srgbClr val="E3D3EE"/>
-          </a:solidFill>
-          <a:ln>
-            <a:noFill/>
-          </a:ln>
-        </p:spPr>
-        <p:txBody>
-          <a:bodyPr rtlCol="0" anchor="ctr"/>
-          <a:lstStyle/>
-          <a:p>
-            <a:pPr algn="ctr"/>
-          </a:p>
-        </p:txBody>
-      </p:sp>
-      <p:sp>
-        <p:nvSpPr>
-          <p:cNvPr id="10" name="장식"/>
-          <p:cNvSpPr/>
-          <p:nvPr/>
-        </p:nvSpPr>
-        <p:spPr>
-          <a:xfrm>
-            <a:off x="11428224" y="351933"/>
-            <a:ext cx="102698" cy="102698"/>
-          </a:xfrm>
-          <a:prstGeom prst="ellipse">
-            <a:avLst/>
-          </a:prstGeom>
-          <a:solidFill>
-            <a:srgbClr val="868D3F"/>
-          </a:solidFill>
-          <a:ln>
-            <a:noFill/>
-          </a:ln>
-        </p:spPr>
-        <p:txBody>
-          <a:bodyPr rtlCol="0" anchor="ctr"/>
-          <a:lstStyle/>
-          <a:p>
-            <a:pPr algn="ctr"/>
-          </a:p>
-        </p:txBody>
-      </p:sp>
-      <p:sp>
-        <p:nvSpPr>
-          <p:cNvPr id="11" name="장식"/>
-          <p:cNvSpPr/>
-          <p:nvPr/>
-        </p:nvSpPr>
-        <p:spPr>
-          <a:xfrm>
-            <a:off x="11597449" y="1195815"/>
-            <a:ext cx="177042" cy="177042"/>
-          </a:xfrm>
-          <a:prstGeom prst="ellipse">
-            <a:avLst/>
-          </a:prstGeom>
-          <a:solidFill>
-            <a:srgbClr val="8C56B3"/>
-          </a:solidFill>
-          <a:ln>
-            <a:noFill/>
-          </a:ln>
-        </p:spPr>
-        <p:txBody>
-          <a:bodyPr rtlCol="0" anchor="ctr"/>
-          <a:lstStyle/>
-          <a:p>
-            <a:pPr algn="ctr"/>
-          </a:p>
-        </p:txBody>
-      </p:sp>
-      <p:sp>
-        <p:nvSpPr>
-          <p:cNvPr id="12" name="장식"/>
-          <p:cNvSpPr/>
-          <p:nvPr/>
-        </p:nvSpPr>
-        <p:spPr>
-          <a:xfrm>
-            <a:off x="11309508" y="479409"/>
-            <a:ext cx="170008" cy="170008"/>
-          </a:xfrm>
-          <a:prstGeom prst="ellipse">
-            <a:avLst/>
-          </a:prstGeom>
-          <a:solidFill>
-            <a:srgbClr val="E3D3EE"/>
-          </a:solidFill>
-          <a:ln>
-            <a:noFill/>
-          </a:ln>
-        </p:spPr>
-        <p:txBody>
-          <a:bodyPr rtlCol="0" anchor="ctr"/>
-          <a:lstStyle/>
-          <a:p>
-            <a:pPr algn="ctr"/>
-          </a:p>
-        </p:txBody>
-      </p:sp>
-      <p:sp>
-        <p:nvSpPr>
-          <p:cNvPr id="13" name="장식"/>
-          <p:cNvSpPr/>
-          <p:nvPr/>
-        </p:nvSpPr>
-        <p:spPr>
-          <a:xfrm>
-            <a:off x="11092695" y="457650"/>
-            <a:ext cx="173296" cy="173296"/>
-          </a:xfrm>
-          <a:prstGeom prst="ellipse">
-            <a:avLst/>
-          </a:prstGeom>
-          <a:solidFill>
-            <a:srgbClr val="868D3F"/>
-          </a:solidFill>
-          <a:ln>
-            <a:noFill/>
-          </a:ln>
-        </p:spPr>
-        <p:txBody>
-          <a:bodyPr rtlCol="0" anchor="ctr"/>
-          <a:lstStyle/>
-          <a:p>
-            <a:pPr algn="ctr"/>
-          </a:p>
-        </p:txBody>
-      </p:sp>
-      <p:sp>
-        <p:nvSpPr>
-          <p:cNvPr id="14" name="장식"/>
-          <p:cNvSpPr/>
-          <p:nvPr/>
-        </p:nvSpPr>
-        <p:spPr>
-          <a:xfrm>
-            <a:off x="10802743" y="209851"/>
-            <a:ext cx="141496" cy="141496"/>
-          </a:xfrm>
-          <a:prstGeom prst="ellipse">
-            <a:avLst/>
-          </a:prstGeom>
-          <a:solidFill>
-            <a:srgbClr val="8C56B3"/>
-          </a:solidFill>
-          <a:ln>
-            <a:noFill/>
-          </a:ln>
-        </p:spPr>
-        <p:txBody>
-          <a:bodyPr rtlCol="0" anchor="ctr"/>
-          <a:lstStyle/>
-          <a:p>
-            <a:pPr algn="ctr"/>
-          </a:p>
-        </p:txBody>
-      </p:sp>
-      <p:sp>
-        <p:nvSpPr>
-          <p:cNvPr id="15" name="장식"/>
-          <p:cNvSpPr/>
-          <p:nvPr/>
-        </p:nvSpPr>
-        <p:spPr>
-          <a:xfrm>
-            <a:off x="11602587" y="1201606"/>
-            <a:ext cx="84341" cy="84341"/>
-          </a:xfrm>
-          <a:prstGeom prst="ellipse">
-            <a:avLst/>
-          </a:prstGeom>
-          <a:solidFill>
-            <a:srgbClr val="E3D3EE"/>
-          </a:solidFill>
-          <a:ln>
-            <a:noFill/>
-          </a:ln>
-        </p:spPr>
-        <p:txBody>
-          <a:bodyPr rtlCol="0" anchor="ctr"/>
-          <a:lstStyle/>
-          <a:p>
-            <a:pPr algn="ctr"/>
-          </a:p>
-        </p:txBody>
-      </p:sp>
-      <p:sp>
-        <p:nvSpPr>
           <p:cNvPr id="2" name="Title 1"/>
           <p:cNvSpPr>
             <a:spLocks noGrp="1"/>
@@ -5187,7 +4188,7 @@
       </p:sp>
       <p:graphicFrame>
         <p:nvGraphicFramePr>
-          <p:cNvPr id="16" name="표"/>
+          <p:cNvPr id="5" name="표"/>
           <p:cNvGraphicFramePr>
             <a:graphicFrameLocks noGrp="1"/>
           </p:cNvGraphicFramePr>
@@ -6924,325 +5925,6 @@
       </p:sp>
       <p:sp>
         <p:nvSpPr>
-          <p:cNvPr id="5" name="장식"/>
-          <p:cNvSpPr/>
-          <p:nvPr/>
-        </p:nvSpPr>
-        <p:spPr>
-          <a:xfrm>
-            <a:off x="10902130" y="434860"/>
-            <a:ext cx="153549" cy="153549"/>
-          </a:xfrm>
-          <a:prstGeom prst="ellipse">
-            <a:avLst/>
-          </a:prstGeom>
-          <a:solidFill>
-            <a:srgbClr val="8C56B3"/>
-          </a:solidFill>
-          <a:ln>
-            <a:noFill/>
-          </a:ln>
-        </p:spPr>
-        <p:txBody>
-          <a:bodyPr rtlCol="0" anchor="ctr"/>
-          <a:lstStyle/>
-          <a:p>
-            <a:pPr algn="ctr"/>
-          </a:p>
-        </p:txBody>
-      </p:sp>
-      <p:sp>
-        <p:nvSpPr>
-          <p:cNvPr id="6" name="장식"/>
-          <p:cNvSpPr/>
-          <p:nvPr/>
-        </p:nvSpPr>
-        <p:spPr>
-          <a:xfrm>
-            <a:off x="11363808" y="1127246"/>
-            <a:ext cx="113682" cy="113682"/>
-          </a:xfrm>
-          <a:prstGeom prst="ellipse">
-            <a:avLst/>
-          </a:prstGeom>
-          <a:solidFill>
-            <a:srgbClr val="E3D3EE"/>
-          </a:solidFill>
-          <a:ln>
-            <a:noFill/>
-          </a:ln>
-        </p:spPr>
-        <p:txBody>
-          <a:bodyPr rtlCol="0" anchor="ctr"/>
-          <a:lstStyle/>
-          <a:p>
-            <a:pPr algn="ctr"/>
-          </a:p>
-        </p:txBody>
-      </p:sp>
-      <p:sp>
-        <p:nvSpPr>
-          <p:cNvPr id="7" name="장식"/>
-          <p:cNvSpPr/>
-          <p:nvPr/>
-        </p:nvSpPr>
-        <p:spPr>
-          <a:xfrm>
-            <a:off x="11568698" y="497270"/>
-            <a:ext cx="149756" cy="149756"/>
-          </a:xfrm>
-          <a:prstGeom prst="ellipse">
-            <a:avLst/>
-          </a:prstGeom>
-          <a:solidFill>
-            <a:srgbClr val="868D3F"/>
-          </a:solidFill>
-          <a:ln>
-            <a:noFill/>
-          </a:ln>
-        </p:spPr>
-        <p:txBody>
-          <a:bodyPr rtlCol="0" anchor="ctr"/>
-          <a:lstStyle/>
-          <a:p>
-            <a:pPr algn="ctr"/>
-          </a:p>
-        </p:txBody>
-      </p:sp>
-      <p:sp>
-        <p:nvSpPr>
-          <p:cNvPr id="8" name="장식"/>
-          <p:cNvSpPr/>
-          <p:nvPr/>
-        </p:nvSpPr>
-        <p:spPr>
-          <a:xfrm>
-            <a:off x="11523643" y="1096027"/>
-            <a:ext cx="134066" cy="134066"/>
-          </a:xfrm>
-          <a:prstGeom prst="ellipse">
-            <a:avLst/>
-          </a:prstGeom>
-          <a:solidFill>
-            <a:srgbClr val="8C56B3"/>
-          </a:solidFill>
-          <a:ln>
-            <a:noFill/>
-          </a:ln>
-        </p:spPr>
-        <p:txBody>
-          <a:bodyPr rtlCol="0" anchor="ctr"/>
-          <a:lstStyle/>
-          <a:p>
-            <a:pPr algn="ctr"/>
-          </a:p>
-        </p:txBody>
-      </p:sp>
-      <p:sp>
-        <p:nvSpPr>
-          <p:cNvPr id="9" name="장식"/>
-          <p:cNvSpPr/>
-          <p:nvPr/>
-        </p:nvSpPr>
-        <p:spPr>
-          <a:xfrm>
-            <a:off x="11054778" y="332121"/>
-            <a:ext cx="94724" cy="94724"/>
-          </a:xfrm>
-          <a:prstGeom prst="ellipse">
-            <a:avLst/>
-          </a:prstGeom>
-          <a:solidFill>
-            <a:srgbClr val="E3D3EE"/>
-          </a:solidFill>
-          <a:ln>
-            <a:noFill/>
-          </a:ln>
-        </p:spPr>
-        <p:txBody>
-          <a:bodyPr rtlCol="0" anchor="ctr"/>
-          <a:lstStyle/>
-          <a:p>
-            <a:pPr algn="ctr"/>
-          </a:p>
-        </p:txBody>
-      </p:sp>
-      <p:sp>
-        <p:nvSpPr>
-          <p:cNvPr id="10" name="장식"/>
-          <p:cNvSpPr/>
-          <p:nvPr/>
-        </p:nvSpPr>
-        <p:spPr>
-          <a:xfrm>
-            <a:off x="11428224" y="351933"/>
-            <a:ext cx="102698" cy="102698"/>
-          </a:xfrm>
-          <a:prstGeom prst="ellipse">
-            <a:avLst/>
-          </a:prstGeom>
-          <a:solidFill>
-            <a:srgbClr val="868D3F"/>
-          </a:solidFill>
-          <a:ln>
-            <a:noFill/>
-          </a:ln>
-        </p:spPr>
-        <p:txBody>
-          <a:bodyPr rtlCol="0" anchor="ctr"/>
-          <a:lstStyle/>
-          <a:p>
-            <a:pPr algn="ctr"/>
-          </a:p>
-        </p:txBody>
-      </p:sp>
-      <p:sp>
-        <p:nvSpPr>
-          <p:cNvPr id="11" name="장식"/>
-          <p:cNvSpPr/>
-          <p:nvPr/>
-        </p:nvSpPr>
-        <p:spPr>
-          <a:xfrm>
-            <a:off x="11597449" y="1195815"/>
-            <a:ext cx="177042" cy="177042"/>
-          </a:xfrm>
-          <a:prstGeom prst="ellipse">
-            <a:avLst/>
-          </a:prstGeom>
-          <a:solidFill>
-            <a:srgbClr val="8C56B3"/>
-          </a:solidFill>
-          <a:ln>
-            <a:noFill/>
-          </a:ln>
-        </p:spPr>
-        <p:txBody>
-          <a:bodyPr rtlCol="0" anchor="ctr"/>
-          <a:lstStyle/>
-          <a:p>
-            <a:pPr algn="ctr"/>
-          </a:p>
-        </p:txBody>
-      </p:sp>
-      <p:sp>
-        <p:nvSpPr>
-          <p:cNvPr id="12" name="장식"/>
-          <p:cNvSpPr/>
-          <p:nvPr/>
-        </p:nvSpPr>
-        <p:spPr>
-          <a:xfrm>
-            <a:off x="11309508" y="479409"/>
-            <a:ext cx="170008" cy="170008"/>
-          </a:xfrm>
-          <a:prstGeom prst="ellipse">
-            <a:avLst/>
-          </a:prstGeom>
-          <a:solidFill>
-            <a:srgbClr val="E3D3EE"/>
-          </a:solidFill>
-          <a:ln>
-            <a:noFill/>
-          </a:ln>
-        </p:spPr>
-        <p:txBody>
-          <a:bodyPr rtlCol="0" anchor="ctr"/>
-          <a:lstStyle/>
-          <a:p>
-            <a:pPr algn="ctr"/>
-          </a:p>
-        </p:txBody>
-      </p:sp>
-      <p:sp>
-        <p:nvSpPr>
-          <p:cNvPr id="13" name="장식"/>
-          <p:cNvSpPr/>
-          <p:nvPr/>
-        </p:nvSpPr>
-        <p:spPr>
-          <a:xfrm>
-            <a:off x="11092695" y="457650"/>
-            <a:ext cx="173296" cy="173296"/>
-          </a:xfrm>
-          <a:prstGeom prst="ellipse">
-            <a:avLst/>
-          </a:prstGeom>
-          <a:solidFill>
-            <a:srgbClr val="868D3F"/>
-          </a:solidFill>
-          <a:ln>
-            <a:noFill/>
-          </a:ln>
-        </p:spPr>
-        <p:txBody>
-          <a:bodyPr rtlCol="0" anchor="ctr"/>
-          <a:lstStyle/>
-          <a:p>
-            <a:pPr algn="ctr"/>
-          </a:p>
-        </p:txBody>
-      </p:sp>
-      <p:sp>
-        <p:nvSpPr>
-          <p:cNvPr id="14" name="장식"/>
-          <p:cNvSpPr/>
-          <p:nvPr/>
-        </p:nvSpPr>
-        <p:spPr>
-          <a:xfrm>
-            <a:off x="10802743" y="209851"/>
-            <a:ext cx="141496" cy="141496"/>
-          </a:xfrm>
-          <a:prstGeom prst="ellipse">
-            <a:avLst/>
-          </a:prstGeom>
-          <a:solidFill>
-            <a:srgbClr val="8C56B3"/>
-          </a:solidFill>
-          <a:ln>
-            <a:noFill/>
-          </a:ln>
-        </p:spPr>
-        <p:txBody>
-          <a:bodyPr rtlCol="0" anchor="ctr"/>
-          <a:lstStyle/>
-          <a:p>
-            <a:pPr algn="ctr"/>
-          </a:p>
-        </p:txBody>
-      </p:sp>
-      <p:sp>
-        <p:nvSpPr>
-          <p:cNvPr id="15" name="장식"/>
-          <p:cNvSpPr/>
-          <p:nvPr/>
-        </p:nvSpPr>
-        <p:spPr>
-          <a:xfrm>
-            <a:off x="11602587" y="1201606"/>
-            <a:ext cx="84341" cy="84341"/>
-          </a:xfrm>
-          <a:prstGeom prst="ellipse">
-            <a:avLst/>
-          </a:prstGeom>
-          <a:solidFill>
-            <a:srgbClr val="E3D3EE"/>
-          </a:solidFill>
-          <a:ln>
-            <a:noFill/>
-          </a:ln>
-        </p:spPr>
-        <p:txBody>
-          <a:bodyPr rtlCol="0" anchor="ctr"/>
-          <a:lstStyle/>
-          <a:p>
-            <a:pPr algn="ctr"/>
-          </a:p>
-        </p:txBody>
-      </p:sp>
-      <p:sp>
-        <p:nvSpPr>
           <p:cNvPr id="2" name="Title 1"/>
           <p:cNvSpPr>
             <a:spLocks noGrp="1"/>
@@ -7281,7 +5963,7 @@
       </p:sp>
       <p:graphicFrame>
         <p:nvGraphicFramePr>
-          <p:cNvPr id="16" name="표"/>
+          <p:cNvPr id="5" name="표"/>
           <p:cNvGraphicFramePr>
             <a:graphicFrameLocks noGrp="1"/>
           </p:cNvGraphicFramePr>
@@ -9067,325 +7749,6 @@
       </p:sp>
       <p:sp>
         <p:nvSpPr>
-          <p:cNvPr id="5" name="장식"/>
-          <p:cNvSpPr/>
-          <p:nvPr/>
-        </p:nvSpPr>
-        <p:spPr>
-          <a:xfrm>
-            <a:off x="10902130" y="434860"/>
-            <a:ext cx="153549" cy="153549"/>
-          </a:xfrm>
-          <a:prstGeom prst="ellipse">
-            <a:avLst/>
-          </a:prstGeom>
-          <a:solidFill>
-            <a:srgbClr val="8C56B3"/>
-          </a:solidFill>
-          <a:ln>
-            <a:noFill/>
-          </a:ln>
-        </p:spPr>
-        <p:txBody>
-          <a:bodyPr rtlCol="0" anchor="ctr"/>
-          <a:lstStyle/>
-          <a:p>
-            <a:pPr algn="ctr"/>
-          </a:p>
-        </p:txBody>
-      </p:sp>
-      <p:sp>
-        <p:nvSpPr>
-          <p:cNvPr id="6" name="장식"/>
-          <p:cNvSpPr/>
-          <p:nvPr/>
-        </p:nvSpPr>
-        <p:spPr>
-          <a:xfrm>
-            <a:off x="11363808" y="1127246"/>
-            <a:ext cx="113682" cy="113682"/>
-          </a:xfrm>
-          <a:prstGeom prst="ellipse">
-            <a:avLst/>
-          </a:prstGeom>
-          <a:solidFill>
-            <a:srgbClr val="E3D3EE"/>
-          </a:solidFill>
-          <a:ln>
-            <a:noFill/>
-          </a:ln>
-        </p:spPr>
-        <p:txBody>
-          <a:bodyPr rtlCol="0" anchor="ctr"/>
-          <a:lstStyle/>
-          <a:p>
-            <a:pPr algn="ctr"/>
-          </a:p>
-        </p:txBody>
-      </p:sp>
-      <p:sp>
-        <p:nvSpPr>
-          <p:cNvPr id="7" name="장식"/>
-          <p:cNvSpPr/>
-          <p:nvPr/>
-        </p:nvSpPr>
-        <p:spPr>
-          <a:xfrm>
-            <a:off x="11568698" y="497270"/>
-            <a:ext cx="149756" cy="149756"/>
-          </a:xfrm>
-          <a:prstGeom prst="ellipse">
-            <a:avLst/>
-          </a:prstGeom>
-          <a:solidFill>
-            <a:srgbClr val="868D3F"/>
-          </a:solidFill>
-          <a:ln>
-            <a:noFill/>
-          </a:ln>
-        </p:spPr>
-        <p:txBody>
-          <a:bodyPr rtlCol="0" anchor="ctr"/>
-          <a:lstStyle/>
-          <a:p>
-            <a:pPr algn="ctr"/>
-          </a:p>
-        </p:txBody>
-      </p:sp>
-      <p:sp>
-        <p:nvSpPr>
-          <p:cNvPr id="8" name="장식"/>
-          <p:cNvSpPr/>
-          <p:nvPr/>
-        </p:nvSpPr>
-        <p:spPr>
-          <a:xfrm>
-            <a:off x="11523643" y="1096027"/>
-            <a:ext cx="134066" cy="134066"/>
-          </a:xfrm>
-          <a:prstGeom prst="ellipse">
-            <a:avLst/>
-          </a:prstGeom>
-          <a:solidFill>
-            <a:srgbClr val="8C56B3"/>
-          </a:solidFill>
-          <a:ln>
-            <a:noFill/>
-          </a:ln>
-        </p:spPr>
-        <p:txBody>
-          <a:bodyPr rtlCol="0" anchor="ctr"/>
-          <a:lstStyle/>
-          <a:p>
-            <a:pPr algn="ctr"/>
-          </a:p>
-        </p:txBody>
-      </p:sp>
-      <p:sp>
-        <p:nvSpPr>
-          <p:cNvPr id="9" name="장식"/>
-          <p:cNvSpPr/>
-          <p:nvPr/>
-        </p:nvSpPr>
-        <p:spPr>
-          <a:xfrm>
-            <a:off x="11054778" y="332121"/>
-            <a:ext cx="94724" cy="94724"/>
-          </a:xfrm>
-          <a:prstGeom prst="ellipse">
-            <a:avLst/>
-          </a:prstGeom>
-          <a:solidFill>
-            <a:srgbClr val="E3D3EE"/>
-          </a:solidFill>
-          <a:ln>
-            <a:noFill/>
-          </a:ln>
-        </p:spPr>
-        <p:txBody>
-          <a:bodyPr rtlCol="0" anchor="ctr"/>
-          <a:lstStyle/>
-          <a:p>
-            <a:pPr algn="ctr"/>
-          </a:p>
-        </p:txBody>
-      </p:sp>
-      <p:sp>
-        <p:nvSpPr>
-          <p:cNvPr id="10" name="장식"/>
-          <p:cNvSpPr/>
-          <p:nvPr/>
-        </p:nvSpPr>
-        <p:spPr>
-          <a:xfrm>
-            <a:off x="11428224" y="351933"/>
-            <a:ext cx="102698" cy="102698"/>
-          </a:xfrm>
-          <a:prstGeom prst="ellipse">
-            <a:avLst/>
-          </a:prstGeom>
-          <a:solidFill>
-            <a:srgbClr val="868D3F"/>
-          </a:solidFill>
-          <a:ln>
-            <a:noFill/>
-          </a:ln>
-        </p:spPr>
-        <p:txBody>
-          <a:bodyPr rtlCol="0" anchor="ctr"/>
-          <a:lstStyle/>
-          <a:p>
-            <a:pPr algn="ctr"/>
-          </a:p>
-        </p:txBody>
-      </p:sp>
-      <p:sp>
-        <p:nvSpPr>
-          <p:cNvPr id="11" name="장식"/>
-          <p:cNvSpPr/>
-          <p:nvPr/>
-        </p:nvSpPr>
-        <p:spPr>
-          <a:xfrm>
-            <a:off x="11597449" y="1195815"/>
-            <a:ext cx="177042" cy="177042"/>
-          </a:xfrm>
-          <a:prstGeom prst="ellipse">
-            <a:avLst/>
-          </a:prstGeom>
-          <a:solidFill>
-            <a:srgbClr val="8C56B3"/>
-          </a:solidFill>
-          <a:ln>
-            <a:noFill/>
-          </a:ln>
-        </p:spPr>
-        <p:txBody>
-          <a:bodyPr rtlCol="0" anchor="ctr"/>
-          <a:lstStyle/>
-          <a:p>
-            <a:pPr algn="ctr"/>
-          </a:p>
-        </p:txBody>
-      </p:sp>
-      <p:sp>
-        <p:nvSpPr>
-          <p:cNvPr id="12" name="장식"/>
-          <p:cNvSpPr/>
-          <p:nvPr/>
-        </p:nvSpPr>
-        <p:spPr>
-          <a:xfrm>
-            <a:off x="11309508" y="479409"/>
-            <a:ext cx="170008" cy="170008"/>
-          </a:xfrm>
-          <a:prstGeom prst="ellipse">
-            <a:avLst/>
-          </a:prstGeom>
-          <a:solidFill>
-            <a:srgbClr val="E3D3EE"/>
-          </a:solidFill>
-          <a:ln>
-            <a:noFill/>
-          </a:ln>
-        </p:spPr>
-        <p:txBody>
-          <a:bodyPr rtlCol="0" anchor="ctr"/>
-          <a:lstStyle/>
-          <a:p>
-            <a:pPr algn="ctr"/>
-          </a:p>
-        </p:txBody>
-      </p:sp>
-      <p:sp>
-        <p:nvSpPr>
-          <p:cNvPr id="13" name="장식"/>
-          <p:cNvSpPr/>
-          <p:nvPr/>
-        </p:nvSpPr>
-        <p:spPr>
-          <a:xfrm>
-            <a:off x="11092695" y="457650"/>
-            <a:ext cx="173296" cy="173296"/>
-          </a:xfrm>
-          <a:prstGeom prst="ellipse">
-            <a:avLst/>
-          </a:prstGeom>
-          <a:solidFill>
-            <a:srgbClr val="868D3F"/>
-          </a:solidFill>
-          <a:ln>
-            <a:noFill/>
-          </a:ln>
-        </p:spPr>
-        <p:txBody>
-          <a:bodyPr rtlCol="0" anchor="ctr"/>
-          <a:lstStyle/>
-          <a:p>
-            <a:pPr algn="ctr"/>
-          </a:p>
-        </p:txBody>
-      </p:sp>
-      <p:sp>
-        <p:nvSpPr>
-          <p:cNvPr id="14" name="장식"/>
-          <p:cNvSpPr/>
-          <p:nvPr/>
-        </p:nvSpPr>
-        <p:spPr>
-          <a:xfrm>
-            <a:off x="10802743" y="209851"/>
-            <a:ext cx="141496" cy="141496"/>
-          </a:xfrm>
-          <a:prstGeom prst="ellipse">
-            <a:avLst/>
-          </a:prstGeom>
-          <a:solidFill>
-            <a:srgbClr val="8C56B3"/>
-          </a:solidFill>
-          <a:ln>
-            <a:noFill/>
-          </a:ln>
-        </p:spPr>
-        <p:txBody>
-          <a:bodyPr rtlCol="0" anchor="ctr"/>
-          <a:lstStyle/>
-          <a:p>
-            <a:pPr algn="ctr"/>
-          </a:p>
-        </p:txBody>
-      </p:sp>
-      <p:sp>
-        <p:nvSpPr>
-          <p:cNvPr id="15" name="장식"/>
-          <p:cNvSpPr/>
-          <p:nvPr/>
-        </p:nvSpPr>
-        <p:spPr>
-          <a:xfrm>
-            <a:off x="11602587" y="1201606"/>
-            <a:ext cx="84341" cy="84341"/>
-          </a:xfrm>
-          <a:prstGeom prst="ellipse">
-            <a:avLst/>
-          </a:prstGeom>
-          <a:solidFill>
-            <a:srgbClr val="E3D3EE"/>
-          </a:solidFill>
-          <a:ln>
-            <a:noFill/>
-          </a:ln>
-        </p:spPr>
-        <p:txBody>
-          <a:bodyPr rtlCol="0" anchor="ctr"/>
-          <a:lstStyle/>
-          <a:p>
-            <a:pPr algn="ctr"/>
-          </a:p>
-        </p:txBody>
-      </p:sp>
-      <p:sp>
-        <p:nvSpPr>
           <p:cNvPr id="2" name="Title 1"/>
           <p:cNvSpPr>
             <a:spLocks noGrp="1"/>
@@ -9424,7 +7787,7 @@
       </p:sp>
       <p:sp>
         <p:nvSpPr>
-          <p:cNvPr id="16" name="카드 1"/>
+          <p:cNvPr id="5" name="카드 1"/>
           <p:cNvSpPr/>
           <p:nvPr/>
         </p:nvSpPr>
@@ -9457,7 +7820,7 @@
       </p:sp>
       <p:sp>
         <p:nvSpPr>
-          <p:cNvPr id="17" name="번호 1"/>
+          <p:cNvPr id="6" name="번호 1"/>
           <p:cNvSpPr/>
           <p:nvPr/>
         </p:nvSpPr>
@@ -9500,7 +7863,7 @@
       </p:sp>
       <p:sp>
         <p:nvSpPr>
-          <p:cNvPr id="18" name="TextBox 17"/>
+          <p:cNvPr id="7" name="TextBox 6"/>
           <p:cNvSpPr txBox="1"/>
           <p:nvPr/>
         </p:nvSpPr>
@@ -9538,7 +7901,7 @@
       </p:sp>
       <p:sp>
         <p:nvSpPr>
-          <p:cNvPr id="19" name="TextBox 18"/>
+          <p:cNvPr id="8" name="TextBox 7"/>
           <p:cNvSpPr txBox="1"/>
           <p:nvPr/>
         </p:nvSpPr>
@@ -9576,7 +7939,7 @@
       </p:sp>
       <p:sp>
         <p:nvSpPr>
-          <p:cNvPr id="20" name="카드 2"/>
+          <p:cNvPr id="9" name="카드 2"/>
           <p:cNvSpPr/>
           <p:nvPr/>
         </p:nvSpPr>
@@ -9609,7 +7972,7 @@
       </p:sp>
       <p:sp>
         <p:nvSpPr>
-          <p:cNvPr id="21" name="번호 2"/>
+          <p:cNvPr id="10" name="번호 2"/>
           <p:cNvSpPr/>
           <p:nvPr/>
         </p:nvSpPr>
@@ -9652,7 +8015,7 @@
       </p:sp>
       <p:sp>
         <p:nvSpPr>
-          <p:cNvPr id="22" name="TextBox 21"/>
+          <p:cNvPr id="11" name="TextBox 10"/>
           <p:cNvSpPr txBox="1"/>
           <p:nvPr/>
         </p:nvSpPr>
@@ -9690,7 +8053,7 @@
       </p:sp>
       <p:sp>
         <p:nvSpPr>
-          <p:cNvPr id="23" name="TextBox 22"/>
+          <p:cNvPr id="12" name="TextBox 11"/>
           <p:cNvSpPr txBox="1"/>
           <p:nvPr/>
         </p:nvSpPr>
@@ -9728,7 +8091,7 @@
       </p:sp>
       <p:sp>
         <p:nvSpPr>
-          <p:cNvPr id="24" name="카드 3"/>
+          <p:cNvPr id="13" name="카드 3"/>
           <p:cNvSpPr/>
           <p:nvPr/>
         </p:nvSpPr>
@@ -9761,7 +8124,7 @@
       </p:sp>
       <p:sp>
         <p:nvSpPr>
-          <p:cNvPr id="25" name="번호 3"/>
+          <p:cNvPr id="14" name="번호 3"/>
           <p:cNvSpPr/>
           <p:nvPr/>
         </p:nvSpPr>
@@ -9804,7 +8167,7 @@
       </p:sp>
       <p:sp>
         <p:nvSpPr>
-          <p:cNvPr id="26" name="TextBox 25"/>
+          <p:cNvPr id="15" name="TextBox 14"/>
           <p:cNvSpPr txBox="1"/>
           <p:nvPr/>
         </p:nvSpPr>
@@ -9842,7 +8205,7 @@
       </p:sp>
       <p:sp>
         <p:nvSpPr>
-          <p:cNvPr id="27" name="TextBox 26"/>
+          <p:cNvPr id="16" name="TextBox 15"/>
           <p:cNvSpPr txBox="1"/>
           <p:nvPr/>
         </p:nvSpPr>
@@ -9880,7 +8243,7 @@
       </p:sp>
       <p:sp>
         <p:nvSpPr>
-          <p:cNvPr id="28" name="안내"/>
+          <p:cNvPr id="17" name="안내"/>
           <p:cNvSpPr txBox="1"/>
           <p:nvPr/>
         </p:nvSpPr>
@@ -10002,325 +8365,6 @@
       </p:sp>
       <p:sp>
         <p:nvSpPr>
-          <p:cNvPr id="5" name="장식"/>
-          <p:cNvSpPr/>
-          <p:nvPr/>
-        </p:nvSpPr>
-        <p:spPr>
-          <a:xfrm>
-            <a:off x="10902130" y="434860"/>
-            <a:ext cx="153549" cy="153549"/>
-          </a:xfrm>
-          <a:prstGeom prst="ellipse">
-            <a:avLst/>
-          </a:prstGeom>
-          <a:solidFill>
-            <a:srgbClr val="8C56B3"/>
-          </a:solidFill>
-          <a:ln>
-            <a:noFill/>
-          </a:ln>
-        </p:spPr>
-        <p:txBody>
-          <a:bodyPr rtlCol="0" anchor="ctr"/>
-          <a:lstStyle/>
-          <a:p>
-            <a:pPr algn="ctr"/>
-          </a:p>
-        </p:txBody>
-      </p:sp>
-      <p:sp>
-        <p:nvSpPr>
-          <p:cNvPr id="6" name="장식"/>
-          <p:cNvSpPr/>
-          <p:nvPr/>
-        </p:nvSpPr>
-        <p:spPr>
-          <a:xfrm>
-            <a:off x="11363808" y="1127246"/>
-            <a:ext cx="113682" cy="113682"/>
-          </a:xfrm>
-          <a:prstGeom prst="ellipse">
-            <a:avLst/>
-          </a:prstGeom>
-          <a:solidFill>
-            <a:srgbClr val="E3D3EE"/>
-          </a:solidFill>
-          <a:ln>
-            <a:noFill/>
-          </a:ln>
-        </p:spPr>
-        <p:txBody>
-          <a:bodyPr rtlCol="0" anchor="ctr"/>
-          <a:lstStyle/>
-          <a:p>
-            <a:pPr algn="ctr"/>
-          </a:p>
-        </p:txBody>
-      </p:sp>
-      <p:sp>
-        <p:nvSpPr>
-          <p:cNvPr id="7" name="장식"/>
-          <p:cNvSpPr/>
-          <p:nvPr/>
-        </p:nvSpPr>
-        <p:spPr>
-          <a:xfrm>
-            <a:off x="11568698" y="497270"/>
-            <a:ext cx="149756" cy="149756"/>
-          </a:xfrm>
-          <a:prstGeom prst="ellipse">
-            <a:avLst/>
-          </a:prstGeom>
-          <a:solidFill>
-            <a:srgbClr val="868D3F"/>
-          </a:solidFill>
-          <a:ln>
-            <a:noFill/>
-          </a:ln>
-        </p:spPr>
-        <p:txBody>
-          <a:bodyPr rtlCol="0" anchor="ctr"/>
-          <a:lstStyle/>
-          <a:p>
-            <a:pPr algn="ctr"/>
-          </a:p>
-        </p:txBody>
-      </p:sp>
-      <p:sp>
-        <p:nvSpPr>
-          <p:cNvPr id="8" name="장식"/>
-          <p:cNvSpPr/>
-          <p:nvPr/>
-        </p:nvSpPr>
-        <p:spPr>
-          <a:xfrm>
-            <a:off x="11523643" y="1096027"/>
-            <a:ext cx="134066" cy="134066"/>
-          </a:xfrm>
-          <a:prstGeom prst="ellipse">
-            <a:avLst/>
-          </a:prstGeom>
-          <a:solidFill>
-            <a:srgbClr val="8C56B3"/>
-          </a:solidFill>
-          <a:ln>
-            <a:noFill/>
-          </a:ln>
-        </p:spPr>
-        <p:txBody>
-          <a:bodyPr rtlCol="0" anchor="ctr"/>
-          <a:lstStyle/>
-          <a:p>
-            <a:pPr algn="ctr"/>
-          </a:p>
-        </p:txBody>
-      </p:sp>
-      <p:sp>
-        <p:nvSpPr>
-          <p:cNvPr id="9" name="장식"/>
-          <p:cNvSpPr/>
-          <p:nvPr/>
-        </p:nvSpPr>
-        <p:spPr>
-          <a:xfrm>
-            <a:off x="11054778" y="332121"/>
-            <a:ext cx="94724" cy="94724"/>
-          </a:xfrm>
-          <a:prstGeom prst="ellipse">
-            <a:avLst/>
-          </a:prstGeom>
-          <a:solidFill>
-            <a:srgbClr val="E3D3EE"/>
-          </a:solidFill>
-          <a:ln>
-            <a:noFill/>
-          </a:ln>
-        </p:spPr>
-        <p:txBody>
-          <a:bodyPr rtlCol="0" anchor="ctr"/>
-          <a:lstStyle/>
-          <a:p>
-            <a:pPr algn="ctr"/>
-          </a:p>
-        </p:txBody>
-      </p:sp>
-      <p:sp>
-        <p:nvSpPr>
-          <p:cNvPr id="10" name="장식"/>
-          <p:cNvSpPr/>
-          <p:nvPr/>
-        </p:nvSpPr>
-        <p:spPr>
-          <a:xfrm>
-            <a:off x="11428224" y="351933"/>
-            <a:ext cx="102698" cy="102698"/>
-          </a:xfrm>
-          <a:prstGeom prst="ellipse">
-            <a:avLst/>
-          </a:prstGeom>
-          <a:solidFill>
-            <a:srgbClr val="868D3F"/>
-          </a:solidFill>
-          <a:ln>
-            <a:noFill/>
-          </a:ln>
-        </p:spPr>
-        <p:txBody>
-          <a:bodyPr rtlCol="0" anchor="ctr"/>
-          <a:lstStyle/>
-          <a:p>
-            <a:pPr algn="ctr"/>
-          </a:p>
-        </p:txBody>
-      </p:sp>
-      <p:sp>
-        <p:nvSpPr>
-          <p:cNvPr id="11" name="장식"/>
-          <p:cNvSpPr/>
-          <p:nvPr/>
-        </p:nvSpPr>
-        <p:spPr>
-          <a:xfrm>
-            <a:off x="11597449" y="1195815"/>
-            <a:ext cx="177042" cy="177042"/>
-          </a:xfrm>
-          <a:prstGeom prst="ellipse">
-            <a:avLst/>
-          </a:prstGeom>
-          <a:solidFill>
-            <a:srgbClr val="8C56B3"/>
-          </a:solidFill>
-          <a:ln>
-            <a:noFill/>
-          </a:ln>
-        </p:spPr>
-        <p:txBody>
-          <a:bodyPr rtlCol="0" anchor="ctr"/>
-          <a:lstStyle/>
-          <a:p>
-            <a:pPr algn="ctr"/>
-          </a:p>
-        </p:txBody>
-      </p:sp>
-      <p:sp>
-        <p:nvSpPr>
-          <p:cNvPr id="12" name="장식"/>
-          <p:cNvSpPr/>
-          <p:nvPr/>
-        </p:nvSpPr>
-        <p:spPr>
-          <a:xfrm>
-            <a:off x="11309508" y="479409"/>
-            <a:ext cx="170008" cy="170008"/>
-          </a:xfrm>
-          <a:prstGeom prst="ellipse">
-            <a:avLst/>
-          </a:prstGeom>
-          <a:solidFill>
-            <a:srgbClr val="E3D3EE"/>
-          </a:solidFill>
-          <a:ln>
-            <a:noFill/>
-          </a:ln>
-        </p:spPr>
-        <p:txBody>
-          <a:bodyPr rtlCol="0" anchor="ctr"/>
-          <a:lstStyle/>
-          <a:p>
-            <a:pPr algn="ctr"/>
-          </a:p>
-        </p:txBody>
-      </p:sp>
-      <p:sp>
-        <p:nvSpPr>
-          <p:cNvPr id="13" name="장식"/>
-          <p:cNvSpPr/>
-          <p:nvPr/>
-        </p:nvSpPr>
-        <p:spPr>
-          <a:xfrm>
-            <a:off x="11092695" y="457650"/>
-            <a:ext cx="173296" cy="173296"/>
-          </a:xfrm>
-          <a:prstGeom prst="ellipse">
-            <a:avLst/>
-          </a:prstGeom>
-          <a:solidFill>
-            <a:srgbClr val="868D3F"/>
-          </a:solidFill>
-          <a:ln>
-            <a:noFill/>
-          </a:ln>
-        </p:spPr>
-        <p:txBody>
-          <a:bodyPr rtlCol="0" anchor="ctr"/>
-          <a:lstStyle/>
-          <a:p>
-            <a:pPr algn="ctr"/>
-          </a:p>
-        </p:txBody>
-      </p:sp>
-      <p:sp>
-        <p:nvSpPr>
-          <p:cNvPr id="14" name="장식"/>
-          <p:cNvSpPr/>
-          <p:nvPr/>
-        </p:nvSpPr>
-        <p:spPr>
-          <a:xfrm>
-            <a:off x="10802743" y="209851"/>
-            <a:ext cx="141496" cy="141496"/>
-          </a:xfrm>
-          <a:prstGeom prst="ellipse">
-            <a:avLst/>
-          </a:prstGeom>
-          <a:solidFill>
-            <a:srgbClr val="8C56B3"/>
-          </a:solidFill>
-          <a:ln>
-            <a:noFill/>
-          </a:ln>
-        </p:spPr>
-        <p:txBody>
-          <a:bodyPr rtlCol="0" anchor="ctr"/>
-          <a:lstStyle/>
-          <a:p>
-            <a:pPr algn="ctr"/>
-          </a:p>
-        </p:txBody>
-      </p:sp>
-      <p:sp>
-        <p:nvSpPr>
-          <p:cNvPr id="15" name="장식"/>
-          <p:cNvSpPr/>
-          <p:nvPr/>
-        </p:nvSpPr>
-        <p:spPr>
-          <a:xfrm>
-            <a:off x="11602587" y="1201606"/>
-            <a:ext cx="84341" cy="84341"/>
-          </a:xfrm>
-          <a:prstGeom prst="ellipse">
-            <a:avLst/>
-          </a:prstGeom>
-          <a:solidFill>
-            <a:srgbClr val="E3D3EE"/>
-          </a:solidFill>
-          <a:ln>
-            <a:noFill/>
-          </a:ln>
-        </p:spPr>
-        <p:txBody>
-          <a:bodyPr rtlCol="0" anchor="ctr"/>
-          <a:lstStyle/>
-          <a:p>
-            <a:pPr algn="ctr"/>
-          </a:p>
-        </p:txBody>
-      </p:sp>
-      <p:sp>
-        <p:nvSpPr>
           <p:cNvPr id="2" name="Title 1"/>
           <p:cNvSpPr>
             <a:spLocks noGrp="1"/>
@@ -10359,7 +8403,7 @@
       </p:sp>
       <p:sp>
         <p:nvSpPr>
-          <p:cNvPr id="16" name="카드 1"/>
+          <p:cNvPr id="5" name="카드 1"/>
           <p:cNvSpPr/>
           <p:nvPr/>
         </p:nvSpPr>
@@ -10392,7 +8436,7 @@
       </p:sp>
       <p:sp>
         <p:nvSpPr>
-          <p:cNvPr id="17" name="번호 1"/>
+          <p:cNvPr id="6" name="번호 1"/>
           <p:cNvSpPr/>
           <p:nvPr/>
         </p:nvSpPr>
@@ -10435,7 +8479,7 @@
       </p:sp>
       <p:sp>
         <p:nvSpPr>
-          <p:cNvPr id="18" name="TextBox 17"/>
+          <p:cNvPr id="7" name="TextBox 6"/>
           <p:cNvSpPr txBox="1"/>
           <p:nvPr/>
         </p:nvSpPr>
@@ -10473,7 +8517,7 @@
       </p:sp>
       <p:sp>
         <p:nvSpPr>
-          <p:cNvPr id="19" name="TextBox 18"/>
+          <p:cNvPr id="8" name="TextBox 7"/>
           <p:cNvSpPr txBox="1"/>
           <p:nvPr/>
         </p:nvSpPr>
@@ -10511,7 +8555,7 @@
       </p:sp>
       <p:sp>
         <p:nvSpPr>
-          <p:cNvPr id="20" name="카드 2"/>
+          <p:cNvPr id="9" name="카드 2"/>
           <p:cNvSpPr/>
           <p:nvPr/>
         </p:nvSpPr>
@@ -10544,7 +8588,7 @@
       </p:sp>
       <p:sp>
         <p:nvSpPr>
-          <p:cNvPr id="21" name="번호 2"/>
+          <p:cNvPr id="10" name="번호 2"/>
           <p:cNvSpPr/>
           <p:nvPr/>
         </p:nvSpPr>
@@ -10587,7 +8631,7 @@
       </p:sp>
       <p:sp>
         <p:nvSpPr>
-          <p:cNvPr id="22" name="TextBox 21"/>
+          <p:cNvPr id="11" name="TextBox 10"/>
           <p:cNvSpPr txBox="1"/>
           <p:nvPr/>
         </p:nvSpPr>
@@ -10625,7 +8669,7 @@
       </p:sp>
       <p:sp>
         <p:nvSpPr>
-          <p:cNvPr id="23" name="TextBox 22"/>
+          <p:cNvPr id="12" name="TextBox 11"/>
           <p:cNvSpPr txBox="1"/>
           <p:nvPr/>
         </p:nvSpPr>
@@ -10663,7 +8707,7 @@
       </p:sp>
       <p:sp>
         <p:nvSpPr>
-          <p:cNvPr id="24" name="카드 3"/>
+          <p:cNvPr id="13" name="카드 3"/>
           <p:cNvSpPr/>
           <p:nvPr/>
         </p:nvSpPr>
@@ -10696,7 +8740,7 @@
       </p:sp>
       <p:sp>
         <p:nvSpPr>
-          <p:cNvPr id="25" name="번호 3"/>
+          <p:cNvPr id="14" name="번호 3"/>
           <p:cNvSpPr/>
           <p:nvPr/>
         </p:nvSpPr>
@@ -10739,7 +8783,7 @@
       </p:sp>
       <p:sp>
         <p:nvSpPr>
-          <p:cNvPr id="26" name="TextBox 25"/>
+          <p:cNvPr id="15" name="TextBox 14"/>
           <p:cNvSpPr txBox="1"/>
           <p:nvPr/>
         </p:nvSpPr>
@@ -10777,7 +8821,7 @@
       </p:sp>
       <p:sp>
         <p:nvSpPr>
-          <p:cNvPr id="27" name="TextBox 26"/>
+          <p:cNvPr id="16" name="TextBox 15"/>
           <p:cNvSpPr txBox="1"/>
           <p:nvPr/>
         </p:nvSpPr>
@@ -10815,7 +8859,7 @@
       </p:sp>
       <p:sp>
         <p:nvSpPr>
-          <p:cNvPr id="28" name="안내 문구"/>
+          <p:cNvPr id="17" name="안내 문구"/>
           <p:cNvSpPr txBox="1"/>
           <p:nvPr/>
         </p:nvSpPr>

--- a/public/fun/pack/pptx/review/보장점검양식_11_본인점검_라일락골목.pptx
+++ b/public/fun/pack/pptx/review/보장점검양식_11_본인점검_라일락골목.pptx
@@ -3347,7 +3347,7 @@
             <a:r>
               <a:rPr sz="3600" b="1" i="0">
                 <a:solidFill>
-                  <a:srgbClr val="573371"/>
+                  <a:srgbClr val="4E226D"/>
                 </a:solidFill>
               </a:rPr>
               <a:t>우리 보험 점검 시간</a:t>
@@ -3385,7 +3385,7 @@
             <a:r>
               <a:rPr sz="1700" b="0" i="1">
                 <a:solidFill>
-                  <a:srgbClr val="573371"/>
+                  <a:srgbClr val="4E226D"/>
                 </a:solidFill>
               </a:rPr>
               <a:t>봄맞이 정리하듯 서류부터 모읍니다</a:t>
@@ -3487,7 +3487,7 @@
             <a:avLst/>
           </a:prstGeom>
           <a:solidFill>
-            <a:srgbClr val="E3D3EE"/>
+            <a:srgbClr val="E8D4F7"/>
           </a:solidFill>
           <a:ln>
             <a:noFill/>
@@ -3516,7 +3516,7 @@
             <a:avLst/>
           </a:prstGeom>
           <a:solidFill>
-            <a:srgbClr val="8C56B3"/>
+            <a:srgbClr val="9651C8"/>
           </a:solidFill>
           <a:ln>
             <a:noFill/>
@@ -3560,7 +3560,7 @@
             <a:r>
               <a:rPr sz="3000" b="1" i="0">
                 <a:solidFill>
-                  <a:srgbClr val="573371"/>
+                  <a:srgbClr val="4E226D"/>
                 </a:solidFill>
               </a:rPr>
               <a:t>점검 대상 현황</a:t>
@@ -3610,30 +3610,30 @@
                   <a:tcPr anchor="ctr" marL="73152" marR="73152">
                     <a:lnL w="9525" cap="flat" cmpd="sng" algn="ctr">
                       <a:solidFill>
-                        <a:srgbClr val="8C56B3"/>
+                        <a:srgbClr val="9651C8"/>
                       </a:solidFill>
                       <a:prstDash val="solid"/>
                     </a:lnL>
                     <a:lnR w="9525" cap="flat" cmpd="sng" algn="ctr">
                       <a:solidFill>
-                        <a:srgbClr val="8C56B3"/>
+                        <a:srgbClr val="9651C8"/>
                       </a:solidFill>
                       <a:prstDash val="solid"/>
                     </a:lnR>
                     <a:lnT w="9525" cap="flat" cmpd="sng" algn="ctr">
                       <a:solidFill>
-                        <a:srgbClr val="8C56B3"/>
+                        <a:srgbClr val="9651C8"/>
                       </a:solidFill>
                       <a:prstDash val="solid"/>
                     </a:lnT>
                     <a:lnB w="9525" cap="flat" cmpd="sng" algn="ctr">
                       <a:solidFill>
-                        <a:srgbClr val="8C56B3"/>
+                        <a:srgbClr val="9651C8"/>
                       </a:solidFill>
                       <a:prstDash val="solid"/>
                     </a:lnB>
                     <a:solidFill>
-                      <a:srgbClr val="8C56B3"/>
+                      <a:srgbClr val="9651C8"/>
                     </a:solidFill>
                   </a:tcPr>
                 </a:tc>
@@ -3656,30 +3656,30 @@
                   <a:tcPr anchor="ctr" marL="73152" marR="73152">
                     <a:lnL w="9525" cap="flat" cmpd="sng" algn="ctr">
                       <a:solidFill>
-                        <a:srgbClr val="8C56B3"/>
+                        <a:srgbClr val="9651C8"/>
                       </a:solidFill>
                       <a:prstDash val="solid"/>
                     </a:lnL>
                     <a:lnR w="9525" cap="flat" cmpd="sng" algn="ctr">
                       <a:solidFill>
-                        <a:srgbClr val="8C56B3"/>
+                        <a:srgbClr val="9651C8"/>
                       </a:solidFill>
                       <a:prstDash val="solid"/>
                     </a:lnR>
                     <a:lnT w="9525" cap="flat" cmpd="sng" algn="ctr">
                       <a:solidFill>
-                        <a:srgbClr val="8C56B3"/>
+                        <a:srgbClr val="9651C8"/>
                       </a:solidFill>
                       <a:prstDash val="solid"/>
                     </a:lnT>
                     <a:lnB w="9525" cap="flat" cmpd="sng" algn="ctr">
                       <a:solidFill>
-                        <a:srgbClr val="8C56B3"/>
+                        <a:srgbClr val="9651C8"/>
                       </a:solidFill>
                       <a:prstDash val="solid"/>
                     </a:lnB>
                     <a:solidFill>
-                      <a:srgbClr val="8C56B3"/>
+                      <a:srgbClr val="9651C8"/>
                     </a:solidFill>
                   </a:tcPr>
                 </a:tc>
@@ -3694,7 +3694,7 @@
                       <a:r>
                         <a:rPr sz="1600" b="1">
                           <a:solidFill>
-                            <a:srgbClr val="573371"/>
+                            <a:srgbClr val="4E226D"/>
                           </a:solidFill>
                         </a:rPr>
                         <a:t>이름</a:t>
@@ -3704,30 +3704,30 @@
                   <a:tcPr anchor="ctr" marL="73152" marR="73152">
                     <a:lnL w="9525" cap="flat" cmpd="sng" algn="ctr">
                       <a:solidFill>
-                        <a:srgbClr val="E3D3EE"/>
+                        <a:srgbClr val="E8D4F7"/>
                       </a:solidFill>
                       <a:prstDash val="solid"/>
                     </a:lnL>
                     <a:lnR w="9525" cap="flat" cmpd="sng" algn="ctr">
                       <a:solidFill>
-                        <a:srgbClr val="E3D3EE"/>
+                        <a:srgbClr val="E8D4F7"/>
                       </a:solidFill>
                       <a:prstDash val="solid"/>
                     </a:lnR>
                     <a:lnT w="9525" cap="flat" cmpd="sng" algn="ctr">
                       <a:solidFill>
-                        <a:srgbClr val="E3D3EE"/>
+                        <a:srgbClr val="E8D4F7"/>
                       </a:solidFill>
                       <a:prstDash val="solid"/>
                     </a:lnT>
                     <a:lnB w="9525" cap="flat" cmpd="sng" algn="ctr">
                       <a:solidFill>
-                        <a:srgbClr val="E3D3EE"/>
+                        <a:srgbClr val="E8D4F7"/>
                       </a:solidFill>
                       <a:prstDash val="solid"/>
                     </a:lnB>
                     <a:solidFill>
-                      <a:srgbClr val="E3D3EE"/>
+                      <a:srgbClr val="E8D4F7"/>
                     </a:solidFill>
                   </a:tcPr>
                 </a:tc>
@@ -3750,25 +3750,25 @@
                   <a:tcPr anchor="ctr" marL="73152" marR="73152">
                     <a:lnL w="9525" cap="flat" cmpd="sng" algn="ctr">
                       <a:solidFill>
-                        <a:srgbClr val="E3D3EE"/>
+                        <a:srgbClr val="E8D4F7"/>
                       </a:solidFill>
                       <a:prstDash val="solid"/>
                     </a:lnL>
                     <a:lnR w="9525" cap="flat" cmpd="sng" algn="ctr">
                       <a:solidFill>
-                        <a:srgbClr val="E3D3EE"/>
+                        <a:srgbClr val="E8D4F7"/>
                       </a:solidFill>
                       <a:prstDash val="solid"/>
                     </a:lnR>
                     <a:lnT w="9525" cap="flat" cmpd="sng" algn="ctr">
                       <a:solidFill>
-                        <a:srgbClr val="E3D3EE"/>
+                        <a:srgbClr val="E8D4F7"/>
                       </a:solidFill>
                       <a:prstDash val="solid"/>
                     </a:lnT>
                     <a:lnB w="9525" cap="flat" cmpd="sng" algn="ctr">
                       <a:solidFill>
-                        <a:srgbClr val="E3D3EE"/>
+                        <a:srgbClr val="E8D4F7"/>
                       </a:solidFill>
                       <a:prstDash val="solid"/>
                     </a:lnB>
@@ -3788,7 +3788,7 @@
                       <a:r>
                         <a:rPr sz="1600" b="1">
                           <a:solidFill>
-                            <a:srgbClr val="573371"/>
+                            <a:srgbClr val="4E226D"/>
                           </a:solidFill>
                         </a:rPr>
                         <a:t>나이</a:t>
@@ -3798,30 +3798,30 @@
                   <a:tcPr anchor="ctr" marL="73152" marR="73152">
                     <a:lnL w="9525" cap="flat" cmpd="sng" algn="ctr">
                       <a:solidFill>
-                        <a:srgbClr val="E3D3EE"/>
+                        <a:srgbClr val="E8D4F7"/>
                       </a:solidFill>
                       <a:prstDash val="solid"/>
                     </a:lnL>
                     <a:lnR w="9525" cap="flat" cmpd="sng" algn="ctr">
                       <a:solidFill>
-                        <a:srgbClr val="E3D3EE"/>
+                        <a:srgbClr val="E8D4F7"/>
                       </a:solidFill>
                       <a:prstDash val="solid"/>
                     </a:lnR>
                     <a:lnT w="9525" cap="flat" cmpd="sng" algn="ctr">
                       <a:solidFill>
-                        <a:srgbClr val="E3D3EE"/>
+                        <a:srgbClr val="E8D4F7"/>
                       </a:solidFill>
                       <a:prstDash val="solid"/>
                     </a:lnT>
                     <a:lnB w="9525" cap="flat" cmpd="sng" algn="ctr">
                       <a:solidFill>
-                        <a:srgbClr val="E3D3EE"/>
+                        <a:srgbClr val="E8D4F7"/>
                       </a:solidFill>
                       <a:prstDash val="solid"/>
                     </a:lnB>
                     <a:solidFill>
-                      <a:srgbClr val="E3D3EE"/>
+                      <a:srgbClr val="E8D4F7"/>
                     </a:solidFill>
                   </a:tcPr>
                 </a:tc>
@@ -3844,30 +3844,30 @@
                   <a:tcPr anchor="ctr" marL="73152" marR="73152">
                     <a:lnL w="9525" cap="flat" cmpd="sng" algn="ctr">
                       <a:solidFill>
-                        <a:srgbClr val="E3D3EE"/>
+                        <a:srgbClr val="E8D4F7"/>
                       </a:solidFill>
                       <a:prstDash val="solid"/>
                     </a:lnL>
                     <a:lnR w="9525" cap="flat" cmpd="sng" algn="ctr">
                       <a:solidFill>
-                        <a:srgbClr val="E3D3EE"/>
+                        <a:srgbClr val="E8D4F7"/>
                       </a:solidFill>
                       <a:prstDash val="solid"/>
                     </a:lnR>
                     <a:lnT w="9525" cap="flat" cmpd="sng" algn="ctr">
                       <a:solidFill>
-                        <a:srgbClr val="E3D3EE"/>
+                        <a:srgbClr val="E8D4F7"/>
                       </a:solidFill>
                       <a:prstDash val="solid"/>
                     </a:lnT>
                     <a:lnB w="9525" cap="flat" cmpd="sng" algn="ctr">
                       <a:solidFill>
-                        <a:srgbClr val="E3D3EE"/>
+                        <a:srgbClr val="E8D4F7"/>
                       </a:solidFill>
                       <a:prstDash val="solid"/>
                     </a:lnB>
                     <a:solidFill>
-                      <a:srgbClr val="F5F1F9"/>
+                      <a:srgbClr val="F8F3FC"/>
                     </a:solidFill>
                   </a:tcPr>
                 </a:tc>
@@ -3882,7 +3882,7 @@
                       <a:r>
                         <a:rPr sz="1600" b="1">
                           <a:solidFill>
-                            <a:srgbClr val="573371"/>
+                            <a:srgbClr val="4E226D"/>
                           </a:solidFill>
                         </a:rPr>
                         <a:t>직업</a:t>
@@ -3892,30 +3892,30 @@
                   <a:tcPr anchor="ctr" marL="73152" marR="73152">
                     <a:lnL w="9525" cap="flat" cmpd="sng" algn="ctr">
                       <a:solidFill>
-                        <a:srgbClr val="E3D3EE"/>
+                        <a:srgbClr val="E8D4F7"/>
                       </a:solidFill>
                       <a:prstDash val="solid"/>
                     </a:lnL>
                     <a:lnR w="9525" cap="flat" cmpd="sng" algn="ctr">
                       <a:solidFill>
-                        <a:srgbClr val="E3D3EE"/>
+                        <a:srgbClr val="E8D4F7"/>
                       </a:solidFill>
                       <a:prstDash val="solid"/>
                     </a:lnR>
                     <a:lnT w="9525" cap="flat" cmpd="sng" algn="ctr">
                       <a:solidFill>
-                        <a:srgbClr val="E3D3EE"/>
+                        <a:srgbClr val="E8D4F7"/>
                       </a:solidFill>
                       <a:prstDash val="solid"/>
                     </a:lnT>
                     <a:lnB w="9525" cap="flat" cmpd="sng" algn="ctr">
                       <a:solidFill>
-                        <a:srgbClr val="E3D3EE"/>
+                        <a:srgbClr val="E8D4F7"/>
                       </a:solidFill>
                       <a:prstDash val="solid"/>
                     </a:lnB>
                     <a:solidFill>
-                      <a:srgbClr val="E3D3EE"/>
+                      <a:srgbClr val="E8D4F7"/>
                     </a:solidFill>
                   </a:tcPr>
                 </a:tc>
@@ -3938,25 +3938,25 @@
                   <a:tcPr anchor="ctr" marL="73152" marR="73152">
                     <a:lnL w="9525" cap="flat" cmpd="sng" algn="ctr">
                       <a:solidFill>
-                        <a:srgbClr val="E3D3EE"/>
+                        <a:srgbClr val="E8D4F7"/>
                       </a:solidFill>
                       <a:prstDash val="solid"/>
                     </a:lnL>
                     <a:lnR w="9525" cap="flat" cmpd="sng" algn="ctr">
                       <a:solidFill>
-                        <a:srgbClr val="E3D3EE"/>
+                        <a:srgbClr val="E8D4F7"/>
                       </a:solidFill>
                       <a:prstDash val="solid"/>
                     </a:lnR>
                     <a:lnT w="9525" cap="flat" cmpd="sng" algn="ctr">
                       <a:solidFill>
-                        <a:srgbClr val="E3D3EE"/>
+                        <a:srgbClr val="E8D4F7"/>
                       </a:solidFill>
                       <a:prstDash val="solid"/>
                     </a:lnT>
                     <a:lnB w="9525" cap="flat" cmpd="sng" algn="ctr">
                       <a:solidFill>
-                        <a:srgbClr val="E3D3EE"/>
+                        <a:srgbClr val="E8D4F7"/>
                       </a:solidFill>
                       <a:prstDash val="solid"/>
                     </a:lnB>
@@ -3976,7 +3976,7 @@
                       <a:r>
                         <a:rPr sz="1600" b="1">
                           <a:solidFill>
-                            <a:srgbClr val="573371"/>
+                            <a:srgbClr val="4E226D"/>
                           </a:solidFill>
                         </a:rPr>
                         <a:t>가족 구성</a:t>
@@ -3986,30 +3986,30 @@
                   <a:tcPr anchor="ctr" marL="73152" marR="73152">
                     <a:lnL w="9525" cap="flat" cmpd="sng" algn="ctr">
                       <a:solidFill>
-                        <a:srgbClr val="E3D3EE"/>
+                        <a:srgbClr val="E8D4F7"/>
                       </a:solidFill>
                       <a:prstDash val="solid"/>
                     </a:lnL>
                     <a:lnR w="9525" cap="flat" cmpd="sng" algn="ctr">
                       <a:solidFill>
-                        <a:srgbClr val="E3D3EE"/>
+                        <a:srgbClr val="E8D4F7"/>
                       </a:solidFill>
                       <a:prstDash val="solid"/>
                     </a:lnR>
                     <a:lnT w="9525" cap="flat" cmpd="sng" algn="ctr">
                       <a:solidFill>
-                        <a:srgbClr val="E3D3EE"/>
+                        <a:srgbClr val="E8D4F7"/>
                       </a:solidFill>
                       <a:prstDash val="solid"/>
                     </a:lnT>
                     <a:lnB w="9525" cap="flat" cmpd="sng" algn="ctr">
                       <a:solidFill>
-                        <a:srgbClr val="E3D3EE"/>
+                        <a:srgbClr val="E8D4F7"/>
                       </a:solidFill>
                       <a:prstDash val="solid"/>
                     </a:lnB>
                     <a:solidFill>
-                      <a:srgbClr val="E3D3EE"/>
+                      <a:srgbClr val="E8D4F7"/>
                     </a:solidFill>
                   </a:tcPr>
                 </a:tc>
@@ -4032,30 +4032,30 @@
                   <a:tcPr anchor="ctr" marL="73152" marR="73152">
                     <a:lnL w="9525" cap="flat" cmpd="sng" algn="ctr">
                       <a:solidFill>
-                        <a:srgbClr val="E3D3EE"/>
+                        <a:srgbClr val="E8D4F7"/>
                       </a:solidFill>
                       <a:prstDash val="solid"/>
                     </a:lnL>
                     <a:lnR w="9525" cap="flat" cmpd="sng" algn="ctr">
                       <a:solidFill>
-                        <a:srgbClr val="E3D3EE"/>
+                        <a:srgbClr val="E8D4F7"/>
                       </a:solidFill>
                       <a:prstDash val="solid"/>
                     </a:lnR>
                     <a:lnT w="9525" cap="flat" cmpd="sng" algn="ctr">
                       <a:solidFill>
-                        <a:srgbClr val="E3D3EE"/>
+                        <a:srgbClr val="E8D4F7"/>
                       </a:solidFill>
                       <a:prstDash val="solid"/>
                     </a:lnT>
                     <a:lnB w="9525" cap="flat" cmpd="sng" algn="ctr">
                       <a:solidFill>
-                        <a:srgbClr val="E3D3EE"/>
+                        <a:srgbClr val="E8D4F7"/>
                       </a:solidFill>
                       <a:prstDash val="solid"/>
                     </a:lnB>
                     <a:solidFill>
-                      <a:srgbClr val="F5F1F9"/>
+                      <a:srgbClr val="F8F3FC"/>
                     </a:solidFill>
                   </a:tcPr>
                 </a:tc>
@@ -4105,7 +4105,7 @@
             <a:avLst/>
           </a:prstGeom>
           <a:solidFill>
-            <a:srgbClr val="E3D3EE"/>
+            <a:srgbClr val="E8D4F7"/>
           </a:solidFill>
           <a:ln>
             <a:noFill/>
@@ -4134,7 +4134,7 @@
             <a:avLst/>
           </a:prstGeom>
           <a:solidFill>
-            <a:srgbClr val="8C56B3"/>
+            <a:srgbClr val="9651C8"/>
           </a:solidFill>
           <a:ln>
             <a:noFill/>
@@ -4178,7 +4178,7 @@
             <a:r>
               <a:rPr sz="3000" b="1" i="0">
                 <a:solidFill>
-                  <a:srgbClr val="573371"/>
+                  <a:srgbClr val="4E226D"/>
                 </a:solidFill>
               </a:rPr>
               <a:t>가입한 보험 목록</a:t>
@@ -4231,30 +4231,30 @@
                   <a:tcPr anchor="ctr" marL="73152" marR="73152">
                     <a:lnL w="9525" cap="flat" cmpd="sng" algn="ctr">
                       <a:solidFill>
-                        <a:srgbClr val="8C56B3"/>
+                        <a:srgbClr val="9651C8"/>
                       </a:solidFill>
                       <a:prstDash val="solid"/>
                     </a:lnL>
                     <a:lnR w="9525" cap="flat" cmpd="sng" algn="ctr">
                       <a:solidFill>
-                        <a:srgbClr val="8C56B3"/>
+                        <a:srgbClr val="9651C8"/>
                       </a:solidFill>
                       <a:prstDash val="solid"/>
                     </a:lnR>
                     <a:lnT w="9525" cap="flat" cmpd="sng" algn="ctr">
                       <a:solidFill>
-                        <a:srgbClr val="8C56B3"/>
+                        <a:srgbClr val="9651C8"/>
                       </a:solidFill>
                       <a:prstDash val="solid"/>
                     </a:lnT>
                     <a:lnB w="9525" cap="flat" cmpd="sng" algn="ctr">
                       <a:solidFill>
-                        <a:srgbClr val="8C56B3"/>
+                        <a:srgbClr val="9651C8"/>
                       </a:solidFill>
                       <a:prstDash val="solid"/>
                     </a:lnB>
                     <a:solidFill>
-                      <a:srgbClr val="8C56B3"/>
+                      <a:srgbClr val="9651C8"/>
                     </a:solidFill>
                   </a:tcPr>
                 </a:tc>
@@ -4277,30 +4277,30 @@
                   <a:tcPr anchor="ctr" marL="73152" marR="73152">
                     <a:lnL w="9525" cap="flat" cmpd="sng" algn="ctr">
                       <a:solidFill>
-                        <a:srgbClr val="8C56B3"/>
+                        <a:srgbClr val="9651C8"/>
                       </a:solidFill>
                       <a:prstDash val="solid"/>
                     </a:lnL>
                     <a:lnR w="9525" cap="flat" cmpd="sng" algn="ctr">
                       <a:solidFill>
-                        <a:srgbClr val="8C56B3"/>
+                        <a:srgbClr val="9651C8"/>
                       </a:solidFill>
                       <a:prstDash val="solid"/>
                     </a:lnR>
                     <a:lnT w="9525" cap="flat" cmpd="sng" algn="ctr">
                       <a:solidFill>
-                        <a:srgbClr val="8C56B3"/>
+                        <a:srgbClr val="9651C8"/>
                       </a:solidFill>
                       <a:prstDash val="solid"/>
                     </a:lnT>
                     <a:lnB w="9525" cap="flat" cmpd="sng" algn="ctr">
                       <a:solidFill>
-                        <a:srgbClr val="8C56B3"/>
+                        <a:srgbClr val="9651C8"/>
                       </a:solidFill>
                       <a:prstDash val="solid"/>
                     </a:lnB>
                     <a:solidFill>
-                      <a:srgbClr val="8C56B3"/>
+                      <a:srgbClr val="9651C8"/>
                     </a:solidFill>
                   </a:tcPr>
                 </a:tc>
@@ -4323,30 +4323,30 @@
                   <a:tcPr anchor="ctr" marL="73152" marR="73152">
                     <a:lnL w="9525" cap="flat" cmpd="sng" algn="ctr">
                       <a:solidFill>
-                        <a:srgbClr val="8C56B3"/>
+                        <a:srgbClr val="9651C8"/>
                       </a:solidFill>
                       <a:prstDash val="solid"/>
                     </a:lnL>
                     <a:lnR w="9525" cap="flat" cmpd="sng" algn="ctr">
                       <a:solidFill>
-                        <a:srgbClr val="8C56B3"/>
+                        <a:srgbClr val="9651C8"/>
                       </a:solidFill>
                       <a:prstDash val="solid"/>
                     </a:lnR>
                     <a:lnT w="9525" cap="flat" cmpd="sng" algn="ctr">
                       <a:solidFill>
-                        <a:srgbClr val="8C56B3"/>
+                        <a:srgbClr val="9651C8"/>
                       </a:solidFill>
                       <a:prstDash val="solid"/>
                     </a:lnT>
                     <a:lnB w="9525" cap="flat" cmpd="sng" algn="ctr">
                       <a:solidFill>
-                        <a:srgbClr val="8C56B3"/>
+                        <a:srgbClr val="9651C8"/>
                       </a:solidFill>
                       <a:prstDash val="solid"/>
                     </a:lnB>
                     <a:solidFill>
-                      <a:srgbClr val="8C56B3"/>
+                      <a:srgbClr val="9651C8"/>
                     </a:solidFill>
                   </a:tcPr>
                 </a:tc>
@@ -4369,30 +4369,30 @@
                   <a:tcPr anchor="ctr" marL="73152" marR="73152">
                     <a:lnL w="9525" cap="flat" cmpd="sng" algn="ctr">
                       <a:solidFill>
-                        <a:srgbClr val="8C56B3"/>
+                        <a:srgbClr val="9651C8"/>
                       </a:solidFill>
                       <a:prstDash val="solid"/>
                     </a:lnL>
                     <a:lnR w="9525" cap="flat" cmpd="sng" algn="ctr">
                       <a:solidFill>
-                        <a:srgbClr val="8C56B3"/>
+                        <a:srgbClr val="9651C8"/>
                       </a:solidFill>
                       <a:prstDash val="solid"/>
                     </a:lnR>
                     <a:lnT w="9525" cap="flat" cmpd="sng" algn="ctr">
                       <a:solidFill>
-                        <a:srgbClr val="8C56B3"/>
+                        <a:srgbClr val="9651C8"/>
                       </a:solidFill>
                       <a:prstDash val="solid"/>
                     </a:lnT>
                     <a:lnB w="9525" cap="flat" cmpd="sng" algn="ctr">
                       <a:solidFill>
-                        <a:srgbClr val="8C56B3"/>
+                        <a:srgbClr val="9651C8"/>
                       </a:solidFill>
                       <a:prstDash val="solid"/>
                     </a:lnB>
                     <a:solidFill>
-                      <a:srgbClr val="8C56B3"/>
+                      <a:srgbClr val="9651C8"/>
                     </a:solidFill>
                   </a:tcPr>
                 </a:tc>
@@ -4415,30 +4415,30 @@
                   <a:tcPr anchor="ctr" marL="73152" marR="73152">
                     <a:lnL w="9525" cap="flat" cmpd="sng" algn="ctr">
                       <a:solidFill>
-                        <a:srgbClr val="8C56B3"/>
+                        <a:srgbClr val="9651C8"/>
                       </a:solidFill>
                       <a:prstDash val="solid"/>
                     </a:lnL>
                     <a:lnR w="9525" cap="flat" cmpd="sng" algn="ctr">
                       <a:solidFill>
-                        <a:srgbClr val="8C56B3"/>
+                        <a:srgbClr val="9651C8"/>
                       </a:solidFill>
                       <a:prstDash val="solid"/>
                     </a:lnR>
                     <a:lnT w="9525" cap="flat" cmpd="sng" algn="ctr">
                       <a:solidFill>
-                        <a:srgbClr val="8C56B3"/>
+                        <a:srgbClr val="9651C8"/>
                       </a:solidFill>
                       <a:prstDash val="solid"/>
                     </a:lnT>
                     <a:lnB w="9525" cap="flat" cmpd="sng" algn="ctr">
                       <a:solidFill>
-                        <a:srgbClr val="8C56B3"/>
+                        <a:srgbClr val="9651C8"/>
                       </a:solidFill>
                       <a:prstDash val="solid"/>
                     </a:lnB>
                     <a:solidFill>
-                      <a:srgbClr val="8C56B3"/>
+                      <a:srgbClr val="9651C8"/>
                     </a:solidFill>
                   </a:tcPr>
                 </a:tc>
@@ -4463,25 +4463,25 @@
                   <a:tcPr anchor="ctr" marL="73152" marR="73152">
                     <a:lnL w="9525" cap="flat" cmpd="sng" algn="ctr">
                       <a:solidFill>
-                        <a:srgbClr val="E3D3EE"/>
+                        <a:srgbClr val="E8D4F7"/>
                       </a:solidFill>
                       <a:prstDash val="solid"/>
                     </a:lnL>
                     <a:lnR w="9525" cap="flat" cmpd="sng" algn="ctr">
                       <a:solidFill>
-                        <a:srgbClr val="E3D3EE"/>
+                        <a:srgbClr val="E8D4F7"/>
                       </a:solidFill>
                       <a:prstDash val="solid"/>
                     </a:lnR>
                     <a:lnT w="9525" cap="flat" cmpd="sng" algn="ctr">
                       <a:solidFill>
-                        <a:srgbClr val="E3D3EE"/>
+                        <a:srgbClr val="E8D4F7"/>
                       </a:solidFill>
                       <a:prstDash val="solid"/>
                     </a:lnT>
                     <a:lnB w="9525" cap="flat" cmpd="sng" algn="ctr">
                       <a:solidFill>
-                        <a:srgbClr val="E3D3EE"/>
+                        <a:srgbClr val="E8D4F7"/>
                       </a:solidFill>
                       <a:prstDash val="solid"/>
                     </a:lnB>
@@ -4509,25 +4509,25 @@
                   <a:tcPr anchor="ctr" marL="73152" marR="73152">
                     <a:lnL w="9525" cap="flat" cmpd="sng" algn="ctr">
                       <a:solidFill>
-                        <a:srgbClr val="E3D3EE"/>
+                        <a:srgbClr val="E8D4F7"/>
                       </a:solidFill>
                       <a:prstDash val="solid"/>
                     </a:lnL>
                     <a:lnR w="9525" cap="flat" cmpd="sng" algn="ctr">
                       <a:solidFill>
-                        <a:srgbClr val="E3D3EE"/>
+                        <a:srgbClr val="E8D4F7"/>
                       </a:solidFill>
                       <a:prstDash val="solid"/>
                     </a:lnR>
                     <a:lnT w="9525" cap="flat" cmpd="sng" algn="ctr">
                       <a:solidFill>
-                        <a:srgbClr val="E3D3EE"/>
+                        <a:srgbClr val="E8D4F7"/>
                       </a:solidFill>
                       <a:prstDash val="solid"/>
                     </a:lnT>
                     <a:lnB w="9525" cap="flat" cmpd="sng" algn="ctr">
                       <a:solidFill>
-                        <a:srgbClr val="E3D3EE"/>
+                        <a:srgbClr val="E8D4F7"/>
                       </a:solidFill>
                       <a:prstDash val="solid"/>
                     </a:lnB>
@@ -4555,25 +4555,25 @@
                   <a:tcPr anchor="ctr" marL="73152" marR="73152">
                     <a:lnL w="9525" cap="flat" cmpd="sng" algn="ctr">
                       <a:solidFill>
-                        <a:srgbClr val="E3D3EE"/>
+                        <a:srgbClr val="E8D4F7"/>
                       </a:solidFill>
                       <a:prstDash val="solid"/>
                     </a:lnL>
                     <a:lnR w="9525" cap="flat" cmpd="sng" algn="ctr">
                       <a:solidFill>
-                        <a:srgbClr val="E3D3EE"/>
+                        <a:srgbClr val="E8D4F7"/>
                       </a:solidFill>
                       <a:prstDash val="solid"/>
                     </a:lnR>
                     <a:lnT w="9525" cap="flat" cmpd="sng" algn="ctr">
                       <a:solidFill>
-                        <a:srgbClr val="E3D3EE"/>
+                        <a:srgbClr val="E8D4F7"/>
                       </a:solidFill>
                       <a:prstDash val="solid"/>
                     </a:lnT>
                     <a:lnB w="9525" cap="flat" cmpd="sng" algn="ctr">
                       <a:solidFill>
-                        <a:srgbClr val="E3D3EE"/>
+                        <a:srgbClr val="E8D4F7"/>
                       </a:solidFill>
                       <a:prstDash val="solid"/>
                     </a:lnB>
@@ -4601,25 +4601,25 @@
                   <a:tcPr anchor="ctr" marL="73152" marR="73152">
                     <a:lnL w="9525" cap="flat" cmpd="sng" algn="ctr">
                       <a:solidFill>
-                        <a:srgbClr val="E3D3EE"/>
+                        <a:srgbClr val="E8D4F7"/>
                       </a:solidFill>
                       <a:prstDash val="solid"/>
                     </a:lnL>
                     <a:lnR w="9525" cap="flat" cmpd="sng" algn="ctr">
                       <a:solidFill>
-                        <a:srgbClr val="E3D3EE"/>
+                        <a:srgbClr val="E8D4F7"/>
                       </a:solidFill>
                       <a:prstDash val="solid"/>
                     </a:lnR>
                     <a:lnT w="9525" cap="flat" cmpd="sng" algn="ctr">
                       <a:solidFill>
-                        <a:srgbClr val="E3D3EE"/>
+                        <a:srgbClr val="E8D4F7"/>
                       </a:solidFill>
                       <a:prstDash val="solid"/>
                     </a:lnT>
                     <a:lnB w="9525" cap="flat" cmpd="sng" algn="ctr">
                       <a:solidFill>
-                        <a:srgbClr val="E3D3EE"/>
+                        <a:srgbClr val="E8D4F7"/>
                       </a:solidFill>
                       <a:prstDash val="solid"/>
                     </a:lnB>
@@ -4647,25 +4647,25 @@
                   <a:tcPr anchor="ctr" marL="73152" marR="73152">
                     <a:lnL w="9525" cap="flat" cmpd="sng" algn="ctr">
                       <a:solidFill>
-                        <a:srgbClr val="E3D3EE"/>
+                        <a:srgbClr val="E8D4F7"/>
                       </a:solidFill>
                       <a:prstDash val="solid"/>
                     </a:lnL>
                     <a:lnR w="9525" cap="flat" cmpd="sng" algn="ctr">
                       <a:solidFill>
-                        <a:srgbClr val="E3D3EE"/>
+                        <a:srgbClr val="E8D4F7"/>
                       </a:solidFill>
                       <a:prstDash val="solid"/>
                     </a:lnR>
                     <a:lnT w="9525" cap="flat" cmpd="sng" algn="ctr">
                       <a:solidFill>
-                        <a:srgbClr val="E3D3EE"/>
+                        <a:srgbClr val="E8D4F7"/>
                       </a:solidFill>
                       <a:prstDash val="solid"/>
                     </a:lnT>
                     <a:lnB w="9525" cap="flat" cmpd="sng" algn="ctr">
                       <a:solidFill>
-                        <a:srgbClr val="E3D3EE"/>
+                        <a:srgbClr val="E8D4F7"/>
                       </a:solidFill>
                       <a:prstDash val="solid"/>
                     </a:lnB>
@@ -4695,30 +4695,30 @@
                   <a:tcPr anchor="ctr" marL="73152" marR="73152">
                     <a:lnL w="9525" cap="flat" cmpd="sng" algn="ctr">
                       <a:solidFill>
-                        <a:srgbClr val="E3D3EE"/>
+                        <a:srgbClr val="E8D4F7"/>
                       </a:solidFill>
                       <a:prstDash val="solid"/>
                     </a:lnL>
                     <a:lnR w="9525" cap="flat" cmpd="sng" algn="ctr">
                       <a:solidFill>
-                        <a:srgbClr val="E3D3EE"/>
+                        <a:srgbClr val="E8D4F7"/>
                       </a:solidFill>
                       <a:prstDash val="solid"/>
                     </a:lnR>
                     <a:lnT w="9525" cap="flat" cmpd="sng" algn="ctr">
                       <a:solidFill>
-                        <a:srgbClr val="E3D3EE"/>
+                        <a:srgbClr val="E8D4F7"/>
                       </a:solidFill>
                       <a:prstDash val="solid"/>
                     </a:lnT>
                     <a:lnB w="9525" cap="flat" cmpd="sng" algn="ctr">
                       <a:solidFill>
-                        <a:srgbClr val="E3D3EE"/>
+                        <a:srgbClr val="E8D4F7"/>
                       </a:solidFill>
                       <a:prstDash val="solid"/>
                     </a:lnB>
                     <a:solidFill>
-                      <a:srgbClr val="F5F1F9"/>
+                      <a:srgbClr val="F8F3FC"/>
                     </a:solidFill>
                   </a:tcPr>
                 </a:tc>
@@ -4741,30 +4741,30 @@
                   <a:tcPr anchor="ctr" marL="73152" marR="73152">
                     <a:lnL w="9525" cap="flat" cmpd="sng" algn="ctr">
                       <a:solidFill>
-                        <a:srgbClr val="E3D3EE"/>
+                        <a:srgbClr val="E8D4F7"/>
                       </a:solidFill>
                       <a:prstDash val="solid"/>
                     </a:lnL>
                     <a:lnR w="9525" cap="flat" cmpd="sng" algn="ctr">
                       <a:solidFill>
-                        <a:srgbClr val="E3D3EE"/>
+                        <a:srgbClr val="E8D4F7"/>
                       </a:solidFill>
                       <a:prstDash val="solid"/>
                     </a:lnR>
                     <a:lnT w="9525" cap="flat" cmpd="sng" algn="ctr">
                       <a:solidFill>
-                        <a:srgbClr val="E3D3EE"/>
+                        <a:srgbClr val="E8D4F7"/>
                       </a:solidFill>
                       <a:prstDash val="solid"/>
                     </a:lnT>
                     <a:lnB w="9525" cap="flat" cmpd="sng" algn="ctr">
                       <a:solidFill>
-                        <a:srgbClr val="E3D3EE"/>
+                        <a:srgbClr val="E8D4F7"/>
                       </a:solidFill>
                       <a:prstDash val="solid"/>
                     </a:lnB>
                     <a:solidFill>
-                      <a:srgbClr val="F5F1F9"/>
+                      <a:srgbClr val="F8F3FC"/>
                     </a:solidFill>
                   </a:tcPr>
                 </a:tc>
@@ -4787,30 +4787,30 @@
                   <a:tcPr anchor="ctr" marL="73152" marR="73152">
                     <a:lnL w="9525" cap="flat" cmpd="sng" algn="ctr">
                       <a:solidFill>
-                        <a:srgbClr val="E3D3EE"/>
+                        <a:srgbClr val="E8D4F7"/>
                       </a:solidFill>
                       <a:prstDash val="solid"/>
                     </a:lnL>
                     <a:lnR w="9525" cap="flat" cmpd="sng" algn="ctr">
                       <a:solidFill>
-                        <a:srgbClr val="E3D3EE"/>
+                        <a:srgbClr val="E8D4F7"/>
                       </a:solidFill>
                       <a:prstDash val="solid"/>
                     </a:lnR>
                     <a:lnT w="9525" cap="flat" cmpd="sng" algn="ctr">
                       <a:solidFill>
-                        <a:srgbClr val="E3D3EE"/>
+                        <a:srgbClr val="E8D4F7"/>
                       </a:solidFill>
                       <a:prstDash val="solid"/>
                     </a:lnT>
                     <a:lnB w="9525" cap="flat" cmpd="sng" algn="ctr">
                       <a:solidFill>
-                        <a:srgbClr val="E3D3EE"/>
+                        <a:srgbClr val="E8D4F7"/>
                       </a:solidFill>
                       <a:prstDash val="solid"/>
                     </a:lnB>
                     <a:solidFill>
-                      <a:srgbClr val="F5F1F9"/>
+                      <a:srgbClr val="F8F3FC"/>
                     </a:solidFill>
                   </a:tcPr>
                 </a:tc>
@@ -4833,30 +4833,30 @@
                   <a:tcPr anchor="ctr" marL="73152" marR="73152">
                     <a:lnL w="9525" cap="flat" cmpd="sng" algn="ctr">
                       <a:solidFill>
-                        <a:srgbClr val="E3D3EE"/>
+                        <a:srgbClr val="E8D4F7"/>
                       </a:solidFill>
                       <a:prstDash val="solid"/>
                     </a:lnL>
                     <a:lnR w="9525" cap="flat" cmpd="sng" algn="ctr">
                       <a:solidFill>
-                        <a:srgbClr val="E3D3EE"/>
+                        <a:srgbClr val="E8D4F7"/>
                       </a:solidFill>
                       <a:prstDash val="solid"/>
                     </a:lnR>
                     <a:lnT w="9525" cap="flat" cmpd="sng" algn="ctr">
                       <a:solidFill>
-                        <a:srgbClr val="E3D3EE"/>
+                        <a:srgbClr val="E8D4F7"/>
                       </a:solidFill>
                       <a:prstDash val="solid"/>
                     </a:lnT>
                     <a:lnB w="9525" cap="flat" cmpd="sng" algn="ctr">
                       <a:solidFill>
-                        <a:srgbClr val="E3D3EE"/>
+                        <a:srgbClr val="E8D4F7"/>
                       </a:solidFill>
                       <a:prstDash val="solid"/>
                     </a:lnB>
                     <a:solidFill>
-                      <a:srgbClr val="F5F1F9"/>
+                      <a:srgbClr val="F8F3FC"/>
                     </a:solidFill>
                   </a:tcPr>
                 </a:tc>
@@ -4879,30 +4879,30 @@
                   <a:tcPr anchor="ctr" marL="73152" marR="73152">
                     <a:lnL w="9525" cap="flat" cmpd="sng" algn="ctr">
                       <a:solidFill>
-                        <a:srgbClr val="E3D3EE"/>
+                        <a:srgbClr val="E8D4F7"/>
                       </a:solidFill>
                       <a:prstDash val="solid"/>
                     </a:lnL>
                     <a:lnR w="9525" cap="flat" cmpd="sng" algn="ctr">
                       <a:solidFill>
-                        <a:srgbClr val="E3D3EE"/>
+                        <a:srgbClr val="E8D4F7"/>
                       </a:solidFill>
                       <a:prstDash val="solid"/>
                     </a:lnR>
                     <a:lnT w="9525" cap="flat" cmpd="sng" algn="ctr">
                       <a:solidFill>
-                        <a:srgbClr val="E3D3EE"/>
+                        <a:srgbClr val="E8D4F7"/>
                       </a:solidFill>
                       <a:prstDash val="solid"/>
                     </a:lnT>
                     <a:lnB w="9525" cap="flat" cmpd="sng" algn="ctr">
                       <a:solidFill>
-                        <a:srgbClr val="E3D3EE"/>
+                        <a:srgbClr val="E8D4F7"/>
                       </a:solidFill>
                       <a:prstDash val="solid"/>
                     </a:lnB>
                     <a:solidFill>
-                      <a:srgbClr val="F5F1F9"/>
+                      <a:srgbClr val="F8F3FC"/>
                     </a:solidFill>
                   </a:tcPr>
                 </a:tc>
@@ -4927,25 +4927,25 @@
                   <a:tcPr anchor="ctr" marL="73152" marR="73152">
                     <a:lnL w="9525" cap="flat" cmpd="sng" algn="ctr">
                       <a:solidFill>
-                        <a:srgbClr val="E3D3EE"/>
+                        <a:srgbClr val="E8D4F7"/>
                       </a:solidFill>
                       <a:prstDash val="solid"/>
                     </a:lnL>
                     <a:lnR w="9525" cap="flat" cmpd="sng" algn="ctr">
                       <a:solidFill>
-                        <a:srgbClr val="E3D3EE"/>
+                        <a:srgbClr val="E8D4F7"/>
                       </a:solidFill>
                       <a:prstDash val="solid"/>
                     </a:lnR>
                     <a:lnT w="9525" cap="flat" cmpd="sng" algn="ctr">
                       <a:solidFill>
-                        <a:srgbClr val="E3D3EE"/>
+                        <a:srgbClr val="E8D4F7"/>
                       </a:solidFill>
                       <a:prstDash val="solid"/>
                     </a:lnT>
                     <a:lnB w="9525" cap="flat" cmpd="sng" algn="ctr">
                       <a:solidFill>
-                        <a:srgbClr val="E3D3EE"/>
+                        <a:srgbClr val="E8D4F7"/>
                       </a:solidFill>
                       <a:prstDash val="solid"/>
                     </a:lnB>
@@ -4973,25 +4973,25 @@
                   <a:tcPr anchor="ctr" marL="73152" marR="73152">
                     <a:lnL w="9525" cap="flat" cmpd="sng" algn="ctr">
                       <a:solidFill>
-                        <a:srgbClr val="E3D3EE"/>
+                        <a:srgbClr val="E8D4F7"/>
                       </a:solidFill>
                       <a:prstDash val="solid"/>
                     </a:lnL>
                     <a:lnR w="9525" cap="flat" cmpd="sng" algn="ctr">
                       <a:solidFill>
-                        <a:srgbClr val="E3D3EE"/>
+                        <a:srgbClr val="E8D4F7"/>
                       </a:solidFill>
                       <a:prstDash val="solid"/>
                     </a:lnR>
                     <a:lnT w="9525" cap="flat" cmpd="sng" algn="ctr">
                       <a:solidFill>
-                        <a:srgbClr val="E3D3EE"/>
+                        <a:srgbClr val="E8D4F7"/>
                       </a:solidFill>
                       <a:prstDash val="solid"/>
                     </a:lnT>
                     <a:lnB w="9525" cap="flat" cmpd="sng" algn="ctr">
                       <a:solidFill>
-                        <a:srgbClr val="E3D3EE"/>
+                        <a:srgbClr val="E8D4F7"/>
                       </a:solidFill>
                       <a:prstDash val="solid"/>
                     </a:lnB>
@@ -5019,25 +5019,25 @@
                   <a:tcPr anchor="ctr" marL="73152" marR="73152">
                     <a:lnL w="9525" cap="flat" cmpd="sng" algn="ctr">
                       <a:solidFill>
-                        <a:srgbClr val="E3D3EE"/>
+                        <a:srgbClr val="E8D4F7"/>
                       </a:solidFill>
                       <a:prstDash val="solid"/>
                     </a:lnL>
                     <a:lnR w="9525" cap="flat" cmpd="sng" algn="ctr">
                       <a:solidFill>
-                        <a:srgbClr val="E3D3EE"/>
+                        <a:srgbClr val="E8D4F7"/>
                       </a:solidFill>
                       <a:prstDash val="solid"/>
                     </a:lnR>
                     <a:lnT w="9525" cap="flat" cmpd="sng" algn="ctr">
                       <a:solidFill>
-                        <a:srgbClr val="E3D3EE"/>
+                        <a:srgbClr val="E8D4F7"/>
                       </a:solidFill>
                       <a:prstDash val="solid"/>
                     </a:lnT>
                     <a:lnB w="9525" cap="flat" cmpd="sng" algn="ctr">
                       <a:solidFill>
-                        <a:srgbClr val="E3D3EE"/>
+                        <a:srgbClr val="E8D4F7"/>
                       </a:solidFill>
                       <a:prstDash val="solid"/>
                     </a:lnB>
@@ -5065,25 +5065,25 @@
                   <a:tcPr anchor="ctr" marL="73152" marR="73152">
                     <a:lnL w="9525" cap="flat" cmpd="sng" algn="ctr">
                       <a:solidFill>
-                        <a:srgbClr val="E3D3EE"/>
+                        <a:srgbClr val="E8D4F7"/>
                       </a:solidFill>
                       <a:prstDash val="solid"/>
                     </a:lnL>
                     <a:lnR w="9525" cap="flat" cmpd="sng" algn="ctr">
                       <a:solidFill>
-                        <a:srgbClr val="E3D3EE"/>
+                        <a:srgbClr val="E8D4F7"/>
                       </a:solidFill>
                       <a:prstDash val="solid"/>
                     </a:lnR>
                     <a:lnT w="9525" cap="flat" cmpd="sng" algn="ctr">
                       <a:solidFill>
-                        <a:srgbClr val="E3D3EE"/>
+                        <a:srgbClr val="E8D4F7"/>
                       </a:solidFill>
                       <a:prstDash val="solid"/>
                     </a:lnT>
                     <a:lnB w="9525" cap="flat" cmpd="sng" algn="ctr">
                       <a:solidFill>
-                        <a:srgbClr val="E3D3EE"/>
+                        <a:srgbClr val="E8D4F7"/>
                       </a:solidFill>
                       <a:prstDash val="solid"/>
                     </a:lnB>
@@ -5111,25 +5111,25 @@
                   <a:tcPr anchor="ctr" marL="73152" marR="73152">
                     <a:lnL w="9525" cap="flat" cmpd="sng" algn="ctr">
                       <a:solidFill>
-                        <a:srgbClr val="E3D3EE"/>
+                        <a:srgbClr val="E8D4F7"/>
                       </a:solidFill>
                       <a:prstDash val="solid"/>
                     </a:lnL>
                     <a:lnR w="9525" cap="flat" cmpd="sng" algn="ctr">
                       <a:solidFill>
-                        <a:srgbClr val="E3D3EE"/>
+                        <a:srgbClr val="E8D4F7"/>
                       </a:solidFill>
                       <a:prstDash val="solid"/>
                     </a:lnR>
                     <a:lnT w="9525" cap="flat" cmpd="sng" algn="ctr">
                       <a:solidFill>
-                        <a:srgbClr val="E3D3EE"/>
+                        <a:srgbClr val="E8D4F7"/>
                       </a:solidFill>
                       <a:prstDash val="solid"/>
                     </a:lnT>
                     <a:lnB w="9525" cap="flat" cmpd="sng" algn="ctr">
                       <a:solidFill>
-                        <a:srgbClr val="E3D3EE"/>
+                        <a:srgbClr val="E8D4F7"/>
                       </a:solidFill>
                       <a:prstDash val="solid"/>
                     </a:lnB>
@@ -5159,30 +5159,30 @@
                   <a:tcPr anchor="ctr" marL="73152" marR="73152">
                     <a:lnL w="9525" cap="flat" cmpd="sng" algn="ctr">
                       <a:solidFill>
-                        <a:srgbClr val="E3D3EE"/>
+                        <a:srgbClr val="E8D4F7"/>
                       </a:solidFill>
                       <a:prstDash val="solid"/>
                     </a:lnL>
                     <a:lnR w="9525" cap="flat" cmpd="sng" algn="ctr">
                       <a:solidFill>
-                        <a:srgbClr val="E3D3EE"/>
+                        <a:srgbClr val="E8D4F7"/>
                       </a:solidFill>
                       <a:prstDash val="solid"/>
                     </a:lnR>
                     <a:lnT w="9525" cap="flat" cmpd="sng" algn="ctr">
                       <a:solidFill>
-                        <a:srgbClr val="E3D3EE"/>
+                        <a:srgbClr val="E8D4F7"/>
                       </a:solidFill>
                       <a:prstDash val="solid"/>
                     </a:lnT>
                     <a:lnB w="9525" cap="flat" cmpd="sng" algn="ctr">
                       <a:solidFill>
-                        <a:srgbClr val="E3D3EE"/>
+                        <a:srgbClr val="E8D4F7"/>
                       </a:solidFill>
                       <a:prstDash val="solid"/>
                     </a:lnB>
                     <a:solidFill>
-                      <a:srgbClr val="F5F1F9"/>
+                      <a:srgbClr val="F8F3FC"/>
                     </a:solidFill>
                   </a:tcPr>
                 </a:tc>
@@ -5205,30 +5205,30 @@
                   <a:tcPr anchor="ctr" marL="73152" marR="73152">
                     <a:lnL w="9525" cap="flat" cmpd="sng" algn="ctr">
                       <a:solidFill>
-                        <a:srgbClr val="E3D3EE"/>
+                        <a:srgbClr val="E8D4F7"/>
                       </a:solidFill>
                       <a:prstDash val="solid"/>
                     </a:lnL>
                     <a:lnR w="9525" cap="flat" cmpd="sng" algn="ctr">
                       <a:solidFill>
-                        <a:srgbClr val="E3D3EE"/>
+                        <a:srgbClr val="E8D4F7"/>
                       </a:solidFill>
                       <a:prstDash val="solid"/>
                     </a:lnR>
                     <a:lnT w="9525" cap="flat" cmpd="sng" algn="ctr">
                       <a:solidFill>
-                        <a:srgbClr val="E3D3EE"/>
+                        <a:srgbClr val="E8D4F7"/>
                       </a:solidFill>
                       <a:prstDash val="solid"/>
                     </a:lnT>
                     <a:lnB w="9525" cap="flat" cmpd="sng" algn="ctr">
                       <a:solidFill>
-                        <a:srgbClr val="E3D3EE"/>
+                        <a:srgbClr val="E8D4F7"/>
                       </a:solidFill>
                       <a:prstDash val="solid"/>
                     </a:lnB>
                     <a:solidFill>
-                      <a:srgbClr val="F5F1F9"/>
+                      <a:srgbClr val="F8F3FC"/>
                     </a:solidFill>
                   </a:tcPr>
                 </a:tc>
@@ -5251,30 +5251,30 @@
                   <a:tcPr anchor="ctr" marL="73152" marR="73152">
                     <a:lnL w="9525" cap="flat" cmpd="sng" algn="ctr">
                       <a:solidFill>
-                        <a:srgbClr val="E3D3EE"/>
+                        <a:srgbClr val="E8D4F7"/>
                       </a:solidFill>
                       <a:prstDash val="solid"/>
                     </a:lnL>
                     <a:lnR w="9525" cap="flat" cmpd="sng" algn="ctr">
                       <a:solidFill>
-                        <a:srgbClr val="E3D3EE"/>
+                        <a:srgbClr val="E8D4F7"/>
                       </a:solidFill>
                       <a:prstDash val="solid"/>
                     </a:lnR>
                     <a:lnT w="9525" cap="flat" cmpd="sng" algn="ctr">
                       <a:solidFill>
-                        <a:srgbClr val="E3D3EE"/>
+                        <a:srgbClr val="E8D4F7"/>
                       </a:solidFill>
                       <a:prstDash val="solid"/>
                     </a:lnT>
                     <a:lnB w="9525" cap="flat" cmpd="sng" algn="ctr">
                       <a:solidFill>
-                        <a:srgbClr val="E3D3EE"/>
+                        <a:srgbClr val="E8D4F7"/>
                       </a:solidFill>
                       <a:prstDash val="solid"/>
                     </a:lnB>
                     <a:solidFill>
-                      <a:srgbClr val="F5F1F9"/>
+                      <a:srgbClr val="F8F3FC"/>
                     </a:solidFill>
                   </a:tcPr>
                 </a:tc>
@@ -5297,30 +5297,30 @@
                   <a:tcPr anchor="ctr" marL="73152" marR="73152">
                     <a:lnL w="9525" cap="flat" cmpd="sng" algn="ctr">
                       <a:solidFill>
-                        <a:srgbClr val="E3D3EE"/>
+                        <a:srgbClr val="E8D4F7"/>
                       </a:solidFill>
                       <a:prstDash val="solid"/>
                     </a:lnL>
                     <a:lnR w="9525" cap="flat" cmpd="sng" algn="ctr">
                       <a:solidFill>
-                        <a:srgbClr val="E3D3EE"/>
+                        <a:srgbClr val="E8D4F7"/>
                       </a:solidFill>
                       <a:prstDash val="solid"/>
                     </a:lnR>
                     <a:lnT w="9525" cap="flat" cmpd="sng" algn="ctr">
                       <a:solidFill>
-                        <a:srgbClr val="E3D3EE"/>
+                        <a:srgbClr val="E8D4F7"/>
                       </a:solidFill>
                       <a:prstDash val="solid"/>
                     </a:lnT>
                     <a:lnB w="9525" cap="flat" cmpd="sng" algn="ctr">
                       <a:solidFill>
-                        <a:srgbClr val="E3D3EE"/>
+                        <a:srgbClr val="E8D4F7"/>
                       </a:solidFill>
                       <a:prstDash val="solid"/>
                     </a:lnB>
                     <a:solidFill>
-                      <a:srgbClr val="F5F1F9"/>
+                      <a:srgbClr val="F8F3FC"/>
                     </a:solidFill>
                   </a:tcPr>
                 </a:tc>
@@ -5343,30 +5343,30 @@
                   <a:tcPr anchor="ctr" marL="73152" marR="73152">
                     <a:lnL w="9525" cap="flat" cmpd="sng" algn="ctr">
                       <a:solidFill>
-                        <a:srgbClr val="E3D3EE"/>
+                        <a:srgbClr val="E8D4F7"/>
                       </a:solidFill>
                       <a:prstDash val="solid"/>
                     </a:lnL>
                     <a:lnR w="9525" cap="flat" cmpd="sng" algn="ctr">
                       <a:solidFill>
-                        <a:srgbClr val="E3D3EE"/>
+                        <a:srgbClr val="E8D4F7"/>
                       </a:solidFill>
                       <a:prstDash val="solid"/>
                     </a:lnR>
                     <a:lnT w="9525" cap="flat" cmpd="sng" algn="ctr">
                       <a:solidFill>
-                        <a:srgbClr val="E3D3EE"/>
+                        <a:srgbClr val="E8D4F7"/>
                       </a:solidFill>
                       <a:prstDash val="solid"/>
                     </a:lnT>
                     <a:lnB w="9525" cap="flat" cmpd="sng" algn="ctr">
                       <a:solidFill>
-                        <a:srgbClr val="E3D3EE"/>
+                        <a:srgbClr val="E8D4F7"/>
                       </a:solidFill>
                       <a:prstDash val="solid"/>
                     </a:lnB>
                     <a:solidFill>
-                      <a:srgbClr val="F5F1F9"/>
+                      <a:srgbClr val="F8F3FC"/>
                     </a:solidFill>
                   </a:tcPr>
                 </a:tc>
@@ -5391,25 +5391,25 @@
                   <a:tcPr anchor="ctr" marL="73152" marR="73152">
                     <a:lnL w="9525" cap="flat" cmpd="sng" algn="ctr">
                       <a:solidFill>
-                        <a:srgbClr val="E3D3EE"/>
+                        <a:srgbClr val="E8D4F7"/>
                       </a:solidFill>
                       <a:prstDash val="solid"/>
                     </a:lnL>
                     <a:lnR w="9525" cap="flat" cmpd="sng" algn="ctr">
                       <a:solidFill>
-                        <a:srgbClr val="E3D3EE"/>
+                        <a:srgbClr val="E8D4F7"/>
                       </a:solidFill>
                       <a:prstDash val="solid"/>
                     </a:lnR>
                     <a:lnT w="9525" cap="flat" cmpd="sng" algn="ctr">
                       <a:solidFill>
-                        <a:srgbClr val="E3D3EE"/>
+                        <a:srgbClr val="E8D4F7"/>
                       </a:solidFill>
                       <a:prstDash val="solid"/>
                     </a:lnT>
                     <a:lnB w="9525" cap="flat" cmpd="sng" algn="ctr">
                       <a:solidFill>
-                        <a:srgbClr val="E3D3EE"/>
+                        <a:srgbClr val="E8D4F7"/>
                       </a:solidFill>
                       <a:prstDash val="solid"/>
                     </a:lnB>
@@ -5437,25 +5437,25 @@
                   <a:tcPr anchor="ctr" marL="73152" marR="73152">
                     <a:lnL w="9525" cap="flat" cmpd="sng" algn="ctr">
                       <a:solidFill>
-                        <a:srgbClr val="E3D3EE"/>
+                        <a:srgbClr val="E8D4F7"/>
                       </a:solidFill>
                       <a:prstDash val="solid"/>
                     </a:lnL>
                     <a:lnR w="9525" cap="flat" cmpd="sng" algn="ctr">
                       <a:solidFill>
-                        <a:srgbClr val="E3D3EE"/>
+                        <a:srgbClr val="E8D4F7"/>
                       </a:solidFill>
                       <a:prstDash val="solid"/>
                     </a:lnR>
                     <a:lnT w="9525" cap="flat" cmpd="sng" algn="ctr">
                       <a:solidFill>
-                        <a:srgbClr val="E3D3EE"/>
+                        <a:srgbClr val="E8D4F7"/>
                       </a:solidFill>
                       <a:prstDash val="solid"/>
                     </a:lnT>
                     <a:lnB w="9525" cap="flat" cmpd="sng" algn="ctr">
                       <a:solidFill>
-                        <a:srgbClr val="E3D3EE"/>
+                        <a:srgbClr val="E8D4F7"/>
                       </a:solidFill>
                       <a:prstDash val="solid"/>
                     </a:lnB>
@@ -5483,25 +5483,25 @@
                   <a:tcPr anchor="ctr" marL="73152" marR="73152">
                     <a:lnL w="9525" cap="flat" cmpd="sng" algn="ctr">
                       <a:solidFill>
-                        <a:srgbClr val="E3D3EE"/>
+                        <a:srgbClr val="E8D4F7"/>
                       </a:solidFill>
                       <a:prstDash val="solid"/>
                     </a:lnL>
                     <a:lnR w="9525" cap="flat" cmpd="sng" algn="ctr">
                       <a:solidFill>
-                        <a:srgbClr val="E3D3EE"/>
+                        <a:srgbClr val="E8D4F7"/>
                       </a:solidFill>
                       <a:prstDash val="solid"/>
                     </a:lnR>
                     <a:lnT w="9525" cap="flat" cmpd="sng" algn="ctr">
                       <a:solidFill>
-                        <a:srgbClr val="E3D3EE"/>
+                        <a:srgbClr val="E8D4F7"/>
                       </a:solidFill>
                       <a:prstDash val="solid"/>
                     </a:lnT>
                     <a:lnB w="9525" cap="flat" cmpd="sng" algn="ctr">
                       <a:solidFill>
-                        <a:srgbClr val="E3D3EE"/>
+                        <a:srgbClr val="E8D4F7"/>
                       </a:solidFill>
                       <a:prstDash val="solid"/>
                     </a:lnB>
@@ -5529,25 +5529,25 @@
                   <a:tcPr anchor="ctr" marL="73152" marR="73152">
                     <a:lnL w="9525" cap="flat" cmpd="sng" algn="ctr">
                       <a:solidFill>
-                        <a:srgbClr val="E3D3EE"/>
+                        <a:srgbClr val="E8D4F7"/>
                       </a:solidFill>
                       <a:prstDash val="solid"/>
                     </a:lnL>
                     <a:lnR w="9525" cap="flat" cmpd="sng" algn="ctr">
                       <a:solidFill>
-                        <a:srgbClr val="E3D3EE"/>
+                        <a:srgbClr val="E8D4F7"/>
                       </a:solidFill>
                       <a:prstDash val="solid"/>
                     </a:lnR>
                     <a:lnT w="9525" cap="flat" cmpd="sng" algn="ctr">
                       <a:solidFill>
-                        <a:srgbClr val="E3D3EE"/>
+                        <a:srgbClr val="E8D4F7"/>
                       </a:solidFill>
                       <a:prstDash val="solid"/>
                     </a:lnT>
                     <a:lnB w="9525" cap="flat" cmpd="sng" algn="ctr">
                       <a:solidFill>
-                        <a:srgbClr val="E3D3EE"/>
+                        <a:srgbClr val="E8D4F7"/>
                       </a:solidFill>
                       <a:prstDash val="solid"/>
                     </a:lnB>
@@ -5575,25 +5575,25 @@
                   <a:tcPr anchor="ctr" marL="73152" marR="73152">
                     <a:lnL w="9525" cap="flat" cmpd="sng" algn="ctr">
                       <a:solidFill>
-                        <a:srgbClr val="E3D3EE"/>
+                        <a:srgbClr val="E8D4F7"/>
                       </a:solidFill>
                       <a:prstDash val="solid"/>
                     </a:lnL>
                     <a:lnR w="9525" cap="flat" cmpd="sng" algn="ctr">
                       <a:solidFill>
-                        <a:srgbClr val="E3D3EE"/>
+                        <a:srgbClr val="E8D4F7"/>
                       </a:solidFill>
                       <a:prstDash val="solid"/>
                     </a:lnR>
                     <a:lnT w="9525" cap="flat" cmpd="sng" algn="ctr">
                       <a:solidFill>
-                        <a:srgbClr val="E3D3EE"/>
+                        <a:srgbClr val="E8D4F7"/>
                       </a:solidFill>
                       <a:prstDash val="solid"/>
                     </a:lnT>
                     <a:lnB w="9525" cap="flat" cmpd="sng" algn="ctr">
                       <a:solidFill>
-                        <a:srgbClr val="E3D3EE"/>
+                        <a:srgbClr val="E8D4F7"/>
                       </a:solidFill>
                       <a:prstDash val="solid"/>
                     </a:lnB>
@@ -5623,30 +5623,30 @@
                   <a:tcPr anchor="ctr" marL="73152" marR="73152">
                     <a:lnL w="9525" cap="flat" cmpd="sng" algn="ctr">
                       <a:solidFill>
-                        <a:srgbClr val="E3D3EE"/>
+                        <a:srgbClr val="E8D4F7"/>
                       </a:solidFill>
                       <a:prstDash val="solid"/>
                     </a:lnL>
                     <a:lnR w="9525" cap="flat" cmpd="sng" algn="ctr">
                       <a:solidFill>
-                        <a:srgbClr val="E3D3EE"/>
+                        <a:srgbClr val="E8D4F7"/>
                       </a:solidFill>
                       <a:prstDash val="solid"/>
                     </a:lnR>
                     <a:lnT w="9525" cap="flat" cmpd="sng" algn="ctr">
                       <a:solidFill>
-                        <a:srgbClr val="E3D3EE"/>
+                        <a:srgbClr val="E8D4F7"/>
                       </a:solidFill>
                       <a:prstDash val="solid"/>
                     </a:lnT>
                     <a:lnB w="9525" cap="flat" cmpd="sng" algn="ctr">
                       <a:solidFill>
-                        <a:srgbClr val="E3D3EE"/>
+                        <a:srgbClr val="E8D4F7"/>
                       </a:solidFill>
                       <a:prstDash val="solid"/>
                     </a:lnB>
                     <a:solidFill>
-                      <a:srgbClr val="F5F1F9"/>
+                      <a:srgbClr val="F8F3FC"/>
                     </a:solidFill>
                   </a:tcPr>
                 </a:tc>
@@ -5669,30 +5669,30 @@
                   <a:tcPr anchor="ctr" marL="73152" marR="73152">
                     <a:lnL w="9525" cap="flat" cmpd="sng" algn="ctr">
                       <a:solidFill>
-                        <a:srgbClr val="E3D3EE"/>
+                        <a:srgbClr val="E8D4F7"/>
                       </a:solidFill>
                       <a:prstDash val="solid"/>
                     </a:lnL>
                     <a:lnR w="9525" cap="flat" cmpd="sng" algn="ctr">
                       <a:solidFill>
-                        <a:srgbClr val="E3D3EE"/>
+                        <a:srgbClr val="E8D4F7"/>
                       </a:solidFill>
                       <a:prstDash val="solid"/>
                     </a:lnR>
                     <a:lnT w="9525" cap="flat" cmpd="sng" algn="ctr">
                       <a:solidFill>
-                        <a:srgbClr val="E3D3EE"/>
+                        <a:srgbClr val="E8D4F7"/>
                       </a:solidFill>
                       <a:prstDash val="solid"/>
                     </a:lnT>
                     <a:lnB w="9525" cap="flat" cmpd="sng" algn="ctr">
                       <a:solidFill>
-                        <a:srgbClr val="E3D3EE"/>
+                        <a:srgbClr val="E8D4F7"/>
                       </a:solidFill>
                       <a:prstDash val="solid"/>
                     </a:lnB>
                     <a:solidFill>
-                      <a:srgbClr val="F5F1F9"/>
+                      <a:srgbClr val="F8F3FC"/>
                     </a:solidFill>
                   </a:tcPr>
                 </a:tc>
@@ -5715,30 +5715,30 @@
                   <a:tcPr anchor="ctr" marL="73152" marR="73152">
                     <a:lnL w="9525" cap="flat" cmpd="sng" algn="ctr">
                       <a:solidFill>
-                        <a:srgbClr val="E3D3EE"/>
+                        <a:srgbClr val="E8D4F7"/>
                       </a:solidFill>
                       <a:prstDash val="solid"/>
                     </a:lnL>
                     <a:lnR w="9525" cap="flat" cmpd="sng" algn="ctr">
                       <a:solidFill>
-                        <a:srgbClr val="E3D3EE"/>
+                        <a:srgbClr val="E8D4F7"/>
                       </a:solidFill>
                       <a:prstDash val="solid"/>
                     </a:lnR>
                     <a:lnT w="9525" cap="flat" cmpd="sng" algn="ctr">
                       <a:solidFill>
-                        <a:srgbClr val="E3D3EE"/>
+                        <a:srgbClr val="E8D4F7"/>
                       </a:solidFill>
                       <a:prstDash val="solid"/>
                     </a:lnT>
                     <a:lnB w="9525" cap="flat" cmpd="sng" algn="ctr">
                       <a:solidFill>
-                        <a:srgbClr val="E3D3EE"/>
+                        <a:srgbClr val="E8D4F7"/>
                       </a:solidFill>
                       <a:prstDash val="solid"/>
                     </a:lnB>
                     <a:solidFill>
-                      <a:srgbClr val="F5F1F9"/>
+                      <a:srgbClr val="F8F3FC"/>
                     </a:solidFill>
                   </a:tcPr>
                 </a:tc>
@@ -5761,30 +5761,30 @@
                   <a:tcPr anchor="ctr" marL="73152" marR="73152">
                     <a:lnL w="9525" cap="flat" cmpd="sng" algn="ctr">
                       <a:solidFill>
-                        <a:srgbClr val="E3D3EE"/>
+                        <a:srgbClr val="E8D4F7"/>
                       </a:solidFill>
                       <a:prstDash val="solid"/>
                     </a:lnL>
                     <a:lnR w="9525" cap="flat" cmpd="sng" algn="ctr">
                       <a:solidFill>
-                        <a:srgbClr val="E3D3EE"/>
+                        <a:srgbClr val="E8D4F7"/>
                       </a:solidFill>
                       <a:prstDash val="solid"/>
                     </a:lnR>
                     <a:lnT w="9525" cap="flat" cmpd="sng" algn="ctr">
                       <a:solidFill>
-                        <a:srgbClr val="E3D3EE"/>
+                        <a:srgbClr val="E8D4F7"/>
                       </a:solidFill>
                       <a:prstDash val="solid"/>
                     </a:lnT>
                     <a:lnB w="9525" cap="flat" cmpd="sng" algn="ctr">
                       <a:solidFill>
-                        <a:srgbClr val="E3D3EE"/>
+                        <a:srgbClr val="E8D4F7"/>
                       </a:solidFill>
                       <a:prstDash val="solid"/>
                     </a:lnB>
                     <a:solidFill>
-                      <a:srgbClr val="F5F1F9"/>
+                      <a:srgbClr val="F8F3FC"/>
                     </a:solidFill>
                   </a:tcPr>
                 </a:tc>
@@ -5807,30 +5807,30 @@
                   <a:tcPr anchor="ctr" marL="73152" marR="73152">
                     <a:lnL w="9525" cap="flat" cmpd="sng" algn="ctr">
                       <a:solidFill>
-                        <a:srgbClr val="E3D3EE"/>
+                        <a:srgbClr val="E8D4F7"/>
                       </a:solidFill>
                       <a:prstDash val="solid"/>
                     </a:lnL>
                     <a:lnR w="9525" cap="flat" cmpd="sng" algn="ctr">
                       <a:solidFill>
-                        <a:srgbClr val="E3D3EE"/>
+                        <a:srgbClr val="E8D4F7"/>
                       </a:solidFill>
                       <a:prstDash val="solid"/>
                     </a:lnR>
                     <a:lnT w="9525" cap="flat" cmpd="sng" algn="ctr">
                       <a:solidFill>
-                        <a:srgbClr val="E3D3EE"/>
+                        <a:srgbClr val="E8D4F7"/>
                       </a:solidFill>
                       <a:prstDash val="solid"/>
                     </a:lnT>
                     <a:lnB w="9525" cap="flat" cmpd="sng" algn="ctr">
                       <a:solidFill>
-                        <a:srgbClr val="E3D3EE"/>
+                        <a:srgbClr val="E8D4F7"/>
                       </a:solidFill>
                       <a:prstDash val="solid"/>
                     </a:lnB>
                     <a:solidFill>
-                      <a:srgbClr val="F5F1F9"/>
+                      <a:srgbClr val="F8F3FC"/>
                     </a:solidFill>
                   </a:tcPr>
                 </a:tc>
@@ -5880,7 +5880,7 @@
             <a:avLst/>
           </a:prstGeom>
           <a:solidFill>
-            <a:srgbClr val="E3D3EE"/>
+            <a:srgbClr val="E8D4F7"/>
           </a:solidFill>
           <a:ln>
             <a:noFill/>
@@ -5909,7 +5909,7 @@
             <a:avLst/>
           </a:prstGeom>
           <a:solidFill>
-            <a:srgbClr val="8C56B3"/>
+            <a:srgbClr val="9651C8"/>
           </a:solidFill>
           <a:ln>
             <a:noFill/>
@@ -5953,7 +5953,7 @@
             <a:r>
               <a:rPr sz="3000" b="1" i="0">
                 <a:solidFill>
-                  <a:srgbClr val="573371"/>
+                  <a:srgbClr val="4E226D"/>
                 </a:solidFill>
               </a:rPr>
               <a:t>보장 항목 체크</a:t>
@@ -6005,30 +6005,30 @@
                   <a:tcPr anchor="ctr" marL="73152" marR="73152">
                     <a:lnL w="9525" cap="flat" cmpd="sng" algn="ctr">
                       <a:solidFill>
-                        <a:srgbClr val="8C56B3"/>
+                        <a:srgbClr val="9651C8"/>
                       </a:solidFill>
                       <a:prstDash val="solid"/>
                     </a:lnL>
                     <a:lnR w="9525" cap="flat" cmpd="sng" algn="ctr">
                       <a:solidFill>
-                        <a:srgbClr val="8C56B3"/>
+                        <a:srgbClr val="9651C8"/>
                       </a:solidFill>
                       <a:prstDash val="solid"/>
                     </a:lnR>
                     <a:lnT w="9525" cap="flat" cmpd="sng" algn="ctr">
                       <a:solidFill>
-                        <a:srgbClr val="8C56B3"/>
+                        <a:srgbClr val="9651C8"/>
                       </a:solidFill>
                       <a:prstDash val="solid"/>
                     </a:lnT>
                     <a:lnB w="9525" cap="flat" cmpd="sng" algn="ctr">
                       <a:solidFill>
-                        <a:srgbClr val="8C56B3"/>
+                        <a:srgbClr val="9651C8"/>
                       </a:solidFill>
                       <a:prstDash val="solid"/>
                     </a:lnB>
                     <a:solidFill>
-                      <a:srgbClr val="8C56B3"/>
+                      <a:srgbClr val="9651C8"/>
                     </a:solidFill>
                   </a:tcPr>
                 </a:tc>
@@ -6051,30 +6051,30 @@
                   <a:tcPr anchor="ctr" marL="73152" marR="73152">
                     <a:lnL w="9525" cap="flat" cmpd="sng" algn="ctr">
                       <a:solidFill>
-                        <a:srgbClr val="8C56B3"/>
+                        <a:srgbClr val="9651C8"/>
                       </a:solidFill>
                       <a:prstDash val="solid"/>
                     </a:lnL>
                     <a:lnR w="9525" cap="flat" cmpd="sng" algn="ctr">
                       <a:solidFill>
-                        <a:srgbClr val="8C56B3"/>
+                        <a:srgbClr val="9651C8"/>
                       </a:solidFill>
                       <a:prstDash val="solid"/>
                     </a:lnR>
                     <a:lnT w="9525" cap="flat" cmpd="sng" algn="ctr">
                       <a:solidFill>
-                        <a:srgbClr val="8C56B3"/>
+                        <a:srgbClr val="9651C8"/>
                       </a:solidFill>
                       <a:prstDash val="solid"/>
                     </a:lnT>
                     <a:lnB w="9525" cap="flat" cmpd="sng" algn="ctr">
                       <a:solidFill>
-                        <a:srgbClr val="8C56B3"/>
+                        <a:srgbClr val="9651C8"/>
                       </a:solidFill>
                       <a:prstDash val="solid"/>
                     </a:lnB>
                     <a:solidFill>
-                      <a:srgbClr val="8C56B3"/>
+                      <a:srgbClr val="9651C8"/>
                     </a:solidFill>
                   </a:tcPr>
                 </a:tc>
@@ -6097,30 +6097,30 @@
                   <a:tcPr anchor="ctr" marL="73152" marR="73152">
                     <a:lnL w="9525" cap="flat" cmpd="sng" algn="ctr">
                       <a:solidFill>
-                        <a:srgbClr val="8C56B3"/>
+                        <a:srgbClr val="9651C8"/>
                       </a:solidFill>
                       <a:prstDash val="solid"/>
                     </a:lnL>
                     <a:lnR w="9525" cap="flat" cmpd="sng" algn="ctr">
                       <a:solidFill>
-                        <a:srgbClr val="8C56B3"/>
+                        <a:srgbClr val="9651C8"/>
                       </a:solidFill>
                       <a:prstDash val="solid"/>
                     </a:lnR>
                     <a:lnT w="9525" cap="flat" cmpd="sng" algn="ctr">
                       <a:solidFill>
-                        <a:srgbClr val="8C56B3"/>
+                        <a:srgbClr val="9651C8"/>
                       </a:solidFill>
                       <a:prstDash val="solid"/>
                     </a:lnT>
                     <a:lnB w="9525" cap="flat" cmpd="sng" algn="ctr">
                       <a:solidFill>
-                        <a:srgbClr val="8C56B3"/>
+                        <a:srgbClr val="9651C8"/>
                       </a:solidFill>
                       <a:prstDash val="solid"/>
                     </a:lnB>
                     <a:solidFill>
-                      <a:srgbClr val="8C56B3"/>
+                      <a:srgbClr val="9651C8"/>
                     </a:solidFill>
                   </a:tcPr>
                 </a:tc>
@@ -6143,30 +6143,30 @@
                   <a:tcPr anchor="ctr" marL="73152" marR="73152">
                     <a:lnL w="9525" cap="flat" cmpd="sng" algn="ctr">
                       <a:solidFill>
-                        <a:srgbClr val="8C56B3"/>
+                        <a:srgbClr val="9651C8"/>
                       </a:solidFill>
                       <a:prstDash val="solid"/>
                     </a:lnL>
                     <a:lnR w="9525" cap="flat" cmpd="sng" algn="ctr">
                       <a:solidFill>
-                        <a:srgbClr val="8C56B3"/>
+                        <a:srgbClr val="9651C8"/>
                       </a:solidFill>
                       <a:prstDash val="solid"/>
                     </a:lnR>
                     <a:lnT w="9525" cap="flat" cmpd="sng" algn="ctr">
                       <a:solidFill>
-                        <a:srgbClr val="8C56B3"/>
+                        <a:srgbClr val="9651C8"/>
                       </a:solidFill>
                       <a:prstDash val="solid"/>
                     </a:lnT>
                     <a:lnB w="9525" cap="flat" cmpd="sng" algn="ctr">
                       <a:solidFill>
-                        <a:srgbClr val="8C56B3"/>
+                        <a:srgbClr val="9651C8"/>
                       </a:solidFill>
                       <a:prstDash val="solid"/>
                     </a:lnB>
                     <a:solidFill>
-                      <a:srgbClr val="8C56B3"/>
+                      <a:srgbClr val="9651C8"/>
                     </a:solidFill>
                   </a:tcPr>
                 </a:tc>
@@ -6181,7 +6181,7 @@
                       <a:r>
                         <a:rPr sz="1400" b="1">
                           <a:solidFill>
-                            <a:srgbClr val="573371"/>
+                            <a:srgbClr val="4E226D"/>
                           </a:solidFill>
                         </a:rPr>
                         <a:t>사망·재해</a:t>
@@ -6191,30 +6191,30 @@
                   <a:tcPr anchor="ctr" marL="73152" marR="73152">
                     <a:lnL w="9525" cap="flat" cmpd="sng" algn="ctr">
                       <a:solidFill>
-                        <a:srgbClr val="E3D3EE"/>
+                        <a:srgbClr val="E8D4F7"/>
                       </a:solidFill>
                       <a:prstDash val="solid"/>
                     </a:lnL>
                     <a:lnR w="9525" cap="flat" cmpd="sng" algn="ctr">
                       <a:solidFill>
-                        <a:srgbClr val="E3D3EE"/>
+                        <a:srgbClr val="E8D4F7"/>
                       </a:solidFill>
                       <a:prstDash val="solid"/>
                     </a:lnR>
                     <a:lnT w="9525" cap="flat" cmpd="sng" algn="ctr">
                       <a:solidFill>
-                        <a:srgbClr val="E3D3EE"/>
+                        <a:srgbClr val="E8D4F7"/>
                       </a:solidFill>
                       <a:prstDash val="solid"/>
                     </a:lnT>
                     <a:lnB w="9525" cap="flat" cmpd="sng" algn="ctr">
                       <a:solidFill>
-                        <a:srgbClr val="E3D3EE"/>
+                        <a:srgbClr val="E8D4F7"/>
                       </a:solidFill>
                       <a:prstDash val="solid"/>
                     </a:lnB>
                     <a:solidFill>
-                      <a:srgbClr val="E3D3EE"/>
+                      <a:srgbClr val="E8D4F7"/>
                     </a:solidFill>
                   </a:tcPr>
                 </a:tc>
@@ -6237,25 +6237,25 @@
                   <a:tcPr anchor="ctr" marL="73152" marR="73152">
                     <a:lnL w="9525" cap="flat" cmpd="sng" algn="ctr">
                       <a:solidFill>
-                        <a:srgbClr val="E3D3EE"/>
+                        <a:srgbClr val="E8D4F7"/>
                       </a:solidFill>
                       <a:prstDash val="solid"/>
                     </a:lnL>
                     <a:lnR w="9525" cap="flat" cmpd="sng" algn="ctr">
                       <a:solidFill>
-                        <a:srgbClr val="E3D3EE"/>
+                        <a:srgbClr val="E8D4F7"/>
                       </a:solidFill>
                       <a:prstDash val="solid"/>
                     </a:lnR>
                     <a:lnT w="9525" cap="flat" cmpd="sng" algn="ctr">
                       <a:solidFill>
-                        <a:srgbClr val="E3D3EE"/>
+                        <a:srgbClr val="E8D4F7"/>
                       </a:solidFill>
                       <a:prstDash val="solid"/>
                     </a:lnT>
                     <a:lnB w="9525" cap="flat" cmpd="sng" algn="ctr">
                       <a:solidFill>
-                        <a:srgbClr val="E3D3EE"/>
+                        <a:srgbClr val="E8D4F7"/>
                       </a:solidFill>
                       <a:prstDash val="solid"/>
                     </a:lnB>
@@ -6283,25 +6283,25 @@
                   <a:tcPr anchor="ctr" marL="73152" marR="73152">
                     <a:lnL w="9525" cap="flat" cmpd="sng" algn="ctr">
                       <a:solidFill>
-                        <a:srgbClr val="E3D3EE"/>
+                        <a:srgbClr val="E8D4F7"/>
                       </a:solidFill>
                       <a:prstDash val="solid"/>
                     </a:lnL>
                     <a:lnR w="9525" cap="flat" cmpd="sng" algn="ctr">
                       <a:solidFill>
-                        <a:srgbClr val="E3D3EE"/>
+                        <a:srgbClr val="E8D4F7"/>
                       </a:solidFill>
                       <a:prstDash val="solid"/>
                     </a:lnR>
                     <a:lnT w="9525" cap="flat" cmpd="sng" algn="ctr">
                       <a:solidFill>
-                        <a:srgbClr val="E3D3EE"/>
+                        <a:srgbClr val="E8D4F7"/>
                       </a:solidFill>
                       <a:prstDash val="solid"/>
                     </a:lnT>
                     <a:lnB w="9525" cap="flat" cmpd="sng" algn="ctr">
                       <a:solidFill>
-                        <a:srgbClr val="E3D3EE"/>
+                        <a:srgbClr val="E8D4F7"/>
                       </a:solidFill>
                       <a:prstDash val="solid"/>
                     </a:lnB>
@@ -6329,25 +6329,25 @@
                   <a:tcPr anchor="ctr" marL="73152" marR="73152">
                     <a:lnL w="9525" cap="flat" cmpd="sng" algn="ctr">
                       <a:solidFill>
-                        <a:srgbClr val="E3D3EE"/>
+                        <a:srgbClr val="E8D4F7"/>
                       </a:solidFill>
                       <a:prstDash val="solid"/>
                     </a:lnL>
                     <a:lnR w="9525" cap="flat" cmpd="sng" algn="ctr">
                       <a:solidFill>
-                        <a:srgbClr val="E3D3EE"/>
+                        <a:srgbClr val="E8D4F7"/>
                       </a:solidFill>
                       <a:prstDash val="solid"/>
                     </a:lnR>
                     <a:lnT w="9525" cap="flat" cmpd="sng" algn="ctr">
                       <a:solidFill>
-                        <a:srgbClr val="E3D3EE"/>
+                        <a:srgbClr val="E8D4F7"/>
                       </a:solidFill>
                       <a:prstDash val="solid"/>
                     </a:lnT>
                     <a:lnB w="9525" cap="flat" cmpd="sng" algn="ctr">
                       <a:solidFill>
-                        <a:srgbClr val="E3D3EE"/>
+                        <a:srgbClr val="E8D4F7"/>
                       </a:solidFill>
                       <a:prstDash val="solid"/>
                     </a:lnB>
@@ -6367,7 +6367,7 @@
                       <a:r>
                         <a:rPr sz="1400" b="1">
                           <a:solidFill>
-                            <a:srgbClr val="573371"/>
+                            <a:srgbClr val="4E226D"/>
                           </a:solidFill>
                         </a:rPr>
                         <a:t>질병 진단</a:t>
@@ -6377,30 +6377,30 @@
                   <a:tcPr anchor="ctr" marL="73152" marR="73152">
                     <a:lnL w="9525" cap="flat" cmpd="sng" algn="ctr">
                       <a:solidFill>
-                        <a:srgbClr val="E3D3EE"/>
+                        <a:srgbClr val="E8D4F7"/>
                       </a:solidFill>
                       <a:prstDash val="solid"/>
                     </a:lnL>
                     <a:lnR w="9525" cap="flat" cmpd="sng" algn="ctr">
                       <a:solidFill>
-                        <a:srgbClr val="E3D3EE"/>
+                        <a:srgbClr val="E8D4F7"/>
                       </a:solidFill>
                       <a:prstDash val="solid"/>
                     </a:lnR>
                     <a:lnT w="9525" cap="flat" cmpd="sng" algn="ctr">
                       <a:solidFill>
-                        <a:srgbClr val="E3D3EE"/>
+                        <a:srgbClr val="E8D4F7"/>
                       </a:solidFill>
                       <a:prstDash val="solid"/>
                     </a:lnT>
                     <a:lnB w="9525" cap="flat" cmpd="sng" algn="ctr">
                       <a:solidFill>
-                        <a:srgbClr val="E3D3EE"/>
+                        <a:srgbClr val="E8D4F7"/>
                       </a:solidFill>
                       <a:prstDash val="solid"/>
                     </a:lnB>
                     <a:solidFill>
-                      <a:srgbClr val="E3D3EE"/>
+                      <a:srgbClr val="E8D4F7"/>
                     </a:solidFill>
                   </a:tcPr>
                 </a:tc>
@@ -6423,30 +6423,30 @@
                   <a:tcPr anchor="ctr" marL="73152" marR="73152">
                     <a:lnL w="9525" cap="flat" cmpd="sng" algn="ctr">
                       <a:solidFill>
-                        <a:srgbClr val="E3D3EE"/>
+                        <a:srgbClr val="E8D4F7"/>
                       </a:solidFill>
                       <a:prstDash val="solid"/>
                     </a:lnL>
                     <a:lnR w="9525" cap="flat" cmpd="sng" algn="ctr">
                       <a:solidFill>
-                        <a:srgbClr val="E3D3EE"/>
+                        <a:srgbClr val="E8D4F7"/>
                       </a:solidFill>
                       <a:prstDash val="solid"/>
                     </a:lnR>
                     <a:lnT w="9525" cap="flat" cmpd="sng" algn="ctr">
                       <a:solidFill>
-                        <a:srgbClr val="E3D3EE"/>
+                        <a:srgbClr val="E8D4F7"/>
                       </a:solidFill>
                       <a:prstDash val="solid"/>
                     </a:lnT>
                     <a:lnB w="9525" cap="flat" cmpd="sng" algn="ctr">
                       <a:solidFill>
-                        <a:srgbClr val="E3D3EE"/>
+                        <a:srgbClr val="E8D4F7"/>
                       </a:solidFill>
                       <a:prstDash val="solid"/>
                     </a:lnB>
                     <a:solidFill>
-                      <a:srgbClr val="F5F1F9"/>
+                      <a:srgbClr val="F8F3FC"/>
                     </a:solidFill>
                   </a:tcPr>
                 </a:tc>
@@ -6469,30 +6469,30 @@
                   <a:tcPr anchor="ctr" marL="73152" marR="73152">
                     <a:lnL w="9525" cap="flat" cmpd="sng" algn="ctr">
                       <a:solidFill>
-                        <a:srgbClr val="E3D3EE"/>
+                        <a:srgbClr val="E8D4F7"/>
                       </a:solidFill>
                       <a:prstDash val="solid"/>
                     </a:lnL>
                     <a:lnR w="9525" cap="flat" cmpd="sng" algn="ctr">
                       <a:solidFill>
-                        <a:srgbClr val="E3D3EE"/>
+                        <a:srgbClr val="E8D4F7"/>
                       </a:solidFill>
                       <a:prstDash val="solid"/>
                     </a:lnR>
                     <a:lnT w="9525" cap="flat" cmpd="sng" algn="ctr">
                       <a:solidFill>
-                        <a:srgbClr val="E3D3EE"/>
+                        <a:srgbClr val="E8D4F7"/>
                       </a:solidFill>
                       <a:prstDash val="solid"/>
                     </a:lnT>
                     <a:lnB w="9525" cap="flat" cmpd="sng" algn="ctr">
                       <a:solidFill>
-                        <a:srgbClr val="E3D3EE"/>
+                        <a:srgbClr val="E8D4F7"/>
                       </a:solidFill>
                       <a:prstDash val="solid"/>
                     </a:lnB>
                     <a:solidFill>
-                      <a:srgbClr val="F5F1F9"/>
+                      <a:srgbClr val="F8F3FC"/>
                     </a:solidFill>
                   </a:tcPr>
                 </a:tc>
@@ -6515,30 +6515,30 @@
                   <a:tcPr anchor="ctr" marL="73152" marR="73152">
                     <a:lnL w="9525" cap="flat" cmpd="sng" algn="ctr">
                       <a:solidFill>
-                        <a:srgbClr val="E3D3EE"/>
+                        <a:srgbClr val="E8D4F7"/>
                       </a:solidFill>
                       <a:prstDash val="solid"/>
                     </a:lnL>
                     <a:lnR w="9525" cap="flat" cmpd="sng" algn="ctr">
                       <a:solidFill>
-                        <a:srgbClr val="E3D3EE"/>
+                        <a:srgbClr val="E8D4F7"/>
                       </a:solidFill>
                       <a:prstDash val="solid"/>
                     </a:lnR>
                     <a:lnT w="9525" cap="flat" cmpd="sng" algn="ctr">
                       <a:solidFill>
-                        <a:srgbClr val="E3D3EE"/>
+                        <a:srgbClr val="E8D4F7"/>
                       </a:solidFill>
                       <a:prstDash val="solid"/>
                     </a:lnT>
                     <a:lnB w="9525" cap="flat" cmpd="sng" algn="ctr">
                       <a:solidFill>
-                        <a:srgbClr val="E3D3EE"/>
+                        <a:srgbClr val="E8D4F7"/>
                       </a:solidFill>
                       <a:prstDash val="solid"/>
                     </a:lnB>
                     <a:solidFill>
-                      <a:srgbClr val="F5F1F9"/>
+                      <a:srgbClr val="F8F3FC"/>
                     </a:solidFill>
                   </a:tcPr>
                 </a:tc>
@@ -6553,7 +6553,7 @@
                       <a:r>
                         <a:rPr sz="1400" b="1">
                           <a:solidFill>
-                            <a:srgbClr val="573371"/>
+                            <a:srgbClr val="4E226D"/>
                           </a:solidFill>
                         </a:rPr>
                         <a:t>암</a:t>
@@ -6563,30 +6563,30 @@
                   <a:tcPr anchor="ctr" marL="73152" marR="73152">
                     <a:lnL w="9525" cap="flat" cmpd="sng" algn="ctr">
                       <a:solidFill>
-                        <a:srgbClr val="E3D3EE"/>
+                        <a:srgbClr val="E8D4F7"/>
                       </a:solidFill>
                       <a:prstDash val="solid"/>
                     </a:lnL>
                     <a:lnR w="9525" cap="flat" cmpd="sng" algn="ctr">
                       <a:solidFill>
-                        <a:srgbClr val="E3D3EE"/>
+                        <a:srgbClr val="E8D4F7"/>
                       </a:solidFill>
                       <a:prstDash val="solid"/>
                     </a:lnR>
                     <a:lnT w="9525" cap="flat" cmpd="sng" algn="ctr">
                       <a:solidFill>
-                        <a:srgbClr val="E3D3EE"/>
+                        <a:srgbClr val="E8D4F7"/>
                       </a:solidFill>
                       <a:prstDash val="solid"/>
                     </a:lnT>
                     <a:lnB w="9525" cap="flat" cmpd="sng" algn="ctr">
                       <a:solidFill>
-                        <a:srgbClr val="E3D3EE"/>
+                        <a:srgbClr val="E8D4F7"/>
                       </a:solidFill>
                       <a:prstDash val="solid"/>
                     </a:lnB>
                     <a:solidFill>
-                      <a:srgbClr val="E3D3EE"/>
+                      <a:srgbClr val="E8D4F7"/>
                     </a:solidFill>
                   </a:tcPr>
                 </a:tc>
@@ -6609,25 +6609,25 @@
                   <a:tcPr anchor="ctr" marL="73152" marR="73152">
                     <a:lnL w="9525" cap="flat" cmpd="sng" algn="ctr">
                       <a:solidFill>
-                        <a:srgbClr val="E3D3EE"/>
+                        <a:srgbClr val="E8D4F7"/>
                       </a:solidFill>
                       <a:prstDash val="solid"/>
                     </a:lnL>
                     <a:lnR w="9525" cap="flat" cmpd="sng" algn="ctr">
                       <a:solidFill>
-                        <a:srgbClr val="E3D3EE"/>
+                        <a:srgbClr val="E8D4F7"/>
                       </a:solidFill>
                       <a:prstDash val="solid"/>
                     </a:lnR>
                     <a:lnT w="9525" cap="flat" cmpd="sng" algn="ctr">
                       <a:solidFill>
-                        <a:srgbClr val="E3D3EE"/>
+                        <a:srgbClr val="E8D4F7"/>
                       </a:solidFill>
                       <a:prstDash val="solid"/>
                     </a:lnT>
                     <a:lnB w="9525" cap="flat" cmpd="sng" algn="ctr">
                       <a:solidFill>
-                        <a:srgbClr val="E3D3EE"/>
+                        <a:srgbClr val="E8D4F7"/>
                       </a:solidFill>
                       <a:prstDash val="solid"/>
                     </a:lnB>
@@ -6655,25 +6655,25 @@
                   <a:tcPr anchor="ctr" marL="73152" marR="73152">
                     <a:lnL w="9525" cap="flat" cmpd="sng" algn="ctr">
                       <a:solidFill>
-                        <a:srgbClr val="E3D3EE"/>
+                        <a:srgbClr val="E8D4F7"/>
                       </a:solidFill>
                       <a:prstDash val="solid"/>
                     </a:lnL>
                     <a:lnR w="9525" cap="flat" cmpd="sng" algn="ctr">
                       <a:solidFill>
-                        <a:srgbClr val="E3D3EE"/>
+                        <a:srgbClr val="E8D4F7"/>
                       </a:solidFill>
                       <a:prstDash val="solid"/>
                     </a:lnR>
                     <a:lnT w="9525" cap="flat" cmpd="sng" algn="ctr">
                       <a:solidFill>
-                        <a:srgbClr val="E3D3EE"/>
+                        <a:srgbClr val="E8D4F7"/>
                       </a:solidFill>
                       <a:prstDash val="solid"/>
                     </a:lnT>
                     <a:lnB w="9525" cap="flat" cmpd="sng" algn="ctr">
                       <a:solidFill>
-                        <a:srgbClr val="E3D3EE"/>
+                        <a:srgbClr val="E8D4F7"/>
                       </a:solidFill>
                       <a:prstDash val="solid"/>
                     </a:lnB>
@@ -6701,25 +6701,25 @@
                   <a:tcPr anchor="ctr" marL="73152" marR="73152">
                     <a:lnL w="9525" cap="flat" cmpd="sng" algn="ctr">
                       <a:solidFill>
-                        <a:srgbClr val="E3D3EE"/>
+                        <a:srgbClr val="E8D4F7"/>
                       </a:solidFill>
                       <a:prstDash val="solid"/>
                     </a:lnL>
                     <a:lnR w="9525" cap="flat" cmpd="sng" algn="ctr">
                       <a:solidFill>
-                        <a:srgbClr val="E3D3EE"/>
+                        <a:srgbClr val="E8D4F7"/>
                       </a:solidFill>
                       <a:prstDash val="solid"/>
                     </a:lnR>
                     <a:lnT w="9525" cap="flat" cmpd="sng" algn="ctr">
                       <a:solidFill>
-                        <a:srgbClr val="E3D3EE"/>
+                        <a:srgbClr val="E8D4F7"/>
                       </a:solidFill>
                       <a:prstDash val="solid"/>
                     </a:lnT>
                     <a:lnB w="9525" cap="flat" cmpd="sng" algn="ctr">
                       <a:solidFill>
-                        <a:srgbClr val="E3D3EE"/>
+                        <a:srgbClr val="E8D4F7"/>
                       </a:solidFill>
                       <a:prstDash val="solid"/>
                     </a:lnB>
@@ -6739,7 +6739,7 @@
                       <a:r>
                         <a:rPr sz="1400" b="1">
                           <a:solidFill>
-                            <a:srgbClr val="573371"/>
+                            <a:srgbClr val="4E226D"/>
                           </a:solidFill>
                         </a:rPr>
                         <a:t>뇌·심장</a:t>
@@ -6749,30 +6749,30 @@
                   <a:tcPr anchor="ctr" marL="73152" marR="73152">
                     <a:lnL w="9525" cap="flat" cmpd="sng" algn="ctr">
                       <a:solidFill>
-                        <a:srgbClr val="E3D3EE"/>
+                        <a:srgbClr val="E8D4F7"/>
                       </a:solidFill>
                       <a:prstDash val="solid"/>
                     </a:lnL>
                     <a:lnR w="9525" cap="flat" cmpd="sng" algn="ctr">
                       <a:solidFill>
-                        <a:srgbClr val="E3D3EE"/>
+                        <a:srgbClr val="E8D4F7"/>
                       </a:solidFill>
                       <a:prstDash val="solid"/>
                     </a:lnR>
                     <a:lnT w="9525" cap="flat" cmpd="sng" algn="ctr">
                       <a:solidFill>
-                        <a:srgbClr val="E3D3EE"/>
+                        <a:srgbClr val="E8D4F7"/>
                       </a:solidFill>
                       <a:prstDash val="solid"/>
                     </a:lnT>
                     <a:lnB w="9525" cap="flat" cmpd="sng" algn="ctr">
                       <a:solidFill>
-                        <a:srgbClr val="E3D3EE"/>
+                        <a:srgbClr val="E8D4F7"/>
                       </a:solidFill>
                       <a:prstDash val="solid"/>
                     </a:lnB>
                     <a:solidFill>
-                      <a:srgbClr val="E3D3EE"/>
+                      <a:srgbClr val="E8D4F7"/>
                     </a:solidFill>
                   </a:tcPr>
                 </a:tc>
@@ -6795,30 +6795,30 @@
                   <a:tcPr anchor="ctr" marL="73152" marR="73152">
                     <a:lnL w="9525" cap="flat" cmpd="sng" algn="ctr">
                       <a:solidFill>
-                        <a:srgbClr val="E3D3EE"/>
+                        <a:srgbClr val="E8D4F7"/>
                       </a:solidFill>
                       <a:prstDash val="solid"/>
                     </a:lnL>
                     <a:lnR w="9525" cap="flat" cmpd="sng" algn="ctr">
                       <a:solidFill>
-                        <a:srgbClr val="E3D3EE"/>
+                        <a:srgbClr val="E8D4F7"/>
                       </a:solidFill>
                       <a:prstDash val="solid"/>
                     </a:lnR>
                     <a:lnT w="9525" cap="flat" cmpd="sng" algn="ctr">
                       <a:solidFill>
-                        <a:srgbClr val="E3D3EE"/>
+                        <a:srgbClr val="E8D4F7"/>
                       </a:solidFill>
                       <a:prstDash val="solid"/>
                     </a:lnT>
                     <a:lnB w="9525" cap="flat" cmpd="sng" algn="ctr">
                       <a:solidFill>
-                        <a:srgbClr val="E3D3EE"/>
+                        <a:srgbClr val="E8D4F7"/>
                       </a:solidFill>
                       <a:prstDash val="solid"/>
                     </a:lnB>
                     <a:solidFill>
-                      <a:srgbClr val="F5F1F9"/>
+                      <a:srgbClr val="F8F3FC"/>
                     </a:solidFill>
                   </a:tcPr>
                 </a:tc>
@@ -6841,30 +6841,30 @@
                   <a:tcPr anchor="ctr" marL="73152" marR="73152">
                     <a:lnL w="9525" cap="flat" cmpd="sng" algn="ctr">
                       <a:solidFill>
-                        <a:srgbClr val="E3D3EE"/>
+                        <a:srgbClr val="E8D4F7"/>
                       </a:solidFill>
                       <a:prstDash val="solid"/>
                     </a:lnL>
                     <a:lnR w="9525" cap="flat" cmpd="sng" algn="ctr">
                       <a:solidFill>
-                        <a:srgbClr val="E3D3EE"/>
+                        <a:srgbClr val="E8D4F7"/>
                       </a:solidFill>
                       <a:prstDash val="solid"/>
                     </a:lnR>
                     <a:lnT w="9525" cap="flat" cmpd="sng" algn="ctr">
                       <a:solidFill>
-                        <a:srgbClr val="E3D3EE"/>
+                        <a:srgbClr val="E8D4F7"/>
                       </a:solidFill>
                       <a:prstDash val="solid"/>
                     </a:lnT>
                     <a:lnB w="9525" cap="flat" cmpd="sng" algn="ctr">
                       <a:solidFill>
-                        <a:srgbClr val="E3D3EE"/>
+                        <a:srgbClr val="E8D4F7"/>
                       </a:solidFill>
                       <a:prstDash val="solid"/>
                     </a:lnB>
                     <a:solidFill>
-                      <a:srgbClr val="F5F1F9"/>
+                      <a:srgbClr val="F8F3FC"/>
                     </a:solidFill>
                   </a:tcPr>
                 </a:tc>
@@ -6887,30 +6887,30 @@
                   <a:tcPr anchor="ctr" marL="73152" marR="73152">
                     <a:lnL w="9525" cap="flat" cmpd="sng" algn="ctr">
                       <a:solidFill>
-                        <a:srgbClr val="E3D3EE"/>
+                        <a:srgbClr val="E8D4F7"/>
                       </a:solidFill>
                       <a:prstDash val="solid"/>
                     </a:lnL>
                     <a:lnR w="9525" cap="flat" cmpd="sng" algn="ctr">
                       <a:solidFill>
-                        <a:srgbClr val="E3D3EE"/>
+                        <a:srgbClr val="E8D4F7"/>
                       </a:solidFill>
                       <a:prstDash val="solid"/>
                     </a:lnR>
                     <a:lnT w="9525" cap="flat" cmpd="sng" algn="ctr">
                       <a:solidFill>
-                        <a:srgbClr val="E3D3EE"/>
+                        <a:srgbClr val="E8D4F7"/>
                       </a:solidFill>
                       <a:prstDash val="solid"/>
                     </a:lnT>
                     <a:lnB w="9525" cap="flat" cmpd="sng" algn="ctr">
                       <a:solidFill>
-                        <a:srgbClr val="E3D3EE"/>
+                        <a:srgbClr val="E8D4F7"/>
                       </a:solidFill>
                       <a:prstDash val="solid"/>
                     </a:lnB>
                     <a:solidFill>
-                      <a:srgbClr val="F5F1F9"/>
+                      <a:srgbClr val="F8F3FC"/>
                     </a:solidFill>
                   </a:tcPr>
                 </a:tc>
@@ -6925,7 +6925,7 @@
                       <a:r>
                         <a:rPr sz="1400" b="1">
                           <a:solidFill>
-                            <a:srgbClr val="573371"/>
+                            <a:srgbClr val="4E226D"/>
                           </a:solidFill>
                         </a:rPr>
                         <a:t>입원·수술</a:t>
@@ -6935,30 +6935,30 @@
                   <a:tcPr anchor="ctr" marL="73152" marR="73152">
                     <a:lnL w="9525" cap="flat" cmpd="sng" algn="ctr">
                       <a:solidFill>
-                        <a:srgbClr val="E3D3EE"/>
+                        <a:srgbClr val="E8D4F7"/>
                       </a:solidFill>
                       <a:prstDash val="solid"/>
                     </a:lnL>
                     <a:lnR w="9525" cap="flat" cmpd="sng" algn="ctr">
                       <a:solidFill>
-                        <a:srgbClr val="E3D3EE"/>
+                        <a:srgbClr val="E8D4F7"/>
                       </a:solidFill>
                       <a:prstDash val="solid"/>
                     </a:lnR>
                     <a:lnT w="9525" cap="flat" cmpd="sng" algn="ctr">
                       <a:solidFill>
-                        <a:srgbClr val="E3D3EE"/>
+                        <a:srgbClr val="E8D4F7"/>
                       </a:solidFill>
                       <a:prstDash val="solid"/>
                     </a:lnT>
                     <a:lnB w="9525" cap="flat" cmpd="sng" algn="ctr">
                       <a:solidFill>
-                        <a:srgbClr val="E3D3EE"/>
+                        <a:srgbClr val="E8D4F7"/>
                       </a:solidFill>
                       <a:prstDash val="solid"/>
                     </a:lnB>
                     <a:solidFill>
-                      <a:srgbClr val="E3D3EE"/>
+                      <a:srgbClr val="E8D4F7"/>
                     </a:solidFill>
                   </a:tcPr>
                 </a:tc>
@@ -6981,25 +6981,25 @@
                   <a:tcPr anchor="ctr" marL="73152" marR="73152">
                     <a:lnL w="9525" cap="flat" cmpd="sng" algn="ctr">
                       <a:solidFill>
-                        <a:srgbClr val="E3D3EE"/>
+                        <a:srgbClr val="E8D4F7"/>
                       </a:solidFill>
                       <a:prstDash val="solid"/>
                     </a:lnL>
                     <a:lnR w="9525" cap="flat" cmpd="sng" algn="ctr">
                       <a:solidFill>
-                        <a:srgbClr val="E3D3EE"/>
+                        <a:srgbClr val="E8D4F7"/>
                       </a:solidFill>
                       <a:prstDash val="solid"/>
                     </a:lnR>
                     <a:lnT w="9525" cap="flat" cmpd="sng" algn="ctr">
                       <a:solidFill>
-                        <a:srgbClr val="E3D3EE"/>
+                        <a:srgbClr val="E8D4F7"/>
                       </a:solidFill>
                       <a:prstDash val="solid"/>
                     </a:lnT>
                     <a:lnB w="9525" cap="flat" cmpd="sng" algn="ctr">
                       <a:solidFill>
-                        <a:srgbClr val="E3D3EE"/>
+                        <a:srgbClr val="E8D4F7"/>
                       </a:solidFill>
                       <a:prstDash val="solid"/>
                     </a:lnB>
@@ -7027,25 +7027,25 @@
                   <a:tcPr anchor="ctr" marL="73152" marR="73152">
                     <a:lnL w="9525" cap="flat" cmpd="sng" algn="ctr">
                       <a:solidFill>
-                        <a:srgbClr val="E3D3EE"/>
+                        <a:srgbClr val="E8D4F7"/>
                       </a:solidFill>
                       <a:prstDash val="solid"/>
                     </a:lnL>
                     <a:lnR w="9525" cap="flat" cmpd="sng" algn="ctr">
                       <a:solidFill>
-                        <a:srgbClr val="E3D3EE"/>
+                        <a:srgbClr val="E8D4F7"/>
                       </a:solidFill>
                       <a:prstDash val="solid"/>
                     </a:lnR>
                     <a:lnT w="9525" cap="flat" cmpd="sng" algn="ctr">
                       <a:solidFill>
-                        <a:srgbClr val="E3D3EE"/>
+                        <a:srgbClr val="E8D4F7"/>
                       </a:solidFill>
                       <a:prstDash val="solid"/>
                     </a:lnT>
                     <a:lnB w="9525" cap="flat" cmpd="sng" algn="ctr">
                       <a:solidFill>
-                        <a:srgbClr val="E3D3EE"/>
+                        <a:srgbClr val="E8D4F7"/>
                       </a:solidFill>
                       <a:prstDash val="solid"/>
                     </a:lnB>
@@ -7073,25 +7073,25 @@
                   <a:tcPr anchor="ctr" marL="73152" marR="73152">
                     <a:lnL w="9525" cap="flat" cmpd="sng" algn="ctr">
                       <a:solidFill>
-                        <a:srgbClr val="E3D3EE"/>
+                        <a:srgbClr val="E8D4F7"/>
                       </a:solidFill>
                       <a:prstDash val="solid"/>
                     </a:lnL>
                     <a:lnR w="9525" cap="flat" cmpd="sng" algn="ctr">
                       <a:solidFill>
-                        <a:srgbClr val="E3D3EE"/>
+                        <a:srgbClr val="E8D4F7"/>
                       </a:solidFill>
                       <a:prstDash val="solid"/>
                     </a:lnR>
                     <a:lnT w="9525" cap="flat" cmpd="sng" algn="ctr">
                       <a:solidFill>
-                        <a:srgbClr val="E3D3EE"/>
+                        <a:srgbClr val="E8D4F7"/>
                       </a:solidFill>
                       <a:prstDash val="solid"/>
                     </a:lnT>
                     <a:lnB w="9525" cap="flat" cmpd="sng" algn="ctr">
                       <a:solidFill>
-                        <a:srgbClr val="E3D3EE"/>
+                        <a:srgbClr val="E8D4F7"/>
                       </a:solidFill>
                       <a:prstDash val="solid"/>
                     </a:lnB>
@@ -7111,7 +7111,7 @@
                       <a:r>
                         <a:rPr sz="1400" b="1">
                           <a:solidFill>
-                            <a:srgbClr val="573371"/>
+                            <a:srgbClr val="4E226D"/>
                           </a:solidFill>
                         </a:rPr>
                         <a:t>상해</a:t>
@@ -7121,30 +7121,30 @@
                   <a:tcPr anchor="ctr" marL="73152" marR="73152">
                     <a:lnL w="9525" cap="flat" cmpd="sng" algn="ctr">
                       <a:solidFill>
-                        <a:srgbClr val="E3D3EE"/>
+                        <a:srgbClr val="E8D4F7"/>
                       </a:solidFill>
                       <a:prstDash val="solid"/>
                     </a:lnL>
                     <a:lnR w="9525" cap="flat" cmpd="sng" algn="ctr">
                       <a:solidFill>
-                        <a:srgbClr val="E3D3EE"/>
+                        <a:srgbClr val="E8D4F7"/>
                       </a:solidFill>
                       <a:prstDash val="solid"/>
                     </a:lnR>
                     <a:lnT w="9525" cap="flat" cmpd="sng" algn="ctr">
                       <a:solidFill>
-                        <a:srgbClr val="E3D3EE"/>
+                        <a:srgbClr val="E8D4F7"/>
                       </a:solidFill>
                       <a:prstDash val="solid"/>
                     </a:lnT>
                     <a:lnB w="9525" cap="flat" cmpd="sng" algn="ctr">
                       <a:solidFill>
-                        <a:srgbClr val="E3D3EE"/>
+                        <a:srgbClr val="E8D4F7"/>
                       </a:solidFill>
                       <a:prstDash val="solid"/>
                     </a:lnB>
                     <a:solidFill>
-                      <a:srgbClr val="E3D3EE"/>
+                      <a:srgbClr val="E8D4F7"/>
                     </a:solidFill>
                   </a:tcPr>
                 </a:tc>
@@ -7167,30 +7167,30 @@
                   <a:tcPr anchor="ctr" marL="73152" marR="73152">
                     <a:lnL w="9525" cap="flat" cmpd="sng" algn="ctr">
                       <a:solidFill>
-                        <a:srgbClr val="E3D3EE"/>
+                        <a:srgbClr val="E8D4F7"/>
                       </a:solidFill>
                       <a:prstDash val="solid"/>
                     </a:lnL>
                     <a:lnR w="9525" cap="flat" cmpd="sng" algn="ctr">
                       <a:solidFill>
-                        <a:srgbClr val="E3D3EE"/>
+                        <a:srgbClr val="E8D4F7"/>
                       </a:solidFill>
                       <a:prstDash val="solid"/>
                     </a:lnR>
                     <a:lnT w="9525" cap="flat" cmpd="sng" algn="ctr">
                       <a:solidFill>
-                        <a:srgbClr val="E3D3EE"/>
+                        <a:srgbClr val="E8D4F7"/>
                       </a:solidFill>
                       <a:prstDash val="solid"/>
                     </a:lnT>
                     <a:lnB w="9525" cap="flat" cmpd="sng" algn="ctr">
                       <a:solidFill>
-                        <a:srgbClr val="E3D3EE"/>
+                        <a:srgbClr val="E8D4F7"/>
                       </a:solidFill>
                       <a:prstDash val="solid"/>
                     </a:lnB>
                     <a:solidFill>
-                      <a:srgbClr val="F5F1F9"/>
+                      <a:srgbClr val="F8F3FC"/>
                     </a:solidFill>
                   </a:tcPr>
                 </a:tc>
@@ -7213,30 +7213,30 @@
                   <a:tcPr anchor="ctr" marL="73152" marR="73152">
                     <a:lnL w="9525" cap="flat" cmpd="sng" algn="ctr">
                       <a:solidFill>
-                        <a:srgbClr val="E3D3EE"/>
+                        <a:srgbClr val="E8D4F7"/>
                       </a:solidFill>
                       <a:prstDash val="solid"/>
                     </a:lnL>
                     <a:lnR w="9525" cap="flat" cmpd="sng" algn="ctr">
                       <a:solidFill>
-                        <a:srgbClr val="E3D3EE"/>
+                        <a:srgbClr val="E8D4F7"/>
                       </a:solidFill>
                       <a:prstDash val="solid"/>
                     </a:lnR>
                     <a:lnT w="9525" cap="flat" cmpd="sng" algn="ctr">
                       <a:solidFill>
-                        <a:srgbClr val="E3D3EE"/>
+                        <a:srgbClr val="E8D4F7"/>
                       </a:solidFill>
                       <a:prstDash val="solid"/>
                     </a:lnT>
                     <a:lnB w="9525" cap="flat" cmpd="sng" algn="ctr">
                       <a:solidFill>
-                        <a:srgbClr val="E3D3EE"/>
+                        <a:srgbClr val="E8D4F7"/>
                       </a:solidFill>
                       <a:prstDash val="solid"/>
                     </a:lnB>
                     <a:solidFill>
-                      <a:srgbClr val="F5F1F9"/>
+                      <a:srgbClr val="F8F3FC"/>
                     </a:solidFill>
                   </a:tcPr>
                 </a:tc>
@@ -7259,30 +7259,30 @@
                   <a:tcPr anchor="ctr" marL="73152" marR="73152">
                     <a:lnL w="9525" cap="flat" cmpd="sng" algn="ctr">
                       <a:solidFill>
-                        <a:srgbClr val="E3D3EE"/>
+                        <a:srgbClr val="E8D4F7"/>
                       </a:solidFill>
                       <a:prstDash val="solid"/>
                     </a:lnL>
                     <a:lnR w="9525" cap="flat" cmpd="sng" algn="ctr">
                       <a:solidFill>
-                        <a:srgbClr val="E3D3EE"/>
+                        <a:srgbClr val="E8D4F7"/>
                       </a:solidFill>
                       <a:prstDash val="solid"/>
                     </a:lnR>
                     <a:lnT w="9525" cap="flat" cmpd="sng" algn="ctr">
                       <a:solidFill>
-                        <a:srgbClr val="E3D3EE"/>
+                        <a:srgbClr val="E8D4F7"/>
                       </a:solidFill>
                       <a:prstDash val="solid"/>
                     </a:lnT>
                     <a:lnB w="9525" cap="flat" cmpd="sng" algn="ctr">
                       <a:solidFill>
-                        <a:srgbClr val="E3D3EE"/>
+                        <a:srgbClr val="E8D4F7"/>
                       </a:solidFill>
                       <a:prstDash val="solid"/>
                     </a:lnB>
                     <a:solidFill>
-                      <a:srgbClr val="F5F1F9"/>
+                      <a:srgbClr val="F8F3FC"/>
                     </a:solidFill>
                   </a:tcPr>
                 </a:tc>
@@ -7297,7 +7297,7 @@
                       <a:r>
                         <a:rPr sz="1400" b="1">
                           <a:solidFill>
-                            <a:srgbClr val="573371"/>
+                            <a:srgbClr val="4E226D"/>
                           </a:solidFill>
                         </a:rPr>
                         <a:t>실손의료</a:t>
@@ -7307,30 +7307,30 @@
                   <a:tcPr anchor="ctr" marL="73152" marR="73152">
                     <a:lnL w="9525" cap="flat" cmpd="sng" algn="ctr">
                       <a:solidFill>
-                        <a:srgbClr val="E3D3EE"/>
+                        <a:srgbClr val="E8D4F7"/>
                       </a:solidFill>
                       <a:prstDash val="solid"/>
                     </a:lnL>
                     <a:lnR w="9525" cap="flat" cmpd="sng" algn="ctr">
                       <a:solidFill>
-                        <a:srgbClr val="E3D3EE"/>
+                        <a:srgbClr val="E8D4F7"/>
                       </a:solidFill>
                       <a:prstDash val="solid"/>
                     </a:lnR>
                     <a:lnT w="9525" cap="flat" cmpd="sng" algn="ctr">
                       <a:solidFill>
-                        <a:srgbClr val="E3D3EE"/>
+                        <a:srgbClr val="E8D4F7"/>
                       </a:solidFill>
                       <a:prstDash val="solid"/>
                     </a:lnT>
                     <a:lnB w="9525" cap="flat" cmpd="sng" algn="ctr">
                       <a:solidFill>
-                        <a:srgbClr val="E3D3EE"/>
+                        <a:srgbClr val="E8D4F7"/>
                       </a:solidFill>
                       <a:prstDash val="solid"/>
                     </a:lnB>
                     <a:solidFill>
-                      <a:srgbClr val="E3D3EE"/>
+                      <a:srgbClr val="E8D4F7"/>
                     </a:solidFill>
                   </a:tcPr>
                 </a:tc>
@@ -7353,25 +7353,25 @@
                   <a:tcPr anchor="ctr" marL="73152" marR="73152">
                     <a:lnL w="9525" cap="flat" cmpd="sng" algn="ctr">
                       <a:solidFill>
-                        <a:srgbClr val="E3D3EE"/>
+                        <a:srgbClr val="E8D4F7"/>
                       </a:solidFill>
                       <a:prstDash val="solid"/>
                     </a:lnL>
                     <a:lnR w="9525" cap="flat" cmpd="sng" algn="ctr">
                       <a:solidFill>
-                        <a:srgbClr val="E3D3EE"/>
+                        <a:srgbClr val="E8D4F7"/>
                       </a:solidFill>
                       <a:prstDash val="solid"/>
                     </a:lnR>
                     <a:lnT w="9525" cap="flat" cmpd="sng" algn="ctr">
                       <a:solidFill>
-                        <a:srgbClr val="E3D3EE"/>
+                        <a:srgbClr val="E8D4F7"/>
                       </a:solidFill>
                       <a:prstDash val="solid"/>
                     </a:lnT>
                     <a:lnB w="9525" cap="flat" cmpd="sng" algn="ctr">
                       <a:solidFill>
-                        <a:srgbClr val="E3D3EE"/>
+                        <a:srgbClr val="E8D4F7"/>
                       </a:solidFill>
                       <a:prstDash val="solid"/>
                     </a:lnB>
@@ -7399,25 +7399,25 @@
                   <a:tcPr anchor="ctr" marL="73152" marR="73152">
                     <a:lnL w="9525" cap="flat" cmpd="sng" algn="ctr">
                       <a:solidFill>
-                        <a:srgbClr val="E3D3EE"/>
+                        <a:srgbClr val="E8D4F7"/>
                       </a:solidFill>
                       <a:prstDash val="solid"/>
                     </a:lnL>
                     <a:lnR w="9525" cap="flat" cmpd="sng" algn="ctr">
                       <a:solidFill>
-                        <a:srgbClr val="E3D3EE"/>
+                        <a:srgbClr val="E8D4F7"/>
                       </a:solidFill>
                       <a:prstDash val="solid"/>
                     </a:lnR>
                     <a:lnT w="9525" cap="flat" cmpd="sng" algn="ctr">
                       <a:solidFill>
-                        <a:srgbClr val="E3D3EE"/>
+                        <a:srgbClr val="E8D4F7"/>
                       </a:solidFill>
                       <a:prstDash val="solid"/>
                     </a:lnT>
                     <a:lnB w="9525" cap="flat" cmpd="sng" algn="ctr">
                       <a:solidFill>
-                        <a:srgbClr val="E3D3EE"/>
+                        <a:srgbClr val="E8D4F7"/>
                       </a:solidFill>
                       <a:prstDash val="solid"/>
                     </a:lnB>
@@ -7445,25 +7445,25 @@
                   <a:tcPr anchor="ctr" marL="73152" marR="73152">
                     <a:lnL w="9525" cap="flat" cmpd="sng" algn="ctr">
                       <a:solidFill>
-                        <a:srgbClr val="E3D3EE"/>
+                        <a:srgbClr val="E8D4F7"/>
                       </a:solidFill>
                       <a:prstDash val="solid"/>
                     </a:lnL>
                     <a:lnR w="9525" cap="flat" cmpd="sng" algn="ctr">
                       <a:solidFill>
-                        <a:srgbClr val="E3D3EE"/>
+                        <a:srgbClr val="E8D4F7"/>
                       </a:solidFill>
                       <a:prstDash val="solid"/>
                     </a:lnR>
                     <a:lnT w="9525" cap="flat" cmpd="sng" algn="ctr">
                       <a:solidFill>
-                        <a:srgbClr val="E3D3EE"/>
+                        <a:srgbClr val="E8D4F7"/>
                       </a:solidFill>
                       <a:prstDash val="solid"/>
                     </a:lnT>
                     <a:lnB w="9525" cap="flat" cmpd="sng" algn="ctr">
                       <a:solidFill>
-                        <a:srgbClr val="E3D3EE"/>
+                        <a:srgbClr val="E8D4F7"/>
                       </a:solidFill>
                       <a:prstDash val="solid"/>
                     </a:lnB>
@@ -7483,7 +7483,7 @@
                       <a:r>
                         <a:rPr sz="1400" b="1">
                           <a:solidFill>
-                            <a:srgbClr val="573371"/>
+                            <a:srgbClr val="4E226D"/>
                           </a:solidFill>
                         </a:rPr>
                         <a:t>연금·노후자금</a:t>
@@ -7493,30 +7493,30 @@
                   <a:tcPr anchor="ctr" marL="73152" marR="73152">
                     <a:lnL w="9525" cap="flat" cmpd="sng" algn="ctr">
                       <a:solidFill>
-                        <a:srgbClr val="E3D3EE"/>
+                        <a:srgbClr val="E8D4F7"/>
                       </a:solidFill>
                       <a:prstDash val="solid"/>
                     </a:lnL>
                     <a:lnR w="9525" cap="flat" cmpd="sng" algn="ctr">
                       <a:solidFill>
-                        <a:srgbClr val="E3D3EE"/>
+                        <a:srgbClr val="E8D4F7"/>
                       </a:solidFill>
                       <a:prstDash val="solid"/>
                     </a:lnR>
                     <a:lnT w="9525" cap="flat" cmpd="sng" algn="ctr">
                       <a:solidFill>
-                        <a:srgbClr val="E3D3EE"/>
+                        <a:srgbClr val="E8D4F7"/>
                       </a:solidFill>
                       <a:prstDash val="solid"/>
                     </a:lnT>
                     <a:lnB w="9525" cap="flat" cmpd="sng" algn="ctr">
                       <a:solidFill>
-                        <a:srgbClr val="E3D3EE"/>
+                        <a:srgbClr val="E8D4F7"/>
                       </a:solidFill>
                       <a:prstDash val="solid"/>
                     </a:lnB>
                     <a:solidFill>
-                      <a:srgbClr val="E3D3EE"/>
+                      <a:srgbClr val="E8D4F7"/>
                     </a:solidFill>
                   </a:tcPr>
                 </a:tc>
@@ -7539,30 +7539,30 @@
                   <a:tcPr anchor="ctr" marL="73152" marR="73152">
                     <a:lnL w="9525" cap="flat" cmpd="sng" algn="ctr">
                       <a:solidFill>
-                        <a:srgbClr val="E3D3EE"/>
+                        <a:srgbClr val="E8D4F7"/>
                       </a:solidFill>
                       <a:prstDash val="solid"/>
                     </a:lnL>
                     <a:lnR w="9525" cap="flat" cmpd="sng" algn="ctr">
                       <a:solidFill>
-                        <a:srgbClr val="E3D3EE"/>
+                        <a:srgbClr val="E8D4F7"/>
                       </a:solidFill>
                       <a:prstDash val="solid"/>
                     </a:lnR>
                     <a:lnT w="9525" cap="flat" cmpd="sng" algn="ctr">
                       <a:solidFill>
-                        <a:srgbClr val="E3D3EE"/>
+                        <a:srgbClr val="E8D4F7"/>
                       </a:solidFill>
                       <a:prstDash val="solid"/>
                     </a:lnT>
                     <a:lnB w="9525" cap="flat" cmpd="sng" algn="ctr">
                       <a:solidFill>
-                        <a:srgbClr val="E3D3EE"/>
+                        <a:srgbClr val="E8D4F7"/>
                       </a:solidFill>
                       <a:prstDash val="solid"/>
                     </a:lnB>
                     <a:solidFill>
-                      <a:srgbClr val="F5F1F9"/>
+                      <a:srgbClr val="F8F3FC"/>
                     </a:solidFill>
                   </a:tcPr>
                 </a:tc>
@@ -7585,30 +7585,30 @@
                   <a:tcPr anchor="ctr" marL="73152" marR="73152">
                     <a:lnL w="9525" cap="flat" cmpd="sng" algn="ctr">
                       <a:solidFill>
-                        <a:srgbClr val="E3D3EE"/>
+                        <a:srgbClr val="E8D4F7"/>
                       </a:solidFill>
                       <a:prstDash val="solid"/>
                     </a:lnL>
                     <a:lnR w="9525" cap="flat" cmpd="sng" algn="ctr">
                       <a:solidFill>
-                        <a:srgbClr val="E3D3EE"/>
+                        <a:srgbClr val="E8D4F7"/>
                       </a:solidFill>
                       <a:prstDash val="solid"/>
                     </a:lnR>
                     <a:lnT w="9525" cap="flat" cmpd="sng" algn="ctr">
                       <a:solidFill>
-                        <a:srgbClr val="E3D3EE"/>
+                        <a:srgbClr val="E8D4F7"/>
                       </a:solidFill>
                       <a:prstDash val="solid"/>
                     </a:lnT>
                     <a:lnB w="9525" cap="flat" cmpd="sng" algn="ctr">
                       <a:solidFill>
-                        <a:srgbClr val="E3D3EE"/>
+                        <a:srgbClr val="E8D4F7"/>
                       </a:solidFill>
                       <a:prstDash val="solid"/>
                     </a:lnB>
                     <a:solidFill>
-                      <a:srgbClr val="F5F1F9"/>
+                      <a:srgbClr val="F8F3FC"/>
                     </a:solidFill>
                   </a:tcPr>
                 </a:tc>
@@ -7631,30 +7631,30 @@
                   <a:tcPr anchor="ctr" marL="73152" marR="73152">
                     <a:lnL w="9525" cap="flat" cmpd="sng" algn="ctr">
                       <a:solidFill>
-                        <a:srgbClr val="E3D3EE"/>
+                        <a:srgbClr val="E8D4F7"/>
                       </a:solidFill>
                       <a:prstDash val="solid"/>
                     </a:lnL>
                     <a:lnR w="9525" cap="flat" cmpd="sng" algn="ctr">
                       <a:solidFill>
-                        <a:srgbClr val="E3D3EE"/>
+                        <a:srgbClr val="E8D4F7"/>
                       </a:solidFill>
                       <a:prstDash val="solid"/>
                     </a:lnR>
                     <a:lnT w="9525" cap="flat" cmpd="sng" algn="ctr">
                       <a:solidFill>
-                        <a:srgbClr val="E3D3EE"/>
+                        <a:srgbClr val="E8D4F7"/>
                       </a:solidFill>
                       <a:prstDash val="solid"/>
                     </a:lnT>
                     <a:lnB w="9525" cap="flat" cmpd="sng" algn="ctr">
                       <a:solidFill>
-                        <a:srgbClr val="E3D3EE"/>
+                        <a:srgbClr val="E8D4F7"/>
                       </a:solidFill>
                       <a:prstDash val="solid"/>
                     </a:lnB>
                     <a:solidFill>
-                      <a:srgbClr val="F5F1F9"/>
+                      <a:srgbClr val="F8F3FC"/>
                     </a:solidFill>
                   </a:tcPr>
                 </a:tc>
@@ -7704,7 +7704,7 @@
             <a:avLst/>
           </a:prstGeom>
           <a:solidFill>
-            <a:srgbClr val="E3D3EE"/>
+            <a:srgbClr val="E8D4F7"/>
           </a:solidFill>
           <a:ln>
             <a:noFill/>
@@ -7733,7 +7733,7 @@
             <a:avLst/>
           </a:prstGeom>
           <a:solidFill>
-            <a:srgbClr val="8C56B3"/>
+            <a:srgbClr val="9651C8"/>
           </a:solidFill>
           <a:ln>
             <a:noFill/>
@@ -7777,7 +7777,7 @@
             <a:r>
               <a:rPr sz="3000" b="1" i="0">
                 <a:solidFill>
-                  <a:srgbClr val="573371"/>
+                  <a:srgbClr val="4E226D"/>
                 </a:solidFill>
               </a:rPr>
               <a:t>월 보험료 한눈에</a:t>
@@ -7802,11 +7802,11 @@
             </a:avLst>
           </a:prstGeom>
           <a:solidFill>
-            <a:srgbClr val="F5F1F9"/>
+            <a:srgbClr val="F8F3FC"/>
           </a:solidFill>
           <a:ln w="15875">
             <a:solidFill>
-              <a:srgbClr val="E3D3EE"/>
+              <a:srgbClr val="E8D4F7"/>
             </a:solidFill>
           </a:ln>
         </p:spPr>
@@ -7833,7 +7833,7 @@
             <a:avLst/>
           </a:prstGeom>
           <a:solidFill>
-            <a:srgbClr val="8C56B3"/>
+            <a:srgbClr val="9651C8"/>
           </a:solidFill>
           <a:ln>
             <a:noFill/>
@@ -7891,7 +7891,7 @@
             <a:r>
               <a:rPr sz="1700" b="1" i="0">
                 <a:solidFill>
-                  <a:srgbClr val="573371"/>
+                  <a:srgbClr val="4E226D"/>
                 </a:solidFill>
               </a:rPr>
               <a:t>월 보험료 합계</a:t>
@@ -7954,11 +7954,11 @@
             </a:avLst>
           </a:prstGeom>
           <a:solidFill>
-            <a:srgbClr val="F5F1F9"/>
+            <a:srgbClr val="F8F3FC"/>
           </a:solidFill>
           <a:ln w="15875">
             <a:solidFill>
-              <a:srgbClr val="E3D3EE"/>
+              <a:srgbClr val="E8D4F7"/>
             </a:solidFill>
           </a:ln>
         </p:spPr>
@@ -7985,7 +7985,7 @@
             <a:avLst/>
           </a:prstGeom>
           <a:solidFill>
-            <a:srgbClr val="8C56B3"/>
+            <a:srgbClr val="9651C8"/>
           </a:solidFill>
           <a:ln>
             <a:noFill/>
@@ -8043,7 +8043,7 @@
             <a:r>
               <a:rPr sz="1700" b="1" i="0">
                 <a:solidFill>
-                  <a:srgbClr val="573371"/>
+                  <a:srgbClr val="4E226D"/>
                 </a:solidFill>
               </a:rPr>
               <a:t>연 보험료 합계</a:t>
@@ -8106,11 +8106,11 @@
             </a:avLst>
           </a:prstGeom>
           <a:solidFill>
-            <a:srgbClr val="F5F1F9"/>
+            <a:srgbClr val="F8F3FC"/>
           </a:solidFill>
           <a:ln w="15875">
             <a:solidFill>
-              <a:srgbClr val="E3D3EE"/>
+              <a:srgbClr val="E8D4F7"/>
             </a:solidFill>
           </a:ln>
         </p:spPr>
@@ -8137,7 +8137,7 @@
             <a:avLst/>
           </a:prstGeom>
           <a:solidFill>
-            <a:srgbClr val="8C56B3"/>
+            <a:srgbClr val="9651C8"/>
           </a:solidFill>
           <a:ln>
             <a:noFill/>
@@ -8195,7 +8195,7 @@
             <a:r>
               <a:rPr sz="1700" b="1" i="0">
                 <a:solidFill>
-                  <a:srgbClr val="573371"/>
+                  <a:srgbClr val="4E226D"/>
                 </a:solidFill>
               </a:rPr>
               <a:t>월 소득 대비</a:t>
@@ -8320,7 +8320,7 @@
             <a:avLst/>
           </a:prstGeom>
           <a:solidFill>
-            <a:srgbClr val="E3D3EE"/>
+            <a:srgbClr val="E8D4F7"/>
           </a:solidFill>
           <a:ln>
             <a:noFill/>
@@ -8349,7 +8349,7 @@
             <a:avLst/>
           </a:prstGeom>
           <a:solidFill>
-            <a:srgbClr val="8C56B3"/>
+            <a:srgbClr val="9651C8"/>
           </a:solidFill>
           <a:ln>
             <a:noFill/>
@@ -8393,7 +8393,7 @@
             <a:r>
               <a:rPr sz="3000" b="1" i="0">
                 <a:solidFill>
-                  <a:srgbClr val="573371"/>
+                  <a:srgbClr val="4E226D"/>
                 </a:solidFill>
               </a:rPr>
               <a:t>점검 메모와 다음 할 일</a:t>
@@ -8418,11 +8418,11 @@
             </a:avLst>
           </a:prstGeom>
           <a:solidFill>
-            <a:srgbClr val="F5F1F9"/>
+            <a:srgbClr val="F8F3FC"/>
           </a:solidFill>
           <a:ln w="15875">
             <a:solidFill>
-              <a:srgbClr val="E3D3EE"/>
+              <a:srgbClr val="E8D4F7"/>
             </a:solidFill>
           </a:ln>
         </p:spPr>
@@ -8449,7 +8449,7 @@
             <a:avLst/>
           </a:prstGeom>
           <a:solidFill>
-            <a:srgbClr val="8C56B3"/>
+            <a:srgbClr val="9651C8"/>
           </a:solidFill>
           <a:ln>
             <a:noFill/>
@@ -8507,7 +8507,7 @@
             <a:r>
               <a:rPr sz="1800" b="1" i="0">
                 <a:solidFill>
-                  <a:srgbClr val="573371"/>
+                  <a:srgbClr val="4E226D"/>
                 </a:solidFill>
               </a:rPr>
               <a:t>확인할 것</a:t>
@@ -8570,11 +8570,11 @@
             </a:avLst>
           </a:prstGeom>
           <a:solidFill>
-            <a:srgbClr val="F5F1F9"/>
+            <a:srgbClr val="F8F3FC"/>
           </a:solidFill>
           <a:ln w="15875">
             <a:solidFill>
-              <a:srgbClr val="E3D3EE"/>
+              <a:srgbClr val="E8D4F7"/>
             </a:solidFill>
           </a:ln>
         </p:spPr>
@@ -8601,7 +8601,7 @@
             <a:avLst/>
           </a:prstGeom>
           <a:solidFill>
-            <a:srgbClr val="8C56B3"/>
+            <a:srgbClr val="9651C8"/>
           </a:solidFill>
           <a:ln>
             <a:noFill/>
@@ -8659,7 +8659,7 @@
             <a:r>
               <a:rPr sz="1800" b="1" i="0">
                 <a:solidFill>
-                  <a:srgbClr val="573371"/>
+                  <a:srgbClr val="4E226D"/>
                 </a:solidFill>
               </a:rPr>
               <a:t>문의할 것</a:t>
@@ -8722,11 +8722,11 @@
             </a:avLst>
           </a:prstGeom>
           <a:solidFill>
-            <a:srgbClr val="F5F1F9"/>
+            <a:srgbClr val="F8F3FC"/>
           </a:solidFill>
           <a:ln w="15875">
             <a:solidFill>
-              <a:srgbClr val="E3D3EE"/>
+              <a:srgbClr val="E8D4F7"/>
             </a:solidFill>
           </a:ln>
         </p:spPr>
@@ -8753,7 +8753,7 @@
             <a:avLst/>
           </a:prstGeom>
           <a:solidFill>
-            <a:srgbClr val="8C56B3"/>
+            <a:srgbClr val="9651C8"/>
           </a:solidFill>
           <a:ln>
             <a:noFill/>
@@ -8811,7 +8811,7 @@
             <a:r>
               <a:rPr sz="1800" b="1" i="0">
                 <a:solidFill>
-                  <a:srgbClr val="573371"/>
+                  <a:srgbClr val="4E226D"/>
                 </a:solidFill>
               </a:rPr>
               <a:t>정리할 날짜</a:t>
@@ -8914,34 +8914,34 @@
         <a:sysClr val="window" lastClr="FFFFFF"/>
       </a:lt1>
       <a:dk2>
-        <a:srgbClr val="573371"/>
+        <a:srgbClr val="4E226D"/>
       </a:dk2>
       <a:lt2>
-        <a:srgbClr val="F5F1F9"/>
+        <a:srgbClr val="F8F3FC"/>
       </a:lt2>
       <a:accent1>
-        <a:srgbClr val="8C56B3"/>
+        <a:srgbClr val="9651C8"/>
       </a:accent1>
       <a:accent2>
-        <a:srgbClr val="868D3F"/>
+        <a:srgbClr val="339941"/>
       </a:accent2>
       <a:accent3>
-        <a:srgbClr val="573371"/>
+        <a:srgbClr val="4E226D"/>
       </a:accent3>
       <a:accent4>
-        <a:srgbClr val="E3D3EE"/>
+        <a:srgbClr val="E8D4F7"/>
       </a:accent4>
       <a:accent5>
-        <a:srgbClr val="897279"/>
+        <a:srgbClr val="647584"/>
       </a:accent5>
       <a:accent6>
-        <a:srgbClr val="9A85AA"/>
+        <a:srgbClr val="957AA7"/>
       </a:accent6>
       <a:hlink>
-        <a:srgbClr val="8C56B3"/>
+        <a:srgbClr val="9651C8"/>
       </a:hlink>
       <a:folHlink>
-        <a:srgbClr val="573371"/>
+        <a:srgbClr val="4E226D"/>
       </a:folHlink>
     </a:clrScheme>
     <a:fontScheme name="Office">

--- a/public/fun/pack/pptx/review/보장점검양식_11_본인점검_라일락골목.pptx
+++ b/public/fun/pack/pptx/review/보장점검양식_11_본인점검_라일락골목.pptx
@@ -3286,6 +3286,14 @@
 <file path=ppt/slides/slide1.xml><?xml version="1.0" encoding="utf-8"?>
 <p:sld xmlns:a="http://schemas.openxmlformats.org/drawingml/2006/main" xmlns:p="http://schemas.openxmlformats.org/presentationml/2006/main" xmlns:r="http://schemas.openxmlformats.org/officeDocument/2006/relationships">
   <p:cSld>
+    <p:bg>
+      <p:bgPr>
+        <a:solidFill>
+          <a:srgbClr val="F5EAFD"/>
+        </a:solidFill>
+        <a:effectLst/>
+      </p:bgPr>
+    </p:bg>
     <p:spTree>
       <p:nvGrpSpPr>
         <p:cNvPr id="1" name=""/>
@@ -3293,30 +3301,106 @@
         <p:nvPr/>
       </p:nvGrpSpPr>
       <p:grpSpPr/>
-      <p:pic>
-        <p:nvPicPr>
-          <p:cNvPr id="3" name="표지 그림" descr="review-11.jpg"/>
-          <p:cNvPicPr>
-            <a:picLocks noChangeAspect="1"/>
-          </p:cNvPicPr>
+      <p:sp>
+        <p:nvSpPr>
+          <p:cNvPr id="3" name="장식"/>
+          <p:cNvSpPr/>
           <p:nvPr/>
-        </p:nvPicPr>
-        <p:blipFill>
-          <a:blip r:embed="rId2"/>
-          <a:stretch>
-            <a:fillRect/>
-          </a:stretch>
-        </p:blipFill>
-        <p:spPr>
-          <a:xfrm>
-            <a:off x="0" y="0"/>
-            <a:ext cx="12191695" cy="6858000"/>
+        </p:nvSpPr>
+        <p:spPr>
+          <a:xfrm>
+            <a:off x="1463003" y="960120"/>
+            <a:ext cx="3657508" cy="4526280"/>
+          </a:xfrm>
+          <a:prstGeom prst="roundRect">
+            <a:avLst>
+              <a:gd name="adj" fmla="val 4000"/>
+            </a:avLst>
+          </a:prstGeom>
+          <a:solidFill>
+            <a:srgbClr val="C997ED"/>
+          </a:solidFill>
+          <a:ln>
+            <a:noFill/>
+          </a:ln>
+        </p:spPr>
+        <p:txBody>
+          <a:bodyPr rtlCol="0" anchor="ctr"/>
+          <a:lstStyle/>
+          <a:p>
+            <a:pPr algn="ctr"/>
+          </a:p>
+        </p:txBody>
+      </p:sp>
+      <p:sp>
+        <p:nvSpPr>
+          <p:cNvPr id="4" name="장식"/>
+          <p:cNvSpPr/>
+          <p:nvPr/>
+        </p:nvSpPr>
+        <p:spPr>
+          <a:xfrm>
+            <a:off x="975335" y="1234439"/>
+            <a:ext cx="3657508" cy="4526280"/>
+          </a:xfrm>
+          <a:prstGeom prst="roundRect">
+            <a:avLst>
+              <a:gd name="adj" fmla="val 4000"/>
+            </a:avLst>
+          </a:prstGeom>
+          <a:noFill/>
+          <a:ln w="9525">
+            <a:solidFill>
+              <a:srgbClr val="26231F"/>
+            </a:solidFill>
+          </a:ln>
+        </p:spPr>
+        <p:txBody>
+          <a:bodyPr rtlCol="0" anchor="ctr"/>
+          <a:lstStyle/>
+          <a:p>
+            <a:pPr algn="ctr"/>
+          </a:p>
+        </p:txBody>
+      </p:sp>
+      <p:sp>
+        <p:nvSpPr>
+          <p:cNvPr id="5" name="라벨"/>
+          <p:cNvSpPr txBox="1"/>
+          <p:nvPr/>
+        </p:nvSpPr>
+        <p:spPr>
+          <a:xfrm>
+            <a:off x="6827349" y="2148840"/>
+            <a:ext cx="4632844" cy="274320"/>
           </a:xfrm>
           <a:prstGeom prst="rect">
             <a:avLst/>
           </a:prstGeom>
-        </p:spPr>
-      </p:pic>
+          <a:noFill/>
+        </p:spPr>
+        <p:txBody>
+          <a:bodyPr wrap="square" lIns="54864" rIns="54864" tIns="27432" bIns="27432" anchor="t">
+            <a:noAutofit/>
+          </a:bodyPr>
+          <a:lstStyle/>
+          <a:p>
+            <a:pPr algn="l">
+              <a:lnSpc>
+                <a:spcPct val="115000"/>
+              </a:lnSpc>
+            </a:pPr>
+            <a:r>
+              <a:rPr sz="1000" b="1" i="0" spc="250">
+                <a:solidFill>
+                  <a:srgbClr val="26231F"/>
+                </a:solidFill>
+              </a:rPr>
+              <a:t>INSURANCE CHECK</a:t>
+            </a:r>
+          </a:p>
+        </p:txBody>
+      </p:sp>
       <p:sp>
         <p:nvSpPr>
           <p:cNvPr id="2" name="Title 1"/>
@@ -3329,8 +3413,8 @@
         </p:nvSpPr>
         <p:spPr>
           <a:xfrm>
-            <a:off x="853418" y="2057400"/>
-            <a:ext cx="6095847" cy="1554480"/>
+            <a:off x="6827349" y="2606040"/>
+            <a:ext cx="4632844" cy="1188720"/>
           </a:xfrm>
         </p:spPr>
         <p:txBody>
@@ -3347,7 +3431,7 @@
             <a:r>
               <a:rPr sz="3600" b="1" i="0">
                 <a:solidFill>
-                  <a:srgbClr val="4E226D"/>
+                  <a:srgbClr val="26231F"/>
                 </a:solidFill>
               </a:rPr>
               <a:t>우리 보험 점검 시간</a:t>
@@ -3357,14 +3441,14 @@
       </p:sp>
       <p:sp>
         <p:nvSpPr>
-          <p:cNvPr id="4" name="한 줄 문구"/>
+          <p:cNvPr id="6" name="한 줄 문구"/>
           <p:cNvSpPr txBox="1"/>
           <p:nvPr/>
         </p:nvSpPr>
         <p:spPr>
           <a:xfrm>
-            <a:off x="853418" y="3749039"/>
-            <a:ext cx="6095847" cy="822960"/>
+            <a:off x="6827349" y="3886200"/>
+            <a:ext cx="4632844" cy="822960"/>
           </a:xfrm>
           <a:prstGeom prst="rect">
             <a:avLst/>
@@ -3383,26 +3467,26 @@
               </a:lnSpc>
             </a:pPr>
             <a:r>
-              <a:rPr sz="1700" b="0" i="1">
+              <a:rPr sz="1700" b="0" i="0">
                 <a:solidFill>
-                  <a:srgbClr val="4E226D"/>
+                  <a:srgbClr val="26231F"/>
                 </a:solidFill>
               </a:rPr>
-              <a:t>봄맞이 정리하듯 서류부터 모읍니다</a:t>
+              <a:t>대청소하듯 서류부터 모읍니다</a:t>
             </a:r>
           </a:p>
         </p:txBody>
       </p:sp>
       <p:sp>
         <p:nvSpPr>
-          <p:cNvPr id="5" name="안내 문구"/>
+          <p:cNvPr id="7" name="안내 문구"/>
           <p:cNvSpPr txBox="1"/>
           <p:nvPr/>
         </p:nvSpPr>
         <p:spPr>
           <a:xfrm>
-            <a:off x="853418" y="4617720"/>
-            <a:ext cx="6095847" cy="914400"/>
+            <a:off x="6827349" y="4754880"/>
+            <a:ext cx="4632844" cy="914400"/>
           </a:xfrm>
           <a:prstGeom prst="rect">
             <a:avLst/>
@@ -3423,10 +3507,10 @@
             <a:r>
               <a:rPr sz="1400" b="0" i="0">
                 <a:solidFill>
-                  <a:srgbClr val="666666"/>
+                  <a:srgbClr val="26231F"/>
                 </a:solidFill>
               </a:rPr>
-              <a:t>본인 점검 · 2027. 00. 00</a:t>
+              <a:t>본인 점검 · 날짜 입력</a:t>
             </a:r>
           </a:p>
           <a:p>
@@ -3438,7 +3522,7 @@
             <a:r>
               <a:rPr sz="1400" b="0" i="0">
                 <a:solidFill>
-                  <a:srgbClr val="666666"/>
+                  <a:srgbClr val="26231F"/>
                 </a:solidFill>
               </a:rPr>
               <a:t>가입 내용을 정리하고 함께 확인하는 양식</a:t>
@@ -3480,14 +3564,14 @@
         </p:nvSpPr>
         <p:spPr>
           <a:xfrm>
-            <a:off x="9905695" y="-1463040"/>
-            <a:ext cx="3840480" cy="3840480"/>
+            <a:off x="10180015" y="-1645920"/>
+            <a:ext cx="3474720" cy="3474720"/>
           </a:xfrm>
           <a:prstGeom prst="ellipse">
             <a:avLst/>
           </a:prstGeom>
           <a:solidFill>
-            <a:srgbClr val="E8D4F7"/>
+            <a:srgbClr val="D2A6F2"/>
           </a:solidFill>
           <a:ln>
             <a:noFill/>
@@ -3503,20 +3587,58 @@
       </p:sp>
       <p:sp>
         <p:nvSpPr>
-          <p:cNvPr id="4" name="장식"/>
+          <p:cNvPr id="4" name="상단 라벨"/>
+          <p:cNvSpPr txBox="1"/>
+          <p:nvPr/>
+        </p:nvSpPr>
+        <p:spPr>
+          <a:xfrm>
+            <a:off x="640080" y="274320"/>
+            <a:ext cx="5486400" cy="274320"/>
+          </a:xfrm>
+          <a:prstGeom prst="rect">
+            <a:avLst/>
+          </a:prstGeom>
+          <a:noFill/>
+        </p:spPr>
+        <p:txBody>
+          <a:bodyPr wrap="square" lIns="54864" rIns="54864" tIns="27432" bIns="27432" anchor="ctr">
+            <a:noAutofit/>
+          </a:bodyPr>
+          <a:lstStyle/>
+          <a:p>
+            <a:pPr algn="l">
+              <a:lnSpc>
+                <a:spcPct val="115000"/>
+              </a:lnSpc>
+            </a:pPr>
+            <a:r>
+              <a:rPr sz="900" b="1" i="0" spc="250">
+                <a:solidFill>
+                  <a:srgbClr val="26231F"/>
+                </a:solidFill>
+              </a:rPr>
+              <a:t>INSURANCE CHECK</a:t>
+            </a:r>
+          </a:p>
+        </p:txBody>
+      </p:sp>
+      <p:sp>
+        <p:nvSpPr>
+          <p:cNvPr id="5" name="포인트"/>
           <p:cNvSpPr/>
           <p:nvPr/>
         </p:nvSpPr>
         <p:spPr>
-          <a:xfrm>
-            <a:off x="11094415" y="274320"/>
-            <a:ext cx="411480" cy="411480"/>
-          </a:xfrm>
-          <a:prstGeom prst="ellipse">
+          <a:xfrm rot="18900000">
+            <a:off x="11048695" y="502919"/>
+            <a:ext cx="274320" cy="274320"/>
+          </a:xfrm>
+          <a:prstGeom prst="teardrop">
             <a:avLst/>
           </a:prstGeom>
           <a:solidFill>
-            <a:srgbClr val="9651C8"/>
+            <a:srgbClr val="FFFFFF"/>
           </a:solidFill>
           <a:ln>
             <a:noFill/>
@@ -3542,8 +3664,8 @@
         </p:nvSpPr>
         <p:spPr>
           <a:xfrm>
-            <a:off x="640080" y="457200"/>
-            <a:ext cx="9722815" cy="868680"/>
+            <a:off x="640080" y="658368"/>
+            <a:ext cx="9082735" cy="868680"/>
           </a:xfrm>
         </p:spPr>
         <p:txBody>
@@ -3560,7 +3682,7 @@
             <a:r>
               <a:rPr sz="3000" b="1" i="0">
                 <a:solidFill>
-                  <a:srgbClr val="4E226D"/>
+                  <a:srgbClr val="26231F"/>
                 </a:solidFill>
               </a:rPr>
               <a:t>점검 대상 현황</a:t>
@@ -3570,14 +3692,14 @@
       </p:sp>
       <p:graphicFrame>
         <p:nvGraphicFramePr>
-          <p:cNvPr id="5" name="표"/>
+          <p:cNvPr id="6" name="표"/>
           <p:cNvGraphicFramePr>
             <a:graphicFrameLocks noGrp="1"/>
           </p:cNvGraphicFramePr>
           <p:nvPr/>
         </p:nvGraphicFramePr>
         <p:xfrm>
-          <a:off x="640080" y="1600200"/>
+          <a:off x="640080" y="1783080"/>
           <a:ext cx="10911534" cy="3657600"/>
         </p:xfrm>
         <a:graphic>
@@ -3600,7 +3722,7 @@
                       <a:r>
                         <a:rPr sz="1600" b="1">
                           <a:solidFill>
-                            <a:srgbClr val="FFFFFF"/>
+                            <a:srgbClr val="26231F"/>
                           </a:solidFill>
                         </a:rPr>
                         <a:t>구분</a:t>
@@ -3610,30 +3732,30 @@
                   <a:tcPr anchor="ctr" marL="73152" marR="73152">
                     <a:lnL w="9525" cap="flat" cmpd="sng" algn="ctr">
                       <a:solidFill>
-                        <a:srgbClr val="9651C8"/>
+                        <a:srgbClr val="C997ED"/>
                       </a:solidFill>
                       <a:prstDash val="solid"/>
                     </a:lnL>
                     <a:lnR w="9525" cap="flat" cmpd="sng" algn="ctr">
                       <a:solidFill>
-                        <a:srgbClr val="9651C8"/>
+                        <a:srgbClr val="C997ED"/>
                       </a:solidFill>
                       <a:prstDash val="solid"/>
                     </a:lnR>
                     <a:lnT w="9525" cap="flat" cmpd="sng" algn="ctr">
                       <a:solidFill>
-                        <a:srgbClr val="9651C8"/>
+                        <a:srgbClr val="C997ED"/>
                       </a:solidFill>
                       <a:prstDash val="solid"/>
                     </a:lnT>
                     <a:lnB w="9525" cap="flat" cmpd="sng" algn="ctr">
                       <a:solidFill>
-                        <a:srgbClr val="9651C8"/>
+                        <a:srgbClr val="C997ED"/>
                       </a:solidFill>
                       <a:prstDash val="solid"/>
                     </a:lnB>
                     <a:solidFill>
-                      <a:srgbClr val="9651C8"/>
+                      <a:srgbClr val="C997ED"/>
                     </a:solidFill>
                   </a:tcPr>
                 </a:tc>
@@ -3646,7 +3768,7 @@
                       <a:r>
                         <a:rPr sz="1600" b="1">
                           <a:solidFill>
-                            <a:srgbClr val="FFFFFF"/>
+                            <a:srgbClr val="26231F"/>
                           </a:solidFill>
                         </a:rPr>
                         <a:t>내용</a:t>
@@ -3656,30 +3778,30 @@
                   <a:tcPr anchor="ctr" marL="73152" marR="73152">
                     <a:lnL w="9525" cap="flat" cmpd="sng" algn="ctr">
                       <a:solidFill>
-                        <a:srgbClr val="9651C8"/>
+                        <a:srgbClr val="C997ED"/>
                       </a:solidFill>
                       <a:prstDash val="solid"/>
                     </a:lnL>
                     <a:lnR w="9525" cap="flat" cmpd="sng" algn="ctr">
                       <a:solidFill>
-                        <a:srgbClr val="9651C8"/>
+                        <a:srgbClr val="C997ED"/>
                       </a:solidFill>
                       <a:prstDash val="solid"/>
                     </a:lnR>
                     <a:lnT w="9525" cap="flat" cmpd="sng" algn="ctr">
                       <a:solidFill>
-                        <a:srgbClr val="9651C8"/>
+                        <a:srgbClr val="C997ED"/>
                       </a:solidFill>
                       <a:prstDash val="solid"/>
                     </a:lnT>
                     <a:lnB w="9525" cap="flat" cmpd="sng" algn="ctr">
                       <a:solidFill>
-                        <a:srgbClr val="9651C8"/>
+                        <a:srgbClr val="C997ED"/>
                       </a:solidFill>
                       <a:prstDash val="solid"/>
                     </a:lnB>
                     <a:solidFill>
-                      <a:srgbClr val="9651C8"/>
+                      <a:srgbClr val="C997ED"/>
                     </a:solidFill>
                   </a:tcPr>
                 </a:tc>
@@ -3694,7 +3816,7 @@
                       <a:r>
                         <a:rPr sz="1600" b="1">
                           <a:solidFill>
-                            <a:srgbClr val="4E226D"/>
+                            <a:srgbClr val="3B2749"/>
                           </a:solidFill>
                         </a:rPr>
                         <a:t>이름</a:t>
@@ -3704,30 +3826,30 @@
                   <a:tcPr anchor="ctr" marL="73152" marR="73152">
                     <a:lnL w="9525" cap="flat" cmpd="sng" algn="ctr">
                       <a:solidFill>
-                        <a:srgbClr val="E8D4F7"/>
+                        <a:srgbClr val="E9D1FA"/>
                       </a:solidFill>
                       <a:prstDash val="solid"/>
                     </a:lnL>
                     <a:lnR w="9525" cap="flat" cmpd="sng" algn="ctr">
                       <a:solidFill>
-                        <a:srgbClr val="E8D4F7"/>
+                        <a:srgbClr val="E9D1FA"/>
                       </a:solidFill>
                       <a:prstDash val="solid"/>
                     </a:lnR>
                     <a:lnT w="9525" cap="flat" cmpd="sng" algn="ctr">
                       <a:solidFill>
-                        <a:srgbClr val="E8D4F7"/>
+                        <a:srgbClr val="E9D1FA"/>
                       </a:solidFill>
                       <a:prstDash val="solid"/>
                     </a:lnT>
                     <a:lnB w="9525" cap="flat" cmpd="sng" algn="ctr">
                       <a:solidFill>
-                        <a:srgbClr val="E8D4F7"/>
+                        <a:srgbClr val="E9D1FA"/>
                       </a:solidFill>
                       <a:prstDash val="solid"/>
                     </a:lnB>
                     <a:solidFill>
-                      <a:srgbClr val="E8D4F7"/>
+                      <a:srgbClr val="E9D1FA"/>
                     </a:solidFill>
                   </a:tcPr>
                 </a:tc>
@@ -3740,7 +3862,7 @@
                       <a:r>
                         <a:rPr sz="1600" b="0">
                           <a:solidFill>
-                            <a:srgbClr val="2B2B2B"/>
+                            <a:srgbClr val="26231F"/>
                           </a:solidFill>
                         </a:rPr>
                         <a:t/>
@@ -3750,25 +3872,25 @@
                   <a:tcPr anchor="ctr" marL="73152" marR="73152">
                     <a:lnL w="9525" cap="flat" cmpd="sng" algn="ctr">
                       <a:solidFill>
-                        <a:srgbClr val="E8D4F7"/>
+                        <a:srgbClr val="E9D1FA"/>
                       </a:solidFill>
                       <a:prstDash val="solid"/>
                     </a:lnL>
                     <a:lnR w="9525" cap="flat" cmpd="sng" algn="ctr">
                       <a:solidFill>
-                        <a:srgbClr val="E8D4F7"/>
+                        <a:srgbClr val="E9D1FA"/>
                       </a:solidFill>
                       <a:prstDash val="solid"/>
                     </a:lnR>
                     <a:lnT w="9525" cap="flat" cmpd="sng" algn="ctr">
                       <a:solidFill>
-                        <a:srgbClr val="E8D4F7"/>
+                        <a:srgbClr val="E9D1FA"/>
                       </a:solidFill>
                       <a:prstDash val="solid"/>
                     </a:lnT>
                     <a:lnB w="9525" cap="flat" cmpd="sng" algn="ctr">
                       <a:solidFill>
-                        <a:srgbClr val="E8D4F7"/>
+                        <a:srgbClr val="E9D1FA"/>
                       </a:solidFill>
                       <a:prstDash val="solid"/>
                     </a:lnB>
@@ -3788,7 +3910,7 @@
                       <a:r>
                         <a:rPr sz="1600" b="1">
                           <a:solidFill>
-                            <a:srgbClr val="4E226D"/>
+                            <a:srgbClr val="3B2749"/>
                           </a:solidFill>
                         </a:rPr>
                         <a:t>나이</a:t>
@@ -3798,30 +3920,30 @@
                   <a:tcPr anchor="ctr" marL="73152" marR="73152">
                     <a:lnL w="9525" cap="flat" cmpd="sng" algn="ctr">
                       <a:solidFill>
-                        <a:srgbClr val="E8D4F7"/>
+                        <a:srgbClr val="E9D1FA"/>
                       </a:solidFill>
                       <a:prstDash val="solid"/>
                     </a:lnL>
                     <a:lnR w="9525" cap="flat" cmpd="sng" algn="ctr">
                       <a:solidFill>
-                        <a:srgbClr val="E8D4F7"/>
+                        <a:srgbClr val="E9D1FA"/>
                       </a:solidFill>
                       <a:prstDash val="solid"/>
                     </a:lnR>
                     <a:lnT w="9525" cap="flat" cmpd="sng" algn="ctr">
                       <a:solidFill>
-                        <a:srgbClr val="E8D4F7"/>
+                        <a:srgbClr val="E9D1FA"/>
                       </a:solidFill>
                       <a:prstDash val="solid"/>
                     </a:lnT>
                     <a:lnB w="9525" cap="flat" cmpd="sng" algn="ctr">
                       <a:solidFill>
-                        <a:srgbClr val="E8D4F7"/>
+                        <a:srgbClr val="E9D1FA"/>
                       </a:solidFill>
                       <a:prstDash val="solid"/>
                     </a:lnB>
                     <a:solidFill>
-                      <a:srgbClr val="E8D4F7"/>
+                      <a:srgbClr val="E9D1FA"/>
                     </a:solidFill>
                   </a:tcPr>
                 </a:tc>
@@ -3834,7 +3956,7 @@
                       <a:r>
                         <a:rPr sz="1600" b="0">
                           <a:solidFill>
-                            <a:srgbClr val="2B2B2B"/>
+                            <a:srgbClr val="26231F"/>
                           </a:solidFill>
                         </a:rPr>
                         <a:t/>
@@ -3844,30 +3966,30 @@
                   <a:tcPr anchor="ctr" marL="73152" marR="73152">
                     <a:lnL w="9525" cap="flat" cmpd="sng" algn="ctr">
                       <a:solidFill>
-                        <a:srgbClr val="E8D4F7"/>
+                        <a:srgbClr val="E9D1FA"/>
                       </a:solidFill>
                       <a:prstDash val="solid"/>
                     </a:lnL>
                     <a:lnR w="9525" cap="flat" cmpd="sng" algn="ctr">
                       <a:solidFill>
-                        <a:srgbClr val="E8D4F7"/>
+                        <a:srgbClr val="E9D1FA"/>
                       </a:solidFill>
                       <a:prstDash val="solid"/>
                     </a:lnR>
                     <a:lnT w="9525" cap="flat" cmpd="sng" algn="ctr">
                       <a:solidFill>
-                        <a:srgbClr val="E8D4F7"/>
+                        <a:srgbClr val="E9D1FA"/>
                       </a:solidFill>
                       <a:prstDash val="solid"/>
                     </a:lnT>
                     <a:lnB w="9525" cap="flat" cmpd="sng" algn="ctr">
                       <a:solidFill>
-                        <a:srgbClr val="E8D4F7"/>
+                        <a:srgbClr val="E9D1FA"/>
                       </a:solidFill>
                       <a:prstDash val="solid"/>
                     </a:lnB>
                     <a:solidFill>
-                      <a:srgbClr val="F8F3FC"/>
+                      <a:srgbClr val="F5EAFD"/>
                     </a:solidFill>
                   </a:tcPr>
                 </a:tc>
@@ -3882,7 +4004,7 @@
                       <a:r>
                         <a:rPr sz="1600" b="1">
                           <a:solidFill>
-                            <a:srgbClr val="4E226D"/>
+                            <a:srgbClr val="3B2749"/>
                           </a:solidFill>
                         </a:rPr>
                         <a:t>직업</a:t>
@@ -3892,30 +4014,30 @@
                   <a:tcPr anchor="ctr" marL="73152" marR="73152">
                     <a:lnL w="9525" cap="flat" cmpd="sng" algn="ctr">
                       <a:solidFill>
-                        <a:srgbClr val="E8D4F7"/>
+                        <a:srgbClr val="E9D1FA"/>
                       </a:solidFill>
                       <a:prstDash val="solid"/>
                     </a:lnL>
                     <a:lnR w="9525" cap="flat" cmpd="sng" algn="ctr">
                       <a:solidFill>
-                        <a:srgbClr val="E8D4F7"/>
+                        <a:srgbClr val="E9D1FA"/>
                       </a:solidFill>
                       <a:prstDash val="solid"/>
                     </a:lnR>
                     <a:lnT w="9525" cap="flat" cmpd="sng" algn="ctr">
                       <a:solidFill>
-                        <a:srgbClr val="E8D4F7"/>
+                        <a:srgbClr val="E9D1FA"/>
                       </a:solidFill>
                       <a:prstDash val="solid"/>
                     </a:lnT>
                     <a:lnB w="9525" cap="flat" cmpd="sng" algn="ctr">
                       <a:solidFill>
-                        <a:srgbClr val="E8D4F7"/>
+                        <a:srgbClr val="E9D1FA"/>
                       </a:solidFill>
                       <a:prstDash val="solid"/>
                     </a:lnB>
                     <a:solidFill>
-                      <a:srgbClr val="E8D4F7"/>
+                      <a:srgbClr val="E9D1FA"/>
                     </a:solidFill>
                   </a:tcPr>
                 </a:tc>
@@ -3928,7 +4050,7 @@
                       <a:r>
                         <a:rPr sz="1600" b="0">
                           <a:solidFill>
-                            <a:srgbClr val="2B2B2B"/>
+                            <a:srgbClr val="26231F"/>
                           </a:solidFill>
                         </a:rPr>
                         <a:t/>
@@ -3938,25 +4060,25 @@
                   <a:tcPr anchor="ctr" marL="73152" marR="73152">
                     <a:lnL w="9525" cap="flat" cmpd="sng" algn="ctr">
                       <a:solidFill>
-                        <a:srgbClr val="E8D4F7"/>
+                        <a:srgbClr val="E9D1FA"/>
                       </a:solidFill>
                       <a:prstDash val="solid"/>
                     </a:lnL>
                     <a:lnR w="9525" cap="flat" cmpd="sng" algn="ctr">
                       <a:solidFill>
-                        <a:srgbClr val="E8D4F7"/>
+                        <a:srgbClr val="E9D1FA"/>
                       </a:solidFill>
                       <a:prstDash val="solid"/>
                     </a:lnR>
                     <a:lnT w="9525" cap="flat" cmpd="sng" algn="ctr">
                       <a:solidFill>
-                        <a:srgbClr val="E8D4F7"/>
+                        <a:srgbClr val="E9D1FA"/>
                       </a:solidFill>
                       <a:prstDash val="solid"/>
                     </a:lnT>
                     <a:lnB w="9525" cap="flat" cmpd="sng" algn="ctr">
                       <a:solidFill>
-                        <a:srgbClr val="E8D4F7"/>
+                        <a:srgbClr val="E9D1FA"/>
                       </a:solidFill>
                       <a:prstDash val="solid"/>
                     </a:lnB>
@@ -3976,7 +4098,7 @@
                       <a:r>
                         <a:rPr sz="1600" b="1">
                           <a:solidFill>
-                            <a:srgbClr val="4E226D"/>
+                            <a:srgbClr val="3B2749"/>
                           </a:solidFill>
                         </a:rPr>
                         <a:t>가족 구성</a:t>
@@ -3986,30 +4108,30 @@
                   <a:tcPr anchor="ctr" marL="73152" marR="73152">
                     <a:lnL w="9525" cap="flat" cmpd="sng" algn="ctr">
                       <a:solidFill>
-                        <a:srgbClr val="E8D4F7"/>
+                        <a:srgbClr val="E9D1FA"/>
                       </a:solidFill>
                       <a:prstDash val="solid"/>
                     </a:lnL>
                     <a:lnR w="9525" cap="flat" cmpd="sng" algn="ctr">
                       <a:solidFill>
-                        <a:srgbClr val="E8D4F7"/>
+                        <a:srgbClr val="E9D1FA"/>
                       </a:solidFill>
                       <a:prstDash val="solid"/>
                     </a:lnR>
                     <a:lnT w="9525" cap="flat" cmpd="sng" algn="ctr">
                       <a:solidFill>
-                        <a:srgbClr val="E8D4F7"/>
+                        <a:srgbClr val="E9D1FA"/>
                       </a:solidFill>
                       <a:prstDash val="solid"/>
                     </a:lnT>
                     <a:lnB w="9525" cap="flat" cmpd="sng" algn="ctr">
                       <a:solidFill>
-                        <a:srgbClr val="E8D4F7"/>
+                        <a:srgbClr val="E9D1FA"/>
                       </a:solidFill>
                       <a:prstDash val="solid"/>
                     </a:lnB>
                     <a:solidFill>
-                      <a:srgbClr val="E8D4F7"/>
+                      <a:srgbClr val="E9D1FA"/>
                     </a:solidFill>
                   </a:tcPr>
                 </a:tc>
@@ -4022,7 +4144,7 @@
                       <a:r>
                         <a:rPr sz="1600" b="0">
                           <a:solidFill>
-                            <a:srgbClr val="2B2B2B"/>
+                            <a:srgbClr val="26231F"/>
                           </a:solidFill>
                         </a:rPr>
                         <a:t/>
@@ -4032,30 +4154,30 @@
                   <a:tcPr anchor="ctr" marL="73152" marR="73152">
                     <a:lnL w="9525" cap="flat" cmpd="sng" algn="ctr">
                       <a:solidFill>
-                        <a:srgbClr val="E8D4F7"/>
+                        <a:srgbClr val="E9D1FA"/>
                       </a:solidFill>
                       <a:prstDash val="solid"/>
                     </a:lnL>
                     <a:lnR w="9525" cap="flat" cmpd="sng" algn="ctr">
                       <a:solidFill>
-                        <a:srgbClr val="E8D4F7"/>
+                        <a:srgbClr val="E9D1FA"/>
                       </a:solidFill>
                       <a:prstDash val="solid"/>
                     </a:lnR>
                     <a:lnT w="9525" cap="flat" cmpd="sng" algn="ctr">
                       <a:solidFill>
-                        <a:srgbClr val="E8D4F7"/>
+                        <a:srgbClr val="E9D1FA"/>
                       </a:solidFill>
                       <a:prstDash val="solid"/>
                     </a:lnT>
                     <a:lnB w="9525" cap="flat" cmpd="sng" algn="ctr">
                       <a:solidFill>
-                        <a:srgbClr val="E8D4F7"/>
+                        <a:srgbClr val="E9D1FA"/>
                       </a:solidFill>
                       <a:prstDash val="solid"/>
                     </a:lnB>
                     <a:solidFill>
-                      <a:srgbClr val="F8F3FC"/>
+                      <a:srgbClr val="F5EAFD"/>
                     </a:solidFill>
                   </a:tcPr>
                 </a:tc>
@@ -4098,14 +4220,14 @@
         </p:nvSpPr>
         <p:spPr>
           <a:xfrm>
-            <a:off x="9905695" y="-1463040"/>
-            <a:ext cx="3840480" cy="3840480"/>
+            <a:off x="10180015" y="-1645920"/>
+            <a:ext cx="3474720" cy="3474720"/>
           </a:xfrm>
           <a:prstGeom prst="ellipse">
             <a:avLst/>
           </a:prstGeom>
           <a:solidFill>
-            <a:srgbClr val="E8D4F7"/>
+            <a:srgbClr val="D2A6F2"/>
           </a:solidFill>
           <a:ln>
             <a:noFill/>
@@ -4121,20 +4243,58 @@
       </p:sp>
       <p:sp>
         <p:nvSpPr>
-          <p:cNvPr id="4" name="장식"/>
+          <p:cNvPr id="4" name="상단 라벨"/>
+          <p:cNvSpPr txBox="1"/>
+          <p:nvPr/>
+        </p:nvSpPr>
+        <p:spPr>
+          <a:xfrm>
+            <a:off x="640080" y="274320"/>
+            <a:ext cx="5486400" cy="274320"/>
+          </a:xfrm>
+          <a:prstGeom prst="rect">
+            <a:avLst/>
+          </a:prstGeom>
+          <a:noFill/>
+        </p:spPr>
+        <p:txBody>
+          <a:bodyPr wrap="square" lIns="54864" rIns="54864" tIns="27432" bIns="27432" anchor="ctr">
+            <a:noAutofit/>
+          </a:bodyPr>
+          <a:lstStyle/>
+          <a:p>
+            <a:pPr algn="l">
+              <a:lnSpc>
+                <a:spcPct val="115000"/>
+              </a:lnSpc>
+            </a:pPr>
+            <a:r>
+              <a:rPr sz="900" b="1" i="0" spc="250">
+                <a:solidFill>
+                  <a:srgbClr val="26231F"/>
+                </a:solidFill>
+              </a:rPr>
+              <a:t>INSURANCE CHECK</a:t>
+            </a:r>
+          </a:p>
+        </p:txBody>
+      </p:sp>
+      <p:sp>
+        <p:nvSpPr>
+          <p:cNvPr id="5" name="포인트"/>
           <p:cNvSpPr/>
           <p:nvPr/>
         </p:nvSpPr>
         <p:spPr>
-          <a:xfrm>
-            <a:off x="11094415" y="274320"/>
-            <a:ext cx="411480" cy="411480"/>
-          </a:xfrm>
-          <a:prstGeom prst="ellipse">
+          <a:xfrm rot="18900000">
+            <a:off x="11048695" y="502919"/>
+            <a:ext cx="274320" cy="274320"/>
+          </a:xfrm>
+          <a:prstGeom prst="teardrop">
             <a:avLst/>
           </a:prstGeom>
           <a:solidFill>
-            <a:srgbClr val="9651C8"/>
+            <a:srgbClr val="FFFFFF"/>
           </a:solidFill>
           <a:ln>
             <a:noFill/>
@@ -4160,8 +4320,8 @@
         </p:nvSpPr>
         <p:spPr>
           <a:xfrm>
-            <a:off x="640080" y="457200"/>
-            <a:ext cx="9722815" cy="868680"/>
+            <a:off x="640080" y="658368"/>
+            <a:ext cx="9082735" cy="868680"/>
           </a:xfrm>
         </p:spPr>
         <p:txBody>
@@ -4178,7 +4338,7 @@
             <a:r>
               <a:rPr sz="3000" b="1" i="0">
                 <a:solidFill>
-                  <a:srgbClr val="4E226D"/>
+                  <a:srgbClr val="26231F"/>
                 </a:solidFill>
               </a:rPr>
               <a:t>가입한 보험 목록</a:t>
@@ -4188,14 +4348,14 @@
       </p:sp>
       <p:graphicFrame>
         <p:nvGraphicFramePr>
-          <p:cNvPr id="5" name="표"/>
+          <p:cNvPr id="6" name="표"/>
           <p:cNvGraphicFramePr>
             <a:graphicFrameLocks noGrp="1"/>
           </p:cNvGraphicFramePr>
           <p:nvPr/>
         </p:nvGraphicFramePr>
         <p:xfrm>
-          <a:off x="640080" y="1600200"/>
+          <a:off x="640080" y="1783080"/>
           <a:ext cx="10911535" cy="4224528"/>
         </p:xfrm>
         <a:graphic>
@@ -4221,7 +4381,7 @@
                       <a:r>
                         <a:rPr sz="1400" b="1">
                           <a:solidFill>
-                            <a:srgbClr val="FFFFFF"/>
+                            <a:srgbClr val="26231F"/>
                           </a:solidFill>
                         </a:rPr>
                         <a:t>보험회사</a:t>
@@ -4231,30 +4391,30 @@
                   <a:tcPr anchor="ctr" marL="73152" marR="73152">
                     <a:lnL w="9525" cap="flat" cmpd="sng" algn="ctr">
                       <a:solidFill>
-                        <a:srgbClr val="9651C8"/>
+                        <a:srgbClr val="C997ED"/>
                       </a:solidFill>
                       <a:prstDash val="solid"/>
                     </a:lnL>
                     <a:lnR w="9525" cap="flat" cmpd="sng" algn="ctr">
                       <a:solidFill>
-                        <a:srgbClr val="9651C8"/>
+                        <a:srgbClr val="C997ED"/>
                       </a:solidFill>
                       <a:prstDash val="solid"/>
                     </a:lnR>
                     <a:lnT w="9525" cap="flat" cmpd="sng" algn="ctr">
                       <a:solidFill>
-                        <a:srgbClr val="9651C8"/>
+                        <a:srgbClr val="C997ED"/>
                       </a:solidFill>
                       <a:prstDash val="solid"/>
                     </a:lnT>
                     <a:lnB w="9525" cap="flat" cmpd="sng" algn="ctr">
                       <a:solidFill>
-                        <a:srgbClr val="9651C8"/>
+                        <a:srgbClr val="C997ED"/>
                       </a:solidFill>
                       <a:prstDash val="solid"/>
                     </a:lnB>
                     <a:solidFill>
-                      <a:srgbClr val="9651C8"/>
+                      <a:srgbClr val="C997ED"/>
                     </a:solidFill>
                   </a:tcPr>
                 </a:tc>
@@ -4267,7 +4427,7 @@
                       <a:r>
                         <a:rPr sz="1400" b="1">
                           <a:solidFill>
-                            <a:srgbClr val="FFFFFF"/>
+                            <a:srgbClr val="26231F"/>
                           </a:solidFill>
                         </a:rPr>
                         <a:t>상품명</a:t>
@@ -4277,30 +4437,30 @@
                   <a:tcPr anchor="ctr" marL="73152" marR="73152">
                     <a:lnL w="9525" cap="flat" cmpd="sng" algn="ctr">
                       <a:solidFill>
-                        <a:srgbClr val="9651C8"/>
+                        <a:srgbClr val="C997ED"/>
                       </a:solidFill>
                       <a:prstDash val="solid"/>
                     </a:lnL>
                     <a:lnR w="9525" cap="flat" cmpd="sng" algn="ctr">
                       <a:solidFill>
-                        <a:srgbClr val="9651C8"/>
+                        <a:srgbClr val="C997ED"/>
                       </a:solidFill>
                       <a:prstDash val="solid"/>
                     </a:lnR>
                     <a:lnT w="9525" cap="flat" cmpd="sng" algn="ctr">
                       <a:solidFill>
-                        <a:srgbClr val="9651C8"/>
+                        <a:srgbClr val="C997ED"/>
                       </a:solidFill>
                       <a:prstDash val="solid"/>
                     </a:lnT>
                     <a:lnB w="9525" cap="flat" cmpd="sng" algn="ctr">
                       <a:solidFill>
-                        <a:srgbClr val="9651C8"/>
+                        <a:srgbClr val="C997ED"/>
                       </a:solidFill>
                       <a:prstDash val="solid"/>
                     </a:lnB>
                     <a:solidFill>
-                      <a:srgbClr val="9651C8"/>
+                      <a:srgbClr val="C997ED"/>
                     </a:solidFill>
                   </a:tcPr>
                 </a:tc>
@@ -4313,7 +4473,7 @@
                       <a:r>
                         <a:rPr sz="1400" b="1">
                           <a:solidFill>
-                            <a:srgbClr val="FFFFFF"/>
+                            <a:srgbClr val="26231F"/>
                           </a:solidFill>
                         </a:rPr>
                         <a:t>종류</a:t>
@@ -4323,30 +4483,30 @@
                   <a:tcPr anchor="ctr" marL="73152" marR="73152">
                     <a:lnL w="9525" cap="flat" cmpd="sng" algn="ctr">
                       <a:solidFill>
-                        <a:srgbClr val="9651C8"/>
+                        <a:srgbClr val="C997ED"/>
                       </a:solidFill>
                       <a:prstDash val="solid"/>
                     </a:lnL>
                     <a:lnR w="9525" cap="flat" cmpd="sng" algn="ctr">
                       <a:solidFill>
-                        <a:srgbClr val="9651C8"/>
+                        <a:srgbClr val="C997ED"/>
                       </a:solidFill>
                       <a:prstDash val="solid"/>
                     </a:lnR>
                     <a:lnT w="9525" cap="flat" cmpd="sng" algn="ctr">
                       <a:solidFill>
-                        <a:srgbClr val="9651C8"/>
+                        <a:srgbClr val="C997ED"/>
                       </a:solidFill>
                       <a:prstDash val="solid"/>
                     </a:lnT>
                     <a:lnB w="9525" cap="flat" cmpd="sng" algn="ctr">
                       <a:solidFill>
-                        <a:srgbClr val="9651C8"/>
+                        <a:srgbClr val="C997ED"/>
                       </a:solidFill>
                       <a:prstDash val="solid"/>
                     </a:lnB>
                     <a:solidFill>
-                      <a:srgbClr val="9651C8"/>
+                      <a:srgbClr val="C997ED"/>
                     </a:solidFill>
                   </a:tcPr>
                 </a:tc>
@@ -4359,7 +4519,7 @@
                       <a:r>
                         <a:rPr sz="1400" b="1">
                           <a:solidFill>
-                            <a:srgbClr val="FFFFFF"/>
+                            <a:srgbClr val="26231F"/>
                           </a:solidFill>
                         </a:rPr>
                         <a:t>만기일</a:t>
@@ -4369,30 +4529,30 @@
                   <a:tcPr anchor="ctr" marL="73152" marR="73152">
                     <a:lnL w="9525" cap="flat" cmpd="sng" algn="ctr">
                       <a:solidFill>
-                        <a:srgbClr val="9651C8"/>
+                        <a:srgbClr val="C997ED"/>
                       </a:solidFill>
                       <a:prstDash val="solid"/>
                     </a:lnL>
                     <a:lnR w="9525" cap="flat" cmpd="sng" algn="ctr">
                       <a:solidFill>
-                        <a:srgbClr val="9651C8"/>
+                        <a:srgbClr val="C997ED"/>
                       </a:solidFill>
                       <a:prstDash val="solid"/>
                     </a:lnR>
                     <a:lnT w="9525" cap="flat" cmpd="sng" algn="ctr">
                       <a:solidFill>
-                        <a:srgbClr val="9651C8"/>
+                        <a:srgbClr val="C997ED"/>
                       </a:solidFill>
                       <a:prstDash val="solid"/>
                     </a:lnT>
                     <a:lnB w="9525" cap="flat" cmpd="sng" algn="ctr">
                       <a:solidFill>
-                        <a:srgbClr val="9651C8"/>
+                        <a:srgbClr val="C997ED"/>
                       </a:solidFill>
                       <a:prstDash val="solid"/>
                     </a:lnB>
                     <a:solidFill>
-                      <a:srgbClr val="9651C8"/>
+                      <a:srgbClr val="C997ED"/>
                     </a:solidFill>
                   </a:tcPr>
                 </a:tc>
@@ -4405,7 +4565,7 @@
                       <a:r>
                         <a:rPr sz="1400" b="1">
                           <a:solidFill>
-                            <a:srgbClr val="FFFFFF"/>
+                            <a:srgbClr val="26231F"/>
                           </a:solidFill>
                         </a:rPr>
                         <a:t>월 보험료</a:t>
@@ -4415,30 +4575,30 @@
                   <a:tcPr anchor="ctr" marL="73152" marR="73152">
                     <a:lnL w="9525" cap="flat" cmpd="sng" algn="ctr">
                       <a:solidFill>
-                        <a:srgbClr val="9651C8"/>
+                        <a:srgbClr val="C997ED"/>
                       </a:solidFill>
                       <a:prstDash val="solid"/>
                     </a:lnL>
                     <a:lnR w="9525" cap="flat" cmpd="sng" algn="ctr">
                       <a:solidFill>
-                        <a:srgbClr val="9651C8"/>
+                        <a:srgbClr val="C997ED"/>
                       </a:solidFill>
                       <a:prstDash val="solid"/>
                     </a:lnR>
                     <a:lnT w="9525" cap="flat" cmpd="sng" algn="ctr">
                       <a:solidFill>
-                        <a:srgbClr val="9651C8"/>
+                        <a:srgbClr val="C997ED"/>
                       </a:solidFill>
                       <a:prstDash val="solid"/>
                     </a:lnT>
                     <a:lnB w="9525" cap="flat" cmpd="sng" algn="ctr">
                       <a:solidFill>
-                        <a:srgbClr val="9651C8"/>
+                        <a:srgbClr val="C997ED"/>
                       </a:solidFill>
                       <a:prstDash val="solid"/>
                     </a:lnB>
                     <a:solidFill>
-                      <a:srgbClr val="9651C8"/>
+                      <a:srgbClr val="C997ED"/>
                     </a:solidFill>
                   </a:tcPr>
                 </a:tc>
@@ -4453,7 +4613,7 @@
                       <a:r>
                         <a:rPr sz="1400" b="0">
                           <a:solidFill>
-                            <a:srgbClr val="2B2B2B"/>
+                            <a:srgbClr val="26231F"/>
                           </a:solidFill>
                         </a:rPr>
                         <a:t/>
@@ -4463,25 +4623,25 @@
                   <a:tcPr anchor="ctr" marL="73152" marR="73152">
                     <a:lnL w="9525" cap="flat" cmpd="sng" algn="ctr">
                       <a:solidFill>
-                        <a:srgbClr val="E8D4F7"/>
+                        <a:srgbClr val="E9D1FA"/>
                       </a:solidFill>
                       <a:prstDash val="solid"/>
                     </a:lnL>
                     <a:lnR w="9525" cap="flat" cmpd="sng" algn="ctr">
                       <a:solidFill>
-                        <a:srgbClr val="E8D4F7"/>
+                        <a:srgbClr val="E9D1FA"/>
                       </a:solidFill>
                       <a:prstDash val="solid"/>
                     </a:lnR>
                     <a:lnT w="9525" cap="flat" cmpd="sng" algn="ctr">
                       <a:solidFill>
-                        <a:srgbClr val="E8D4F7"/>
+                        <a:srgbClr val="E9D1FA"/>
                       </a:solidFill>
                       <a:prstDash val="solid"/>
                     </a:lnT>
                     <a:lnB w="9525" cap="flat" cmpd="sng" algn="ctr">
                       <a:solidFill>
-                        <a:srgbClr val="E8D4F7"/>
+                        <a:srgbClr val="E9D1FA"/>
                       </a:solidFill>
                       <a:prstDash val="solid"/>
                     </a:lnB>
@@ -4499,7 +4659,7 @@
                       <a:r>
                         <a:rPr sz="1400" b="0">
                           <a:solidFill>
-                            <a:srgbClr val="2B2B2B"/>
+                            <a:srgbClr val="26231F"/>
                           </a:solidFill>
                         </a:rPr>
                         <a:t/>
@@ -4509,25 +4669,25 @@
                   <a:tcPr anchor="ctr" marL="73152" marR="73152">
                     <a:lnL w="9525" cap="flat" cmpd="sng" algn="ctr">
                       <a:solidFill>
-                        <a:srgbClr val="E8D4F7"/>
+                        <a:srgbClr val="E9D1FA"/>
                       </a:solidFill>
                       <a:prstDash val="solid"/>
                     </a:lnL>
                     <a:lnR w="9525" cap="flat" cmpd="sng" algn="ctr">
                       <a:solidFill>
-                        <a:srgbClr val="E8D4F7"/>
+                        <a:srgbClr val="E9D1FA"/>
                       </a:solidFill>
                       <a:prstDash val="solid"/>
                     </a:lnR>
                     <a:lnT w="9525" cap="flat" cmpd="sng" algn="ctr">
                       <a:solidFill>
-                        <a:srgbClr val="E8D4F7"/>
+                        <a:srgbClr val="E9D1FA"/>
                       </a:solidFill>
                       <a:prstDash val="solid"/>
                     </a:lnT>
                     <a:lnB w="9525" cap="flat" cmpd="sng" algn="ctr">
                       <a:solidFill>
-                        <a:srgbClr val="E8D4F7"/>
+                        <a:srgbClr val="E9D1FA"/>
                       </a:solidFill>
                       <a:prstDash val="solid"/>
                     </a:lnB>
@@ -4545,7 +4705,7 @@
                       <a:r>
                         <a:rPr sz="1400" b="0">
                           <a:solidFill>
-                            <a:srgbClr val="2B2B2B"/>
+                            <a:srgbClr val="26231F"/>
                           </a:solidFill>
                         </a:rPr>
                         <a:t/>
@@ -4555,25 +4715,25 @@
                   <a:tcPr anchor="ctr" marL="73152" marR="73152">
                     <a:lnL w="9525" cap="flat" cmpd="sng" algn="ctr">
                       <a:solidFill>
-                        <a:srgbClr val="E8D4F7"/>
+                        <a:srgbClr val="E9D1FA"/>
                       </a:solidFill>
                       <a:prstDash val="solid"/>
                     </a:lnL>
                     <a:lnR w="9525" cap="flat" cmpd="sng" algn="ctr">
                       <a:solidFill>
-                        <a:srgbClr val="E8D4F7"/>
+                        <a:srgbClr val="E9D1FA"/>
                       </a:solidFill>
                       <a:prstDash val="solid"/>
                     </a:lnR>
                     <a:lnT w="9525" cap="flat" cmpd="sng" algn="ctr">
                       <a:solidFill>
-                        <a:srgbClr val="E8D4F7"/>
+                        <a:srgbClr val="E9D1FA"/>
                       </a:solidFill>
                       <a:prstDash val="solid"/>
                     </a:lnT>
                     <a:lnB w="9525" cap="flat" cmpd="sng" algn="ctr">
                       <a:solidFill>
-                        <a:srgbClr val="E8D4F7"/>
+                        <a:srgbClr val="E9D1FA"/>
                       </a:solidFill>
                       <a:prstDash val="solid"/>
                     </a:lnB>
@@ -4591,7 +4751,7 @@
                       <a:r>
                         <a:rPr sz="1400" b="0">
                           <a:solidFill>
-                            <a:srgbClr val="2B2B2B"/>
+                            <a:srgbClr val="26231F"/>
                           </a:solidFill>
                         </a:rPr>
                         <a:t/>
@@ -4601,25 +4761,25 @@
                   <a:tcPr anchor="ctr" marL="73152" marR="73152">
                     <a:lnL w="9525" cap="flat" cmpd="sng" algn="ctr">
                       <a:solidFill>
-                        <a:srgbClr val="E8D4F7"/>
+                        <a:srgbClr val="E9D1FA"/>
                       </a:solidFill>
                       <a:prstDash val="solid"/>
                     </a:lnL>
                     <a:lnR w="9525" cap="flat" cmpd="sng" algn="ctr">
                       <a:solidFill>
-                        <a:srgbClr val="E8D4F7"/>
+                        <a:srgbClr val="E9D1FA"/>
                       </a:solidFill>
                       <a:prstDash val="solid"/>
                     </a:lnR>
                     <a:lnT w="9525" cap="flat" cmpd="sng" algn="ctr">
                       <a:solidFill>
-                        <a:srgbClr val="E8D4F7"/>
+                        <a:srgbClr val="E9D1FA"/>
                       </a:solidFill>
                       <a:prstDash val="solid"/>
                     </a:lnT>
                     <a:lnB w="9525" cap="flat" cmpd="sng" algn="ctr">
                       <a:solidFill>
-                        <a:srgbClr val="E8D4F7"/>
+                        <a:srgbClr val="E9D1FA"/>
                       </a:solidFill>
                       <a:prstDash val="solid"/>
                     </a:lnB>
@@ -4637,7 +4797,7 @@
                       <a:r>
                         <a:rPr sz="1400" b="0">
                           <a:solidFill>
-                            <a:srgbClr val="2B2B2B"/>
+                            <a:srgbClr val="26231F"/>
                           </a:solidFill>
                         </a:rPr>
                         <a:t/>
@@ -4647,25 +4807,25 @@
                   <a:tcPr anchor="ctr" marL="73152" marR="73152">
                     <a:lnL w="9525" cap="flat" cmpd="sng" algn="ctr">
                       <a:solidFill>
-                        <a:srgbClr val="E8D4F7"/>
+                        <a:srgbClr val="E9D1FA"/>
                       </a:solidFill>
                       <a:prstDash val="solid"/>
                     </a:lnL>
                     <a:lnR w="9525" cap="flat" cmpd="sng" algn="ctr">
                       <a:solidFill>
-                        <a:srgbClr val="E8D4F7"/>
+                        <a:srgbClr val="E9D1FA"/>
                       </a:solidFill>
                       <a:prstDash val="solid"/>
                     </a:lnR>
                     <a:lnT w="9525" cap="flat" cmpd="sng" algn="ctr">
                       <a:solidFill>
-                        <a:srgbClr val="E8D4F7"/>
+                        <a:srgbClr val="E9D1FA"/>
                       </a:solidFill>
                       <a:prstDash val="solid"/>
                     </a:lnT>
                     <a:lnB w="9525" cap="flat" cmpd="sng" algn="ctr">
                       <a:solidFill>
-                        <a:srgbClr val="E8D4F7"/>
+                        <a:srgbClr val="E9D1FA"/>
                       </a:solidFill>
                       <a:prstDash val="solid"/>
                     </a:lnB>
@@ -4685,7 +4845,7 @@
                       <a:r>
                         <a:rPr sz="1400" b="0">
                           <a:solidFill>
-                            <a:srgbClr val="2B2B2B"/>
+                            <a:srgbClr val="26231F"/>
                           </a:solidFill>
                         </a:rPr>
                         <a:t/>
@@ -4695,30 +4855,30 @@
                   <a:tcPr anchor="ctr" marL="73152" marR="73152">
                     <a:lnL w="9525" cap="flat" cmpd="sng" algn="ctr">
                       <a:solidFill>
-                        <a:srgbClr val="E8D4F7"/>
+                        <a:srgbClr val="E9D1FA"/>
                       </a:solidFill>
                       <a:prstDash val="solid"/>
                     </a:lnL>
                     <a:lnR w="9525" cap="flat" cmpd="sng" algn="ctr">
                       <a:solidFill>
-                        <a:srgbClr val="E8D4F7"/>
+                        <a:srgbClr val="E9D1FA"/>
                       </a:solidFill>
                       <a:prstDash val="solid"/>
                     </a:lnR>
                     <a:lnT w="9525" cap="flat" cmpd="sng" algn="ctr">
                       <a:solidFill>
-                        <a:srgbClr val="E8D4F7"/>
+                        <a:srgbClr val="E9D1FA"/>
                       </a:solidFill>
                       <a:prstDash val="solid"/>
                     </a:lnT>
                     <a:lnB w="9525" cap="flat" cmpd="sng" algn="ctr">
                       <a:solidFill>
-                        <a:srgbClr val="E8D4F7"/>
+                        <a:srgbClr val="E9D1FA"/>
                       </a:solidFill>
                       <a:prstDash val="solid"/>
                     </a:lnB>
                     <a:solidFill>
-                      <a:srgbClr val="F8F3FC"/>
+                      <a:srgbClr val="F5EAFD"/>
                     </a:solidFill>
                   </a:tcPr>
                 </a:tc>
@@ -4731,7 +4891,7 @@
                       <a:r>
                         <a:rPr sz="1400" b="0">
                           <a:solidFill>
-                            <a:srgbClr val="2B2B2B"/>
+                            <a:srgbClr val="26231F"/>
                           </a:solidFill>
                         </a:rPr>
                         <a:t/>
@@ -4741,30 +4901,30 @@
                   <a:tcPr anchor="ctr" marL="73152" marR="73152">
                     <a:lnL w="9525" cap="flat" cmpd="sng" algn="ctr">
                       <a:solidFill>
-                        <a:srgbClr val="E8D4F7"/>
+                        <a:srgbClr val="E9D1FA"/>
                       </a:solidFill>
                       <a:prstDash val="solid"/>
                     </a:lnL>
                     <a:lnR w="9525" cap="flat" cmpd="sng" algn="ctr">
                       <a:solidFill>
-                        <a:srgbClr val="E8D4F7"/>
+                        <a:srgbClr val="E9D1FA"/>
                       </a:solidFill>
                       <a:prstDash val="solid"/>
                     </a:lnR>
                     <a:lnT w="9525" cap="flat" cmpd="sng" algn="ctr">
                       <a:solidFill>
-                        <a:srgbClr val="E8D4F7"/>
+                        <a:srgbClr val="E9D1FA"/>
                       </a:solidFill>
                       <a:prstDash val="solid"/>
                     </a:lnT>
                     <a:lnB w="9525" cap="flat" cmpd="sng" algn="ctr">
                       <a:solidFill>
-                        <a:srgbClr val="E8D4F7"/>
+                        <a:srgbClr val="E9D1FA"/>
                       </a:solidFill>
                       <a:prstDash val="solid"/>
                     </a:lnB>
                     <a:solidFill>
-                      <a:srgbClr val="F8F3FC"/>
+                      <a:srgbClr val="F5EAFD"/>
                     </a:solidFill>
                   </a:tcPr>
                 </a:tc>
@@ -4777,7 +4937,7 @@
                       <a:r>
                         <a:rPr sz="1400" b="0">
                           <a:solidFill>
-                            <a:srgbClr val="2B2B2B"/>
+                            <a:srgbClr val="26231F"/>
                           </a:solidFill>
                         </a:rPr>
                         <a:t/>
@@ -4787,30 +4947,30 @@
                   <a:tcPr anchor="ctr" marL="73152" marR="73152">
                     <a:lnL w="9525" cap="flat" cmpd="sng" algn="ctr">
                       <a:solidFill>
-                        <a:srgbClr val="E8D4F7"/>
+                        <a:srgbClr val="E9D1FA"/>
                       </a:solidFill>
                       <a:prstDash val="solid"/>
                     </a:lnL>
                     <a:lnR w="9525" cap="flat" cmpd="sng" algn="ctr">
                       <a:solidFill>
-                        <a:srgbClr val="E8D4F7"/>
+                        <a:srgbClr val="E9D1FA"/>
                       </a:solidFill>
                       <a:prstDash val="solid"/>
                     </a:lnR>
                     <a:lnT w="9525" cap="flat" cmpd="sng" algn="ctr">
                       <a:solidFill>
-                        <a:srgbClr val="E8D4F7"/>
+                        <a:srgbClr val="E9D1FA"/>
                       </a:solidFill>
                       <a:prstDash val="solid"/>
                     </a:lnT>
                     <a:lnB w="9525" cap="flat" cmpd="sng" algn="ctr">
                       <a:solidFill>
-                        <a:srgbClr val="E8D4F7"/>
+                        <a:srgbClr val="E9D1FA"/>
                       </a:solidFill>
                       <a:prstDash val="solid"/>
                     </a:lnB>
                     <a:solidFill>
-                      <a:srgbClr val="F8F3FC"/>
+                      <a:srgbClr val="F5EAFD"/>
                     </a:solidFill>
                   </a:tcPr>
                 </a:tc>
@@ -4823,7 +4983,7 @@
                       <a:r>
                         <a:rPr sz="1400" b="0">
                           <a:solidFill>
-                            <a:srgbClr val="2B2B2B"/>
+                            <a:srgbClr val="26231F"/>
                           </a:solidFill>
                         </a:rPr>
                         <a:t/>
@@ -4833,30 +4993,30 @@
                   <a:tcPr anchor="ctr" marL="73152" marR="73152">
                     <a:lnL w="9525" cap="flat" cmpd="sng" algn="ctr">
                       <a:solidFill>
-                        <a:srgbClr val="E8D4F7"/>
+                        <a:srgbClr val="E9D1FA"/>
                       </a:solidFill>
                       <a:prstDash val="solid"/>
                     </a:lnL>
                     <a:lnR w="9525" cap="flat" cmpd="sng" algn="ctr">
                       <a:solidFill>
-                        <a:srgbClr val="E8D4F7"/>
+                        <a:srgbClr val="E9D1FA"/>
                       </a:solidFill>
                       <a:prstDash val="solid"/>
                     </a:lnR>
                     <a:lnT w="9525" cap="flat" cmpd="sng" algn="ctr">
                       <a:solidFill>
-                        <a:srgbClr val="E8D4F7"/>
+                        <a:srgbClr val="E9D1FA"/>
                       </a:solidFill>
                       <a:prstDash val="solid"/>
                     </a:lnT>
                     <a:lnB w="9525" cap="flat" cmpd="sng" algn="ctr">
                       <a:solidFill>
-                        <a:srgbClr val="E8D4F7"/>
+                        <a:srgbClr val="E9D1FA"/>
                       </a:solidFill>
                       <a:prstDash val="solid"/>
                     </a:lnB>
                     <a:solidFill>
-                      <a:srgbClr val="F8F3FC"/>
+                      <a:srgbClr val="F5EAFD"/>
                     </a:solidFill>
                   </a:tcPr>
                 </a:tc>
@@ -4869,7 +5029,7 @@
                       <a:r>
                         <a:rPr sz="1400" b="0">
                           <a:solidFill>
-                            <a:srgbClr val="2B2B2B"/>
+                            <a:srgbClr val="26231F"/>
                           </a:solidFill>
                         </a:rPr>
                         <a:t/>
@@ -4879,30 +5039,30 @@
                   <a:tcPr anchor="ctr" marL="73152" marR="73152">
                     <a:lnL w="9525" cap="flat" cmpd="sng" algn="ctr">
                       <a:solidFill>
-                        <a:srgbClr val="E8D4F7"/>
+                        <a:srgbClr val="E9D1FA"/>
                       </a:solidFill>
                       <a:prstDash val="solid"/>
                     </a:lnL>
                     <a:lnR w="9525" cap="flat" cmpd="sng" algn="ctr">
                       <a:solidFill>
-                        <a:srgbClr val="E8D4F7"/>
+                        <a:srgbClr val="E9D1FA"/>
                       </a:solidFill>
                       <a:prstDash val="solid"/>
                     </a:lnR>
                     <a:lnT w="9525" cap="flat" cmpd="sng" algn="ctr">
                       <a:solidFill>
-                        <a:srgbClr val="E8D4F7"/>
+                        <a:srgbClr val="E9D1FA"/>
                       </a:solidFill>
                       <a:prstDash val="solid"/>
                     </a:lnT>
                     <a:lnB w="9525" cap="flat" cmpd="sng" algn="ctr">
                       <a:solidFill>
-                        <a:srgbClr val="E8D4F7"/>
+                        <a:srgbClr val="E9D1FA"/>
                       </a:solidFill>
                       <a:prstDash val="solid"/>
                     </a:lnB>
                     <a:solidFill>
-                      <a:srgbClr val="F8F3FC"/>
+                      <a:srgbClr val="F5EAFD"/>
                     </a:solidFill>
                   </a:tcPr>
                 </a:tc>
@@ -4917,7 +5077,7 @@
                       <a:r>
                         <a:rPr sz="1400" b="0">
                           <a:solidFill>
-                            <a:srgbClr val="2B2B2B"/>
+                            <a:srgbClr val="26231F"/>
                           </a:solidFill>
                         </a:rPr>
                         <a:t/>
@@ -4927,25 +5087,25 @@
                   <a:tcPr anchor="ctr" marL="73152" marR="73152">
                     <a:lnL w="9525" cap="flat" cmpd="sng" algn="ctr">
                       <a:solidFill>
-                        <a:srgbClr val="E8D4F7"/>
+                        <a:srgbClr val="E9D1FA"/>
                       </a:solidFill>
                       <a:prstDash val="solid"/>
                     </a:lnL>
                     <a:lnR w="9525" cap="flat" cmpd="sng" algn="ctr">
                       <a:solidFill>
-                        <a:srgbClr val="E8D4F7"/>
+                        <a:srgbClr val="E9D1FA"/>
                       </a:solidFill>
                       <a:prstDash val="solid"/>
                     </a:lnR>
                     <a:lnT w="9525" cap="flat" cmpd="sng" algn="ctr">
                       <a:solidFill>
-                        <a:srgbClr val="E8D4F7"/>
+                        <a:srgbClr val="E9D1FA"/>
                       </a:solidFill>
                       <a:prstDash val="solid"/>
                     </a:lnT>
                     <a:lnB w="9525" cap="flat" cmpd="sng" algn="ctr">
                       <a:solidFill>
-                        <a:srgbClr val="E8D4F7"/>
+                        <a:srgbClr val="E9D1FA"/>
                       </a:solidFill>
                       <a:prstDash val="solid"/>
                     </a:lnB>
@@ -4963,7 +5123,7 @@
                       <a:r>
                         <a:rPr sz="1400" b="0">
                           <a:solidFill>
-                            <a:srgbClr val="2B2B2B"/>
+                            <a:srgbClr val="26231F"/>
                           </a:solidFill>
                         </a:rPr>
                         <a:t/>
@@ -4973,25 +5133,25 @@
                   <a:tcPr anchor="ctr" marL="73152" marR="73152">
                     <a:lnL w="9525" cap="flat" cmpd="sng" algn="ctr">
                       <a:solidFill>
-                        <a:srgbClr val="E8D4F7"/>
+                        <a:srgbClr val="E9D1FA"/>
                       </a:solidFill>
                       <a:prstDash val="solid"/>
                     </a:lnL>
                     <a:lnR w="9525" cap="flat" cmpd="sng" algn="ctr">
                       <a:solidFill>
-                        <a:srgbClr val="E8D4F7"/>
+                        <a:srgbClr val="E9D1FA"/>
                       </a:solidFill>
                       <a:prstDash val="solid"/>
                     </a:lnR>
                     <a:lnT w="9525" cap="flat" cmpd="sng" algn="ctr">
                       <a:solidFill>
-                        <a:srgbClr val="E8D4F7"/>
+                        <a:srgbClr val="E9D1FA"/>
                       </a:solidFill>
                       <a:prstDash val="solid"/>
                     </a:lnT>
                     <a:lnB w="9525" cap="flat" cmpd="sng" algn="ctr">
                       <a:solidFill>
-                        <a:srgbClr val="E8D4F7"/>
+                        <a:srgbClr val="E9D1FA"/>
                       </a:solidFill>
                       <a:prstDash val="solid"/>
                     </a:lnB>
@@ -5009,7 +5169,7 @@
                       <a:r>
                         <a:rPr sz="1400" b="0">
                           <a:solidFill>
-                            <a:srgbClr val="2B2B2B"/>
+                            <a:srgbClr val="26231F"/>
                           </a:solidFill>
                         </a:rPr>
                         <a:t/>
@@ -5019,25 +5179,25 @@
                   <a:tcPr anchor="ctr" marL="73152" marR="73152">
                     <a:lnL w="9525" cap="flat" cmpd="sng" algn="ctr">
                       <a:solidFill>
-                        <a:srgbClr val="E8D4F7"/>
+                        <a:srgbClr val="E9D1FA"/>
                       </a:solidFill>
                       <a:prstDash val="solid"/>
                     </a:lnL>
                     <a:lnR w="9525" cap="flat" cmpd="sng" algn="ctr">
                       <a:solidFill>
-                        <a:srgbClr val="E8D4F7"/>
+                        <a:srgbClr val="E9D1FA"/>
                       </a:solidFill>
                       <a:prstDash val="solid"/>
                     </a:lnR>
                     <a:lnT w="9525" cap="flat" cmpd="sng" algn="ctr">
                       <a:solidFill>
-                        <a:srgbClr val="E8D4F7"/>
+                        <a:srgbClr val="E9D1FA"/>
                       </a:solidFill>
                       <a:prstDash val="solid"/>
                     </a:lnT>
                     <a:lnB w="9525" cap="flat" cmpd="sng" algn="ctr">
                       <a:solidFill>
-                        <a:srgbClr val="E8D4F7"/>
+                        <a:srgbClr val="E9D1FA"/>
                       </a:solidFill>
                       <a:prstDash val="solid"/>
                     </a:lnB>
@@ -5055,7 +5215,7 @@
                       <a:r>
                         <a:rPr sz="1400" b="0">
                           <a:solidFill>
-                            <a:srgbClr val="2B2B2B"/>
+                            <a:srgbClr val="26231F"/>
                           </a:solidFill>
                         </a:rPr>
                         <a:t/>
@@ -5065,25 +5225,25 @@
                   <a:tcPr anchor="ctr" marL="73152" marR="73152">
                     <a:lnL w="9525" cap="flat" cmpd="sng" algn="ctr">
                       <a:solidFill>
-                        <a:srgbClr val="E8D4F7"/>
+                        <a:srgbClr val="E9D1FA"/>
                       </a:solidFill>
                       <a:prstDash val="solid"/>
                     </a:lnL>
                     <a:lnR w="9525" cap="flat" cmpd="sng" algn="ctr">
                       <a:solidFill>
-                        <a:srgbClr val="E8D4F7"/>
+                        <a:srgbClr val="E9D1FA"/>
                       </a:solidFill>
                       <a:prstDash val="solid"/>
                     </a:lnR>
                     <a:lnT w="9525" cap="flat" cmpd="sng" algn="ctr">
                       <a:solidFill>
-                        <a:srgbClr val="E8D4F7"/>
+                        <a:srgbClr val="E9D1FA"/>
                       </a:solidFill>
                       <a:prstDash val="solid"/>
                     </a:lnT>
                     <a:lnB w="9525" cap="flat" cmpd="sng" algn="ctr">
                       <a:solidFill>
-                        <a:srgbClr val="E8D4F7"/>
+                        <a:srgbClr val="E9D1FA"/>
                       </a:solidFill>
                       <a:prstDash val="solid"/>
                     </a:lnB>
@@ -5101,7 +5261,7 @@
                       <a:r>
                         <a:rPr sz="1400" b="0">
                           <a:solidFill>
-                            <a:srgbClr val="2B2B2B"/>
+                            <a:srgbClr val="26231F"/>
                           </a:solidFill>
                         </a:rPr>
                         <a:t/>
@@ -5111,25 +5271,25 @@
                   <a:tcPr anchor="ctr" marL="73152" marR="73152">
                     <a:lnL w="9525" cap="flat" cmpd="sng" algn="ctr">
                       <a:solidFill>
-                        <a:srgbClr val="E8D4F7"/>
+                        <a:srgbClr val="E9D1FA"/>
                       </a:solidFill>
                       <a:prstDash val="solid"/>
                     </a:lnL>
                     <a:lnR w="9525" cap="flat" cmpd="sng" algn="ctr">
                       <a:solidFill>
-                        <a:srgbClr val="E8D4F7"/>
+                        <a:srgbClr val="E9D1FA"/>
                       </a:solidFill>
                       <a:prstDash val="solid"/>
                     </a:lnR>
                     <a:lnT w="9525" cap="flat" cmpd="sng" algn="ctr">
                       <a:solidFill>
-                        <a:srgbClr val="E8D4F7"/>
+                        <a:srgbClr val="E9D1FA"/>
                       </a:solidFill>
                       <a:prstDash val="solid"/>
                     </a:lnT>
                     <a:lnB w="9525" cap="flat" cmpd="sng" algn="ctr">
                       <a:solidFill>
-                        <a:srgbClr val="E8D4F7"/>
+                        <a:srgbClr val="E9D1FA"/>
                       </a:solidFill>
                       <a:prstDash val="solid"/>
                     </a:lnB>
@@ -5149,7 +5309,7 @@
                       <a:r>
                         <a:rPr sz="1400" b="0">
                           <a:solidFill>
-                            <a:srgbClr val="2B2B2B"/>
+                            <a:srgbClr val="26231F"/>
                           </a:solidFill>
                         </a:rPr>
                         <a:t/>
@@ -5159,30 +5319,30 @@
                   <a:tcPr anchor="ctr" marL="73152" marR="73152">
                     <a:lnL w="9525" cap="flat" cmpd="sng" algn="ctr">
                       <a:solidFill>
-                        <a:srgbClr val="E8D4F7"/>
+                        <a:srgbClr val="E9D1FA"/>
                       </a:solidFill>
                       <a:prstDash val="solid"/>
                     </a:lnL>
                     <a:lnR w="9525" cap="flat" cmpd="sng" algn="ctr">
                       <a:solidFill>
-                        <a:srgbClr val="E8D4F7"/>
+                        <a:srgbClr val="E9D1FA"/>
                       </a:solidFill>
                       <a:prstDash val="solid"/>
                     </a:lnR>
                     <a:lnT w="9525" cap="flat" cmpd="sng" algn="ctr">
                       <a:solidFill>
-                        <a:srgbClr val="E8D4F7"/>
+                        <a:srgbClr val="E9D1FA"/>
                       </a:solidFill>
                       <a:prstDash val="solid"/>
                     </a:lnT>
                     <a:lnB w="9525" cap="flat" cmpd="sng" algn="ctr">
                       <a:solidFill>
-                        <a:srgbClr val="E8D4F7"/>
+                        <a:srgbClr val="E9D1FA"/>
                       </a:solidFill>
                       <a:prstDash val="solid"/>
                     </a:lnB>
                     <a:solidFill>
-                      <a:srgbClr val="F8F3FC"/>
+                      <a:srgbClr val="F5EAFD"/>
                     </a:solidFill>
                   </a:tcPr>
                 </a:tc>
@@ -5195,7 +5355,7 @@
                       <a:r>
                         <a:rPr sz="1400" b="0">
                           <a:solidFill>
-                            <a:srgbClr val="2B2B2B"/>
+                            <a:srgbClr val="26231F"/>
                           </a:solidFill>
                         </a:rPr>
                         <a:t/>
@@ -5205,30 +5365,30 @@
                   <a:tcPr anchor="ctr" marL="73152" marR="73152">
                     <a:lnL w="9525" cap="flat" cmpd="sng" algn="ctr">
                       <a:solidFill>
-                        <a:srgbClr val="E8D4F7"/>
+                        <a:srgbClr val="E9D1FA"/>
                       </a:solidFill>
                       <a:prstDash val="solid"/>
                     </a:lnL>
                     <a:lnR w="9525" cap="flat" cmpd="sng" algn="ctr">
                       <a:solidFill>
-                        <a:srgbClr val="E8D4F7"/>
+                        <a:srgbClr val="E9D1FA"/>
                       </a:solidFill>
                       <a:prstDash val="solid"/>
                     </a:lnR>
                     <a:lnT w="9525" cap="flat" cmpd="sng" algn="ctr">
                       <a:solidFill>
-                        <a:srgbClr val="E8D4F7"/>
+                        <a:srgbClr val="E9D1FA"/>
                       </a:solidFill>
                       <a:prstDash val="solid"/>
                     </a:lnT>
                     <a:lnB w="9525" cap="flat" cmpd="sng" algn="ctr">
                       <a:solidFill>
-                        <a:srgbClr val="E8D4F7"/>
+                        <a:srgbClr val="E9D1FA"/>
                       </a:solidFill>
                       <a:prstDash val="solid"/>
                     </a:lnB>
                     <a:solidFill>
-                      <a:srgbClr val="F8F3FC"/>
+                      <a:srgbClr val="F5EAFD"/>
                     </a:solidFill>
                   </a:tcPr>
                 </a:tc>
@@ -5241,7 +5401,7 @@
                       <a:r>
                         <a:rPr sz="1400" b="0">
                           <a:solidFill>
-                            <a:srgbClr val="2B2B2B"/>
+                            <a:srgbClr val="26231F"/>
                           </a:solidFill>
                         </a:rPr>
                         <a:t/>
@@ -5251,30 +5411,30 @@
                   <a:tcPr anchor="ctr" marL="73152" marR="73152">
                     <a:lnL w="9525" cap="flat" cmpd="sng" algn="ctr">
                       <a:solidFill>
-                        <a:srgbClr val="E8D4F7"/>
+                        <a:srgbClr val="E9D1FA"/>
                       </a:solidFill>
                       <a:prstDash val="solid"/>
                     </a:lnL>
                     <a:lnR w="9525" cap="flat" cmpd="sng" algn="ctr">
                       <a:solidFill>
-                        <a:srgbClr val="E8D4F7"/>
+                        <a:srgbClr val="E9D1FA"/>
                       </a:solidFill>
                       <a:prstDash val="solid"/>
                     </a:lnR>
                     <a:lnT w="9525" cap="flat" cmpd="sng" algn="ctr">
                       <a:solidFill>
-                        <a:srgbClr val="E8D4F7"/>
+                        <a:srgbClr val="E9D1FA"/>
                       </a:solidFill>
                       <a:prstDash val="solid"/>
                     </a:lnT>
                     <a:lnB w="9525" cap="flat" cmpd="sng" algn="ctr">
                       <a:solidFill>
-                        <a:srgbClr val="E8D4F7"/>
+                        <a:srgbClr val="E9D1FA"/>
                       </a:solidFill>
                       <a:prstDash val="solid"/>
                     </a:lnB>
                     <a:solidFill>
-                      <a:srgbClr val="F8F3FC"/>
+                      <a:srgbClr val="F5EAFD"/>
                     </a:solidFill>
                   </a:tcPr>
                 </a:tc>
@@ -5287,7 +5447,7 @@
                       <a:r>
                         <a:rPr sz="1400" b="0">
                           <a:solidFill>
-                            <a:srgbClr val="2B2B2B"/>
+                            <a:srgbClr val="26231F"/>
                           </a:solidFill>
                         </a:rPr>
                         <a:t/>
@@ -5297,30 +5457,30 @@
                   <a:tcPr anchor="ctr" marL="73152" marR="73152">
                     <a:lnL w="9525" cap="flat" cmpd="sng" algn="ctr">
                       <a:solidFill>
-                        <a:srgbClr val="E8D4F7"/>
+                        <a:srgbClr val="E9D1FA"/>
                       </a:solidFill>
                       <a:prstDash val="solid"/>
                     </a:lnL>
                     <a:lnR w="9525" cap="flat" cmpd="sng" algn="ctr">
                       <a:solidFill>
-                        <a:srgbClr val="E8D4F7"/>
+                        <a:srgbClr val="E9D1FA"/>
                       </a:solidFill>
                       <a:prstDash val="solid"/>
                     </a:lnR>
                     <a:lnT w="9525" cap="flat" cmpd="sng" algn="ctr">
                       <a:solidFill>
-                        <a:srgbClr val="E8D4F7"/>
+                        <a:srgbClr val="E9D1FA"/>
                       </a:solidFill>
                       <a:prstDash val="solid"/>
                     </a:lnT>
                     <a:lnB w="9525" cap="flat" cmpd="sng" algn="ctr">
                       <a:solidFill>
-                        <a:srgbClr val="E8D4F7"/>
+                        <a:srgbClr val="E9D1FA"/>
                       </a:solidFill>
                       <a:prstDash val="solid"/>
                     </a:lnB>
                     <a:solidFill>
-                      <a:srgbClr val="F8F3FC"/>
+                      <a:srgbClr val="F5EAFD"/>
                     </a:solidFill>
                   </a:tcPr>
                 </a:tc>
@@ -5333,7 +5493,7 @@
                       <a:r>
                         <a:rPr sz="1400" b="0">
                           <a:solidFill>
-                            <a:srgbClr val="2B2B2B"/>
+                            <a:srgbClr val="26231F"/>
                           </a:solidFill>
                         </a:rPr>
                         <a:t/>
@@ -5343,30 +5503,30 @@
                   <a:tcPr anchor="ctr" marL="73152" marR="73152">
                     <a:lnL w="9525" cap="flat" cmpd="sng" algn="ctr">
                       <a:solidFill>
-                        <a:srgbClr val="E8D4F7"/>
+                        <a:srgbClr val="E9D1FA"/>
                       </a:solidFill>
                       <a:prstDash val="solid"/>
                     </a:lnL>
                     <a:lnR w="9525" cap="flat" cmpd="sng" algn="ctr">
                       <a:solidFill>
-                        <a:srgbClr val="E8D4F7"/>
+                        <a:srgbClr val="E9D1FA"/>
                       </a:solidFill>
                       <a:prstDash val="solid"/>
                     </a:lnR>
                     <a:lnT w="9525" cap="flat" cmpd="sng" algn="ctr">
                       <a:solidFill>
-                        <a:srgbClr val="E8D4F7"/>
+                        <a:srgbClr val="E9D1FA"/>
                       </a:solidFill>
                       <a:prstDash val="solid"/>
                     </a:lnT>
                     <a:lnB w="9525" cap="flat" cmpd="sng" algn="ctr">
                       <a:solidFill>
-                        <a:srgbClr val="E8D4F7"/>
+                        <a:srgbClr val="E9D1FA"/>
                       </a:solidFill>
                       <a:prstDash val="solid"/>
                     </a:lnB>
                     <a:solidFill>
-                      <a:srgbClr val="F8F3FC"/>
+                      <a:srgbClr val="F5EAFD"/>
                     </a:solidFill>
                   </a:tcPr>
                 </a:tc>
@@ -5381,7 +5541,7 @@
                       <a:r>
                         <a:rPr sz="1400" b="0">
                           <a:solidFill>
-                            <a:srgbClr val="2B2B2B"/>
+                            <a:srgbClr val="26231F"/>
                           </a:solidFill>
                         </a:rPr>
                         <a:t/>
@@ -5391,25 +5551,25 @@
                   <a:tcPr anchor="ctr" marL="73152" marR="73152">
                     <a:lnL w="9525" cap="flat" cmpd="sng" algn="ctr">
                       <a:solidFill>
-                        <a:srgbClr val="E8D4F7"/>
+                        <a:srgbClr val="E9D1FA"/>
                       </a:solidFill>
                       <a:prstDash val="solid"/>
                     </a:lnL>
                     <a:lnR w="9525" cap="flat" cmpd="sng" algn="ctr">
                       <a:solidFill>
-                        <a:srgbClr val="E8D4F7"/>
+                        <a:srgbClr val="E9D1FA"/>
                       </a:solidFill>
                       <a:prstDash val="solid"/>
                     </a:lnR>
                     <a:lnT w="9525" cap="flat" cmpd="sng" algn="ctr">
                       <a:solidFill>
-                        <a:srgbClr val="E8D4F7"/>
+                        <a:srgbClr val="E9D1FA"/>
                       </a:solidFill>
                       <a:prstDash val="solid"/>
                     </a:lnT>
                     <a:lnB w="9525" cap="flat" cmpd="sng" algn="ctr">
                       <a:solidFill>
-                        <a:srgbClr val="E8D4F7"/>
+                        <a:srgbClr val="E9D1FA"/>
                       </a:solidFill>
                       <a:prstDash val="solid"/>
                     </a:lnB>
@@ -5427,7 +5587,7 @@
                       <a:r>
                         <a:rPr sz="1400" b="0">
                           <a:solidFill>
-                            <a:srgbClr val="2B2B2B"/>
+                            <a:srgbClr val="26231F"/>
                           </a:solidFill>
                         </a:rPr>
                         <a:t/>
@@ -5437,25 +5597,25 @@
                   <a:tcPr anchor="ctr" marL="73152" marR="73152">
                     <a:lnL w="9525" cap="flat" cmpd="sng" algn="ctr">
                       <a:solidFill>
-                        <a:srgbClr val="E8D4F7"/>
+                        <a:srgbClr val="E9D1FA"/>
                       </a:solidFill>
                       <a:prstDash val="solid"/>
                     </a:lnL>
                     <a:lnR w="9525" cap="flat" cmpd="sng" algn="ctr">
                       <a:solidFill>
-                        <a:srgbClr val="E8D4F7"/>
+                        <a:srgbClr val="E9D1FA"/>
                       </a:solidFill>
                       <a:prstDash val="solid"/>
                     </a:lnR>
                     <a:lnT w="9525" cap="flat" cmpd="sng" algn="ctr">
                       <a:solidFill>
-                        <a:srgbClr val="E8D4F7"/>
+                        <a:srgbClr val="E9D1FA"/>
                       </a:solidFill>
                       <a:prstDash val="solid"/>
                     </a:lnT>
                     <a:lnB w="9525" cap="flat" cmpd="sng" algn="ctr">
                       <a:solidFill>
-                        <a:srgbClr val="E8D4F7"/>
+                        <a:srgbClr val="E9D1FA"/>
                       </a:solidFill>
                       <a:prstDash val="solid"/>
                     </a:lnB>
@@ -5473,7 +5633,7 @@
                       <a:r>
                         <a:rPr sz="1400" b="0">
                           <a:solidFill>
-                            <a:srgbClr val="2B2B2B"/>
+                            <a:srgbClr val="26231F"/>
                           </a:solidFill>
                         </a:rPr>
                         <a:t/>
@@ -5483,25 +5643,25 @@
                   <a:tcPr anchor="ctr" marL="73152" marR="73152">
                     <a:lnL w="9525" cap="flat" cmpd="sng" algn="ctr">
                       <a:solidFill>
-                        <a:srgbClr val="E8D4F7"/>
+                        <a:srgbClr val="E9D1FA"/>
                       </a:solidFill>
                       <a:prstDash val="solid"/>
                     </a:lnL>
                     <a:lnR w="9525" cap="flat" cmpd="sng" algn="ctr">
                       <a:solidFill>
-                        <a:srgbClr val="E8D4F7"/>
+                        <a:srgbClr val="E9D1FA"/>
                       </a:solidFill>
                       <a:prstDash val="solid"/>
                     </a:lnR>
                     <a:lnT w="9525" cap="flat" cmpd="sng" algn="ctr">
                       <a:solidFill>
-                        <a:srgbClr val="E8D4F7"/>
+                        <a:srgbClr val="E9D1FA"/>
                       </a:solidFill>
                       <a:prstDash val="solid"/>
                     </a:lnT>
                     <a:lnB w="9525" cap="flat" cmpd="sng" algn="ctr">
                       <a:solidFill>
-                        <a:srgbClr val="E8D4F7"/>
+                        <a:srgbClr val="E9D1FA"/>
                       </a:solidFill>
                       <a:prstDash val="solid"/>
                     </a:lnB>
@@ -5519,7 +5679,7 @@
                       <a:r>
                         <a:rPr sz="1400" b="0">
                           <a:solidFill>
-                            <a:srgbClr val="2B2B2B"/>
+                            <a:srgbClr val="26231F"/>
                           </a:solidFill>
                         </a:rPr>
                         <a:t/>
@@ -5529,25 +5689,25 @@
                   <a:tcPr anchor="ctr" marL="73152" marR="73152">
                     <a:lnL w="9525" cap="flat" cmpd="sng" algn="ctr">
                       <a:solidFill>
-                        <a:srgbClr val="E8D4F7"/>
+                        <a:srgbClr val="E9D1FA"/>
                       </a:solidFill>
                       <a:prstDash val="solid"/>
                     </a:lnL>
                     <a:lnR w="9525" cap="flat" cmpd="sng" algn="ctr">
                       <a:solidFill>
-                        <a:srgbClr val="E8D4F7"/>
+                        <a:srgbClr val="E9D1FA"/>
                       </a:solidFill>
                       <a:prstDash val="solid"/>
                     </a:lnR>
                     <a:lnT w="9525" cap="flat" cmpd="sng" algn="ctr">
                       <a:solidFill>
-                        <a:srgbClr val="E8D4F7"/>
+                        <a:srgbClr val="E9D1FA"/>
                       </a:solidFill>
                       <a:prstDash val="solid"/>
                     </a:lnT>
                     <a:lnB w="9525" cap="flat" cmpd="sng" algn="ctr">
                       <a:solidFill>
-                        <a:srgbClr val="E8D4F7"/>
+                        <a:srgbClr val="E9D1FA"/>
                       </a:solidFill>
                       <a:prstDash val="solid"/>
                     </a:lnB>
@@ -5565,7 +5725,7 @@
                       <a:r>
                         <a:rPr sz="1400" b="0">
                           <a:solidFill>
-                            <a:srgbClr val="2B2B2B"/>
+                            <a:srgbClr val="26231F"/>
                           </a:solidFill>
                         </a:rPr>
                         <a:t/>
@@ -5575,25 +5735,25 @@
                   <a:tcPr anchor="ctr" marL="73152" marR="73152">
                     <a:lnL w="9525" cap="flat" cmpd="sng" algn="ctr">
                       <a:solidFill>
-                        <a:srgbClr val="E8D4F7"/>
+                        <a:srgbClr val="E9D1FA"/>
                       </a:solidFill>
                       <a:prstDash val="solid"/>
                     </a:lnL>
                     <a:lnR w="9525" cap="flat" cmpd="sng" algn="ctr">
                       <a:solidFill>
-                        <a:srgbClr val="E8D4F7"/>
+                        <a:srgbClr val="E9D1FA"/>
                       </a:solidFill>
                       <a:prstDash val="solid"/>
                     </a:lnR>
                     <a:lnT w="9525" cap="flat" cmpd="sng" algn="ctr">
                       <a:solidFill>
-                        <a:srgbClr val="E8D4F7"/>
+                        <a:srgbClr val="E9D1FA"/>
                       </a:solidFill>
                       <a:prstDash val="solid"/>
                     </a:lnT>
                     <a:lnB w="9525" cap="flat" cmpd="sng" algn="ctr">
                       <a:solidFill>
-                        <a:srgbClr val="E8D4F7"/>
+                        <a:srgbClr val="E9D1FA"/>
                       </a:solidFill>
                       <a:prstDash val="solid"/>
                     </a:lnB>
@@ -5613,7 +5773,7 @@
                       <a:r>
                         <a:rPr sz="1400" b="0">
                           <a:solidFill>
-                            <a:srgbClr val="2B2B2B"/>
+                            <a:srgbClr val="26231F"/>
                           </a:solidFill>
                         </a:rPr>
                         <a:t/>
@@ -5623,30 +5783,30 @@
                   <a:tcPr anchor="ctr" marL="73152" marR="73152">
                     <a:lnL w="9525" cap="flat" cmpd="sng" algn="ctr">
                       <a:solidFill>
-                        <a:srgbClr val="E8D4F7"/>
+                        <a:srgbClr val="E9D1FA"/>
                       </a:solidFill>
                       <a:prstDash val="solid"/>
                     </a:lnL>
                     <a:lnR w="9525" cap="flat" cmpd="sng" algn="ctr">
                       <a:solidFill>
-                        <a:srgbClr val="E8D4F7"/>
+                        <a:srgbClr val="E9D1FA"/>
                       </a:solidFill>
                       <a:prstDash val="solid"/>
                     </a:lnR>
                     <a:lnT w="9525" cap="flat" cmpd="sng" algn="ctr">
                       <a:solidFill>
-                        <a:srgbClr val="E8D4F7"/>
+                        <a:srgbClr val="E9D1FA"/>
                       </a:solidFill>
                       <a:prstDash val="solid"/>
                     </a:lnT>
                     <a:lnB w="9525" cap="flat" cmpd="sng" algn="ctr">
                       <a:solidFill>
-                        <a:srgbClr val="E8D4F7"/>
+                        <a:srgbClr val="E9D1FA"/>
                       </a:solidFill>
                       <a:prstDash val="solid"/>
                     </a:lnB>
                     <a:solidFill>
-                      <a:srgbClr val="F8F3FC"/>
+                      <a:srgbClr val="F5EAFD"/>
                     </a:solidFill>
                   </a:tcPr>
                 </a:tc>
@@ -5659,7 +5819,7 @@
                       <a:r>
                         <a:rPr sz="1400" b="0">
                           <a:solidFill>
-                            <a:srgbClr val="2B2B2B"/>
+                            <a:srgbClr val="26231F"/>
                           </a:solidFill>
                         </a:rPr>
                         <a:t/>
@@ -5669,30 +5829,30 @@
                   <a:tcPr anchor="ctr" marL="73152" marR="73152">
                     <a:lnL w="9525" cap="flat" cmpd="sng" algn="ctr">
                       <a:solidFill>
-                        <a:srgbClr val="E8D4F7"/>
+                        <a:srgbClr val="E9D1FA"/>
                       </a:solidFill>
                       <a:prstDash val="solid"/>
                     </a:lnL>
                     <a:lnR w="9525" cap="flat" cmpd="sng" algn="ctr">
                       <a:solidFill>
-                        <a:srgbClr val="E8D4F7"/>
+                        <a:srgbClr val="E9D1FA"/>
                       </a:solidFill>
                       <a:prstDash val="solid"/>
                     </a:lnR>
                     <a:lnT w="9525" cap="flat" cmpd="sng" algn="ctr">
                       <a:solidFill>
-                        <a:srgbClr val="E8D4F7"/>
+                        <a:srgbClr val="E9D1FA"/>
                       </a:solidFill>
                       <a:prstDash val="solid"/>
                     </a:lnT>
                     <a:lnB w="9525" cap="flat" cmpd="sng" algn="ctr">
                       <a:solidFill>
-                        <a:srgbClr val="E8D4F7"/>
+                        <a:srgbClr val="E9D1FA"/>
                       </a:solidFill>
                       <a:prstDash val="solid"/>
                     </a:lnB>
                     <a:solidFill>
-                      <a:srgbClr val="F8F3FC"/>
+                      <a:srgbClr val="F5EAFD"/>
                     </a:solidFill>
                   </a:tcPr>
                 </a:tc>
@@ -5705,7 +5865,7 @@
                       <a:r>
                         <a:rPr sz="1400" b="0">
                           <a:solidFill>
-                            <a:srgbClr val="2B2B2B"/>
+                            <a:srgbClr val="26231F"/>
                           </a:solidFill>
                         </a:rPr>
                         <a:t/>
@@ -5715,30 +5875,30 @@
                   <a:tcPr anchor="ctr" marL="73152" marR="73152">
                     <a:lnL w="9525" cap="flat" cmpd="sng" algn="ctr">
                       <a:solidFill>
-                        <a:srgbClr val="E8D4F7"/>
+                        <a:srgbClr val="E9D1FA"/>
                       </a:solidFill>
                       <a:prstDash val="solid"/>
                     </a:lnL>
                     <a:lnR w="9525" cap="flat" cmpd="sng" algn="ctr">
                       <a:solidFill>
-                        <a:srgbClr val="E8D4F7"/>
+                        <a:srgbClr val="E9D1FA"/>
                       </a:solidFill>
                       <a:prstDash val="solid"/>
                     </a:lnR>
                     <a:lnT w="9525" cap="flat" cmpd="sng" algn="ctr">
                       <a:solidFill>
-                        <a:srgbClr val="E8D4F7"/>
+                        <a:srgbClr val="E9D1FA"/>
                       </a:solidFill>
                       <a:prstDash val="solid"/>
                     </a:lnT>
                     <a:lnB w="9525" cap="flat" cmpd="sng" algn="ctr">
                       <a:solidFill>
-                        <a:srgbClr val="E8D4F7"/>
+                        <a:srgbClr val="E9D1FA"/>
                       </a:solidFill>
                       <a:prstDash val="solid"/>
                     </a:lnB>
                     <a:solidFill>
-                      <a:srgbClr val="F8F3FC"/>
+                      <a:srgbClr val="F5EAFD"/>
                     </a:solidFill>
                   </a:tcPr>
                 </a:tc>
@@ -5751,7 +5911,7 @@
                       <a:r>
                         <a:rPr sz="1400" b="0">
                           <a:solidFill>
-                            <a:srgbClr val="2B2B2B"/>
+                            <a:srgbClr val="26231F"/>
                           </a:solidFill>
                         </a:rPr>
                         <a:t/>
@@ -5761,30 +5921,30 @@
                   <a:tcPr anchor="ctr" marL="73152" marR="73152">
                     <a:lnL w="9525" cap="flat" cmpd="sng" algn="ctr">
                       <a:solidFill>
-                        <a:srgbClr val="E8D4F7"/>
+                        <a:srgbClr val="E9D1FA"/>
                       </a:solidFill>
                       <a:prstDash val="solid"/>
                     </a:lnL>
                     <a:lnR w="9525" cap="flat" cmpd="sng" algn="ctr">
                       <a:solidFill>
-                        <a:srgbClr val="E8D4F7"/>
+                        <a:srgbClr val="E9D1FA"/>
                       </a:solidFill>
                       <a:prstDash val="solid"/>
                     </a:lnR>
                     <a:lnT w="9525" cap="flat" cmpd="sng" algn="ctr">
                       <a:solidFill>
-                        <a:srgbClr val="E8D4F7"/>
+                        <a:srgbClr val="E9D1FA"/>
                       </a:solidFill>
                       <a:prstDash val="solid"/>
                     </a:lnT>
                     <a:lnB w="9525" cap="flat" cmpd="sng" algn="ctr">
                       <a:solidFill>
-                        <a:srgbClr val="E8D4F7"/>
+                        <a:srgbClr val="E9D1FA"/>
                       </a:solidFill>
                       <a:prstDash val="solid"/>
                     </a:lnB>
                     <a:solidFill>
-                      <a:srgbClr val="F8F3FC"/>
+                      <a:srgbClr val="F5EAFD"/>
                     </a:solidFill>
                   </a:tcPr>
                 </a:tc>
@@ -5797,7 +5957,7 @@
                       <a:r>
                         <a:rPr sz="1400" b="0">
                           <a:solidFill>
-                            <a:srgbClr val="2B2B2B"/>
+                            <a:srgbClr val="26231F"/>
                           </a:solidFill>
                         </a:rPr>
                         <a:t/>
@@ -5807,30 +5967,30 @@
                   <a:tcPr anchor="ctr" marL="73152" marR="73152">
                     <a:lnL w="9525" cap="flat" cmpd="sng" algn="ctr">
                       <a:solidFill>
-                        <a:srgbClr val="E8D4F7"/>
+                        <a:srgbClr val="E9D1FA"/>
                       </a:solidFill>
                       <a:prstDash val="solid"/>
                     </a:lnL>
                     <a:lnR w="9525" cap="flat" cmpd="sng" algn="ctr">
                       <a:solidFill>
-                        <a:srgbClr val="E8D4F7"/>
+                        <a:srgbClr val="E9D1FA"/>
                       </a:solidFill>
                       <a:prstDash val="solid"/>
                     </a:lnR>
                     <a:lnT w="9525" cap="flat" cmpd="sng" algn="ctr">
                       <a:solidFill>
-                        <a:srgbClr val="E8D4F7"/>
+                        <a:srgbClr val="E9D1FA"/>
                       </a:solidFill>
                       <a:prstDash val="solid"/>
                     </a:lnT>
                     <a:lnB w="9525" cap="flat" cmpd="sng" algn="ctr">
                       <a:solidFill>
-                        <a:srgbClr val="E8D4F7"/>
+                        <a:srgbClr val="E9D1FA"/>
                       </a:solidFill>
                       <a:prstDash val="solid"/>
                     </a:lnB>
                     <a:solidFill>
-                      <a:srgbClr val="F8F3FC"/>
+                      <a:srgbClr val="F5EAFD"/>
                     </a:solidFill>
                   </a:tcPr>
                 </a:tc>
@@ -5873,14 +6033,14 @@
         </p:nvSpPr>
         <p:spPr>
           <a:xfrm>
-            <a:off x="9905695" y="-1463040"/>
-            <a:ext cx="3840480" cy="3840480"/>
+            <a:off x="10180015" y="-1645920"/>
+            <a:ext cx="3474720" cy="3474720"/>
           </a:xfrm>
           <a:prstGeom prst="ellipse">
             <a:avLst/>
           </a:prstGeom>
           <a:solidFill>
-            <a:srgbClr val="E8D4F7"/>
+            <a:srgbClr val="D2A6F2"/>
           </a:solidFill>
           <a:ln>
             <a:noFill/>
@@ -5896,20 +6056,58 @@
       </p:sp>
       <p:sp>
         <p:nvSpPr>
-          <p:cNvPr id="4" name="장식"/>
+          <p:cNvPr id="4" name="상단 라벨"/>
+          <p:cNvSpPr txBox="1"/>
+          <p:nvPr/>
+        </p:nvSpPr>
+        <p:spPr>
+          <a:xfrm>
+            <a:off x="640080" y="274320"/>
+            <a:ext cx="5486400" cy="274320"/>
+          </a:xfrm>
+          <a:prstGeom prst="rect">
+            <a:avLst/>
+          </a:prstGeom>
+          <a:noFill/>
+        </p:spPr>
+        <p:txBody>
+          <a:bodyPr wrap="square" lIns="54864" rIns="54864" tIns="27432" bIns="27432" anchor="ctr">
+            <a:noAutofit/>
+          </a:bodyPr>
+          <a:lstStyle/>
+          <a:p>
+            <a:pPr algn="l">
+              <a:lnSpc>
+                <a:spcPct val="115000"/>
+              </a:lnSpc>
+            </a:pPr>
+            <a:r>
+              <a:rPr sz="900" b="1" i="0" spc="250">
+                <a:solidFill>
+                  <a:srgbClr val="26231F"/>
+                </a:solidFill>
+              </a:rPr>
+              <a:t>INSURANCE CHECK</a:t>
+            </a:r>
+          </a:p>
+        </p:txBody>
+      </p:sp>
+      <p:sp>
+        <p:nvSpPr>
+          <p:cNvPr id="5" name="포인트"/>
           <p:cNvSpPr/>
           <p:nvPr/>
         </p:nvSpPr>
         <p:spPr>
-          <a:xfrm>
-            <a:off x="11094415" y="274320"/>
-            <a:ext cx="411480" cy="411480"/>
-          </a:xfrm>
-          <a:prstGeom prst="ellipse">
+          <a:xfrm rot="18900000">
+            <a:off x="11048695" y="502919"/>
+            <a:ext cx="274320" cy="274320"/>
+          </a:xfrm>
+          <a:prstGeom prst="teardrop">
             <a:avLst/>
           </a:prstGeom>
           <a:solidFill>
-            <a:srgbClr val="9651C8"/>
+            <a:srgbClr val="FFFFFF"/>
           </a:solidFill>
           <a:ln>
             <a:noFill/>
@@ -5935,8 +6133,8 @@
         </p:nvSpPr>
         <p:spPr>
           <a:xfrm>
-            <a:off x="640080" y="457200"/>
-            <a:ext cx="9722815" cy="868680"/>
+            <a:off x="640080" y="658368"/>
+            <a:ext cx="9082735" cy="868680"/>
           </a:xfrm>
         </p:spPr>
         <p:txBody>
@@ -5953,7 +6151,7 @@
             <a:r>
               <a:rPr sz="3000" b="1" i="0">
                 <a:solidFill>
-                  <a:srgbClr val="4E226D"/>
+                  <a:srgbClr val="26231F"/>
                 </a:solidFill>
               </a:rPr>
               <a:t>보장 항목 체크</a:t>
@@ -5963,14 +6161,14 @@
       </p:sp>
       <p:graphicFrame>
         <p:nvGraphicFramePr>
-          <p:cNvPr id="5" name="표"/>
+          <p:cNvPr id="6" name="표"/>
           <p:cNvGraphicFramePr>
             <a:graphicFrameLocks noGrp="1"/>
           </p:cNvGraphicFramePr>
           <p:nvPr/>
         </p:nvGraphicFramePr>
         <p:xfrm>
-          <a:off x="640080" y="1600200"/>
+          <a:off x="640080" y="1783080"/>
           <a:ext cx="10911534" cy="4773168"/>
         </p:xfrm>
         <a:graphic>
@@ -5995,7 +6193,7 @@
                       <a:r>
                         <a:rPr sz="1400" b="1">
                           <a:solidFill>
-                            <a:srgbClr val="FFFFFF"/>
+                            <a:srgbClr val="26231F"/>
                           </a:solidFill>
                         </a:rPr>
                         <a:t>보장 항목</a:t>
@@ -6005,30 +6203,30 @@
                   <a:tcPr anchor="ctr" marL="73152" marR="73152">
                     <a:lnL w="9525" cap="flat" cmpd="sng" algn="ctr">
                       <a:solidFill>
-                        <a:srgbClr val="9651C8"/>
+                        <a:srgbClr val="C997ED"/>
                       </a:solidFill>
                       <a:prstDash val="solid"/>
                     </a:lnL>
                     <a:lnR w="9525" cap="flat" cmpd="sng" algn="ctr">
                       <a:solidFill>
-                        <a:srgbClr val="9651C8"/>
+                        <a:srgbClr val="C997ED"/>
                       </a:solidFill>
                       <a:prstDash val="solid"/>
                     </a:lnR>
                     <a:lnT w="9525" cap="flat" cmpd="sng" algn="ctr">
                       <a:solidFill>
-                        <a:srgbClr val="9651C8"/>
+                        <a:srgbClr val="C997ED"/>
                       </a:solidFill>
                       <a:prstDash val="solid"/>
                     </a:lnT>
                     <a:lnB w="9525" cap="flat" cmpd="sng" algn="ctr">
                       <a:solidFill>
-                        <a:srgbClr val="9651C8"/>
+                        <a:srgbClr val="C997ED"/>
                       </a:solidFill>
                       <a:prstDash val="solid"/>
                     </a:lnB>
                     <a:solidFill>
-                      <a:srgbClr val="9651C8"/>
+                      <a:srgbClr val="C997ED"/>
                     </a:solidFill>
                   </a:tcPr>
                 </a:tc>
@@ -6041,7 +6239,7 @@
                       <a:r>
                         <a:rPr sz="1400" b="1">
                           <a:solidFill>
-                            <a:srgbClr val="FFFFFF"/>
+                            <a:srgbClr val="26231F"/>
                           </a:solidFill>
                         </a:rPr>
                         <a:t>가입 확인</a:t>
@@ -6051,30 +6249,30 @@
                   <a:tcPr anchor="ctr" marL="73152" marR="73152">
                     <a:lnL w="9525" cap="flat" cmpd="sng" algn="ctr">
                       <a:solidFill>
-                        <a:srgbClr val="9651C8"/>
+                        <a:srgbClr val="C997ED"/>
                       </a:solidFill>
                       <a:prstDash val="solid"/>
                     </a:lnL>
                     <a:lnR w="9525" cap="flat" cmpd="sng" algn="ctr">
                       <a:solidFill>
-                        <a:srgbClr val="9651C8"/>
+                        <a:srgbClr val="C997ED"/>
                       </a:solidFill>
                       <a:prstDash val="solid"/>
                     </a:lnR>
                     <a:lnT w="9525" cap="flat" cmpd="sng" algn="ctr">
                       <a:solidFill>
-                        <a:srgbClr val="9651C8"/>
+                        <a:srgbClr val="C997ED"/>
                       </a:solidFill>
                       <a:prstDash val="solid"/>
                     </a:lnT>
                     <a:lnB w="9525" cap="flat" cmpd="sng" algn="ctr">
                       <a:solidFill>
-                        <a:srgbClr val="9651C8"/>
+                        <a:srgbClr val="C997ED"/>
                       </a:solidFill>
                       <a:prstDash val="solid"/>
                     </a:lnB>
                     <a:solidFill>
-                      <a:srgbClr val="9651C8"/>
+                      <a:srgbClr val="C997ED"/>
                     </a:solidFill>
                   </a:tcPr>
                 </a:tc>
@@ -6087,7 +6285,7 @@
                       <a:r>
                         <a:rPr sz="1400" b="1">
                           <a:solidFill>
-                            <a:srgbClr val="FFFFFF"/>
+                            <a:srgbClr val="26231F"/>
                           </a:solidFill>
                         </a:rPr>
                         <a:t>확인 필요</a:t>
@@ -6097,30 +6295,30 @@
                   <a:tcPr anchor="ctr" marL="73152" marR="73152">
                     <a:lnL w="9525" cap="flat" cmpd="sng" algn="ctr">
                       <a:solidFill>
-                        <a:srgbClr val="9651C8"/>
+                        <a:srgbClr val="C997ED"/>
                       </a:solidFill>
                       <a:prstDash val="solid"/>
                     </a:lnL>
                     <a:lnR w="9525" cap="flat" cmpd="sng" algn="ctr">
                       <a:solidFill>
-                        <a:srgbClr val="9651C8"/>
+                        <a:srgbClr val="C997ED"/>
                       </a:solidFill>
                       <a:prstDash val="solid"/>
                     </a:lnR>
                     <a:lnT w="9525" cap="flat" cmpd="sng" algn="ctr">
                       <a:solidFill>
-                        <a:srgbClr val="9651C8"/>
+                        <a:srgbClr val="C997ED"/>
                       </a:solidFill>
                       <a:prstDash val="solid"/>
                     </a:lnT>
                     <a:lnB w="9525" cap="flat" cmpd="sng" algn="ctr">
                       <a:solidFill>
-                        <a:srgbClr val="9651C8"/>
+                        <a:srgbClr val="C997ED"/>
                       </a:solidFill>
                       <a:prstDash val="solid"/>
                     </a:lnB>
                     <a:solidFill>
-                      <a:srgbClr val="9651C8"/>
+                      <a:srgbClr val="C997ED"/>
                     </a:solidFill>
                   </a:tcPr>
                 </a:tc>
@@ -6133,7 +6331,7 @@
                       <a:r>
                         <a:rPr sz="1400" b="1">
                           <a:solidFill>
-                            <a:srgbClr val="FFFFFF"/>
+                            <a:srgbClr val="26231F"/>
                           </a:solidFill>
                         </a:rPr>
                         <a:t>해당 없음</a:t>
@@ -6143,30 +6341,30 @@
                   <a:tcPr anchor="ctr" marL="73152" marR="73152">
                     <a:lnL w="9525" cap="flat" cmpd="sng" algn="ctr">
                       <a:solidFill>
-                        <a:srgbClr val="9651C8"/>
+                        <a:srgbClr val="C997ED"/>
                       </a:solidFill>
                       <a:prstDash val="solid"/>
                     </a:lnL>
                     <a:lnR w="9525" cap="flat" cmpd="sng" algn="ctr">
                       <a:solidFill>
-                        <a:srgbClr val="9651C8"/>
+                        <a:srgbClr val="C997ED"/>
                       </a:solidFill>
                       <a:prstDash val="solid"/>
                     </a:lnR>
                     <a:lnT w="9525" cap="flat" cmpd="sng" algn="ctr">
                       <a:solidFill>
-                        <a:srgbClr val="9651C8"/>
+                        <a:srgbClr val="C997ED"/>
                       </a:solidFill>
                       <a:prstDash val="solid"/>
                     </a:lnT>
                     <a:lnB w="9525" cap="flat" cmpd="sng" algn="ctr">
                       <a:solidFill>
-                        <a:srgbClr val="9651C8"/>
+                        <a:srgbClr val="C997ED"/>
                       </a:solidFill>
                       <a:prstDash val="solid"/>
                     </a:lnB>
                     <a:solidFill>
-                      <a:srgbClr val="9651C8"/>
+                      <a:srgbClr val="C997ED"/>
                     </a:solidFill>
                   </a:tcPr>
                 </a:tc>
@@ -6181,7 +6379,7 @@
                       <a:r>
                         <a:rPr sz="1400" b="1">
                           <a:solidFill>
-                            <a:srgbClr val="4E226D"/>
+                            <a:srgbClr val="3B2749"/>
                           </a:solidFill>
                         </a:rPr>
                         <a:t>사망·재해</a:t>
@@ -6191,30 +6389,30 @@
                   <a:tcPr anchor="ctr" marL="73152" marR="73152">
                     <a:lnL w="9525" cap="flat" cmpd="sng" algn="ctr">
                       <a:solidFill>
-                        <a:srgbClr val="E8D4F7"/>
+                        <a:srgbClr val="E9D1FA"/>
                       </a:solidFill>
                       <a:prstDash val="solid"/>
                     </a:lnL>
                     <a:lnR w="9525" cap="flat" cmpd="sng" algn="ctr">
                       <a:solidFill>
-                        <a:srgbClr val="E8D4F7"/>
+                        <a:srgbClr val="E9D1FA"/>
                       </a:solidFill>
                       <a:prstDash val="solid"/>
                     </a:lnR>
                     <a:lnT w="9525" cap="flat" cmpd="sng" algn="ctr">
                       <a:solidFill>
-                        <a:srgbClr val="E8D4F7"/>
+                        <a:srgbClr val="E9D1FA"/>
                       </a:solidFill>
                       <a:prstDash val="solid"/>
                     </a:lnT>
                     <a:lnB w="9525" cap="flat" cmpd="sng" algn="ctr">
                       <a:solidFill>
-                        <a:srgbClr val="E8D4F7"/>
+                        <a:srgbClr val="E9D1FA"/>
                       </a:solidFill>
                       <a:prstDash val="solid"/>
                     </a:lnB>
                     <a:solidFill>
-                      <a:srgbClr val="E8D4F7"/>
+                      <a:srgbClr val="E9D1FA"/>
                     </a:solidFill>
                   </a:tcPr>
                 </a:tc>
@@ -6227,7 +6425,7 @@
                       <a:r>
                         <a:rPr sz="1400" b="0">
                           <a:solidFill>
-                            <a:srgbClr val="2B2B2B"/>
+                            <a:srgbClr val="26231F"/>
                           </a:solidFill>
                         </a:rPr>
                         <a:t>□</a:t>
@@ -6237,25 +6435,25 @@
                   <a:tcPr anchor="ctr" marL="73152" marR="73152">
                     <a:lnL w="9525" cap="flat" cmpd="sng" algn="ctr">
                       <a:solidFill>
-                        <a:srgbClr val="E8D4F7"/>
+                        <a:srgbClr val="E9D1FA"/>
                       </a:solidFill>
                       <a:prstDash val="solid"/>
                     </a:lnL>
                     <a:lnR w="9525" cap="flat" cmpd="sng" algn="ctr">
                       <a:solidFill>
-                        <a:srgbClr val="E8D4F7"/>
+                        <a:srgbClr val="E9D1FA"/>
                       </a:solidFill>
                       <a:prstDash val="solid"/>
                     </a:lnR>
                     <a:lnT w="9525" cap="flat" cmpd="sng" algn="ctr">
                       <a:solidFill>
-                        <a:srgbClr val="E8D4F7"/>
+                        <a:srgbClr val="E9D1FA"/>
                       </a:solidFill>
                       <a:prstDash val="solid"/>
                     </a:lnT>
                     <a:lnB w="9525" cap="flat" cmpd="sng" algn="ctr">
                       <a:solidFill>
-                        <a:srgbClr val="E8D4F7"/>
+                        <a:srgbClr val="E9D1FA"/>
                       </a:solidFill>
                       <a:prstDash val="solid"/>
                     </a:lnB>
@@ -6273,7 +6471,7 @@
                       <a:r>
                         <a:rPr sz="1400" b="0">
                           <a:solidFill>
-                            <a:srgbClr val="2B2B2B"/>
+                            <a:srgbClr val="26231F"/>
                           </a:solidFill>
                         </a:rPr>
                         <a:t>□</a:t>
@@ -6283,25 +6481,25 @@
                   <a:tcPr anchor="ctr" marL="73152" marR="73152">
                     <a:lnL w="9525" cap="flat" cmpd="sng" algn="ctr">
                       <a:solidFill>
-                        <a:srgbClr val="E8D4F7"/>
+                        <a:srgbClr val="E9D1FA"/>
                       </a:solidFill>
                       <a:prstDash val="solid"/>
                     </a:lnL>
                     <a:lnR w="9525" cap="flat" cmpd="sng" algn="ctr">
                       <a:solidFill>
-                        <a:srgbClr val="E8D4F7"/>
+                        <a:srgbClr val="E9D1FA"/>
                       </a:solidFill>
                       <a:prstDash val="solid"/>
                     </a:lnR>
                     <a:lnT w="9525" cap="flat" cmpd="sng" algn="ctr">
                       <a:solidFill>
-                        <a:srgbClr val="E8D4F7"/>
+                        <a:srgbClr val="E9D1FA"/>
                       </a:solidFill>
                       <a:prstDash val="solid"/>
                     </a:lnT>
                     <a:lnB w="9525" cap="flat" cmpd="sng" algn="ctr">
                       <a:solidFill>
-                        <a:srgbClr val="E8D4F7"/>
+                        <a:srgbClr val="E9D1FA"/>
                       </a:solidFill>
                       <a:prstDash val="solid"/>
                     </a:lnB>
@@ -6319,7 +6517,7 @@
                       <a:r>
                         <a:rPr sz="1400" b="0">
                           <a:solidFill>
-                            <a:srgbClr val="2B2B2B"/>
+                            <a:srgbClr val="26231F"/>
                           </a:solidFill>
                         </a:rPr>
                         <a:t>□</a:t>
@@ -6329,25 +6527,25 @@
                   <a:tcPr anchor="ctr" marL="73152" marR="73152">
                     <a:lnL w="9525" cap="flat" cmpd="sng" algn="ctr">
                       <a:solidFill>
-                        <a:srgbClr val="E8D4F7"/>
+                        <a:srgbClr val="E9D1FA"/>
                       </a:solidFill>
                       <a:prstDash val="solid"/>
                     </a:lnL>
                     <a:lnR w="9525" cap="flat" cmpd="sng" algn="ctr">
                       <a:solidFill>
-                        <a:srgbClr val="E8D4F7"/>
+                        <a:srgbClr val="E9D1FA"/>
                       </a:solidFill>
                       <a:prstDash val="solid"/>
                     </a:lnR>
                     <a:lnT w="9525" cap="flat" cmpd="sng" algn="ctr">
                       <a:solidFill>
-                        <a:srgbClr val="E8D4F7"/>
+                        <a:srgbClr val="E9D1FA"/>
                       </a:solidFill>
                       <a:prstDash val="solid"/>
                     </a:lnT>
                     <a:lnB w="9525" cap="flat" cmpd="sng" algn="ctr">
                       <a:solidFill>
-                        <a:srgbClr val="E8D4F7"/>
+                        <a:srgbClr val="E9D1FA"/>
                       </a:solidFill>
                       <a:prstDash val="solid"/>
                     </a:lnB>
@@ -6367,7 +6565,7 @@
                       <a:r>
                         <a:rPr sz="1400" b="1">
                           <a:solidFill>
-                            <a:srgbClr val="4E226D"/>
+                            <a:srgbClr val="3B2749"/>
                           </a:solidFill>
                         </a:rPr>
                         <a:t>질병 진단</a:t>
@@ -6377,30 +6575,30 @@
                   <a:tcPr anchor="ctr" marL="73152" marR="73152">
                     <a:lnL w="9525" cap="flat" cmpd="sng" algn="ctr">
                       <a:solidFill>
-                        <a:srgbClr val="E8D4F7"/>
+                        <a:srgbClr val="E9D1FA"/>
                       </a:solidFill>
                       <a:prstDash val="solid"/>
                     </a:lnL>
                     <a:lnR w="9525" cap="flat" cmpd="sng" algn="ctr">
                       <a:solidFill>
-                        <a:srgbClr val="E8D4F7"/>
+                        <a:srgbClr val="E9D1FA"/>
                       </a:solidFill>
                       <a:prstDash val="solid"/>
                     </a:lnR>
                     <a:lnT w="9525" cap="flat" cmpd="sng" algn="ctr">
                       <a:solidFill>
-                        <a:srgbClr val="E8D4F7"/>
+                        <a:srgbClr val="E9D1FA"/>
                       </a:solidFill>
                       <a:prstDash val="solid"/>
                     </a:lnT>
                     <a:lnB w="9525" cap="flat" cmpd="sng" algn="ctr">
                       <a:solidFill>
-                        <a:srgbClr val="E8D4F7"/>
+                        <a:srgbClr val="E9D1FA"/>
                       </a:solidFill>
                       <a:prstDash val="solid"/>
                     </a:lnB>
                     <a:solidFill>
-                      <a:srgbClr val="E8D4F7"/>
+                      <a:srgbClr val="E9D1FA"/>
                     </a:solidFill>
                   </a:tcPr>
                 </a:tc>
@@ -6413,7 +6611,7 @@
                       <a:r>
                         <a:rPr sz="1400" b="0">
                           <a:solidFill>
-                            <a:srgbClr val="2B2B2B"/>
+                            <a:srgbClr val="26231F"/>
                           </a:solidFill>
                         </a:rPr>
                         <a:t>□</a:t>
@@ -6423,30 +6621,30 @@
                   <a:tcPr anchor="ctr" marL="73152" marR="73152">
                     <a:lnL w="9525" cap="flat" cmpd="sng" algn="ctr">
                       <a:solidFill>
-                        <a:srgbClr val="E8D4F7"/>
+                        <a:srgbClr val="E9D1FA"/>
                       </a:solidFill>
                       <a:prstDash val="solid"/>
                     </a:lnL>
                     <a:lnR w="9525" cap="flat" cmpd="sng" algn="ctr">
                       <a:solidFill>
-                        <a:srgbClr val="E8D4F7"/>
+                        <a:srgbClr val="E9D1FA"/>
                       </a:solidFill>
                       <a:prstDash val="solid"/>
                     </a:lnR>
                     <a:lnT w="9525" cap="flat" cmpd="sng" algn="ctr">
                       <a:solidFill>
-                        <a:srgbClr val="E8D4F7"/>
+                        <a:srgbClr val="E9D1FA"/>
                       </a:solidFill>
                       <a:prstDash val="solid"/>
                     </a:lnT>
                     <a:lnB w="9525" cap="flat" cmpd="sng" algn="ctr">
                       <a:solidFill>
-                        <a:srgbClr val="E8D4F7"/>
+                        <a:srgbClr val="E9D1FA"/>
                       </a:solidFill>
                       <a:prstDash val="solid"/>
                     </a:lnB>
                     <a:solidFill>
-                      <a:srgbClr val="F8F3FC"/>
+                      <a:srgbClr val="F5EAFD"/>
                     </a:solidFill>
                   </a:tcPr>
                 </a:tc>
@@ -6459,7 +6657,7 @@
                       <a:r>
                         <a:rPr sz="1400" b="0">
                           <a:solidFill>
-                            <a:srgbClr val="2B2B2B"/>
+                            <a:srgbClr val="26231F"/>
                           </a:solidFill>
                         </a:rPr>
                         <a:t>□</a:t>
@@ -6469,30 +6667,30 @@
                   <a:tcPr anchor="ctr" marL="73152" marR="73152">
                     <a:lnL w="9525" cap="flat" cmpd="sng" algn="ctr">
                       <a:solidFill>
-                        <a:srgbClr val="E8D4F7"/>
+                        <a:srgbClr val="E9D1FA"/>
                       </a:solidFill>
                       <a:prstDash val="solid"/>
                     </a:lnL>
                     <a:lnR w="9525" cap="flat" cmpd="sng" algn="ctr">
                       <a:solidFill>
-                        <a:srgbClr val="E8D4F7"/>
+                        <a:srgbClr val="E9D1FA"/>
                       </a:solidFill>
                       <a:prstDash val="solid"/>
                     </a:lnR>
                     <a:lnT w="9525" cap="flat" cmpd="sng" algn="ctr">
                       <a:solidFill>
-                        <a:srgbClr val="E8D4F7"/>
+                        <a:srgbClr val="E9D1FA"/>
                       </a:solidFill>
                       <a:prstDash val="solid"/>
                     </a:lnT>
                     <a:lnB w="9525" cap="flat" cmpd="sng" algn="ctr">
                       <a:solidFill>
-                        <a:srgbClr val="E8D4F7"/>
+                        <a:srgbClr val="E9D1FA"/>
                       </a:solidFill>
                       <a:prstDash val="solid"/>
                     </a:lnB>
                     <a:solidFill>
-                      <a:srgbClr val="F8F3FC"/>
+                      <a:srgbClr val="F5EAFD"/>
                     </a:solidFill>
                   </a:tcPr>
                 </a:tc>
@@ -6505,7 +6703,7 @@
                       <a:r>
                         <a:rPr sz="1400" b="0">
                           <a:solidFill>
-                            <a:srgbClr val="2B2B2B"/>
+                            <a:srgbClr val="26231F"/>
                           </a:solidFill>
                         </a:rPr>
                         <a:t>□</a:t>
@@ -6515,30 +6713,30 @@
                   <a:tcPr anchor="ctr" marL="73152" marR="73152">
                     <a:lnL w="9525" cap="flat" cmpd="sng" algn="ctr">
                       <a:solidFill>
-                        <a:srgbClr val="E8D4F7"/>
+                        <a:srgbClr val="E9D1FA"/>
                       </a:solidFill>
                       <a:prstDash val="solid"/>
                     </a:lnL>
                     <a:lnR w="9525" cap="flat" cmpd="sng" algn="ctr">
                       <a:solidFill>
-                        <a:srgbClr val="E8D4F7"/>
+                        <a:srgbClr val="E9D1FA"/>
                       </a:solidFill>
                       <a:prstDash val="solid"/>
                     </a:lnR>
                     <a:lnT w="9525" cap="flat" cmpd="sng" algn="ctr">
                       <a:solidFill>
-                        <a:srgbClr val="E8D4F7"/>
+                        <a:srgbClr val="E9D1FA"/>
                       </a:solidFill>
                       <a:prstDash val="solid"/>
                     </a:lnT>
                     <a:lnB w="9525" cap="flat" cmpd="sng" algn="ctr">
                       <a:solidFill>
-                        <a:srgbClr val="E8D4F7"/>
+                        <a:srgbClr val="E9D1FA"/>
                       </a:solidFill>
                       <a:prstDash val="solid"/>
                     </a:lnB>
                     <a:solidFill>
-                      <a:srgbClr val="F8F3FC"/>
+                      <a:srgbClr val="F5EAFD"/>
                     </a:solidFill>
                   </a:tcPr>
                 </a:tc>
@@ -6553,7 +6751,7 @@
                       <a:r>
                         <a:rPr sz="1400" b="1">
                           <a:solidFill>
-                            <a:srgbClr val="4E226D"/>
+                            <a:srgbClr val="3B2749"/>
                           </a:solidFill>
                         </a:rPr>
                         <a:t>암</a:t>
@@ -6563,30 +6761,30 @@
                   <a:tcPr anchor="ctr" marL="73152" marR="73152">
                     <a:lnL w="9525" cap="flat" cmpd="sng" algn="ctr">
                       <a:solidFill>
-                        <a:srgbClr val="E8D4F7"/>
+                        <a:srgbClr val="E9D1FA"/>
                       </a:solidFill>
                       <a:prstDash val="solid"/>
                     </a:lnL>
                     <a:lnR w="9525" cap="flat" cmpd="sng" algn="ctr">
                       <a:solidFill>
-                        <a:srgbClr val="E8D4F7"/>
+                        <a:srgbClr val="E9D1FA"/>
                       </a:solidFill>
                       <a:prstDash val="solid"/>
                     </a:lnR>
                     <a:lnT w="9525" cap="flat" cmpd="sng" algn="ctr">
                       <a:solidFill>
-                        <a:srgbClr val="E8D4F7"/>
+                        <a:srgbClr val="E9D1FA"/>
                       </a:solidFill>
                       <a:prstDash val="solid"/>
                     </a:lnT>
                     <a:lnB w="9525" cap="flat" cmpd="sng" algn="ctr">
                       <a:solidFill>
-                        <a:srgbClr val="E8D4F7"/>
+                        <a:srgbClr val="E9D1FA"/>
                       </a:solidFill>
                       <a:prstDash val="solid"/>
                     </a:lnB>
                     <a:solidFill>
-                      <a:srgbClr val="E8D4F7"/>
+                      <a:srgbClr val="E9D1FA"/>
                     </a:solidFill>
                   </a:tcPr>
                 </a:tc>
@@ -6599,7 +6797,7 @@
                       <a:r>
                         <a:rPr sz="1400" b="0">
                           <a:solidFill>
-                            <a:srgbClr val="2B2B2B"/>
+                            <a:srgbClr val="26231F"/>
                           </a:solidFill>
                         </a:rPr>
                         <a:t>□</a:t>
@@ -6609,25 +6807,25 @@
                   <a:tcPr anchor="ctr" marL="73152" marR="73152">
                     <a:lnL w="9525" cap="flat" cmpd="sng" algn="ctr">
                       <a:solidFill>
-                        <a:srgbClr val="E8D4F7"/>
+                        <a:srgbClr val="E9D1FA"/>
                       </a:solidFill>
                       <a:prstDash val="solid"/>
                     </a:lnL>
                     <a:lnR w="9525" cap="flat" cmpd="sng" algn="ctr">
                       <a:solidFill>
-                        <a:srgbClr val="E8D4F7"/>
+                        <a:srgbClr val="E9D1FA"/>
                       </a:solidFill>
                       <a:prstDash val="solid"/>
                     </a:lnR>
                     <a:lnT w="9525" cap="flat" cmpd="sng" algn="ctr">
                       <a:solidFill>
-                        <a:srgbClr val="E8D4F7"/>
+                        <a:srgbClr val="E9D1FA"/>
                       </a:solidFill>
                       <a:prstDash val="solid"/>
                     </a:lnT>
                     <a:lnB w="9525" cap="flat" cmpd="sng" algn="ctr">
                       <a:solidFill>
-                        <a:srgbClr val="E8D4F7"/>
+                        <a:srgbClr val="E9D1FA"/>
                       </a:solidFill>
                       <a:prstDash val="solid"/>
                     </a:lnB>
@@ -6645,7 +6843,7 @@
                       <a:r>
                         <a:rPr sz="1400" b="0">
                           <a:solidFill>
-                            <a:srgbClr val="2B2B2B"/>
+                            <a:srgbClr val="26231F"/>
                           </a:solidFill>
                         </a:rPr>
                         <a:t>□</a:t>
@@ -6655,25 +6853,25 @@
                   <a:tcPr anchor="ctr" marL="73152" marR="73152">
                     <a:lnL w="9525" cap="flat" cmpd="sng" algn="ctr">
                       <a:solidFill>
-                        <a:srgbClr val="E8D4F7"/>
+                        <a:srgbClr val="E9D1FA"/>
                       </a:solidFill>
                       <a:prstDash val="solid"/>
                     </a:lnL>
                     <a:lnR w="9525" cap="flat" cmpd="sng" algn="ctr">
                       <a:solidFill>
-                        <a:srgbClr val="E8D4F7"/>
+                        <a:srgbClr val="E9D1FA"/>
                       </a:solidFill>
                       <a:prstDash val="solid"/>
                     </a:lnR>
                     <a:lnT w="9525" cap="flat" cmpd="sng" algn="ctr">
                       <a:solidFill>
-                        <a:srgbClr val="E8D4F7"/>
+                        <a:srgbClr val="E9D1FA"/>
                       </a:solidFill>
                       <a:prstDash val="solid"/>
                     </a:lnT>
                     <a:lnB w="9525" cap="flat" cmpd="sng" algn="ctr">
                       <a:solidFill>
-                        <a:srgbClr val="E8D4F7"/>
+                        <a:srgbClr val="E9D1FA"/>
                       </a:solidFill>
                       <a:prstDash val="solid"/>
                     </a:lnB>
@@ -6691,7 +6889,7 @@
                       <a:r>
                         <a:rPr sz="1400" b="0">
                           <a:solidFill>
-                            <a:srgbClr val="2B2B2B"/>
+                            <a:srgbClr val="26231F"/>
                           </a:solidFill>
                         </a:rPr>
                         <a:t>□</a:t>
@@ -6701,25 +6899,25 @@
                   <a:tcPr anchor="ctr" marL="73152" marR="73152">
                     <a:lnL w="9525" cap="flat" cmpd="sng" algn="ctr">
                       <a:solidFill>
-                        <a:srgbClr val="E8D4F7"/>
+                        <a:srgbClr val="E9D1FA"/>
                       </a:solidFill>
                       <a:prstDash val="solid"/>
                     </a:lnL>
                     <a:lnR w="9525" cap="flat" cmpd="sng" algn="ctr">
                       <a:solidFill>
-                        <a:srgbClr val="E8D4F7"/>
+                        <a:srgbClr val="E9D1FA"/>
                       </a:solidFill>
                       <a:prstDash val="solid"/>
                     </a:lnR>
                     <a:lnT w="9525" cap="flat" cmpd="sng" algn="ctr">
                       <a:solidFill>
-                        <a:srgbClr val="E8D4F7"/>
+                        <a:srgbClr val="E9D1FA"/>
                       </a:solidFill>
                       <a:prstDash val="solid"/>
                     </a:lnT>
                     <a:lnB w="9525" cap="flat" cmpd="sng" algn="ctr">
                       <a:solidFill>
-                        <a:srgbClr val="E8D4F7"/>
+                        <a:srgbClr val="E9D1FA"/>
                       </a:solidFill>
                       <a:prstDash val="solid"/>
                     </a:lnB>
@@ -6739,7 +6937,7 @@
                       <a:r>
                         <a:rPr sz="1400" b="1">
                           <a:solidFill>
-                            <a:srgbClr val="4E226D"/>
+                            <a:srgbClr val="3B2749"/>
                           </a:solidFill>
                         </a:rPr>
                         <a:t>뇌·심장</a:t>
@@ -6749,30 +6947,30 @@
                   <a:tcPr anchor="ctr" marL="73152" marR="73152">
                     <a:lnL w="9525" cap="flat" cmpd="sng" algn="ctr">
                       <a:solidFill>
-                        <a:srgbClr val="E8D4F7"/>
+                        <a:srgbClr val="E9D1FA"/>
                       </a:solidFill>
                       <a:prstDash val="solid"/>
                     </a:lnL>
                     <a:lnR w="9525" cap="flat" cmpd="sng" algn="ctr">
                       <a:solidFill>
-                        <a:srgbClr val="E8D4F7"/>
+                        <a:srgbClr val="E9D1FA"/>
                       </a:solidFill>
                       <a:prstDash val="solid"/>
                     </a:lnR>
                     <a:lnT w="9525" cap="flat" cmpd="sng" algn="ctr">
                       <a:solidFill>
-                        <a:srgbClr val="E8D4F7"/>
+                        <a:srgbClr val="E9D1FA"/>
                       </a:solidFill>
                       <a:prstDash val="solid"/>
                     </a:lnT>
                     <a:lnB w="9525" cap="flat" cmpd="sng" algn="ctr">
                       <a:solidFill>
-                        <a:srgbClr val="E8D4F7"/>
+                        <a:srgbClr val="E9D1FA"/>
                       </a:solidFill>
                       <a:prstDash val="solid"/>
                     </a:lnB>
                     <a:solidFill>
-                      <a:srgbClr val="E8D4F7"/>
+                      <a:srgbClr val="E9D1FA"/>
                     </a:solidFill>
                   </a:tcPr>
                 </a:tc>
@@ -6785,7 +6983,7 @@
                       <a:r>
                         <a:rPr sz="1400" b="0">
                           <a:solidFill>
-                            <a:srgbClr val="2B2B2B"/>
+                            <a:srgbClr val="26231F"/>
                           </a:solidFill>
                         </a:rPr>
                         <a:t>□</a:t>
@@ -6795,30 +6993,30 @@
                   <a:tcPr anchor="ctr" marL="73152" marR="73152">
                     <a:lnL w="9525" cap="flat" cmpd="sng" algn="ctr">
                       <a:solidFill>
-                        <a:srgbClr val="E8D4F7"/>
+                        <a:srgbClr val="E9D1FA"/>
                       </a:solidFill>
                       <a:prstDash val="solid"/>
                     </a:lnL>
                     <a:lnR w="9525" cap="flat" cmpd="sng" algn="ctr">
                       <a:solidFill>
-                        <a:srgbClr val="E8D4F7"/>
+                        <a:srgbClr val="E9D1FA"/>
                       </a:solidFill>
                       <a:prstDash val="solid"/>
                     </a:lnR>
                     <a:lnT w="9525" cap="flat" cmpd="sng" algn="ctr">
                       <a:solidFill>
-                        <a:srgbClr val="E8D4F7"/>
+                        <a:srgbClr val="E9D1FA"/>
                       </a:solidFill>
                       <a:prstDash val="solid"/>
                     </a:lnT>
                     <a:lnB w="9525" cap="flat" cmpd="sng" algn="ctr">
                       <a:solidFill>
-                        <a:srgbClr val="E8D4F7"/>
+                        <a:srgbClr val="E9D1FA"/>
                       </a:solidFill>
                       <a:prstDash val="solid"/>
                     </a:lnB>
                     <a:solidFill>
-                      <a:srgbClr val="F8F3FC"/>
+                      <a:srgbClr val="F5EAFD"/>
                     </a:solidFill>
                   </a:tcPr>
                 </a:tc>
@@ -6831,7 +7029,7 @@
                       <a:r>
                         <a:rPr sz="1400" b="0">
                           <a:solidFill>
-                            <a:srgbClr val="2B2B2B"/>
+                            <a:srgbClr val="26231F"/>
                           </a:solidFill>
                         </a:rPr>
                         <a:t>□</a:t>
@@ -6841,30 +7039,30 @@
                   <a:tcPr anchor="ctr" marL="73152" marR="73152">
                     <a:lnL w="9525" cap="flat" cmpd="sng" algn="ctr">
                       <a:solidFill>
-                        <a:srgbClr val="E8D4F7"/>
+                        <a:srgbClr val="E9D1FA"/>
                       </a:solidFill>
                       <a:prstDash val="solid"/>
                     </a:lnL>
                     <a:lnR w="9525" cap="flat" cmpd="sng" algn="ctr">
                       <a:solidFill>
-                        <a:srgbClr val="E8D4F7"/>
+                        <a:srgbClr val="E9D1FA"/>
                       </a:solidFill>
                       <a:prstDash val="solid"/>
                     </a:lnR>
                     <a:lnT w="9525" cap="flat" cmpd="sng" algn="ctr">
                       <a:solidFill>
-                        <a:srgbClr val="E8D4F7"/>
+                        <a:srgbClr val="E9D1FA"/>
                       </a:solidFill>
                       <a:prstDash val="solid"/>
                     </a:lnT>
                     <a:lnB w="9525" cap="flat" cmpd="sng" algn="ctr">
                       <a:solidFill>
-                        <a:srgbClr val="E8D4F7"/>
+                        <a:srgbClr val="E9D1FA"/>
                       </a:solidFill>
                       <a:prstDash val="solid"/>
                     </a:lnB>
                     <a:solidFill>
-                      <a:srgbClr val="F8F3FC"/>
+                      <a:srgbClr val="F5EAFD"/>
                     </a:solidFill>
                   </a:tcPr>
                 </a:tc>
@@ -6877,7 +7075,7 @@
                       <a:r>
                         <a:rPr sz="1400" b="0">
                           <a:solidFill>
-                            <a:srgbClr val="2B2B2B"/>
+                            <a:srgbClr val="26231F"/>
                           </a:solidFill>
                         </a:rPr>
                         <a:t>□</a:t>
@@ -6887,30 +7085,30 @@
                   <a:tcPr anchor="ctr" marL="73152" marR="73152">
                     <a:lnL w="9525" cap="flat" cmpd="sng" algn="ctr">
                       <a:solidFill>
-                        <a:srgbClr val="E8D4F7"/>
+                        <a:srgbClr val="E9D1FA"/>
                       </a:solidFill>
                       <a:prstDash val="solid"/>
                     </a:lnL>
                     <a:lnR w="9525" cap="flat" cmpd="sng" algn="ctr">
                       <a:solidFill>
-                        <a:srgbClr val="E8D4F7"/>
+                        <a:srgbClr val="E9D1FA"/>
                       </a:solidFill>
                       <a:prstDash val="solid"/>
                     </a:lnR>
                     <a:lnT w="9525" cap="flat" cmpd="sng" algn="ctr">
                       <a:solidFill>
-                        <a:srgbClr val="E8D4F7"/>
+                        <a:srgbClr val="E9D1FA"/>
                       </a:solidFill>
                       <a:prstDash val="solid"/>
                     </a:lnT>
                     <a:lnB w="9525" cap="flat" cmpd="sng" algn="ctr">
                       <a:solidFill>
-                        <a:srgbClr val="E8D4F7"/>
+                        <a:srgbClr val="E9D1FA"/>
                       </a:solidFill>
                       <a:prstDash val="solid"/>
                     </a:lnB>
                     <a:solidFill>
-                      <a:srgbClr val="F8F3FC"/>
+                      <a:srgbClr val="F5EAFD"/>
                     </a:solidFill>
                   </a:tcPr>
                 </a:tc>
@@ -6925,7 +7123,7 @@
                       <a:r>
                         <a:rPr sz="1400" b="1">
                           <a:solidFill>
-                            <a:srgbClr val="4E226D"/>
+                            <a:srgbClr val="3B2749"/>
                           </a:solidFill>
                         </a:rPr>
                         <a:t>입원·수술</a:t>
@@ -6935,30 +7133,30 @@
                   <a:tcPr anchor="ctr" marL="73152" marR="73152">
                     <a:lnL w="9525" cap="flat" cmpd="sng" algn="ctr">
                       <a:solidFill>
-                        <a:srgbClr val="E8D4F7"/>
+                        <a:srgbClr val="E9D1FA"/>
                       </a:solidFill>
                       <a:prstDash val="solid"/>
                     </a:lnL>
                     <a:lnR w="9525" cap="flat" cmpd="sng" algn="ctr">
                       <a:solidFill>
-                        <a:srgbClr val="E8D4F7"/>
+                        <a:srgbClr val="E9D1FA"/>
                       </a:solidFill>
                       <a:prstDash val="solid"/>
                     </a:lnR>
                     <a:lnT w="9525" cap="flat" cmpd="sng" algn="ctr">
                       <a:solidFill>
-                        <a:srgbClr val="E8D4F7"/>
+                        <a:srgbClr val="E9D1FA"/>
                       </a:solidFill>
                       <a:prstDash val="solid"/>
                     </a:lnT>
                     <a:lnB w="9525" cap="flat" cmpd="sng" algn="ctr">
                       <a:solidFill>
-                        <a:srgbClr val="E8D4F7"/>
+                        <a:srgbClr val="E9D1FA"/>
                       </a:solidFill>
                       <a:prstDash val="solid"/>
                     </a:lnB>
                     <a:solidFill>
-                      <a:srgbClr val="E8D4F7"/>
+                      <a:srgbClr val="E9D1FA"/>
                     </a:solidFill>
                   </a:tcPr>
                 </a:tc>
@@ -6971,7 +7169,7 @@
                       <a:r>
                         <a:rPr sz="1400" b="0">
                           <a:solidFill>
-                            <a:srgbClr val="2B2B2B"/>
+                            <a:srgbClr val="26231F"/>
                           </a:solidFill>
                         </a:rPr>
                         <a:t>□</a:t>
@@ -6981,25 +7179,25 @@
                   <a:tcPr anchor="ctr" marL="73152" marR="73152">
                     <a:lnL w="9525" cap="flat" cmpd="sng" algn="ctr">
                       <a:solidFill>
-                        <a:srgbClr val="E8D4F7"/>
+                        <a:srgbClr val="E9D1FA"/>
                       </a:solidFill>
                       <a:prstDash val="solid"/>
                     </a:lnL>
                     <a:lnR w="9525" cap="flat" cmpd="sng" algn="ctr">
                       <a:solidFill>
-                        <a:srgbClr val="E8D4F7"/>
+                        <a:srgbClr val="E9D1FA"/>
                       </a:solidFill>
                       <a:prstDash val="solid"/>
                     </a:lnR>
                     <a:lnT w="9525" cap="flat" cmpd="sng" algn="ctr">
                       <a:solidFill>
-                        <a:srgbClr val="E8D4F7"/>
+                        <a:srgbClr val="E9D1FA"/>
                       </a:solidFill>
                       <a:prstDash val="solid"/>
                     </a:lnT>
                     <a:lnB w="9525" cap="flat" cmpd="sng" algn="ctr">
                       <a:solidFill>
-                        <a:srgbClr val="E8D4F7"/>
+                        <a:srgbClr val="E9D1FA"/>
                       </a:solidFill>
                       <a:prstDash val="solid"/>
                     </a:lnB>
@@ -7017,7 +7215,7 @@
                       <a:r>
                         <a:rPr sz="1400" b="0">
                           <a:solidFill>
-                            <a:srgbClr val="2B2B2B"/>
+                            <a:srgbClr val="26231F"/>
                           </a:solidFill>
                         </a:rPr>
                         <a:t>□</a:t>
@@ -7027,25 +7225,25 @@
                   <a:tcPr anchor="ctr" marL="73152" marR="73152">
                     <a:lnL w="9525" cap="flat" cmpd="sng" algn="ctr">
                       <a:solidFill>
-                        <a:srgbClr val="E8D4F7"/>
+                        <a:srgbClr val="E9D1FA"/>
                       </a:solidFill>
                       <a:prstDash val="solid"/>
                     </a:lnL>
                     <a:lnR w="9525" cap="flat" cmpd="sng" algn="ctr">
                       <a:solidFill>
-                        <a:srgbClr val="E8D4F7"/>
+                        <a:srgbClr val="E9D1FA"/>
                       </a:solidFill>
                       <a:prstDash val="solid"/>
                     </a:lnR>
                     <a:lnT w="9525" cap="flat" cmpd="sng" algn="ctr">
                       <a:solidFill>
-                        <a:srgbClr val="E8D4F7"/>
+                        <a:srgbClr val="E9D1FA"/>
                       </a:solidFill>
                       <a:prstDash val="solid"/>
                     </a:lnT>
                     <a:lnB w="9525" cap="flat" cmpd="sng" algn="ctr">
                       <a:solidFill>
-                        <a:srgbClr val="E8D4F7"/>
+                        <a:srgbClr val="E9D1FA"/>
                       </a:solidFill>
                       <a:prstDash val="solid"/>
                     </a:lnB>
@@ -7063,7 +7261,7 @@
                       <a:r>
                         <a:rPr sz="1400" b="0">
                           <a:solidFill>
-                            <a:srgbClr val="2B2B2B"/>
+                            <a:srgbClr val="26231F"/>
                           </a:solidFill>
                         </a:rPr>
                         <a:t>□</a:t>
@@ -7073,25 +7271,25 @@
                   <a:tcPr anchor="ctr" marL="73152" marR="73152">
                     <a:lnL w="9525" cap="flat" cmpd="sng" algn="ctr">
                       <a:solidFill>
-                        <a:srgbClr val="E8D4F7"/>
+                        <a:srgbClr val="E9D1FA"/>
                       </a:solidFill>
                       <a:prstDash val="solid"/>
                     </a:lnL>
                     <a:lnR w="9525" cap="flat" cmpd="sng" algn="ctr">
                       <a:solidFill>
-                        <a:srgbClr val="E8D4F7"/>
+                        <a:srgbClr val="E9D1FA"/>
                       </a:solidFill>
                       <a:prstDash val="solid"/>
                     </a:lnR>
                     <a:lnT w="9525" cap="flat" cmpd="sng" algn="ctr">
                       <a:solidFill>
-                        <a:srgbClr val="E8D4F7"/>
+                        <a:srgbClr val="E9D1FA"/>
                       </a:solidFill>
                       <a:prstDash val="solid"/>
                     </a:lnT>
                     <a:lnB w="9525" cap="flat" cmpd="sng" algn="ctr">
                       <a:solidFill>
-                        <a:srgbClr val="E8D4F7"/>
+                        <a:srgbClr val="E9D1FA"/>
                       </a:solidFill>
                       <a:prstDash val="solid"/>
                     </a:lnB>
@@ -7111,7 +7309,7 @@
                       <a:r>
                         <a:rPr sz="1400" b="1">
                           <a:solidFill>
-                            <a:srgbClr val="4E226D"/>
+                            <a:srgbClr val="3B2749"/>
                           </a:solidFill>
                         </a:rPr>
                         <a:t>상해</a:t>
@@ -7121,30 +7319,30 @@
                   <a:tcPr anchor="ctr" marL="73152" marR="73152">
                     <a:lnL w="9525" cap="flat" cmpd="sng" algn="ctr">
                       <a:solidFill>
-                        <a:srgbClr val="E8D4F7"/>
+                        <a:srgbClr val="E9D1FA"/>
                       </a:solidFill>
                       <a:prstDash val="solid"/>
                     </a:lnL>
                     <a:lnR w="9525" cap="flat" cmpd="sng" algn="ctr">
                       <a:solidFill>
-                        <a:srgbClr val="E8D4F7"/>
+                        <a:srgbClr val="E9D1FA"/>
                       </a:solidFill>
                       <a:prstDash val="solid"/>
                     </a:lnR>
                     <a:lnT w="9525" cap="flat" cmpd="sng" algn="ctr">
                       <a:solidFill>
-                        <a:srgbClr val="E8D4F7"/>
+                        <a:srgbClr val="E9D1FA"/>
                       </a:solidFill>
                       <a:prstDash val="solid"/>
                     </a:lnT>
                     <a:lnB w="9525" cap="flat" cmpd="sng" algn="ctr">
                       <a:solidFill>
-                        <a:srgbClr val="E8D4F7"/>
+                        <a:srgbClr val="E9D1FA"/>
                       </a:solidFill>
                       <a:prstDash val="solid"/>
                     </a:lnB>
                     <a:solidFill>
-                      <a:srgbClr val="E8D4F7"/>
+                      <a:srgbClr val="E9D1FA"/>
                     </a:solidFill>
                   </a:tcPr>
                 </a:tc>
@@ -7157,7 +7355,7 @@
                       <a:r>
                         <a:rPr sz="1400" b="0">
                           <a:solidFill>
-                            <a:srgbClr val="2B2B2B"/>
+                            <a:srgbClr val="26231F"/>
                           </a:solidFill>
                         </a:rPr>
                         <a:t>□</a:t>
@@ -7167,30 +7365,30 @@
                   <a:tcPr anchor="ctr" marL="73152" marR="73152">
                     <a:lnL w="9525" cap="flat" cmpd="sng" algn="ctr">
                       <a:solidFill>
-                        <a:srgbClr val="E8D4F7"/>
+                        <a:srgbClr val="E9D1FA"/>
                       </a:solidFill>
                       <a:prstDash val="solid"/>
                     </a:lnL>
                     <a:lnR w="9525" cap="flat" cmpd="sng" algn="ctr">
                       <a:solidFill>
-                        <a:srgbClr val="E8D4F7"/>
+                        <a:srgbClr val="E9D1FA"/>
                       </a:solidFill>
                       <a:prstDash val="solid"/>
                     </a:lnR>
                     <a:lnT w="9525" cap="flat" cmpd="sng" algn="ctr">
                       <a:solidFill>
-                        <a:srgbClr val="E8D4F7"/>
+                        <a:srgbClr val="E9D1FA"/>
                       </a:solidFill>
                       <a:prstDash val="solid"/>
                     </a:lnT>
                     <a:lnB w="9525" cap="flat" cmpd="sng" algn="ctr">
                       <a:solidFill>
-                        <a:srgbClr val="E8D4F7"/>
+                        <a:srgbClr val="E9D1FA"/>
                       </a:solidFill>
                       <a:prstDash val="solid"/>
                     </a:lnB>
                     <a:solidFill>
-                      <a:srgbClr val="F8F3FC"/>
+                      <a:srgbClr val="F5EAFD"/>
                     </a:solidFill>
                   </a:tcPr>
                 </a:tc>
@@ -7203,7 +7401,7 @@
                       <a:r>
                         <a:rPr sz="1400" b="0">
                           <a:solidFill>
-                            <a:srgbClr val="2B2B2B"/>
+                            <a:srgbClr val="26231F"/>
                           </a:solidFill>
                         </a:rPr>
                         <a:t>□</a:t>
@@ -7213,30 +7411,30 @@
                   <a:tcPr anchor="ctr" marL="73152" marR="73152">
                     <a:lnL w="9525" cap="flat" cmpd="sng" algn="ctr">
                       <a:solidFill>
-                        <a:srgbClr val="E8D4F7"/>
+                        <a:srgbClr val="E9D1FA"/>
                       </a:solidFill>
                       <a:prstDash val="solid"/>
                     </a:lnL>
                     <a:lnR w="9525" cap="flat" cmpd="sng" algn="ctr">
                       <a:solidFill>
-                        <a:srgbClr val="E8D4F7"/>
+                        <a:srgbClr val="E9D1FA"/>
                       </a:solidFill>
                       <a:prstDash val="solid"/>
                     </a:lnR>
                     <a:lnT w="9525" cap="flat" cmpd="sng" algn="ctr">
                       <a:solidFill>
-                        <a:srgbClr val="E8D4F7"/>
+                        <a:srgbClr val="E9D1FA"/>
                       </a:solidFill>
                       <a:prstDash val="solid"/>
                     </a:lnT>
                     <a:lnB w="9525" cap="flat" cmpd="sng" algn="ctr">
                       <a:solidFill>
-                        <a:srgbClr val="E8D4F7"/>
+                        <a:srgbClr val="E9D1FA"/>
                       </a:solidFill>
                       <a:prstDash val="solid"/>
                     </a:lnB>
                     <a:solidFill>
-                      <a:srgbClr val="F8F3FC"/>
+                      <a:srgbClr val="F5EAFD"/>
                     </a:solidFill>
                   </a:tcPr>
                 </a:tc>
@@ -7249,7 +7447,7 @@
                       <a:r>
                         <a:rPr sz="1400" b="0">
                           <a:solidFill>
-                            <a:srgbClr val="2B2B2B"/>
+                            <a:srgbClr val="26231F"/>
                           </a:solidFill>
                         </a:rPr>
                         <a:t>□</a:t>
@@ -7259,30 +7457,30 @@
                   <a:tcPr anchor="ctr" marL="73152" marR="73152">
                     <a:lnL w="9525" cap="flat" cmpd="sng" algn="ctr">
                       <a:solidFill>
-                        <a:srgbClr val="E8D4F7"/>
+                        <a:srgbClr val="E9D1FA"/>
                       </a:solidFill>
                       <a:prstDash val="solid"/>
                     </a:lnL>
                     <a:lnR w="9525" cap="flat" cmpd="sng" algn="ctr">
                       <a:solidFill>
-                        <a:srgbClr val="E8D4F7"/>
+                        <a:srgbClr val="E9D1FA"/>
                       </a:solidFill>
                       <a:prstDash val="solid"/>
                     </a:lnR>
                     <a:lnT w="9525" cap="flat" cmpd="sng" algn="ctr">
                       <a:solidFill>
-                        <a:srgbClr val="E8D4F7"/>
+                        <a:srgbClr val="E9D1FA"/>
                       </a:solidFill>
                       <a:prstDash val="solid"/>
                     </a:lnT>
                     <a:lnB w="9525" cap="flat" cmpd="sng" algn="ctr">
                       <a:solidFill>
-                        <a:srgbClr val="E8D4F7"/>
+                        <a:srgbClr val="E9D1FA"/>
                       </a:solidFill>
                       <a:prstDash val="solid"/>
                     </a:lnB>
                     <a:solidFill>
-                      <a:srgbClr val="F8F3FC"/>
+                      <a:srgbClr val="F5EAFD"/>
                     </a:solidFill>
                   </a:tcPr>
                 </a:tc>
@@ -7297,7 +7495,7 @@
                       <a:r>
                         <a:rPr sz="1400" b="1">
                           <a:solidFill>
-                            <a:srgbClr val="4E226D"/>
+                            <a:srgbClr val="3B2749"/>
                           </a:solidFill>
                         </a:rPr>
                         <a:t>실손의료</a:t>
@@ -7307,30 +7505,30 @@
                   <a:tcPr anchor="ctr" marL="73152" marR="73152">
                     <a:lnL w="9525" cap="flat" cmpd="sng" algn="ctr">
                       <a:solidFill>
-                        <a:srgbClr val="E8D4F7"/>
+                        <a:srgbClr val="E9D1FA"/>
                       </a:solidFill>
                       <a:prstDash val="solid"/>
                     </a:lnL>
                     <a:lnR w="9525" cap="flat" cmpd="sng" algn="ctr">
                       <a:solidFill>
-                        <a:srgbClr val="E8D4F7"/>
+                        <a:srgbClr val="E9D1FA"/>
                       </a:solidFill>
                       <a:prstDash val="solid"/>
                     </a:lnR>
                     <a:lnT w="9525" cap="flat" cmpd="sng" algn="ctr">
                       <a:solidFill>
-                        <a:srgbClr val="E8D4F7"/>
+                        <a:srgbClr val="E9D1FA"/>
                       </a:solidFill>
                       <a:prstDash val="solid"/>
                     </a:lnT>
                     <a:lnB w="9525" cap="flat" cmpd="sng" algn="ctr">
                       <a:solidFill>
-                        <a:srgbClr val="E8D4F7"/>
+                        <a:srgbClr val="E9D1FA"/>
                       </a:solidFill>
                       <a:prstDash val="solid"/>
                     </a:lnB>
                     <a:solidFill>
-                      <a:srgbClr val="E8D4F7"/>
+                      <a:srgbClr val="E9D1FA"/>
                     </a:solidFill>
                   </a:tcPr>
                 </a:tc>
@@ -7343,7 +7541,7 @@
                       <a:r>
                         <a:rPr sz="1400" b="0">
                           <a:solidFill>
-                            <a:srgbClr val="2B2B2B"/>
+                            <a:srgbClr val="26231F"/>
                           </a:solidFill>
                         </a:rPr>
                         <a:t>□</a:t>
@@ -7353,25 +7551,25 @@
                   <a:tcPr anchor="ctr" marL="73152" marR="73152">
                     <a:lnL w="9525" cap="flat" cmpd="sng" algn="ctr">
                       <a:solidFill>
-                        <a:srgbClr val="E8D4F7"/>
+                        <a:srgbClr val="E9D1FA"/>
                       </a:solidFill>
                       <a:prstDash val="solid"/>
                     </a:lnL>
                     <a:lnR w="9525" cap="flat" cmpd="sng" algn="ctr">
                       <a:solidFill>
-                        <a:srgbClr val="E8D4F7"/>
+                        <a:srgbClr val="E9D1FA"/>
                       </a:solidFill>
                       <a:prstDash val="solid"/>
                     </a:lnR>
                     <a:lnT w="9525" cap="flat" cmpd="sng" algn="ctr">
                       <a:solidFill>
-                        <a:srgbClr val="E8D4F7"/>
+                        <a:srgbClr val="E9D1FA"/>
                       </a:solidFill>
                       <a:prstDash val="solid"/>
                     </a:lnT>
                     <a:lnB w="9525" cap="flat" cmpd="sng" algn="ctr">
                       <a:solidFill>
-                        <a:srgbClr val="E8D4F7"/>
+                        <a:srgbClr val="E9D1FA"/>
                       </a:solidFill>
                       <a:prstDash val="solid"/>
                     </a:lnB>
@@ -7389,7 +7587,7 @@
                       <a:r>
                         <a:rPr sz="1400" b="0">
                           <a:solidFill>
-                            <a:srgbClr val="2B2B2B"/>
+                            <a:srgbClr val="26231F"/>
                           </a:solidFill>
                         </a:rPr>
                         <a:t>□</a:t>
@@ -7399,25 +7597,25 @@
                   <a:tcPr anchor="ctr" marL="73152" marR="73152">
                     <a:lnL w="9525" cap="flat" cmpd="sng" algn="ctr">
                       <a:solidFill>
-                        <a:srgbClr val="E8D4F7"/>
+                        <a:srgbClr val="E9D1FA"/>
                       </a:solidFill>
                       <a:prstDash val="solid"/>
                     </a:lnL>
                     <a:lnR w="9525" cap="flat" cmpd="sng" algn="ctr">
                       <a:solidFill>
-                        <a:srgbClr val="E8D4F7"/>
+                        <a:srgbClr val="E9D1FA"/>
                       </a:solidFill>
                       <a:prstDash val="solid"/>
                     </a:lnR>
                     <a:lnT w="9525" cap="flat" cmpd="sng" algn="ctr">
                       <a:solidFill>
-                        <a:srgbClr val="E8D4F7"/>
+                        <a:srgbClr val="E9D1FA"/>
                       </a:solidFill>
                       <a:prstDash val="solid"/>
                     </a:lnT>
                     <a:lnB w="9525" cap="flat" cmpd="sng" algn="ctr">
                       <a:solidFill>
-                        <a:srgbClr val="E8D4F7"/>
+                        <a:srgbClr val="E9D1FA"/>
                       </a:solidFill>
                       <a:prstDash val="solid"/>
                     </a:lnB>
@@ -7435,7 +7633,7 @@
                       <a:r>
                         <a:rPr sz="1400" b="0">
                           <a:solidFill>
-                            <a:srgbClr val="2B2B2B"/>
+                            <a:srgbClr val="26231F"/>
                           </a:solidFill>
                         </a:rPr>
                         <a:t>□</a:t>
@@ -7445,25 +7643,25 @@
                   <a:tcPr anchor="ctr" marL="73152" marR="73152">
                     <a:lnL w="9525" cap="flat" cmpd="sng" algn="ctr">
                       <a:solidFill>
-                        <a:srgbClr val="E8D4F7"/>
+                        <a:srgbClr val="E9D1FA"/>
                       </a:solidFill>
                       <a:prstDash val="solid"/>
                     </a:lnL>
                     <a:lnR w="9525" cap="flat" cmpd="sng" algn="ctr">
                       <a:solidFill>
-                        <a:srgbClr val="E8D4F7"/>
+                        <a:srgbClr val="E9D1FA"/>
                       </a:solidFill>
                       <a:prstDash val="solid"/>
                     </a:lnR>
                     <a:lnT w="9525" cap="flat" cmpd="sng" algn="ctr">
                       <a:solidFill>
-                        <a:srgbClr val="E8D4F7"/>
+                        <a:srgbClr val="E9D1FA"/>
                       </a:solidFill>
                       <a:prstDash val="solid"/>
                     </a:lnT>
                     <a:lnB w="9525" cap="flat" cmpd="sng" algn="ctr">
                       <a:solidFill>
-                        <a:srgbClr val="E8D4F7"/>
+                        <a:srgbClr val="E9D1FA"/>
                       </a:solidFill>
                       <a:prstDash val="solid"/>
                     </a:lnB>
@@ -7483,7 +7681,7 @@
                       <a:r>
                         <a:rPr sz="1400" b="1">
                           <a:solidFill>
-                            <a:srgbClr val="4E226D"/>
+                            <a:srgbClr val="3B2749"/>
                           </a:solidFill>
                         </a:rPr>
                         <a:t>연금·노후자금</a:t>
@@ -7493,30 +7691,30 @@
                   <a:tcPr anchor="ctr" marL="73152" marR="73152">
                     <a:lnL w="9525" cap="flat" cmpd="sng" algn="ctr">
                       <a:solidFill>
-                        <a:srgbClr val="E8D4F7"/>
+                        <a:srgbClr val="E9D1FA"/>
                       </a:solidFill>
                       <a:prstDash val="solid"/>
                     </a:lnL>
                     <a:lnR w="9525" cap="flat" cmpd="sng" algn="ctr">
                       <a:solidFill>
-                        <a:srgbClr val="E8D4F7"/>
+                        <a:srgbClr val="E9D1FA"/>
                       </a:solidFill>
                       <a:prstDash val="solid"/>
                     </a:lnR>
                     <a:lnT w="9525" cap="flat" cmpd="sng" algn="ctr">
                       <a:solidFill>
-                        <a:srgbClr val="E8D4F7"/>
+                        <a:srgbClr val="E9D1FA"/>
                       </a:solidFill>
                       <a:prstDash val="solid"/>
                     </a:lnT>
                     <a:lnB w="9525" cap="flat" cmpd="sng" algn="ctr">
                       <a:solidFill>
-                        <a:srgbClr val="E8D4F7"/>
+                        <a:srgbClr val="E9D1FA"/>
                       </a:solidFill>
                       <a:prstDash val="solid"/>
                     </a:lnB>
                     <a:solidFill>
-                      <a:srgbClr val="E8D4F7"/>
+                      <a:srgbClr val="E9D1FA"/>
                     </a:solidFill>
                   </a:tcPr>
                 </a:tc>
@@ -7529,7 +7727,7 @@
                       <a:r>
                         <a:rPr sz="1400" b="0">
                           <a:solidFill>
-                            <a:srgbClr val="2B2B2B"/>
+                            <a:srgbClr val="26231F"/>
                           </a:solidFill>
                         </a:rPr>
                         <a:t>□</a:t>
@@ -7539,30 +7737,30 @@
                   <a:tcPr anchor="ctr" marL="73152" marR="73152">
                     <a:lnL w="9525" cap="flat" cmpd="sng" algn="ctr">
                       <a:solidFill>
-                        <a:srgbClr val="E8D4F7"/>
+                        <a:srgbClr val="E9D1FA"/>
                       </a:solidFill>
                       <a:prstDash val="solid"/>
                     </a:lnL>
                     <a:lnR w="9525" cap="flat" cmpd="sng" algn="ctr">
                       <a:solidFill>
-                        <a:srgbClr val="E8D4F7"/>
+                        <a:srgbClr val="E9D1FA"/>
                       </a:solidFill>
                       <a:prstDash val="solid"/>
                     </a:lnR>
                     <a:lnT w="9525" cap="flat" cmpd="sng" algn="ctr">
                       <a:solidFill>
-                        <a:srgbClr val="E8D4F7"/>
+                        <a:srgbClr val="E9D1FA"/>
                       </a:solidFill>
                       <a:prstDash val="solid"/>
                     </a:lnT>
                     <a:lnB w="9525" cap="flat" cmpd="sng" algn="ctr">
                       <a:solidFill>
-                        <a:srgbClr val="E8D4F7"/>
+                        <a:srgbClr val="E9D1FA"/>
                       </a:solidFill>
                       <a:prstDash val="solid"/>
                     </a:lnB>
                     <a:solidFill>
-                      <a:srgbClr val="F8F3FC"/>
+                      <a:srgbClr val="F5EAFD"/>
                     </a:solidFill>
                   </a:tcPr>
                 </a:tc>
@@ -7575,7 +7773,7 @@
                       <a:r>
                         <a:rPr sz="1400" b="0">
                           <a:solidFill>
-                            <a:srgbClr val="2B2B2B"/>
+                            <a:srgbClr val="26231F"/>
                           </a:solidFill>
                         </a:rPr>
                         <a:t>□</a:t>
@@ -7585,30 +7783,30 @@
                   <a:tcPr anchor="ctr" marL="73152" marR="73152">
                     <a:lnL w="9525" cap="flat" cmpd="sng" algn="ctr">
                       <a:solidFill>
-                        <a:srgbClr val="E8D4F7"/>
+                        <a:srgbClr val="E9D1FA"/>
                       </a:solidFill>
                       <a:prstDash val="solid"/>
                     </a:lnL>
                     <a:lnR w="9525" cap="flat" cmpd="sng" algn="ctr">
                       <a:solidFill>
-                        <a:srgbClr val="E8D4F7"/>
+                        <a:srgbClr val="E9D1FA"/>
                       </a:solidFill>
                       <a:prstDash val="solid"/>
                     </a:lnR>
                     <a:lnT w="9525" cap="flat" cmpd="sng" algn="ctr">
                       <a:solidFill>
-                        <a:srgbClr val="E8D4F7"/>
+                        <a:srgbClr val="E9D1FA"/>
                       </a:solidFill>
                       <a:prstDash val="solid"/>
                     </a:lnT>
                     <a:lnB w="9525" cap="flat" cmpd="sng" algn="ctr">
                       <a:solidFill>
-                        <a:srgbClr val="E8D4F7"/>
+                        <a:srgbClr val="E9D1FA"/>
                       </a:solidFill>
                       <a:prstDash val="solid"/>
                     </a:lnB>
                     <a:solidFill>
-                      <a:srgbClr val="F8F3FC"/>
+                      <a:srgbClr val="F5EAFD"/>
                     </a:solidFill>
                   </a:tcPr>
                 </a:tc>
@@ -7621,7 +7819,7 @@
                       <a:r>
                         <a:rPr sz="1400" b="0">
                           <a:solidFill>
-                            <a:srgbClr val="2B2B2B"/>
+                            <a:srgbClr val="26231F"/>
                           </a:solidFill>
                         </a:rPr>
                         <a:t>□</a:t>
@@ -7631,30 +7829,30 @@
                   <a:tcPr anchor="ctr" marL="73152" marR="73152">
                     <a:lnL w="9525" cap="flat" cmpd="sng" algn="ctr">
                       <a:solidFill>
-                        <a:srgbClr val="E8D4F7"/>
+                        <a:srgbClr val="E9D1FA"/>
                       </a:solidFill>
                       <a:prstDash val="solid"/>
                     </a:lnL>
                     <a:lnR w="9525" cap="flat" cmpd="sng" algn="ctr">
                       <a:solidFill>
-                        <a:srgbClr val="E8D4F7"/>
+                        <a:srgbClr val="E9D1FA"/>
                       </a:solidFill>
                       <a:prstDash val="solid"/>
                     </a:lnR>
                     <a:lnT w="9525" cap="flat" cmpd="sng" algn="ctr">
                       <a:solidFill>
-                        <a:srgbClr val="E8D4F7"/>
+                        <a:srgbClr val="E9D1FA"/>
                       </a:solidFill>
                       <a:prstDash val="solid"/>
                     </a:lnT>
                     <a:lnB w="9525" cap="flat" cmpd="sng" algn="ctr">
                       <a:solidFill>
-                        <a:srgbClr val="E8D4F7"/>
+                        <a:srgbClr val="E9D1FA"/>
                       </a:solidFill>
                       <a:prstDash val="solid"/>
                     </a:lnB>
                     <a:solidFill>
-                      <a:srgbClr val="F8F3FC"/>
+                      <a:srgbClr val="F5EAFD"/>
                     </a:solidFill>
                   </a:tcPr>
                 </a:tc>
@@ -7697,14 +7895,14 @@
         </p:nvSpPr>
         <p:spPr>
           <a:xfrm>
-            <a:off x="9905695" y="-1463040"/>
-            <a:ext cx="3840480" cy="3840480"/>
+            <a:off x="10180015" y="-1645920"/>
+            <a:ext cx="3474720" cy="3474720"/>
           </a:xfrm>
           <a:prstGeom prst="ellipse">
             <a:avLst/>
           </a:prstGeom>
           <a:solidFill>
-            <a:srgbClr val="E8D4F7"/>
+            <a:srgbClr val="D2A6F2"/>
           </a:solidFill>
           <a:ln>
             <a:noFill/>
@@ -7720,20 +7918,58 @@
       </p:sp>
       <p:sp>
         <p:nvSpPr>
-          <p:cNvPr id="4" name="장식"/>
+          <p:cNvPr id="4" name="상단 라벨"/>
+          <p:cNvSpPr txBox="1"/>
+          <p:nvPr/>
+        </p:nvSpPr>
+        <p:spPr>
+          <a:xfrm>
+            <a:off x="640080" y="274320"/>
+            <a:ext cx="5486400" cy="274320"/>
+          </a:xfrm>
+          <a:prstGeom prst="rect">
+            <a:avLst/>
+          </a:prstGeom>
+          <a:noFill/>
+        </p:spPr>
+        <p:txBody>
+          <a:bodyPr wrap="square" lIns="54864" rIns="54864" tIns="27432" bIns="27432" anchor="ctr">
+            <a:noAutofit/>
+          </a:bodyPr>
+          <a:lstStyle/>
+          <a:p>
+            <a:pPr algn="l">
+              <a:lnSpc>
+                <a:spcPct val="115000"/>
+              </a:lnSpc>
+            </a:pPr>
+            <a:r>
+              <a:rPr sz="900" b="1" i="0" spc="250">
+                <a:solidFill>
+                  <a:srgbClr val="26231F"/>
+                </a:solidFill>
+              </a:rPr>
+              <a:t>INSURANCE CHECK</a:t>
+            </a:r>
+          </a:p>
+        </p:txBody>
+      </p:sp>
+      <p:sp>
+        <p:nvSpPr>
+          <p:cNvPr id="5" name="포인트"/>
           <p:cNvSpPr/>
           <p:nvPr/>
         </p:nvSpPr>
         <p:spPr>
-          <a:xfrm>
-            <a:off x="11094415" y="274320"/>
-            <a:ext cx="411480" cy="411480"/>
-          </a:xfrm>
-          <a:prstGeom prst="ellipse">
+          <a:xfrm rot="18900000">
+            <a:off x="11048695" y="502919"/>
+            <a:ext cx="274320" cy="274320"/>
+          </a:xfrm>
+          <a:prstGeom prst="teardrop">
             <a:avLst/>
           </a:prstGeom>
           <a:solidFill>
-            <a:srgbClr val="9651C8"/>
+            <a:srgbClr val="FFFFFF"/>
           </a:solidFill>
           <a:ln>
             <a:noFill/>
@@ -7759,8 +7995,8 @@
         </p:nvSpPr>
         <p:spPr>
           <a:xfrm>
-            <a:off x="640080" y="457200"/>
-            <a:ext cx="9722815" cy="868680"/>
+            <a:off x="640080" y="658368"/>
+            <a:ext cx="9082735" cy="868680"/>
           </a:xfrm>
         </p:spPr>
         <p:txBody>
@@ -7777,7 +8013,7 @@
             <a:r>
               <a:rPr sz="3000" b="1" i="0">
                 <a:solidFill>
-                  <a:srgbClr val="4E226D"/>
+                  <a:srgbClr val="26231F"/>
                 </a:solidFill>
               </a:rPr>
               <a:t>월 보험료 한눈에</a:t>
@@ -7787,27 +8023,25 @@
       </p:sp>
       <p:sp>
         <p:nvSpPr>
-          <p:cNvPr id="5" name="카드 1"/>
+          <p:cNvPr id="6" name="카드 1"/>
           <p:cNvSpPr/>
           <p:nvPr/>
         </p:nvSpPr>
         <p:spPr>
           <a:xfrm>
-            <a:off x="640080" y="1600200"/>
+            <a:off x="640080" y="1783080"/>
             <a:ext cx="3484778" cy="2926080"/>
           </a:xfrm>
           <a:prstGeom prst="roundRect">
             <a:avLst>
-              <a:gd name="adj" fmla="val 8000"/>
+              <a:gd name="adj" fmla="val 4000"/>
             </a:avLst>
           </a:prstGeom>
           <a:solidFill>
-            <a:srgbClr val="F8F3FC"/>
+            <a:srgbClr val="F5EAFD"/>
           </a:solidFill>
-          <a:ln w="15875">
-            <a:solidFill>
-              <a:srgbClr val="E8D4F7"/>
-            </a:solidFill>
+          <a:ln>
+            <a:noFill/>
           </a:ln>
         </p:spPr>
         <p:txBody>
@@ -7820,20 +8054,49 @@
       </p:sp>
       <p:sp>
         <p:nvSpPr>
-          <p:cNvPr id="6" name="번호 1"/>
+          <p:cNvPr id="7" name="포인트 막대"/>
           <p:cNvSpPr/>
           <p:nvPr/>
         </p:nvSpPr>
         <p:spPr>
           <a:xfrm>
-            <a:off x="822959" y="1783080"/>
+            <a:off x="640080" y="1892807"/>
+            <a:ext cx="54864" cy="2706624"/>
+          </a:xfrm>
+          <a:prstGeom prst="rect">
+            <a:avLst/>
+          </a:prstGeom>
+          <a:solidFill>
+            <a:srgbClr val="C997ED"/>
+          </a:solidFill>
+          <a:ln>
+            <a:noFill/>
+          </a:ln>
+        </p:spPr>
+        <p:txBody>
+          <a:bodyPr rtlCol="0" anchor="ctr"/>
+          <a:lstStyle/>
+          <a:p>
+            <a:pPr algn="ctr"/>
+          </a:p>
+        </p:txBody>
+      </p:sp>
+      <p:sp>
+        <p:nvSpPr>
+          <p:cNvPr id="8" name="번호 1"/>
+          <p:cNvSpPr/>
+          <p:nvPr/>
+        </p:nvSpPr>
+        <p:spPr>
+          <a:xfrm>
+            <a:off x="822959" y="1965960"/>
             <a:ext cx="457200" cy="457200"/>
           </a:xfrm>
           <a:prstGeom prst="ellipse">
             <a:avLst/>
           </a:prstGeom>
           <a:solidFill>
-            <a:srgbClr val="9651C8"/>
+            <a:srgbClr val="F3BAF0"/>
           </a:solidFill>
           <a:ln>
             <a:noFill/>
@@ -7853,7 +8116,7 @@
             <a:r>
               <a:rPr sz="1600" b="1" i="0">
                 <a:solidFill>
-                  <a:srgbClr val="FFFFFF"/>
+                  <a:srgbClr val="26231F"/>
                 </a:solidFill>
               </a:rPr>
               <a:t>1</a:t>
@@ -7863,13 +8126,13 @@
       </p:sp>
       <p:sp>
         <p:nvSpPr>
-          <p:cNvPr id="7" name="TextBox 6"/>
+          <p:cNvPr id="9" name="TextBox 8"/>
           <p:cNvSpPr txBox="1"/>
           <p:nvPr/>
         </p:nvSpPr>
         <p:spPr>
           <a:xfrm>
-            <a:off x="777240" y="2377440"/>
+            <a:off x="777240" y="2560320"/>
             <a:ext cx="3210458" cy="640080"/>
           </a:xfrm>
           <a:prstGeom prst="rect">
@@ -7891,7 +8154,7 @@
             <a:r>
               <a:rPr sz="1700" b="1" i="0">
                 <a:solidFill>
-                  <a:srgbClr val="4E226D"/>
+                  <a:srgbClr val="3B2749"/>
                 </a:solidFill>
               </a:rPr>
               <a:t>월 보험료 합계</a:t>
@@ -7901,13 +8164,13 @@
       </p:sp>
       <p:sp>
         <p:nvSpPr>
-          <p:cNvPr id="8" name="TextBox 7"/>
+          <p:cNvPr id="10" name="TextBox 9"/>
           <p:cNvSpPr txBox="1"/>
           <p:nvPr/>
         </p:nvSpPr>
         <p:spPr>
           <a:xfrm>
-            <a:off x="777240" y="3063240"/>
+            <a:off x="777240" y="3246120"/>
             <a:ext cx="3210458" cy="1325880"/>
           </a:xfrm>
           <a:prstGeom prst="rect">
@@ -7929,7 +8192,7 @@
             <a:r>
               <a:rPr sz="3000" b="0" i="0">
                 <a:solidFill>
-                  <a:srgbClr val="2B2B2B"/>
+                  <a:srgbClr val="26231F"/>
                 </a:solidFill>
               </a:rPr>
               <a:t>0원</a:t>
@@ -7939,27 +8202,25 @@
       </p:sp>
       <p:sp>
         <p:nvSpPr>
-          <p:cNvPr id="9" name="카드 2"/>
+          <p:cNvPr id="11" name="카드 2"/>
           <p:cNvSpPr/>
           <p:nvPr/>
         </p:nvSpPr>
         <p:spPr>
           <a:xfrm>
-            <a:off x="4353458" y="1600200"/>
+            <a:off x="4353458" y="1783080"/>
             <a:ext cx="3484778" cy="2926080"/>
           </a:xfrm>
           <a:prstGeom prst="roundRect">
             <a:avLst>
-              <a:gd name="adj" fmla="val 8000"/>
+              <a:gd name="adj" fmla="val 4000"/>
             </a:avLst>
           </a:prstGeom>
           <a:solidFill>
-            <a:srgbClr val="F8F3FC"/>
+            <a:srgbClr val="F5EAFD"/>
           </a:solidFill>
-          <a:ln w="15875">
-            <a:solidFill>
-              <a:srgbClr val="E8D4F7"/>
-            </a:solidFill>
+          <a:ln>
+            <a:noFill/>
           </a:ln>
         </p:spPr>
         <p:txBody>
@@ -7972,20 +8233,49 @@
       </p:sp>
       <p:sp>
         <p:nvSpPr>
-          <p:cNvPr id="10" name="번호 2"/>
+          <p:cNvPr id="12" name="포인트 막대"/>
           <p:cNvSpPr/>
           <p:nvPr/>
         </p:nvSpPr>
         <p:spPr>
           <a:xfrm>
-            <a:off x="4536338" y="1783080"/>
+            <a:off x="4353458" y="1892807"/>
+            <a:ext cx="54864" cy="2706624"/>
+          </a:xfrm>
+          <a:prstGeom prst="rect">
+            <a:avLst/>
+          </a:prstGeom>
+          <a:solidFill>
+            <a:srgbClr val="C997ED"/>
+          </a:solidFill>
+          <a:ln>
+            <a:noFill/>
+          </a:ln>
+        </p:spPr>
+        <p:txBody>
+          <a:bodyPr rtlCol="0" anchor="ctr"/>
+          <a:lstStyle/>
+          <a:p>
+            <a:pPr algn="ctr"/>
+          </a:p>
+        </p:txBody>
+      </p:sp>
+      <p:sp>
+        <p:nvSpPr>
+          <p:cNvPr id="13" name="번호 2"/>
+          <p:cNvSpPr/>
+          <p:nvPr/>
+        </p:nvSpPr>
+        <p:spPr>
+          <a:xfrm>
+            <a:off x="4536338" y="1965960"/>
             <a:ext cx="457200" cy="457200"/>
           </a:xfrm>
           <a:prstGeom prst="ellipse">
             <a:avLst/>
           </a:prstGeom>
           <a:solidFill>
-            <a:srgbClr val="9651C8"/>
+            <a:srgbClr val="F3BAF0"/>
           </a:solidFill>
           <a:ln>
             <a:noFill/>
@@ -8005,7 +8295,7 @@
             <a:r>
               <a:rPr sz="1600" b="1" i="0">
                 <a:solidFill>
-                  <a:srgbClr val="FFFFFF"/>
+                  <a:srgbClr val="26231F"/>
                 </a:solidFill>
               </a:rPr>
               <a:t>2</a:t>
@@ -8015,13 +8305,13 @@
       </p:sp>
       <p:sp>
         <p:nvSpPr>
-          <p:cNvPr id="11" name="TextBox 10"/>
+          <p:cNvPr id="14" name="TextBox 13"/>
           <p:cNvSpPr txBox="1"/>
           <p:nvPr/>
         </p:nvSpPr>
         <p:spPr>
           <a:xfrm>
-            <a:off x="4490618" y="2377440"/>
+            <a:off x="4490618" y="2560320"/>
             <a:ext cx="3210458" cy="640080"/>
           </a:xfrm>
           <a:prstGeom prst="rect">
@@ -8043,7 +8333,7 @@
             <a:r>
               <a:rPr sz="1700" b="1" i="0">
                 <a:solidFill>
-                  <a:srgbClr val="4E226D"/>
+                  <a:srgbClr val="3B2749"/>
                 </a:solidFill>
               </a:rPr>
               <a:t>연 보험료 합계</a:t>
@@ -8053,13 +8343,13 @@
       </p:sp>
       <p:sp>
         <p:nvSpPr>
-          <p:cNvPr id="12" name="TextBox 11"/>
+          <p:cNvPr id="15" name="TextBox 14"/>
           <p:cNvSpPr txBox="1"/>
           <p:nvPr/>
         </p:nvSpPr>
         <p:spPr>
           <a:xfrm>
-            <a:off x="4490618" y="3063240"/>
+            <a:off x="4490618" y="3246120"/>
             <a:ext cx="3210458" cy="1325880"/>
           </a:xfrm>
           <a:prstGeom prst="rect">
@@ -8081,7 +8371,7 @@
             <a:r>
               <a:rPr sz="3000" b="0" i="0">
                 <a:solidFill>
-                  <a:srgbClr val="2B2B2B"/>
+                  <a:srgbClr val="26231F"/>
                 </a:solidFill>
               </a:rPr>
               <a:t>0원</a:t>
@@ -8091,27 +8381,25 @@
       </p:sp>
       <p:sp>
         <p:nvSpPr>
-          <p:cNvPr id="13" name="카드 3"/>
+          <p:cNvPr id="16" name="카드 3"/>
           <p:cNvSpPr/>
           <p:nvPr/>
         </p:nvSpPr>
         <p:spPr>
           <a:xfrm>
-            <a:off x="8066836" y="1600200"/>
+            <a:off x="8066836" y="1783080"/>
             <a:ext cx="3484778" cy="2926080"/>
           </a:xfrm>
           <a:prstGeom prst="roundRect">
             <a:avLst>
-              <a:gd name="adj" fmla="val 8000"/>
+              <a:gd name="adj" fmla="val 4000"/>
             </a:avLst>
           </a:prstGeom>
           <a:solidFill>
-            <a:srgbClr val="F8F3FC"/>
+            <a:srgbClr val="F5EAFD"/>
           </a:solidFill>
-          <a:ln w="15875">
-            <a:solidFill>
-              <a:srgbClr val="E8D4F7"/>
-            </a:solidFill>
+          <a:ln>
+            <a:noFill/>
           </a:ln>
         </p:spPr>
         <p:txBody>
@@ -8124,20 +8412,49 @@
       </p:sp>
       <p:sp>
         <p:nvSpPr>
-          <p:cNvPr id="14" name="번호 3"/>
+          <p:cNvPr id="17" name="포인트 막대"/>
           <p:cNvSpPr/>
           <p:nvPr/>
         </p:nvSpPr>
         <p:spPr>
           <a:xfrm>
-            <a:off x="8249716" y="1783080"/>
+            <a:off x="8066836" y="1892807"/>
+            <a:ext cx="54864" cy="2706624"/>
+          </a:xfrm>
+          <a:prstGeom prst="rect">
+            <a:avLst/>
+          </a:prstGeom>
+          <a:solidFill>
+            <a:srgbClr val="C997ED"/>
+          </a:solidFill>
+          <a:ln>
+            <a:noFill/>
+          </a:ln>
+        </p:spPr>
+        <p:txBody>
+          <a:bodyPr rtlCol="0" anchor="ctr"/>
+          <a:lstStyle/>
+          <a:p>
+            <a:pPr algn="ctr"/>
+          </a:p>
+        </p:txBody>
+      </p:sp>
+      <p:sp>
+        <p:nvSpPr>
+          <p:cNvPr id="18" name="번호 3"/>
+          <p:cNvSpPr/>
+          <p:nvPr/>
+        </p:nvSpPr>
+        <p:spPr>
+          <a:xfrm>
+            <a:off x="8249716" y="1965960"/>
             <a:ext cx="457200" cy="457200"/>
           </a:xfrm>
           <a:prstGeom prst="ellipse">
             <a:avLst/>
           </a:prstGeom>
           <a:solidFill>
-            <a:srgbClr val="9651C8"/>
+            <a:srgbClr val="F3BAF0"/>
           </a:solidFill>
           <a:ln>
             <a:noFill/>
@@ -8157,7 +8474,7 @@
             <a:r>
               <a:rPr sz="1600" b="1" i="0">
                 <a:solidFill>
-                  <a:srgbClr val="FFFFFF"/>
+                  <a:srgbClr val="26231F"/>
                 </a:solidFill>
               </a:rPr>
               <a:t>3</a:t>
@@ -8167,13 +8484,13 @@
       </p:sp>
       <p:sp>
         <p:nvSpPr>
-          <p:cNvPr id="15" name="TextBox 14"/>
+          <p:cNvPr id="19" name="TextBox 18"/>
           <p:cNvSpPr txBox="1"/>
           <p:nvPr/>
         </p:nvSpPr>
         <p:spPr>
           <a:xfrm>
-            <a:off x="8203996" y="2377440"/>
+            <a:off x="8203996" y="2560320"/>
             <a:ext cx="3210458" cy="640080"/>
           </a:xfrm>
           <a:prstGeom prst="rect">
@@ -8195,7 +8512,7 @@
             <a:r>
               <a:rPr sz="1700" b="1" i="0">
                 <a:solidFill>
-                  <a:srgbClr val="4E226D"/>
+                  <a:srgbClr val="3B2749"/>
                 </a:solidFill>
               </a:rPr>
               <a:t>월 소득 대비</a:t>
@@ -8205,13 +8522,13 @@
       </p:sp>
       <p:sp>
         <p:nvSpPr>
-          <p:cNvPr id="16" name="TextBox 15"/>
+          <p:cNvPr id="20" name="TextBox 19"/>
           <p:cNvSpPr txBox="1"/>
           <p:nvPr/>
         </p:nvSpPr>
         <p:spPr>
           <a:xfrm>
-            <a:off x="8203996" y="3063240"/>
+            <a:off x="8203996" y="3246120"/>
             <a:ext cx="3210458" cy="1325880"/>
           </a:xfrm>
           <a:prstGeom prst="rect">
@@ -8233,7 +8550,7 @@
             <a:r>
               <a:rPr sz="3000" b="0" i="0">
                 <a:solidFill>
-                  <a:srgbClr val="2B2B2B"/>
+                  <a:srgbClr val="26231F"/>
                 </a:solidFill>
               </a:rPr>
               <a:t>0 %</a:t>
@@ -8243,13 +8560,13 @@
       </p:sp>
       <p:sp>
         <p:nvSpPr>
-          <p:cNvPr id="17" name="안내"/>
+          <p:cNvPr id="21" name="안내"/>
           <p:cNvSpPr txBox="1"/>
           <p:nvPr/>
         </p:nvSpPr>
         <p:spPr>
           <a:xfrm>
-            <a:off x="640080" y="4709160"/>
+            <a:off x="640080" y="4892040"/>
             <a:ext cx="10911535" cy="365760"/>
           </a:xfrm>
           <a:prstGeom prst="rect">
@@ -8313,14 +8630,14 @@
         </p:nvSpPr>
         <p:spPr>
           <a:xfrm>
-            <a:off x="9905695" y="-1463040"/>
-            <a:ext cx="3840480" cy="3840480"/>
+            <a:off x="10180015" y="-1645920"/>
+            <a:ext cx="3474720" cy="3474720"/>
           </a:xfrm>
           <a:prstGeom prst="ellipse">
             <a:avLst/>
           </a:prstGeom>
           <a:solidFill>
-            <a:srgbClr val="E8D4F7"/>
+            <a:srgbClr val="D2A6F2"/>
           </a:solidFill>
           <a:ln>
             <a:noFill/>
@@ -8336,20 +8653,58 @@
       </p:sp>
       <p:sp>
         <p:nvSpPr>
-          <p:cNvPr id="4" name="장식"/>
+          <p:cNvPr id="4" name="상단 라벨"/>
+          <p:cNvSpPr txBox="1"/>
+          <p:nvPr/>
+        </p:nvSpPr>
+        <p:spPr>
+          <a:xfrm>
+            <a:off x="640080" y="274320"/>
+            <a:ext cx="5486400" cy="274320"/>
+          </a:xfrm>
+          <a:prstGeom prst="rect">
+            <a:avLst/>
+          </a:prstGeom>
+          <a:noFill/>
+        </p:spPr>
+        <p:txBody>
+          <a:bodyPr wrap="square" lIns="54864" rIns="54864" tIns="27432" bIns="27432" anchor="ctr">
+            <a:noAutofit/>
+          </a:bodyPr>
+          <a:lstStyle/>
+          <a:p>
+            <a:pPr algn="l">
+              <a:lnSpc>
+                <a:spcPct val="115000"/>
+              </a:lnSpc>
+            </a:pPr>
+            <a:r>
+              <a:rPr sz="900" b="1" i="0" spc="250">
+                <a:solidFill>
+                  <a:srgbClr val="26231F"/>
+                </a:solidFill>
+              </a:rPr>
+              <a:t>INSURANCE CHECK</a:t>
+            </a:r>
+          </a:p>
+        </p:txBody>
+      </p:sp>
+      <p:sp>
+        <p:nvSpPr>
+          <p:cNvPr id="5" name="포인트"/>
           <p:cNvSpPr/>
           <p:nvPr/>
         </p:nvSpPr>
         <p:spPr>
-          <a:xfrm>
-            <a:off x="11094415" y="274320"/>
-            <a:ext cx="411480" cy="411480"/>
-          </a:xfrm>
-          <a:prstGeom prst="ellipse">
+          <a:xfrm rot="18900000">
+            <a:off x="11048695" y="502919"/>
+            <a:ext cx="274320" cy="274320"/>
+          </a:xfrm>
+          <a:prstGeom prst="teardrop">
             <a:avLst/>
           </a:prstGeom>
           <a:solidFill>
-            <a:srgbClr val="9651C8"/>
+            <a:srgbClr val="FFFFFF"/>
           </a:solidFill>
           <a:ln>
             <a:noFill/>
@@ -8375,8 +8730,8 @@
         </p:nvSpPr>
         <p:spPr>
           <a:xfrm>
-            <a:off x="640080" y="457200"/>
-            <a:ext cx="9722815" cy="868680"/>
+            <a:off x="640080" y="658368"/>
+            <a:ext cx="9082735" cy="868680"/>
           </a:xfrm>
         </p:spPr>
         <p:txBody>
@@ -8393,7 +8748,7 @@
             <a:r>
               <a:rPr sz="3000" b="1" i="0">
                 <a:solidFill>
-                  <a:srgbClr val="4E226D"/>
+                  <a:srgbClr val="26231F"/>
                 </a:solidFill>
               </a:rPr>
               <a:t>점검 메모와 다음 할 일</a:t>
@@ -8403,27 +8758,25 @@
       </p:sp>
       <p:sp>
         <p:nvSpPr>
-          <p:cNvPr id="5" name="카드 1"/>
+          <p:cNvPr id="6" name="카드 1"/>
           <p:cNvSpPr/>
           <p:nvPr/>
         </p:nvSpPr>
         <p:spPr>
           <a:xfrm>
-            <a:off x="640080" y="1600200"/>
-            <a:ext cx="3484778" cy="4160520"/>
+            <a:off x="640080" y="1783080"/>
+            <a:ext cx="3484778" cy="3931920"/>
           </a:xfrm>
           <a:prstGeom prst="roundRect">
             <a:avLst>
-              <a:gd name="adj" fmla="val 8000"/>
+              <a:gd name="adj" fmla="val 4000"/>
             </a:avLst>
           </a:prstGeom>
           <a:solidFill>
-            <a:srgbClr val="F8F3FC"/>
+            <a:srgbClr val="F5EAFD"/>
           </a:solidFill>
-          <a:ln w="15875">
-            <a:solidFill>
-              <a:srgbClr val="E8D4F7"/>
-            </a:solidFill>
+          <a:ln>
+            <a:noFill/>
           </a:ln>
         </p:spPr>
         <p:txBody>
@@ -8436,20 +8789,49 @@
       </p:sp>
       <p:sp>
         <p:nvSpPr>
-          <p:cNvPr id="6" name="번호 1"/>
+          <p:cNvPr id="7" name="포인트 막대"/>
           <p:cNvSpPr/>
           <p:nvPr/>
         </p:nvSpPr>
         <p:spPr>
           <a:xfrm>
-            <a:off x="822959" y="1783080"/>
+            <a:off x="640080" y="1892807"/>
+            <a:ext cx="54864" cy="3712463"/>
+          </a:xfrm>
+          <a:prstGeom prst="rect">
+            <a:avLst/>
+          </a:prstGeom>
+          <a:solidFill>
+            <a:srgbClr val="C997ED"/>
+          </a:solidFill>
+          <a:ln>
+            <a:noFill/>
+          </a:ln>
+        </p:spPr>
+        <p:txBody>
+          <a:bodyPr rtlCol="0" anchor="ctr"/>
+          <a:lstStyle/>
+          <a:p>
+            <a:pPr algn="ctr"/>
+          </a:p>
+        </p:txBody>
+      </p:sp>
+      <p:sp>
+        <p:nvSpPr>
+          <p:cNvPr id="8" name="번호 1"/>
+          <p:cNvSpPr/>
+          <p:nvPr/>
+        </p:nvSpPr>
+        <p:spPr>
+          <a:xfrm>
+            <a:off x="822959" y="1965960"/>
             <a:ext cx="457200" cy="457200"/>
           </a:xfrm>
           <a:prstGeom prst="ellipse">
             <a:avLst/>
           </a:prstGeom>
           <a:solidFill>
-            <a:srgbClr val="9651C8"/>
+            <a:srgbClr val="F3BAF0"/>
           </a:solidFill>
           <a:ln>
             <a:noFill/>
@@ -8469,7 +8851,7 @@
             <a:r>
               <a:rPr sz="1600" b="1" i="0">
                 <a:solidFill>
-                  <a:srgbClr val="FFFFFF"/>
+                  <a:srgbClr val="26231F"/>
                 </a:solidFill>
               </a:rPr>
               <a:t>1</a:t>
@@ -8479,13 +8861,13 @@
       </p:sp>
       <p:sp>
         <p:nvSpPr>
-          <p:cNvPr id="7" name="TextBox 6"/>
+          <p:cNvPr id="9" name="TextBox 8"/>
           <p:cNvSpPr txBox="1"/>
           <p:nvPr/>
         </p:nvSpPr>
         <p:spPr>
           <a:xfrm>
-            <a:off x="777240" y="2377440"/>
+            <a:off x="777240" y="2560320"/>
             <a:ext cx="3210458" cy="640080"/>
           </a:xfrm>
           <a:prstGeom prst="rect">
@@ -8507,7 +8889,7 @@
             <a:r>
               <a:rPr sz="1800" b="1" i="0">
                 <a:solidFill>
-                  <a:srgbClr val="4E226D"/>
+                  <a:srgbClr val="3B2749"/>
                 </a:solidFill>
               </a:rPr>
               <a:t>확인할 것</a:t>
@@ -8517,14 +8899,14 @@
       </p:sp>
       <p:sp>
         <p:nvSpPr>
-          <p:cNvPr id="8" name="TextBox 7"/>
+          <p:cNvPr id="10" name="TextBox 9"/>
           <p:cNvSpPr txBox="1"/>
           <p:nvPr/>
         </p:nvSpPr>
         <p:spPr>
           <a:xfrm>
-            <a:off x="777240" y="3063240"/>
-            <a:ext cx="3210458" cy="2560320"/>
+            <a:off x="777240" y="3246120"/>
+            <a:ext cx="3210458" cy="2331720"/>
           </a:xfrm>
           <a:prstGeom prst="rect">
             <a:avLst/>
@@ -8545,7 +8927,7 @@
             <a:r>
               <a:rPr sz="1500" b="0" i="0">
                 <a:solidFill>
-                  <a:srgbClr val="2B2B2B"/>
+                  <a:srgbClr val="26231F"/>
                 </a:solidFill>
               </a:rPr>
               <a:t>내용을 입력하세요</a:t>
@@ -8555,27 +8937,25 @@
       </p:sp>
       <p:sp>
         <p:nvSpPr>
-          <p:cNvPr id="9" name="카드 2"/>
+          <p:cNvPr id="11" name="카드 2"/>
           <p:cNvSpPr/>
           <p:nvPr/>
         </p:nvSpPr>
         <p:spPr>
           <a:xfrm>
-            <a:off x="4353458" y="1600200"/>
-            <a:ext cx="3484778" cy="4160520"/>
+            <a:off x="4353458" y="1783080"/>
+            <a:ext cx="3484778" cy="3931920"/>
           </a:xfrm>
           <a:prstGeom prst="roundRect">
             <a:avLst>
-              <a:gd name="adj" fmla="val 8000"/>
+              <a:gd name="adj" fmla="val 4000"/>
             </a:avLst>
           </a:prstGeom>
           <a:solidFill>
-            <a:srgbClr val="F8F3FC"/>
+            <a:srgbClr val="F5EAFD"/>
           </a:solidFill>
-          <a:ln w="15875">
-            <a:solidFill>
-              <a:srgbClr val="E8D4F7"/>
-            </a:solidFill>
+          <a:ln>
+            <a:noFill/>
           </a:ln>
         </p:spPr>
         <p:txBody>
@@ -8588,20 +8968,49 @@
       </p:sp>
       <p:sp>
         <p:nvSpPr>
-          <p:cNvPr id="10" name="번호 2"/>
+          <p:cNvPr id="12" name="포인트 막대"/>
           <p:cNvSpPr/>
           <p:nvPr/>
         </p:nvSpPr>
         <p:spPr>
           <a:xfrm>
-            <a:off x="4536338" y="1783080"/>
+            <a:off x="4353458" y="1892807"/>
+            <a:ext cx="54864" cy="3712463"/>
+          </a:xfrm>
+          <a:prstGeom prst="rect">
+            <a:avLst/>
+          </a:prstGeom>
+          <a:solidFill>
+            <a:srgbClr val="C997ED"/>
+          </a:solidFill>
+          <a:ln>
+            <a:noFill/>
+          </a:ln>
+        </p:spPr>
+        <p:txBody>
+          <a:bodyPr rtlCol="0" anchor="ctr"/>
+          <a:lstStyle/>
+          <a:p>
+            <a:pPr algn="ctr"/>
+          </a:p>
+        </p:txBody>
+      </p:sp>
+      <p:sp>
+        <p:nvSpPr>
+          <p:cNvPr id="13" name="번호 2"/>
+          <p:cNvSpPr/>
+          <p:nvPr/>
+        </p:nvSpPr>
+        <p:spPr>
+          <a:xfrm>
+            <a:off x="4536338" y="1965960"/>
             <a:ext cx="457200" cy="457200"/>
           </a:xfrm>
           <a:prstGeom prst="ellipse">
             <a:avLst/>
           </a:prstGeom>
           <a:solidFill>
-            <a:srgbClr val="9651C8"/>
+            <a:srgbClr val="F3BAF0"/>
           </a:solidFill>
           <a:ln>
             <a:noFill/>
@@ -8621,7 +9030,7 @@
             <a:r>
               <a:rPr sz="1600" b="1" i="0">
                 <a:solidFill>
-                  <a:srgbClr val="FFFFFF"/>
+                  <a:srgbClr val="26231F"/>
                 </a:solidFill>
               </a:rPr>
               <a:t>2</a:t>
@@ -8631,13 +9040,13 @@
       </p:sp>
       <p:sp>
         <p:nvSpPr>
-          <p:cNvPr id="11" name="TextBox 10"/>
+          <p:cNvPr id="14" name="TextBox 13"/>
           <p:cNvSpPr txBox="1"/>
           <p:nvPr/>
         </p:nvSpPr>
         <p:spPr>
           <a:xfrm>
-            <a:off x="4490618" y="2377440"/>
+            <a:off x="4490618" y="2560320"/>
             <a:ext cx="3210458" cy="640080"/>
           </a:xfrm>
           <a:prstGeom prst="rect">
@@ -8659,7 +9068,7 @@
             <a:r>
               <a:rPr sz="1800" b="1" i="0">
                 <a:solidFill>
-                  <a:srgbClr val="4E226D"/>
+                  <a:srgbClr val="3B2749"/>
                 </a:solidFill>
               </a:rPr>
               <a:t>문의할 것</a:t>
@@ -8669,14 +9078,14 @@
       </p:sp>
       <p:sp>
         <p:nvSpPr>
-          <p:cNvPr id="12" name="TextBox 11"/>
+          <p:cNvPr id="15" name="TextBox 14"/>
           <p:cNvSpPr txBox="1"/>
           <p:nvPr/>
         </p:nvSpPr>
         <p:spPr>
           <a:xfrm>
-            <a:off x="4490618" y="3063240"/>
-            <a:ext cx="3210458" cy="2560320"/>
+            <a:off x="4490618" y="3246120"/>
+            <a:ext cx="3210458" cy="2331720"/>
           </a:xfrm>
           <a:prstGeom prst="rect">
             <a:avLst/>
@@ -8697,7 +9106,7 @@
             <a:r>
               <a:rPr sz="1500" b="0" i="0">
                 <a:solidFill>
-                  <a:srgbClr val="2B2B2B"/>
+                  <a:srgbClr val="26231F"/>
                 </a:solidFill>
               </a:rPr>
               <a:t>내용을 입력하세요</a:t>
@@ -8707,27 +9116,25 @@
       </p:sp>
       <p:sp>
         <p:nvSpPr>
-          <p:cNvPr id="13" name="카드 3"/>
+          <p:cNvPr id="16" name="카드 3"/>
           <p:cNvSpPr/>
           <p:nvPr/>
         </p:nvSpPr>
         <p:spPr>
           <a:xfrm>
-            <a:off x="8066836" y="1600200"/>
-            <a:ext cx="3484778" cy="4160520"/>
+            <a:off x="8066836" y="1783080"/>
+            <a:ext cx="3484778" cy="3931920"/>
           </a:xfrm>
           <a:prstGeom prst="roundRect">
             <a:avLst>
-              <a:gd name="adj" fmla="val 8000"/>
+              <a:gd name="adj" fmla="val 4000"/>
             </a:avLst>
           </a:prstGeom>
           <a:solidFill>
-            <a:srgbClr val="F8F3FC"/>
+            <a:srgbClr val="F5EAFD"/>
           </a:solidFill>
-          <a:ln w="15875">
-            <a:solidFill>
-              <a:srgbClr val="E8D4F7"/>
-            </a:solidFill>
+          <a:ln>
+            <a:noFill/>
           </a:ln>
         </p:spPr>
         <p:txBody>
@@ -8740,20 +9147,49 @@
       </p:sp>
       <p:sp>
         <p:nvSpPr>
-          <p:cNvPr id="14" name="번호 3"/>
+          <p:cNvPr id="17" name="포인트 막대"/>
           <p:cNvSpPr/>
           <p:nvPr/>
         </p:nvSpPr>
         <p:spPr>
           <a:xfrm>
-            <a:off x="8249716" y="1783080"/>
+            <a:off x="8066836" y="1892807"/>
+            <a:ext cx="54864" cy="3712463"/>
+          </a:xfrm>
+          <a:prstGeom prst="rect">
+            <a:avLst/>
+          </a:prstGeom>
+          <a:solidFill>
+            <a:srgbClr val="C997ED"/>
+          </a:solidFill>
+          <a:ln>
+            <a:noFill/>
+          </a:ln>
+        </p:spPr>
+        <p:txBody>
+          <a:bodyPr rtlCol="0" anchor="ctr"/>
+          <a:lstStyle/>
+          <a:p>
+            <a:pPr algn="ctr"/>
+          </a:p>
+        </p:txBody>
+      </p:sp>
+      <p:sp>
+        <p:nvSpPr>
+          <p:cNvPr id="18" name="번호 3"/>
+          <p:cNvSpPr/>
+          <p:nvPr/>
+        </p:nvSpPr>
+        <p:spPr>
+          <a:xfrm>
+            <a:off x="8249716" y="1965960"/>
             <a:ext cx="457200" cy="457200"/>
           </a:xfrm>
           <a:prstGeom prst="ellipse">
             <a:avLst/>
           </a:prstGeom>
           <a:solidFill>
-            <a:srgbClr val="9651C8"/>
+            <a:srgbClr val="F3BAF0"/>
           </a:solidFill>
           <a:ln>
             <a:noFill/>
@@ -8773,7 +9209,7 @@
             <a:r>
               <a:rPr sz="1600" b="1" i="0">
                 <a:solidFill>
-                  <a:srgbClr val="FFFFFF"/>
+                  <a:srgbClr val="26231F"/>
                 </a:solidFill>
               </a:rPr>
               <a:t>3</a:t>
@@ -8783,13 +9219,13 @@
       </p:sp>
       <p:sp>
         <p:nvSpPr>
-          <p:cNvPr id="15" name="TextBox 14"/>
+          <p:cNvPr id="19" name="TextBox 18"/>
           <p:cNvSpPr txBox="1"/>
           <p:nvPr/>
         </p:nvSpPr>
         <p:spPr>
           <a:xfrm>
-            <a:off x="8203996" y="2377440"/>
+            <a:off x="8203996" y="2560320"/>
             <a:ext cx="3210458" cy="640080"/>
           </a:xfrm>
           <a:prstGeom prst="rect">
@@ -8811,7 +9247,7 @@
             <a:r>
               <a:rPr sz="1800" b="1" i="0">
                 <a:solidFill>
-                  <a:srgbClr val="4E226D"/>
+                  <a:srgbClr val="3B2749"/>
                 </a:solidFill>
               </a:rPr>
               <a:t>정리할 날짜</a:t>
@@ -8821,14 +9257,14 @@
       </p:sp>
       <p:sp>
         <p:nvSpPr>
-          <p:cNvPr id="16" name="TextBox 15"/>
+          <p:cNvPr id="20" name="TextBox 19"/>
           <p:cNvSpPr txBox="1"/>
           <p:nvPr/>
         </p:nvSpPr>
         <p:spPr>
           <a:xfrm>
-            <a:off x="8203996" y="3063240"/>
-            <a:ext cx="3210458" cy="2560320"/>
+            <a:off x="8203996" y="3246120"/>
+            <a:ext cx="3210458" cy="2331720"/>
           </a:xfrm>
           <a:prstGeom prst="rect">
             <a:avLst/>
@@ -8849,7 +9285,7 @@
             <a:r>
               <a:rPr sz="1500" b="0" i="0">
                 <a:solidFill>
-                  <a:srgbClr val="2B2B2B"/>
+                  <a:srgbClr val="26231F"/>
                 </a:solidFill>
               </a:rPr>
               <a:t>내용을 입력하세요</a:t>
@@ -8859,13 +9295,13 @@
       </p:sp>
       <p:sp>
         <p:nvSpPr>
-          <p:cNvPr id="17" name="안내 문구"/>
+          <p:cNvPr id="21" name="안내 문구"/>
           <p:cNvSpPr txBox="1"/>
           <p:nvPr/>
         </p:nvSpPr>
         <p:spPr>
           <a:xfrm>
-            <a:off x="640080" y="5852160"/>
+            <a:off x="640080" y="5806440"/>
             <a:ext cx="10911535" cy="548640"/>
           </a:xfrm>
           <a:prstGeom prst="rect">
@@ -8914,34 +9350,34 @@
         <a:sysClr val="window" lastClr="FFFFFF"/>
       </a:lt1>
       <a:dk2>
-        <a:srgbClr val="4E226D"/>
+        <a:srgbClr val="3B2749"/>
       </a:dk2>
       <a:lt2>
-        <a:srgbClr val="F8F3FC"/>
+        <a:srgbClr val="F5EAFD"/>
       </a:lt2>
       <a:accent1>
-        <a:srgbClr val="9651C8"/>
+        <a:srgbClr val="C997ED"/>
       </a:accent1>
       <a:accent2>
-        <a:srgbClr val="339941"/>
+        <a:srgbClr val="F3BAF0"/>
       </a:accent2>
       <a:accent3>
-        <a:srgbClr val="4E226D"/>
+        <a:srgbClr val="3B2749"/>
       </a:accent3>
       <a:accent4>
-        <a:srgbClr val="E8D4F7"/>
+        <a:srgbClr val="E9D1FA"/>
       </a:accent4>
       <a:accent5>
-        <a:srgbClr val="647584"/>
+        <a:srgbClr val="DEA8EE"/>
       </a:accent5>
       <a:accent6>
-        <a:srgbClr val="957AA7"/>
+        <a:srgbClr val="897D92"/>
       </a:accent6>
       <a:hlink>
-        <a:srgbClr val="9651C8"/>
+        <a:srgbClr val="C997ED"/>
       </a:hlink>
       <a:folHlink>
-        <a:srgbClr val="4E226D"/>
+        <a:srgbClr val="3B2749"/>
       </a:folHlink>
     </a:clrScheme>
     <a:fontScheme name="Office">
